--- a/output/wordlabs-logical-3day.pptx
+++ b/output/wordlabs-logical-3day.pptx
@@ -6071,7 +6071,7 @@
                 <a:ea typeface="Calibri" pitchFamily="34" charset="-122"/>
                 <a:cs typeface="Calibri" pitchFamily="34" charset="-120"/>
               </a:rPr>
-              <a:t> and </a:t>
+              <a:t> report was well written, and the teacher said our thinking was very </a:t>
             </a:r>
             <a:pPr algn="l" indent="0" marL="0">
               <a:buNone/>
@@ -6088,7 +6088,7 @@
                 <a:ea typeface="Calibri" pitchFamily="34" charset="-122"/>
                 <a:cs typeface="Calibri" pitchFamily="34" charset="-120"/>
               </a:rPr>
-              <a:t>geological</a:t>
+              <a:t>logical</a:t>
             </a:r>
             <a:pPr algn="l" indent="0" marL="0">
               <a:buNone/>
@@ -6102,7 +6102,7 @@
                 <a:ea typeface="Calibri" pitchFamily="34" charset="-122"/>
                 <a:cs typeface="Calibri" pitchFamily="34" charset="-120"/>
               </a:rPr>
-              <a:t> features of Australia make it a fascinating country to study.</a:t>
+              <a:t>.</a:t>
             </a:r>
             <a:endParaRPr lang="en-US" sz="1800" dirty="0"/>
           </a:p>
@@ -6385,7 +6385,7 @@
                 <a:ea typeface="Trebuchet MS" pitchFamily="34" charset="-122"/>
                 <a:cs typeface="Trebuchet MS" pitchFamily="34" charset="-120"/>
               </a:rPr>
-              <a:t>geological</a:t>
+              <a:t>logical</a:t>
             </a:r>
             <a:endParaRPr lang="en-US" sz="1400" dirty="0"/>
           </a:p>
@@ -7972,7 +7972,7 @@
                 <a:ea typeface="Calibri" pitchFamily="34" charset="-122"/>
                 <a:cs typeface="Calibri" pitchFamily="34" charset="-120"/>
               </a:rPr>
-              <a:t>relating to reason or study</a:t>
+              <a:t>relating to reason or logic</a:t>
             </a:r>
             <a:endParaRPr lang="en-US" sz="850" dirty="0"/>
           </a:p>
@@ -8957,7 +8957,7 @@
                 <a:ea typeface="Calibri" pitchFamily="34" charset="-122"/>
                 <a:cs typeface="Calibri" pitchFamily="34" charset="-120"/>
               </a:rPr>
-              <a:t>relating to reason or study</a:t>
+              <a:t>relating to reason or logic</a:t>
             </a:r>
             <a:endParaRPr lang="en-US" sz="850" dirty="0"/>
           </a:p>
@@ -10389,7 +10389,7 @@
                 <a:ea typeface="Calibri" pitchFamily="34" charset="-122"/>
                 <a:cs typeface="Calibri" pitchFamily="34" charset="-120"/>
               </a:rPr>
-              <a:t>relating to reason or study</a:t>
+              <a:t>relating to reason or logic</a:t>
             </a:r>
             <a:endParaRPr lang="en-US" sz="850" dirty="0"/>
           </a:p>
@@ -12125,7 +12125,7 @@
                 <a:ea typeface="Trebuchet MS" pitchFamily="34" charset="-122"/>
                 <a:cs typeface="Trebuchet MS" pitchFamily="34" charset="-120"/>
               </a:rPr>
-              <a:t>geological</a:t>
+              <a:t>logical</a:t>
             </a:r>
             <a:endParaRPr lang="en-US" sz="2800" dirty="0"/>
           </a:p>
@@ -12952,7 +12952,7 @@
                 <a:ea typeface="Trebuchet MS" pitchFamily="34" charset="-122"/>
                 <a:cs typeface="Trebuchet MS" pitchFamily="34" charset="-120"/>
               </a:rPr>
-              <a:t>geological</a:t>
+              <a:t>logical</a:t>
             </a:r>
             <a:endParaRPr lang="en-US" sz="2800" dirty="0"/>
           </a:p>
@@ -13032,7 +13032,7 @@
         </p:nvSpPr>
         <p:spPr>
           <a:xfrm>
-            <a:off x="2938272" y="2258568"/>
+            <a:off x="4370832" y="2258568"/>
             <a:ext cx="1828800" cy="292608"/>
           </a:xfrm>
           <a:prstGeom prst="rect">
@@ -13041,11 +13041,11 @@
             </a:avLst>
           </a:prstGeom>
           <a:solidFill>
-            <a:srgbClr val="DDD6FE"/>
+            <a:srgbClr val="CCFBF1"/>
           </a:solidFill>
           <a:ln w="19050">
             <a:solidFill>
-              <a:srgbClr val="7C3AED"/>
+              <a:srgbClr val="0D9488"/>
             </a:solidFill>
             <a:prstDash val="solid"/>
           </a:ln>
@@ -13066,7 +13066,7 @@
         </p:nvSpPr>
         <p:spPr>
           <a:xfrm>
-            <a:off x="2938272" y="2258568"/>
+            <a:off x="4370832" y="2258568"/>
             <a:ext cx="1828800" cy="292608"/>
           </a:xfrm>
           <a:prstGeom prst="rect">
@@ -13085,13 +13085,13 @@
             <a:r>
               <a:rPr lang="en-US" sz="1300" b="1" dirty="0">
                 <a:solidFill>
-                  <a:srgbClr val="4C1D95"/>
+                  <a:srgbClr val="0F766E"/>
                 </a:solidFill>
                 <a:latin typeface="Trebuchet MS" pitchFamily="34" charset="0"/>
                 <a:ea typeface="Trebuchet MS" pitchFamily="34" charset="-122"/>
                 <a:cs typeface="Trebuchet MS" pitchFamily="34" charset="-120"/>
               </a:rPr>
-              <a:t>geo</a:t>
+              <a:t>logical</a:t>
             </a:r>
             <a:endParaRPr lang="en-US" sz="1300" dirty="0"/>
           </a:p>
@@ -13105,7 +13105,7 @@
         </p:nvSpPr>
         <p:spPr>
           <a:xfrm>
-            <a:off x="2938272" y="2569464"/>
+            <a:off x="4370832" y="2569464"/>
             <a:ext cx="1828800" cy="201168"/>
           </a:xfrm>
           <a:prstGeom prst="rect">
@@ -13130,7 +13130,7 @@
                 <a:ea typeface="Calibri" pitchFamily="34" charset="-122"/>
                 <a:cs typeface="Calibri" pitchFamily="34" charset="-120"/>
               </a:rPr>
-              <a:t>earth</a:t>
+              <a:t>relating to reason or logic</a:t>
             </a:r>
             <a:endParaRPr lang="en-US" sz="850" dirty="0"/>
           </a:p>
@@ -13144,30 +13144,23 @@
         </p:nvSpPr>
         <p:spPr>
           <a:xfrm>
-            <a:off x="5803392" y="2258568"/>
-            <a:ext cx="1828800" cy="292608"/>
+            <a:off x="365760" y="3273552"/>
+            <a:ext cx="1371600" cy="658368"/>
           </a:xfrm>
           <a:prstGeom prst="rect">
             <a:avLst>
-              <a:gd name="adj" fmla="val 25000"/>
+              <a:gd name="adj" fmla="val 8333"/>
             </a:avLst>
           </a:prstGeom>
           <a:solidFill>
-            <a:srgbClr val="CCFBF1"/>
-          </a:solidFill>
-          <a:ln w="19050">
-            <a:solidFill>
-              <a:srgbClr val="0D9488"/>
-            </a:solidFill>
-            <a:prstDash val="solid"/>
-          </a:ln>
-          <a:effectLst>
-            <a:outerShdw sx="100000" sy="100000" kx="0" ky="0" algn="bl" rotWithShape="0" blurRad="101600" dist="38100" dir="8100000">
-              <a:srgbClr val="000000">
-                <a:alpha val="12000"/>
-              </a:srgbClr>
-            </a:outerShdw>
-          </a:effectLst>
+            <a:srgbClr val="E2E8F0"/>
+          </a:solidFill>
+          <a:ln w="12700">
+            <a:solidFill>
+              <a:srgbClr val="E2E8F0"/>
+            </a:solidFill>
+            <a:prstDash val="solid"/>
+          </a:ln>
         </p:spPr>
       </p:sp>
       <p:sp>
@@ -13178,90 +13171,117 @@
         </p:nvSpPr>
         <p:spPr>
           <a:xfrm>
-            <a:off x="5803392" y="2258568"/>
-            <a:ext cx="1828800" cy="292608"/>
-          </a:xfrm>
-          <a:prstGeom prst="rect">
-            <a:avLst/>
-          </a:prstGeom>
-          <a:noFill/>
-          <a:ln/>
-        </p:spPr>
-        <p:txBody>
-          <a:bodyPr wrap="square" lIns="0" tIns="0" rIns="0" bIns="0" rtlCol="0" anchor="ctr"/>
-          <a:lstStyle/>
-          <a:p>
-            <a:pPr algn="ctr" indent="0" marL="0">
-              <a:buNone/>
-            </a:pPr>
-            <a:r>
-              <a:rPr lang="en-US" sz="1300" b="1" dirty="0">
-                <a:solidFill>
-                  <a:srgbClr val="0F766E"/>
+            <a:off x="365760" y="3273552"/>
+            <a:ext cx="1371600" cy="658368"/>
+          </a:xfrm>
+          <a:prstGeom prst="rect">
+            <a:avLst/>
+          </a:prstGeom>
+          <a:noFill/>
+          <a:ln/>
+        </p:spPr>
+        <p:txBody>
+          <a:bodyPr wrap="square" lIns="0" tIns="0" rIns="0" bIns="0" rtlCol="0" anchor="ctr"/>
+          <a:lstStyle/>
+          <a:p>
+            <a:pPr algn="ctr" indent="0" marL="0">
+              <a:buNone/>
+            </a:pPr>
+            <a:r>
+              <a:rPr lang="en-US" sz="1100" b="1" dirty="0">
+                <a:solidFill>
+                  <a:srgbClr val="475569"/>
                 </a:solidFill>
                 <a:latin typeface="Trebuchet MS" pitchFamily="34" charset="0"/>
                 <a:ea typeface="Trebuchet MS" pitchFamily="34" charset="-122"/>
                 <a:cs typeface="Trebuchet MS" pitchFamily="34" charset="-120"/>
               </a:rPr>
-              <a:t>logical</a:t>
-            </a:r>
-            <a:endParaRPr lang="en-US" sz="1300" dirty="0"/>
-          </a:p>
-        </p:txBody>
-      </p:sp>
-      <p:sp>
-        <p:nvSpPr>
-          <p:cNvPr id="21" name="Text 19"/>
-          <p:cNvSpPr/>
-          <p:nvPr/>
-        </p:nvSpPr>
-        <p:spPr>
-          <a:xfrm>
-            <a:off x="5803392" y="2569464"/>
-            <a:ext cx="1828800" cy="201168"/>
-          </a:xfrm>
-          <a:prstGeom prst="rect">
-            <a:avLst/>
-          </a:prstGeom>
-          <a:noFill/>
-          <a:ln/>
-        </p:spPr>
-        <p:txBody>
-          <a:bodyPr wrap="square" lIns="0" tIns="0" rIns="0" bIns="0" rtlCol="0" anchor="t"/>
-          <a:lstStyle/>
-          <a:p>
-            <a:pPr algn="ctr" indent="0" marL="0">
-              <a:buNone/>
-            </a:pPr>
-            <a:r>
-              <a:rPr lang="en-US" sz="850" dirty="0">
-                <a:solidFill>
-                  <a:srgbClr val="475569"/>
+              <a:t>Syllables</a:t>
+            </a:r>
+            <a:endParaRPr lang="en-US" sz="1100" dirty="0"/>
+          </a:p>
+        </p:txBody>
+      </p:sp>
+      <p:sp>
+        <p:nvSpPr>
+          <p:cNvPr id="21" name="Shape 19"/>
+          <p:cNvSpPr/>
+          <p:nvPr/>
+        </p:nvSpPr>
+        <p:spPr>
+          <a:xfrm>
+            <a:off x="1874520" y="3273552"/>
+            <a:ext cx="6903720" cy="658368"/>
+          </a:xfrm>
+          <a:prstGeom prst="rect">
+            <a:avLst>
+              <a:gd name="adj" fmla="val 8333"/>
+            </a:avLst>
+          </a:prstGeom>
+          <a:solidFill>
+            <a:srgbClr val="F8FAFC"/>
+          </a:solidFill>
+          <a:ln w="12700">
+            <a:solidFill>
+              <a:srgbClr val="E2E8F0"/>
+            </a:solidFill>
+            <a:prstDash val="dash"/>
+          </a:ln>
+        </p:spPr>
+      </p:sp>
+      <p:sp>
+        <p:nvSpPr>
+          <p:cNvPr id="22" name="Text 20"/>
+          <p:cNvSpPr/>
+          <p:nvPr/>
+        </p:nvSpPr>
+        <p:spPr>
+          <a:xfrm>
+            <a:off x="1874520" y="3273552"/>
+            <a:ext cx="6903720" cy="658368"/>
+          </a:xfrm>
+          <a:prstGeom prst="rect">
+            <a:avLst/>
+          </a:prstGeom>
+          <a:noFill/>
+          <a:ln/>
+        </p:spPr>
+        <p:txBody>
+          <a:bodyPr wrap="square" rtlCol="0" anchor="ctr"/>
+          <a:lstStyle/>
+          <a:p>
+            <a:pPr algn="ctr" indent="0" marL="0">
+              <a:buNone/>
+            </a:pPr>
+            <a:r>
+              <a:rPr lang="en-US" sz="1100" i="1" dirty="0">
+                <a:solidFill>
+                  <a:srgbClr val="CBD5E1"/>
                 </a:solidFill>
                 <a:latin typeface="Calibri" pitchFamily="34" charset="0"/>
                 <a:ea typeface="Calibri" pitchFamily="34" charset="-122"/>
                 <a:cs typeface="Calibri" pitchFamily="34" charset="-120"/>
               </a:rPr>
-              <a:t>relating to reason or study</a:t>
-            </a:r>
-            <a:endParaRPr lang="en-US" sz="850" dirty="0"/>
-          </a:p>
-        </p:txBody>
-      </p:sp>
-      <p:sp>
-        <p:nvSpPr>
-          <p:cNvPr id="22" name="Shape 20"/>
-          <p:cNvSpPr/>
-          <p:nvPr/>
-        </p:nvSpPr>
-        <p:spPr>
-          <a:xfrm>
-            <a:off x="365760" y="3273552"/>
-            <a:ext cx="1371600" cy="658368"/>
+              <a:t>Write here...</a:t>
+            </a:r>
+            <a:endParaRPr lang="en-US" sz="1100" dirty="0"/>
+          </a:p>
+        </p:txBody>
+      </p:sp>
+      <p:sp>
+        <p:nvSpPr>
+          <p:cNvPr id="23" name="Shape 21"/>
+          <p:cNvSpPr/>
+          <p:nvPr/>
+        </p:nvSpPr>
+        <p:spPr>
+          <a:xfrm>
+            <a:off x="365760" y="4096512"/>
+            <a:ext cx="1371600" cy="804672"/>
           </a:xfrm>
           <a:prstGeom prst="rect">
             <a:avLst>
-              <a:gd name="adj" fmla="val 8333"/>
+              <a:gd name="adj" fmla="val 6818"/>
             </a:avLst>
           </a:prstGeom>
           <a:solidFill>
@@ -13277,14 +13297,14 @@
       </p:sp>
       <p:sp>
         <p:nvSpPr>
-          <p:cNvPr id="23" name="Text 21"/>
-          <p:cNvSpPr/>
-          <p:nvPr/>
-        </p:nvSpPr>
-        <p:spPr>
-          <a:xfrm>
-            <a:off x="365760" y="3273552"/>
-            <a:ext cx="1371600" cy="658368"/>
+          <p:cNvPr id="24" name="Text 22"/>
+          <p:cNvSpPr/>
+          <p:nvPr/>
+        </p:nvSpPr>
+        <p:spPr>
+          <a:xfrm>
+            <a:off x="365760" y="4096512"/>
+            <a:ext cx="1371600" cy="804672"/>
           </a:xfrm>
           <a:prstGeom prst="rect">
             <a:avLst/>
@@ -13308,7 +13328,7 @@
                 <a:ea typeface="Trebuchet MS" pitchFamily="34" charset="-122"/>
                 <a:cs typeface="Trebuchet MS" pitchFamily="34" charset="-120"/>
               </a:rPr>
-              <a:t>Syllables</a:t>
+              <a:t>Phonemes</a:t>
             </a:r>
             <a:endParaRPr lang="en-US" sz="1100" dirty="0"/>
           </a:p>
@@ -13316,80 +13336,14 @@
       </p:sp>
       <p:sp>
         <p:nvSpPr>
-          <p:cNvPr id="24" name="Shape 22"/>
-          <p:cNvSpPr/>
-          <p:nvPr/>
-        </p:nvSpPr>
-        <p:spPr>
-          <a:xfrm>
-            <a:off x="1874520" y="3273552"/>
-            <a:ext cx="6903720" cy="658368"/>
-          </a:xfrm>
-          <a:prstGeom prst="rect">
-            <a:avLst>
-              <a:gd name="adj" fmla="val 8333"/>
-            </a:avLst>
-          </a:prstGeom>
-          <a:solidFill>
-            <a:srgbClr val="F8FAFC"/>
-          </a:solidFill>
-          <a:ln w="12700">
-            <a:solidFill>
-              <a:srgbClr val="E2E8F0"/>
-            </a:solidFill>
-            <a:prstDash val="dash"/>
-          </a:ln>
-        </p:spPr>
-      </p:sp>
-      <p:sp>
-        <p:nvSpPr>
-          <p:cNvPr id="25" name="Text 23"/>
-          <p:cNvSpPr/>
-          <p:nvPr/>
-        </p:nvSpPr>
-        <p:spPr>
-          <a:xfrm>
-            <a:off x="1874520" y="3273552"/>
-            <a:ext cx="6903720" cy="658368"/>
-          </a:xfrm>
-          <a:prstGeom prst="rect">
-            <a:avLst/>
-          </a:prstGeom>
-          <a:noFill/>
-          <a:ln/>
-        </p:spPr>
-        <p:txBody>
-          <a:bodyPr wrap="square" rtlCol="0" anchor="ctr"/>
-          <a:lstStyle/>
-          <a:p>
-            <a:pPr algn="ctr" indent="0" marL="0">
-              <a:buNone/>
-            </a:pPr>
-            <a:r>
-              <a:rPr lang="en-US" sz="1100" i="1" dirty="0">
-                <a:solidFill>
-                  <a:srgbClr val="CBD5E1"/>
-                </a:solidFill>
-                <a:latin typeface="Calibri" pitchFamily="34" charset="0"/>
-                <a:ea typeface="Calibri" pitchFamily="34" charset="-122"/>
-                <a:cs typeface="Calibri" pitchFamily="34" charset="-120"/>
-              </a:rPr>
-              <a:t>Write here...</a:t>
-            </a:r>
-            <a:endParaRPr lang="en-US" sz="1100" dirty="0"/>
-          </a:p>
-        </p:txBody>
-      </p:sp>
-      <p:sp>
-        <p:nvSpPr>
-          <p:cNvPr id="26" name="Shape 24"/>
-          <p:cNvSpPr/>
-          <p:nvPr/>
-        </p:nvSpPr>
-        <p:spPr>
-          <a:xfrm>
-            <a:off x="365760" y="4096512"/>
-            <a:ext cx="1371600" cy="804672"/>
+          <p:cNvPr id="25" name="Shape 23"/>
+          <p:cNvSpPr/>
+          <p:nvPr/>
+        </p:nvSpPr>
+        <p:spPr>
+          <a:xfrm>
+            <a:off x="1874520" y="4096512"/>
+            <a:ext cx="6903720" cy="804672"/>
           </a:xfrm>
           <a:prstGeom prst="rect">
             <a:avLst>
@@ -13397,85 +13351,19 @@
             </a:avLst>
           </a:prstGeom>
           <a:solidFill>
-            <a:srgbClr val="E2E8F0"/>
+            <a:srgbClr val="F8FAFC"/>
           </a:solidFill>
           <a:ln w="12700">
             <a:solidFill>
               <a:srgbClr val="E2E8F0"/>
             </a:solidFill>
-            <a:prstDash val="solid"/>
-          </a:ln>
-        </p:spPr>
-      </p:sp>
-      <p:sp>
-        <p:nvSpPr>
-          <p:cNvPr id="27" name="Text 25"/>
-          <p:cNvSpPr/>
-          <p:nvPr/>
-        </p:nvSpPr>
-        <p:spPr>
-          <a:xfrm>
-            <a:off x="365760" y="4096512"/>
-            <a:ext cx="1371600" cy="804672"/>
-          </a:xfrm>
-          <a:prstGeom prst="rect">
-            <a:avLst/>
-          </a:prstGeom>
-          <a:noFill/>
-          <a:ln/>
-        </p:spPr>
-        <p:txBody>
-          <a:bodyPr wrap="square" lIns="0" tIns="0" rIns="0" bIns="0" rtlCol="0" anchor="ctr"/>
-          <a:lstStyle/>
-          <a:p>
-            <a:pPr algn="ctr" indent="0" marL="0">
-              <a:buNone/>
-            </a:pPr>
-            <a:r>
-              <a:rPr lang="en-US" sz="1100" b="1" dirty="0">
-                <a:solidFill>
-                  <a:srgbClr val="475569"/>
-                </a:solidFill>
-                <a:latin typeface="Trebuchet MS" pitchFamily="34" charset="0"/>
-                <a:ea typeface="Trebuchet MS" pitchFamily="34" charset="-122"/>
-                <a:cs typeface="Trebuchet MS" pitchFamily="34" charset="-120"/>
-              </a:rPr>
-              <a:t>Phonemes</a:t>
-            </a:r>
-            <a:endParaRPr lang="en-US" sz="1100" dirty="0"/>
-          </a:p>
-        </p:txBody>
-      </p:sp>
-      <p:sp>
-        <p:nvSpPr>
-          <p:cNvPr id="28" name="Shape 26"/>
-          <p:cNvSpPr/>
-          <p:nvPr/>
-        </p:nvSpPr>
-        <p:spPr>
-          <a:xfrm>
-            <a:off x="1874520" y="4096512"/>
-            <a:ext cx="6903720" cy="804672"/>
-          </a:xfrm>
-          <a:prstGeom prst="rect">
-            <a:avLst>
-              <a:gd name="adj" fmla="val 6818"/>
-            </a:avLst>
-          </a:prstGeom>
-          <a:solidFill>
-            <a:srgbClr val="F8FAFC"/>
-          </a:solidFill>
-          <a:ln w="12700">
-            <a:solidFill>
-              <a:srgbClr val="E2E8F0"/>
-            </a:solidFill>
             <a:prstDash val="dash"/>
           </a:ln>
         </p:spPr>
       </p:sp>
       <p:sp>
         <p:nvSpPr>
-          <p:cNvPr id="29" name="Text 27"/>
+          <p:cNvPr id="26" name="Text 24"/>
           <p:cNvSpPr/>
           <p:nvPr/>
         </p:nvSpPr>
@@ -13937,7 +13825,7 @@
                 <a:ea typeface="Trebuchet MS" pitchFamily="34" charset="-122"/>
                 <a:cs typeface="Trebuchet MS" pitchFamily="34" charset="-120"/>
               </a:rPr>
-              <a:t>geological</a:t>
+              <a:t>logical</a:t>
             </a:r>
             <a:endParaRPr lang="en-US" sz="2800" dirty="0"/>
           </a:p>
@@ -14017,7 +13905,7 @@
         </p:nvSpPr>
         <p:spPr>
           <a:xfrm>
-            <a:off x="2938272" y="2258568"/>
+            <a:off x="4370832" y="2258568"/>
             <a:ext cx="1828800" cy="292608"/>
           </a:xfrm>
           <a:prstGeom prst="rect">
@@ -14026,11 +13914,11 @@
             </a:avLst>
           </a:prstGeom>
           <a:solidFill>
-            <a:srgbClr val="DDD6FE"/>
+            <a:srgbClr val="CCFBF1"/>
           </a:solidFill>
           <a:ln w="19050">
             <a:solidFill>
-              <a:srgbClr val="7C3AED"/>
+              <a:srgbClr val="0D9488"/>
             </a:solidFill>
             <a:prstDash val="solid"/>
           </a:ln>
@@ -14051,7 +13939,7 @@
         </p:nvSpPr>
         <p:spPr>
           <a:xfrm>
-            <a:off x="2938272" y="2258568"/>
+            <a:off x="4370832" y="2258568"/>
             <a:ext cx="1828800" cy="292608"/>
           </a:xfrm>
           <a:prstGeom prst="rect">
@@ -14070,13 +13958,13 @@
             <a:r>
               <a:rPr lang="en-US" sz="1300" b="1" dirty="0">
                 <a:solidFill>
-                  <a:srgbClr val="4C1D95"/>
+                  <a:srgbClr val="0F766E"/>
                 </a:solidFill>
                 <a:latin typeface="Trebuchet MS" pitchFamily="34" charset="0"/>
                 <a:ea typeface="Trebuchet MS" pitchFamily="34" charset="-122"/>
                 <a:cs typeface="Trebuchet MS" pitchFamily="34" charset="-120"/>
               </a:rPr>
-              <a:t>geo</a:t>
+              <a:t>logical</a:t>
             </a:r>
             <a:endParaRPr lang="en-US" sz="1300" dirty="0"/>
           </a:p>
@@ -14090,7 +13978,7 @@
         </p:nvSpPr>
         <p:spPr>
           <a:xfrm>
-            <a:off x="2938272" y="2569464"/>
+            <a:off x="4370832" y="2569464"/>
             <a:ext cx="1828800" cy="201168"/>
           </a:xfrm>
           <a:prstGeom prst="rect">
@@ -14115,7 +14003,7 @@
                 <a:ea typeface="Calibri" pitchFamily="34" charset="-122"/>
                 <a:cs typeface="Calibri" pitchFamily="34" charset="-120"/>
               </a:rPr>
-              <a:t>earth</a:t>
+              <a:t>relating to reason or logic</a:t>
             </a:r>
             <a:endParaRPr lang="en-US" sz="850" dirty="0"/>
           </a:p>
@@ -14129,30 +14017,23 @@
         </p:nvSpPr>
         <p:spPr>
           <a:xfrm>
-            <a:off x="5803392" y="2258568"/>
-            <a:ext cx="1828800" cy="292608"/>
+            <a:off x="365760" y="3273552"/>
+            <a:ext cx="1371600" cy="658368"/>
           </a:xfrm>
           <a:prstGeom prst="rect">
             <a:avLst>
-              <a:gd name="adj" fmla="val 25000"/>
+              <a:gd name="adj" fmla="val 8333"/>
             </a:avLst>
           </a:prstGeom>
           <a:solidFill>
-            <a:srgbClr val="CCFBF1"/>
-          </a:solidFill>
-          <a:ln w="19050">
-            <a:solidFill>
-              <a:srgbClr val="0D9488"/>
-            </a:solidFill>
-            <a:prstDash val="solid"/>
-          </a:ln>
-          <a:effectLst>
-            <a:outerShdw sx="100000" sy="100000" kx="0" ky="0" algn="bl" rotWithShape="0" blurRad="101600" dist="38100" dir="8100000">
-              <a:srgbClr val="000000">
-                <a:alpha val="12000"/>
-              </a:srgbClr>
-            </a:outerShdw>
-          </a:effectLst>
+            <a:srgbClr val="E2E8F0"/>
+          </a:solidFill>
+          <a:ln w="12700">
+            <a:solidFill>
+              <a:srgbClr val="E2E8F0"/>
+            </a:solidFill>
+            <a:prstDash val="solid"/>
+          </a:ln>
         </p:spPr>
       </p:sp>
       <p:sp>
@@ -14163,86 +14044,47 @@
         </p:nvSpPr>
         <p:spPr>
           <a:xfrm>
-            <a:off x="5803392" y="2258568"/>
-            <a:ext cx="1828800" cy="292608"/>
-          </a:xfrm>
-          <a:prstGeom prst="rect">
-            <a:avLst/>
-          </a:prstGeom>
-          <a:noFill/>
-          <a:ln/>
-        </p:spPr>
-        <p:txBody>
-          <a:bodyPr wrap="square" lIns="0" tIns="0" rIns="0" bIns="0" rtlCol="0" anchor="ctr"/>
-          <a:lstStyle/>
-          <a:p>
-            <a:pPr algn="ctr" indent="0" marL="0">
-              <a:buNone/>
-            </a:pPr>
-            <a:r>
-              <a:rPr lang="en-US" sz="1300" b="1" dirty="0">
-                <a:solidFill>
-                  <a:srgbClr val="0F766E"/>
+            <a:off x="365760" y="3273552"/>
+            <a:ext cx="1371600" cy="658368"/>
+          </a:xfrm>
+          <a:prstGeom prst="rect">
+            <a:avLst/>
+          </a:prstGeom>
+          <a:noFill/>
+          <a:ln/>
+        </p:spPr>
+        <p:txBody>
+          <a:bodyPr wrap="square" lIns="0" tIns="0" rIns="0" bIns="0" rtlCol="0" anchor="ctr"/>
+          <a:lstStyle/>
+          <a:p>
+            <a:pPr algn="ctr" indent="0" marL="0">
+              <a:buNone/>
+            </a:pPr>
+            <a:r>
+              <a:rPr lang="en-US" sz="1100" b="1" dirty="0">
+                <a:solidFill>
+                  <a:srgbClr val="475569"/>
                 </a:solidFill>
                 <a:latin typeface="Trebuchet MS" pitchFamily="34" charset="0"/>
                 <a:ea typeface="Trebuchet MS" pitchFamily="34" charset="-122"/>
                 <a:cs typeface="Trebuchet MS" pitchFamily="34" charset="-120"/>
               </a:rPr>
-              <a:t>logical</a:t>
-            </a:r>
-            <a:endParaRPr lang="en-US" sz="1300" dirty="0"/>
-          </a:p>
-        </p:txBody>
-      </p:sp>
-      <p:sp>
-        <p:nvSpPr>
-          <p:cNvPr id="21" name="Text 19"/>
-          <p:cNvSpPr/>
-          <p:nvPr/>
-        </p:nvSpPr>
-        <p:spPr>
-          <a:xfrm>
-            <a:off x="5803392" y="2569464"/>
-            <a:ext cx="1828800" cy="201168"/>
-          </a:xfrm>
-          <a:prstGeom prst="rect">
-            <a:avLst/>
-          </a:prstGeom>
-          <a:noFill/>
-          <a:ln/>
-        </p:spPr>
-        <p:txBody>
-          <a:bodyPr wrap="square" lIns="0" tIns="0" rIns="0" bIns="0" rtlCol="0" anchor="t"/>
-          <a:lstStyle/>
-          <a:p>
-            <a:pPr algn="ctr" indent="0" marL="0">
-              <a:buNone/>
-            </a:pPr>
-            <a:r>
-              <a:rPr lang="en-US" sz="850" dirty="0">
-                <a:solidFill>
-                  <a:srgbClr val="475569"/>
-                </a:solidFill>
-                <a:latin typeface="Calibri" pitchFamily="34" charset="0"/>
-                <a:ea typeface="Calibri" pitchFamily="34" charset="-122"/>
-                <a:cs typeface="Calibri" pitchFamily="34" charset="-120"/>
-              </a:rPr>
-              <a:t>relating to reason or study</a:t>
-            </a:r>
-            <a:endParaRPr lang="en-US" sz="850" dirty="0"/>
-          </a:p>
-        </p:txBody>
-      </p:sp>
-      <p:sp>
-        <p:nvSpPr>
-          <p:cNvPr id="22" name="Shape 20"/>
-          <p:cNvSpPr/>
-          <p:nvPr/>
-        </p:nvSpPr>
-        <p:spPr>
-          <a:xfrm>
-            <a:off x="365760" y="3273552"/>
-            <a:ext cx="1371600" cy="658368"/>
+              <a:t>Syllables</a:t>
+            </a:r>
+            <a:endParaRPr lang="en-US" sz="1100" dirty="0"/>
+          </a:p>
+        </p:txBody>
+      </p:sp>
+      <p:sp>
+        <p:nvSpPr>
+          <p:cNvPr id="21" name="Shape 19"/>
+          <p:cNvSpPr/>
+          <p:nvPr/>
+        </p:nvSpPr>
+        <p:spPr>
+          <a:xfrm>
+            <a:off x="1874520" y="3273552"/>
+            <a:ext cx="6903720" cy="658368"/>
           </a:xfrm>
           <a:prstGeom prst="rect">
             <a:avLst>
@@ -14250,11 +14092,38 @@
             </a:avLst>
           </a:prstGeom>
           <a:solidFill>
-            <a:srgbClr val="E2E8F0"/>
-          </a:solidFill>
-          <a:ln w="12700">
-            <a:solidFill>
-              <a:srgbClr val="E2E8F0"/>
+            <a:srgbClr val="CCFBF1"/>
+          </a:solidFill>
+          <a:ln w="12700">
+            <a:solidFill>
+              <a:srgbClr val="0D9488"/>
+            </a:solidFill>
+            <a:prstDash val="solid"/>
+          </a:ln>
+        </p:spPr>
+      </p:sp>
+      <p:sp>
+        <p:nvSpPr>
+          <p:cNvPr id="22" name="Shape 20"/>
+          <p:cNvSpPr/>
+          <p:nvPr/>
+        </p:nvSpPr>
+        <p:spPr>
+          <a:xfrm>
+            <a:off x="2313432" y="3364992"/>
+            <a:ext cx="1645920" cy="475488"/>
+          </a:xfrm>
+          <a:prstGeom prst="rect">
+            <a:avLst>
+              <a:gd name="adj" fmla="val 9615"/>
+            </a:avLst>
+          </a:prstGeom>
+          <a:solidFill>
+            <a:srgbClr val="FFFFFF"/>
+          </a:solidFill>
+          <a:ln w="12700">
+            <a:solidFill>
+              <a:srgbClr val="0D9488"/>
             </a:solidFill>
             <a:prstDash val="solid"/>
           </a:ln>
@@ -14268,63 +14137,75 @@
         </p:nvSpPr>
         <p:spPr>
           <a:xfrm>
-            <a:off x="365760" y="3273552"/>
-            <a:ext cx="1371600" cy="658368"/>
-          </a:xfrm>
-          <a:prstGeom prst="rect">
-            <a:avLst/>
-          </a:prstGeom>
-          <a:noFill/>
-          <a:ln/>
-        </p:spPr>
-        <p:txBody>
-          <a:bodyPr wrap="square" lIns="0" tIns="0" rIns="0" bIns="0" rtlCol="0" anchor="ctr"/>
-          <a:lstStyle/>
-          <a:p>
-            <a:pPr algn="ctr" indent="0" marL="0">
-              <a:buNone/>
-            </a:pPr>
-            <a:r>
-              <a:rPr lang="en-US" sz="1100" b="1" dirty="0">
-                <a:solidFill>
-                  <a:srgbClr val="475569"/>
+            <a:off x="2313432" y="3364992"/>
+            <a:ext cx="1645920" cy="475488"/>
+          </a:xfrm>
+          <a:prstGeom prst="rect">
+            <a:avLst/>
+          </a:prstGeom>
+          <a:noFill/>
+          <a:ln/>
+        </p:spPr>
+        <p:txBody>
+          <a:bodyPr wrap="square" lIns="0" tIns="0" rIns="0" bIns="0" rtlCol="0" anchor="ctr"/>
+          <a:lstStyle/>
+          <a:p>
+            <a:pPr algn="ctr" indent="0" marL="0">
+              <a:buNone/>
+            </a:pPr>
+            <a:r>
+              <a:rPr lang="en-US" sz="1400" b="1" dirty="0">
+                <a:solidFill>
+                  <a:srgbClr val="0D9488"/>
                 </a:solidFill>
                 <a:latin typeface="Trebuchet MS" pitchFamily="34" charset="0"/>
                 <a:ea typeface="Trebuchet MS" pitchFamily="34" charset="-122"/>
                 <a:cs typeface="Trebuchet MS" pitchFamily="34" charset="-120"/>
               </a:rPr>
-              <a:t>Syllables</a:t>
-            </a:r>
-            <a:endParaRPr lang="en-US" sz="1100" dirty="0"/>
-          </a:p>
-        </p:txBody>
-      </p:sp>
-      <p:sp>
-        <p:nvSpPr>
-          <p:cNvPr id="24" name="Shape 22"/>
-          <p:cNvSpPr/>
-          <p:nvPr/>
-        </p:nvSpPr>
-        <p:spPr>
-          <a:xfrm>
-            <a:off x="1874520" y="3273552"/>
-            <a:ext cx="6903720" cy="658368"/>
-          </a:xfrm>
-          <a:prstGeom prst="rect">
-            <a:avLst>
-              <a:gd name="adj" fmla="val 8333"/>
-            </a:avLst>
-          </a:prstGeom>
-          <a:solidFill>
-            <a:srgbClr val="CCFBF1"/>
-          </a:solidFill>
-          <a:ln w="12700">
-            <a:solidFill>
-              <a:srgbClr val="0D9488"/>
-            </a:solidFill>
-            <a:prstDash val="solid"/>
-          </a:ln>
-        </p:spPr>
+              <a:t>log</a:t>
+            </a:r>
+            <a:endParaRPr lang="en-US" sz="1400" dirty="0"/>
+          </a:p>
+        </p:txBody>
+      </p:sp>
+      <p:sp>
+        <p:nvSpPr>
+          <p:cNvPr id="24" name="Text 22"/>
+          <p:cNvSpPr/>
+          <p:nvPr/>
+        </p:nvSpPr>
+        <p:spPr>
+          <a:xfrm>
+            <a:off x="3959352" y="3364992"/>
+            <a:ext cx="411480" cy="475488"/>
+          </a:xfrm>
+          <a:prstGeom prst="rect">
+            <a:avLst/>
+          </a:prstGeom>
+          <a:noFill/>
+          <a:ln/>
+        </p:spPr>
+        <p:txBody>
+          <a:bodyPr wrap="square" lIns="0" tIns="0" rIns="0" bIns="0" rtlCol="0" anchor="ctr"/>
+          <a:lstStyle/>
+          <a:p>
+            <a:pPr algn="ctr" indent="0" marL="0">
+              <a:buNone/>
+            </a:pPr>
+            <a:r>
+              <a:rPr lang="en-US" sz="1600" b="1" dirty="0">
+                <a:solidFill>
+                  <a:srgbClr val="0D9488"/>
+                </a:solidFill>
+                <a:latin typeface="Trebuchet MS" pitchFamily="34" charset="0"/>
+                <a:ea typeface="Trebuchet MS" pitchFamily="34" charset="-122"/>
+                <a:cs typeface="Trebuchet MS" pitchFamily="34" charset="-120"/>
+              </a:rPr>
+              <a:t>·</a:t>
+            </a:r>
+            <a:endParaRPr lang="en-US" sz="1600" dirty="0"/>
+          </a:p>
+        </p:txBody>
       </p:sp>
       <p:sp>
         <p:nvSpPr>
@@ -14334,8 +14215,8 @@
         </p:nvSpPr>
         <p:spPr>
           <a:xfrm>
-            <a:off x="1978152" y="3364992"/>
-            <a:ext cx="1225296" cy="475488"/>
+            <a:off x="4370832" y="3364992"/>
+            <a:ext cx="1645920" cy="475488"/>
           </a:xfrm>
           <a:prstGeom prst="rect">
             <a:avLst>
@@ -14361,8 +14242,8 @@
         </p:nvSpPr>
         <p:spPr>
           <a:xfrm>
-            <a:off x="1978152" y="3364992"/>
-            <a:ext cx="1225296" cy="475488"/>
+            <a:off x="4370832" y="3364992"/>
+            <a:ext cx="1645920" cy="475488"/>
           </a:xfrm>
           <a:prstGeom prst="rect">
             <a:avLst/>
@@ -14386,7 +14267,7 @@
                 <a:ea typeface="Trebuchet MS" pitchFamily="34" charset="-122"/>
                 <a:cs typeface="Trebuchet MS" pitchFamily="34" charset="-120"/>
               </a:rPr>
-              <a:t>ge</a:t>
+              <a:t>i</a:t>
             </a:r>
             <a:endParaRPr lang="en-US" sz="1400" dirty="0"/>
           </a:p>
@@ -14400,8 +14281,8 @@
         </p:nvSpPr>
         <p:spPr>
           <a:xfrm>
-            <a:off x="3203448" y="3364992"/>
-            <a:ext cx="76200" cy="475488"/>
+            <a:off x="6016752" y="3364992"/>
+            <a:ext cx="411480" cy="475488"/>
           </a:xfrm>
           <a:prstGeom prst="rect">
             <a:avLst/>
@@ -14439,8 +14320,8 @@
         </p:nvSpPr>
         <p:spPr>
           <a:xfrm>
-            <a:off x="3279648" y="3364992"/>
-            <a:ext cx="1225296" cy="475488"/>
+            <a:off x="6428232" y="3364992"/>
+            <a:ext cx="1645920" cy="475488"/>
           </a:xfrm>
           <a:prstGeom prst="rect">
             <a:avLst>
@@ -14466,8 +14347,8 @@
         </p:nvSpPr>
         <p:spPr>
           <a:xfrm>
-            <a:off x="3279648" y="3364992"/>
-            <a:ext cx="1225296" cy="475488"/>
+            <a:off x="6428232" y="3364992"/>
+            <a:ext cx="1645920" cy="475488"/>
           </a:xfrm>
           <a:prstGeom prst="rect">
             <a:avLst/>
@@ -14491,7 +14372,7 @@
                 <a:ea typeface="Trebuchet MS" pitchFamily="34" charset="-122"/>
                 <a:cs typeface="Trebuchet MS" pitchFamily="34" charset="-120"/>
               </a:rPr>
-              <a:t>o</a:t>
+              <a:t>cal</a:t>
             </a:r>
             <a:endParaRPr lang="en-US" sz="1400" dirty="0"/>
           </a:p>
@@ -14499,329 +14380,80 @@
       </p:sp>
       <p:sp>
         <p:nvSpPr>
-          <p:cNvPr id="30" name="Text 28"/>
-          <p:cNvSpPr/>
-          <p:nvPr/>
-        </p:nvSpPr>
-        <p:spPr>
-          <a:xfrm>
-            <a:off x="4504944" y="3364992"/>
-            <a:ext cx="76200" cy="475488"/>
-          </a:xfrm>
-          <a:prstGeom prst="rect">
-            <a:avLst/>
-          </a:prstGeom>
-          <a:noFill/>
-          <a:ln/>
-        </p:spPr>
-        <p:txBody>
-          <a:bodyPr wrap="square" lIns="0" tIns="0" rIns="0" bIns="0" rtlCol="0" anchor="ctr"/>
-          <a:lstStyle/>
-          <a:p>
-            <a:pPr algn="ctr" indent="0" marL="0">
-              <a:buNone/>
-            </a:pPr>
-            <a:r>
-              <a:rPr lang="en-US" sz="1600" b="1" dirty="0">
-                <a:solidFill>
-                  <a:srgbClr val="0D9488"/>
+          <p:cNvPr id="30" name="Shape 28"/>
+          <p:cNvSpPr/>
+          <p:nvPr/>
+        </p:nvSpPr>
+        <p:spPr>
+          <a:xfrm>
+            <a:off x="365760" y="4096512"/>
+            <a:ext cx="1371600" cy="804672"/>
+          </a:xfrm>
+          <a:prstGeom prst="rect">
+            <a:avLst>
+              <a:gd name="adj" fmla="val 6818"/>
+            </a:avLst>
+          </a:prstGeom>
+          <a:solidFill>
+            <a:srgbClr val="E2E8F0"/>
+          </a:solidFill>
+          <a:ln w="12700">
+            <a:solidFill>
+              <a:srgbClr val="E2E8F0"/>
+            </a:solidFill>
+            <a:prstDash val="solid"/>
+          </a:ln>
+        </p:spPr>
+      </p:sp>
+      <p:sp>
+        <p:nvSpPr>
+          <p:cNvPr id="31" name="Text 29"/>
+          <p:cNvSpPr/>
+          <p:nvPr/>
+        </p:nvSpPr>
+        <p:spPr>
+          <a:xfrm>
+            <a:off x="365760" y="4096512"/>
+            <a:ext cx="1371600" cy="804672"/>
+          </a:xfrm>
+          <a:prstGeom prst="rect">
+            <a:avLst/>
+          </a:prstGeom>
+          <a:noFill/>
+          <a:ln/>
+        </p:spPr>
+        <p:txBody>
+          <a:bodyPr wrap="square" lIns="0" tIns="0" rIns="0" bIns="0" rtlCol="0" anchor="ctr"/>
+          <a:lstStyle/>
+          <a:p>
+            <a:pPr algn="ctr" indent="0" marL="0">
+              <a:buNone/>
+            </a:pPr>
+            <a:r>
+              <a:rPr lang="en-US" sz="1100" b="1" dirty="0">
+                <a:solidFill>
+                  <a:srgbClr val="475569"/>
                 </a:solidFill>
                 <a:latin typeface="Trebuchet MS" pitchFamily="34" charset="0"/>
                 <a:ea typeface="Trebuchet MS" pitchFamily="34" charset="-122"/>
                 <a:cs typeface="Trebuchet MS" pitchFamily="34" charset="-120"/>
               </a:rPr>
-              <a:t>·</a:t>
-            </a:r>
-            <a:endParaRPr lang="en-US" sz="1600" dirty="0"/>
-          </a:p>
-        </p:txBody>
-      </p:sp>
-      <p:sp>
-        <p:nvSpPr>
-          <p:cNvPr id="31" name="Shape 29"/>
-          <p:cNvSpPr/>
-          <p:nvPr/>
-        </p:nvSpPr>
-        <p:spPr>
-          <a:xfrm>
-            <a:off x="4581144" y="3364992"/>
-            <a:ext cx="1225296" cy="475488"/>
-          </a:xfrm>
-          <a:prstGeom prst="rect">
-            <a:avLst>
-              <a:gd name="adj" fmla="val 9615"/>
-            </a:avLst>
-          </a:prstGeom>
-          <a:solidFill>
-            <a:srgbClr val="FFFFFF"/>
-          </a:solidFill>
-          <a:ln w="12700">
-            <a:solidFill>
-              <a:srgbClr val="0D9488"/>
-            </a:solidFill>
-            <a:prstDash val="solid"/>
-          </a:ln>
-        </p:spPr>
-      </p:sp>
-      <p:sp>
-        <p:nvSpPr>
-          <p:cNvPr id="32" name="Text 30"/>
-          <p:cNvSpPr/>
-          <p:nvPr/>
-        </p:nvSpPr>
-        <p:spPr>
-          <a:xfrm>
-            <a:off x="4581144" y="3364992"/>
-            <a:ext cx="1225296" cy="475488"/>
-          </a:xfrm>
-          <a:prstGeom prst="rect">
-            <a:avLst/>
-          </a:prstGeom>
-          <a:noFill/>
-          <a:ln/>
-        </p:spPr>
-        <p:txBody>
-          <a:bodyPr wrap="square" lIns="0" tIns="0" rIns="0" bIns="0" rtlCol="0" anchor="ctr"/>
-          <a:lstStyle/>
-          <a:p>
-            <a:pPr algn="ctr" indent="0" marL="0">
-              <a:buNone/>
-            </a:pPr>
-            <a:r>
-              <a:rPr lang="en-US" sz="1400" b="1" dirty="0">
-                <a:solidFill>
-                  <a:srgbClr val="0D9488"/>
-                </a:solidFill>
-                <a:latin typeface="Trebuchet MS" pitchFamily="34" charset="0"/>
-                <a:ea typeface="Trebuchet MS" pitchFamily="34" charset="-122"/>
-                <a:cs typeface="Trebuchet MS" pitchFamily="34" charset="-120"/>
-              </a:rPr>
-              <a:t>log</a:t>
-            </a:r>
-            <a:endParaRPr lang="en-US" sz="1400" dirty="0"/>
-          </a:p>
-        </p:txBody>
-      </p:sp>
-      <p:sp>
-        <p:nvSpPr>
-          <p:cNvPr id="33" name="Text 31"/>
-          <p:cNvSpPr/>
-          <p:nvPr/>
-        </p:nvSpPr>
-        <p:spPr>
-          <a:xfrm>
-            <a:off x="5806440" y="3364992"/>
-            <a:ext cx="76200" cy="475488"/>
-          </a:xfrm>
-          <a:prstGeom prst="rect">
-            <a:avLst/>
-          </a:prstGeom>
-          <a:noFill/>
-          <a:ln/>
-        </p:spPr>
-        <p:txBody>
-          <a:bodyPr wrap="square" lIns="0" tIns="0" rIns="0" bIns="0" rtlCol="0" anchor="ctr"/>
-          <a:lstStyle/>
-          <a:p>
-            <a:pPr algn="ctr" indent="0" marL="0">
-              <a:buNone/>
-            </a:pPr>
-            <a:r>
-              <a:rPr lang="en-US" sz="1600" b="1" dirty="0">
-                <a:solidFill>
-                  <a:srgbClr val="0D9488"/>
-                </a:solidFill>
-                <a:latin typeface="Trebuchet MS" pitchFamily="34" charset="0"/>
-                <a:ea typeface="Trebuchet MS" pitchFamily="34" charset="-122"/>
-                <a:cs typeface="Trebuchet MS" pitchFamily="34" charset="-120"/>
-              </a:rPr>
-              <a:t>·</a:t>
-            </a:r>
-            <a:endParaRPr lang="en-US" sz="1600" dirty="0"/>
-          </a:p>
-        </p:txBody>
-      </p:sp>
-      <p:sp>
-        <p:nvSpPr>
-          <p:cNvPr id="34" name="Shape 32"/>
-          <p:cNvSpPr/>
-          <p:nvPr/>
-        </p:nvSpPr>
-        <p:spPr>
-          <a:xfrm>
-            <a:off x="5882640" y="3364992"/>
-            <a:ext cx="1225296" cy="475488"/>
-          </a:xfrm>
-          <a:prstGeom prst="rect">
-            <a:avLst>
-              <a:gd name="adj" fmla="val 9615"/>
-            </a:avLst>
-          </a:prstGeom>
-          <a:solidFill>
-            <a:srgbClr val="FFFFFF"/>
-          </a:solidFill>
-          <a:ln w="12700">
-            <a:solidFill>
-              <a:srgbClr val="0D9488"/>
-            </a:solidFill>
-            <a:prstDash val="solid"/>
-          </a:ln>
-        </p:spPr>
-      </p:sp>
-      <p:sp>
-        <p:nvSpPr>
-          <p:cNvPr id="35" name="Text 33"/>
-          <p:cNvSpPr/>
-          <p:nvPr/>
-        </p:nvSpPr>
-        <p:spPr>
-          <a:xfrm>
-            <a:off x="5882640" y="3364992"/>
-            <a:ext cx="1225296" cy="475488"/>
-          </a:xfrm>
-          <a:prstGeom prst="rect">
-            <a:avLst/>
-          </a:prstGeom>
-          <a:noFill/>
-          <a:ln/>
-        </p:spPr>
-        <p:txBody>
-          <a:bodyPr wrap="square" lIns="0" tIns="0" rIns="0" bIns="0" rtlCol="0" anchor="ctr"/>
-          <a:lstStyle/>
-          <a:p>
-            <a:pPr algn="ctr" indent="0" marL="0">
-              <a:buNone/>
-            </a:pPr>
-            <a:r>
-              <a:rPr lang="en-US" sz="1400" b="1" dirty="0">
-                <a:solidFill>
-                  <a:srgbClr val="0D9488"/>
-                </a:solidFill>
-                <a:latin typeface="Trebuchet MS" pitchFamily="34" charset="0"/>
-                <a:ea typeface="Trebuchet MS" pitchFamily="34" charset="-122"/>
-                <a:cs typeface="Trebuchet MS" pitchFamily="34" charset="-120"/>
-              </a:rPr>
-              <a:t>i</a:t>
-            </a:r>
-            <a:endParaRPr lang="en-US" sz="1400" dirty="0"/>
-          </a:p>
-        </p:txBody>
-      </p:sp>
-      <p:sp>
-        <p:nvSpPr>
-          <p:cNvPr id="36" name="Text 34"/>
-          <p:cNvSpPr/>
-          <p:nvPr/>
-        </p:nvSpPr>
-        <p:spPr>
-          <a:xfrm>
-            <a:off x="7107936" y="3364992"/>
-            <a:ext cx="76200" cy="475488"/>
-          </a:xfrm>
-          <a:prstGeom prst="rect">
-            <a:avLst/>
-          </a:prstGeom>
-          <a:noFill/>
-          <a:ln/>
-        </p:spPr>
-        <p:txBody>
-          <a:bodyPr wrap="square" lIns="0" tIns="0" rIns="0" bIns="0" rtlCol="0" anchor="ctr"/>
-          <a:lstStyle/>
-          <a:p>
-            <a:pPr algn="ctr" indent="0" marL="0">
-              <a:buNone/>
-            </a:pPr>
-            <a:r>
-              <a:rPr lang="en-US" sz="1600" b="1" dirty="0">
-                <a:solidFill>
-                  <a:srgbClr val="0D9488"/>
-                </a:solidFill>
-                <a:latin typeface="Trebuchet MS" pitchFamily="34" charset="0"/>
-                <a:ea typeface="Trebuchet MS" pitchFamily="34" charset="-122"/>
-                <a:cs typeface="Trebuchet MS" pitchFamily="34" charset="-120"/>
-              </a:rPr>
-              <a:t>·</a:t>
-            </a:r>
-            <a:endParaRPr lang="en-US" sz="1600" dirty="0"/>
-          </a:p>
-        </p:txBody>
-      </p:sp>
-      <p:sp>
-        <p:nvSpPr>
-          <p:cNvPr id="37" name="Shape 35"/>
-          <p:cNvSpPr/>
-          <p:nvPr/>
-        </p:nvSpPr>
-        <p:spPr>
-          <a:xfrm>
-            <a:off x="7184136" y="3364992"/>
-            <a:ext cx="1225296" cy="475488"/>
-          </a:xfrm>
-          <a:prstGeom prst="rect">
-            <a:avLst>
-              <a:gd name="adj" fmla="val 9615"/>
-            </a:avLst>
-          </a:prstGeom>
-          <a:solidFill>
-            <a:srgbClr val="FFFFFF"/>
-          </a:solidFill>
-          <a:ln w="12700">
-            <a:solidFill>
-              <a:srgbClr val="0D9488"/>
-            </a:solidFill>
-            <a:prstDash val="solid"/>
-          </a:ln>
-        </p:spPr>
-      </p:sp>
-      <p:sp>
-        <p:nvSpPr>
-          <p:cNvPr id="38" name="Text 36"/>
-          <p:cNvSpPr/>
-          <p:nvPr/>
-        </p:nvSpPr>
-        <p:spPr>
-          <a:xfrm>
-            <a:off x="7184136" y="3364992"/>
-            <a:ext cx="1225296" cy="475488"/>
-          </a:xfrm>
-          <a:prstGeom prst="rect">
-            <a:avLst/>
-          </a:prstGeom>
-          <a:noFill/>
-          <a:ln/>
-        </p:spPr>
-        <p:txBody>
-          <a:bodyPr wrap="square" lIns="0" tIns="0" rIns="0" bIns="0" rtlCol="0" anchor="ctr"/>
-          <a:lstStyle/>
-          <a:p>
-            <a:pPr algn="ctr" indent="0" marL="0">
-              <a:buNone/>
-            </a:pPr>
-            <a:r>
-              <a:rPr lang="en-US" sz="1400" b="1" dirty="0">
-                <a:solidFill>
-                  <a:srgbClr val="0D9488"/>
-                </a:solidFill>
-                <a:latin typeface="Trebuchet MS" pitchFamily="34" charset="0"/>
-                <a:ea typeface="Trebuchet MS" pitchFamily="34" charset="-122"/>
-                <a:cs typeface="Trebuchet MS" pitchFamily="34" charset="-120"/>
-              </a:rPr>
-              <a:t>cal</a:t>
-            </a:r>
-            <a:endParaRPr lang="en-US" sz="1400" dirty="0"/>
-          </a:p>
-        </p:txBody>
-      </p:sp>
-      <p:sp>
-        <p:nvSpPr>
-          <p:cNvPr id="39" name="Shape 37"/>
-          <p:cNvSpPr/>
-          <p:nvPr/>
-        </p:nvSpPr>
-        <p:spPr>
-          <a:xfrm>
-            <a:off x="365760" y="4096512"/>
-            <a:ext cx="1371600" cy="804672"/>
+              <a:t>Phonemes</a:t>
+            </a:r>
+            <a:endParaRPr lang="en-US" sz="1100" dirty="0"/>
+          </a:p>
+        </p:txBody>
+      </p:sp>
+      <p:sp>
+        <p:nvSpPr>
+          <p:cNvPr id="32" name="Shape 30"/>
+          <p:cNvSpPr/>
+          <p:nvPr/>
+        </p:nvSpPr>
+        <p:spPr>
+          <a:xfrm>
+            <a:off x="1874520" y="4096512"/>
+            <a:ext cx="6903720" cy="804672"/>
           </a:xfrm>
           <a:prstGeom prst="rect">
             <a:avLst>
@@ -14829,85 +14461,19 @@
             </a:avLst>
           </a:prstGeom>
           <a:solidFill>
-            <a:srgbClr val="E2E8F0"/>
+            <a:srgbClr val="F8FAFC"/>
           </a:solidFill>
           <a:ln w="12700">
             <a:solidFill>
               <a:srgbClr val="E2E8F0"/>
             </a:solidFill>
-            <a:prstDash val="solid"/>
-          </a:ln>
-        </p:spPr>
-      </p:sp>
-      <p:sp>
-        <p:nvSpPr>
-          <p:cNvPr id="40" name="Text 38"/>
-          <p:cNvSpPr/>
-          <p:nvPr/>
-        </p:nvSpPr>
-        <p:spPr>
-          <a:xfrm>
-            <a:off x="365760" y="4096512"/>
-            <a:ext cx="1371600" cy="804672"/>
-          </a:xfrm>
-          <a:prstGeom prst="rect">
-            <a:avLst/>
-          </a:prstGeom>
-          <a:noFill/>
-          <a:ln/>
-        </p:spPr>
-        <p:txBody>
-          <a:bodyPr wrap="square" lIns="0" tIns="0" rIns="0" bIns="0" rtlCol="0" anchor="ctr"/>
-          <a:lstStyle/>
-          <a:p>
-            <a:pPr algn="ctr" indent="0" marL="0">
-              <a:buNone/>
-            </a:pPr>
-            <a:r>
-              <a:rPr lang="en-US" sz="1100" b="1" dirty="0">
-                <a:solidFill>
-                  <a:srgbClr val="475569"/>
-                </a:solidFill>
-                <a:latin typeface="Trebuchet MS" pitchFamily="34" charset="0"/>
-                <a:ea typeface="Trebuchet MS" pitchFamily="34" charset="-122"/>
-                <a:cs typeface="Trebuchet MS" pitchFamily="34" charset="-120"/>
-              </a:rPr>
-              <a:t>Phonemes</a:t>
-            </a:r>
-            <a:endParaRPr lang="en-US" sz="1100" dirty="0"/>
-          </a:p>
-        </p:txBody>
-      </p:sp>
-      <p:sp>
-        <p:nvSpPr>
-          <p:cNvPr id="41" name="Shape 39"/>
-          <p:cNvSpPr/>
-          <p:nvPr/>
-        </p:nvSpPr>
-        <p:spPr>
-          <a:xfrm>
-            <a:off x="1874520" y="4096512"/>
-            <a:ext cx="6903720" cy="804672"/>
-          </a:xfrm>
-          <a:prstGeom prst="rect">
-            <a:avLst>
-              <a:gd name="adj" fmla="val 6818"/>
-            </a:avLst>
-          </a:prstGeom>
-          <a:solidFill>
-            <a:srgbClr val="F8FAFC"/>
-          </a:solidFill>
-          <a:ln w="12700">
-            <a:solidFill>
-              <a:srgbClr val="E2E8F0"/>
-            </a:solidFill>
             <a:prstDash val="dash"/>
           </a:ln>
         </p:spPr>
       </p:sp>
       <p:sp>
         <p:nvSpPr>
-          <p:cNvPr id="42" name="Text 40"/>
+          <p:cNvPr id="33" name="Text 31"/>
           <p:cNvSpPr/>
           <p:nvPr/>
         </p:nvSpPr>
@@ -15634,7 +15200,7 @@
                 <a:ea typeface="Trebuchet MS" pitchFamily="34" charset="-122"/>
                 <a:cs typeface="Trebuchet MS" pitchFamily="34" charset="-120"/>
               </a:rPr>
-              <a:t>geological</a:t>
+              <a:t>logical</a:t>
             </a:r>
             <a:endParaRPr lang="en-US" sz="2800" dirty="0"/>
           </a:p>
@@ -15714,7 +15280,7 @@
         </p:nvSpPr>
         <p:spPr>
           <a:xfrm>
-            <a:off x="2938272" y="2258568"/>
+            <a:off x="4370832" y="2258568"/>
             <a:ext cx="1828800" cy="292608"/>
           </a:xfrm>
           <a:prstGeom prst="rect">
@@ -15723,11 +15289,11 @@
             </a:avLst>
           </a:prstGeom>
           <a:solidFill>
-            <a:srgbClr val="DDD6FE"/>
+            <a:srgbClr val="CCFBF1"/>
           </a:solidFill>
           <a:ln w="19050">
             <a:solidFill>
-              <a:srgbClr val="7C3AED"/>
+              <a:srgbClr val="0D9488"/>
             </a:solidFill>
             <a:prstDash val="solid"/>
           </a:ln>
@@ -15748,7 +15314,7 @@
         </p:nvSpPr>
         <p:spPr>
           <a:xfrm>
-            <a:off x="2938272" y="2258568"/>
+            <a:off x="4370832" y="2258568"/>
             <a:ext cx="1828800" cy="292608"/>
           </a:xfrm>
           <a:prstGeom prst="rect">
@@ -15767,13 +15333,13 @@
             <a:r>
               <a:rPr lang="en-US" sz="1300" b="1" dirty="0">
                 <a:solidFill>
-                  <a:srgbClr val="4C1D95"/>
+                  <a:srgbClr val="0F766E"/>
                 </a:solidFill>
                 <a:latin typeface="Trebuchet MS" pitchFamily="34" charset="0"/>
                 <a:ea typeface="Trebuchet MS" pitchFamily="34" charset="-122"/>
                 <a:cs typeface="Trebuchet MS" pitchFamily="34" charset="-120"/>
               </a:rPr>
-              <a:t>geo</a:t>
+              <a:t>logical</a:t>
             </a:r>
             <a:endParaRPr lang="en-US" sz="1300" dirty="0"/>
           </a:p>
@@ -15787,7 +15353,7 @@
         </p:nvSpPr>
         <p:spPr>
           <a:xfrm>
-            <a:off x="2938272" y="2569464"/>
+            <a:off x="4370832" y="2569464"/>
             <a:ext cx="1828800" cy="201168"/>
           </a:xfrm>
           <a:prstGeom prst="rect">
@@ -15812,7 +15378,7 @@
                 <a:ea typeface="Calibri" pitchFamily="34" charset="-122"/>
                 <a:cs typeface="Calibri" pitchFamily="34" charset="-120"/>
               </a:rPr>
-              <a:t>earth</a:t>
+              <a:t>relating to reason or logic</a:t>
             </a:r>
             <a:endParaRPr lang="en-US" sz="850" dirty="0"/>
           </a:p>
@@ -15826,30 +15392,23 @@
         </p:nvSpPr>
         <p:spPr>
           <a:xfrm>
-            <a:off x="5803392" y="2258568"/>
-            <a:ext cx="1828800" cy="292608"/>
+            <a:off x="365760" y="3273552"/>
+            <a:ext cx="1371600" cy="658368"/>
           </a:xfrm>
           <a:prstGeom prst="rect">
             <a:avLst>
-              <a:gd name="adj" fmla="val 25000"/>
+              <a:gd name="adj" fmla="val 8333"/>
             </a:avLst>
           </a:prstGeom>
           <a:solidFill>
-            <a:srgbClr val="CCFBF1"/>
-          </a:solidFill>
-          <a:ln w="19050">
-            <a:solidFill>
-              <a:srgbClr val="0D9488"/>
-            </a:solidFill>
-            <a:prstDash val="solid"/>
-          </a:ln>
-          <a:effectLst>
-            <a:outerShdw sx="100000" sy="100000" kx="0" ky="0" algn="bl" rotWithShape="0" blurRad="101600" dist="38100" dir="8100000">
-              <a:srgbClr val="000000">
-                <a:alpha val="12000"/>
-              </a:srgbClr>
-            </a:outerShdw>
-          </a:effectLst>
+            <a:srgbClr val="E2E8F0"/>
+          </a:solidFill>
+          <a:ln w="12700">
+            <a:solidFill>
+              <a:srgbClr val="E2E8F0"/>
+            </a:solidFill>
+            <a:prstDash val="solid"/>
+          </a:ln>
         </p:spPr>
       </p:sp>
       <p:sp>
@@ -15860,47 +15419,773 @@
         </p:nvSpPr>
         <p:spPr>
           <a:xfrm>
-            <a:off x="5803392" y="2258568"/>
-            <a:ext cx="1828800" cy="292608"/>
-          </a:xfrm>
-          <a:prstGeom prst="rect">
-            <a:avLst/>
-          </a:prstGeom>
-          <a:noFill/>
-          <a:ln/>
-        </p:spPr>
-        <p:txBody>
-          <a:bodyPr wrap="square" lIns="0" tIns="0" rIns="0" bIns="0" rtlCol="0" anchor="ctr"/>
-          <a:lstStyle/>
-          <a:p>
-            <a:pPr algn="ctr" indent="0" marL="0">
-              <a:buNone/>
-            </a:pPr>
-            <a:r>
-              <a:rPr lang="en-US" sz="1300" b="1" dirty="0">
-                <a:solidFill>
-                  <a:srgbClr val="0F766E"/>
+            <a:off x="365760" y="3273552"/>
+            <a:ext cx="1371600" cy="658368"/>
+          </a:xfrm>
+          <a:prstGeom prst="rect">
+            <a:avLst/>
+          </a:prstGeom>
+          <a:noFill/>
+          <a:ln/>
+        </p:spPr>
+        <p:txBody>
+          <a:bodyPr wrap="square" lIns="0" tIns="0" rIns="0" bIns="0" rtlCol="0" anchor="ctr"/>
+          <a:lstStyle/>
+          <a:p>
+            <a:pPr algn="ctr" indent="0" marL="0">
+              <a:buNone/>
+            </a:pPr>
+            <a:r>
+              <a:rPr lang="en-US" sz="1100" b="1" dirty="0">
+                <a:solidFill>
+                  <a:srgbClr val="475569"/>
                 </a:solidFill>
                 <a:latin typeface="Trebuchet MS" pitchFamily="34" charset="0"/>
                 <a:ea typeface="Trebuchet MS" pitchFamily="34" charset="-122"/>
                 <a:cs typeface="Trebuchet MS" pitchFamily="34" charset="-120"/>
               </a:rPr>
-              <a:t>logical</a:t>
-            </a:r>
-            <a:endParaRPr lang="en-US" sz="1300" dirty="0"/>
-          </a:p>
-        </p:txBody>
-      </p:sp>
-      <p:sp>
-        <p:nvSpPr>
-          <p:cNvPr id="21" name="Text 19"/>
-          <p:cNvSpPr/>
-          <p:nvPr/>
-        </p:nvSpPr>
-        <p:spPr>
-          <a:xfrm>
-            <a:off x="5803392" y="2569464"/>
-            <a:ext cx="1828800" cy="201168"/>
+              <a:t>Syllables</a:t>
+            </a:r>
+            <a:endParaRPr lang="en-US" sz="1100" dirty="0"/>
+          </a:p>
+        </p:txBody>
+      </p:sp>
+      <p:sp>
+        <p:nvSpPr>
+          <p:cNvPr id="21" name="Shape 19"/>
+          <p:cNvSpPr/>
+          <p:nvPr/>
+        </p:nvSpPr>
+        <p:spPr>
+          <a:xfrm>
+            <a:off x="1874520" y="3273552"/>
+            <a:ext cx="6903720" cy="658368"/>
+          </a:xfrm>
+          <a:prstGeom prst="rect">
+            <a:avLst>
+              <a:gd name="adj" fmla="val 8333"/>
+            </a:avLst>
+          </a:prstGeom>
+          <a:solidFill>
+            <a:srgbClr val="CCFBF1"/>
+          </a:solidFill>
+          <a:ln w="12700">
+            <a:solidFill>
+              <a:srgbClr val="0D9488"/>
+            </a:solidFill>
+            <a:prstDash val="solid"/>
+          </a:ln>
+        </p:spPr>
+      </p:sp>
+      <p:sp>
+        <p:nvSpPr>
+          <p:cNvPr id="22" name="Shape 20"/>
+          <p:cNvSpPr/>
+          <p:nvPr/>
+        </p:nvSpPr>
+        <p:spPr>
+          <a:xfrm>
+            <a:off x="2313432" y="3364992"/>
+            <a:ext cx="1645920" cy="475488"/>
+          </a:xfrm>
+          <a:prstGeom prst="rect">
+            <a:avLst>
+              <a:gd name="adj" fmla="val 9615"/>
+            </a:avLst>
+          </a:prstGeom>
+          <a:solidFill>
+            <a:srgbClr val="FFFFFF"/>
+          </a:solidFill>
+          <a:ln w="12700">
+            <a:solidFill>
+              <a:srgbClr val="0D9488"/>
+            </a:solidFill>
+            <a:prstDash val="solid"/>
+          </a:ln>
+        </p:spPr>
+      </p:sp>
+      <p:sp>
+        <p:nvSpPr>
+          <p:cNvPr id="23" name="Text 21"/>
+          <p:cNvSpPr/>
+          <p:nvPr/>
+        </p:nvSpPr>
+        <p:spPr>
+          <a:xfrm>
+            <a:off x="2313432" y="3364992"/>
+            <a:ext cx="1645920" cy="475488"/>
+          </a:xfrm>
+          <a:prstGeom prst="rect">
+            <a:avLst/>
+          </a:prstGeom>
+          <a:noFill/>
+          <a:ln/>
+        </p:spPr>
+        <p:txBody>
+          <a:bodyPr wrap="square" lIns="0" tIns="0" rIns="0" bIns="0" rtlCol="0" anchor="ctr"/>
+          <a:lstStyle/>
+          <a:p>
+            <a:pPr algn="ctr" indent="0" marL="0">
+              <a:buNone/>
+            </a:pPr>
+            <a:r>
+              <a:rPr lang="en-US" sz="1400" b="1" dirty="0">
+                <a:solidFill>
+                  <a:srgbClr val="0D9488"/>
+                </a:solidFill>
+                <a:latin typeface="Trebuchet MS" pitchFamily="34" charset="0"/>
+                <a:ea typeface="Trebuchet MS" pitchFamily="34" charset="-122"/>
+                <a:cs typeface="Trebuchet MS" pitchFamily="34" charset="-120"/>
+              </a:rPr>
+              <a:t>log</a:t>
+            </a:r>
+            <a:endParaRPr lang="en-US" sz="1400" dirty="0"/>
+          </a:p>
+        </p:txBody>
+      </p:sp>
+      <p:sp>
+        <p:nvSpPr>
+          <p:cNvPr id="24" name="Text 22"/>
+          <p:cNvSpPr/>
+          <p:nvPr/>
+        </p:nvSpPr>
+        <p:spPr>
+          <a:xfrm>
+            <a:off x="3959352" y="3364992"/>
+            <a:ext cx="411480" cy="475488"/>
+          </a:xfrm>
+          <a:prstGeom prst="rect">
+            <a:avLst/>
+          </a:prstGeom>
+          <a:noFill/>
+          <a:ln/>
+        </p:spPr>
+        <p:txBody>
+          <a:bodyPr wrap="square" lIns="0" tIns="0" rIns="0" bIns="0" rtlCol="0" anchor="ctr"/>
+          <a:lstStyle/>
+          <a:p>
+            <a:pPr algn="ctr" indent="0" marL="0">
+              <a:buNone/>
+            </a:pPr>
+            <a:r>
+              <a:rPr lang="en-US" sz="1600" b="1" dirty="0">
+                <a:solidFill>
+                  <a:srgbClr val="0D9488"/>
+                </a:solidFill>
+                <a:latin typeface="Trebuchet MS" pitchFamily="34" charset="0"/>
+                <a:ea typeface="Trebuchet MS" pitchFamily="34" charset="-122"/>
+                <a:cs typeface="Trebuchet MS" pitchFamily="34" charset="-120"/>
+              </a:rPr>
+              <a:t>·</a:t>
+            </a:r>
+            <a:endParaRPr lang="en-US" sz="1600" dirty="0"/>
+          </a:p>
+        </p:txBody>
+      </p:sp>
+      <p:sp>
+        <p:nvSpPr>
+          <p:cNvPr id="25" name="Shape 23"/>
+          <p:cNvSpPr/>
+          <p:nvPr/>
+        </p:nvSpPr>
+        <p:spPr>
+          <a:xfrm>
+            <a:off x="4370832" y="3364992"/>
+            <a:ext cx="1645920" cy="475488"/>
+          </a:xfrm>
+          <a:prstGeom prst="rect">
+            <a:avLst>
+              <a:gd name="adj" fmla="val 9615"/>
+            </a:avLst>
+          </a:prstGeom>
+          <a:solidFill>
+            <a:srgbClr val="FFFFFF"/>
+          </a:solidFill>
+          <a:ln w="12700">
+            <a:solidFill>
+              <a:srgbClr val="0D9488"/>
+            </a:solidFill>
+            <a:prstDash val="solid"/>
+          </a:ln>
+        </p:spPr>
+      </p:sp>
+      <p:sp>
+        <p:nvSpPr>
+          <p:cNvPr id="26" name="Text 24"/>
+          <p:cNvSpPr/>
+          <p:nvPr/>
+        </p:nvSpPr>
+        <p:spPr>
+          <a:xfrm>
+            <a:off x="4370832" y="3364992"/>
+            <a:ext cx="1645920" cy="475488"/>
+          </a:xfrm>
+          <a:prstGeom prst="rect">
+            <a:avLst/>
+          </a:prstGeom>
+          <a:noFill/>
+          <a:ln/>
+        </p:spPr>
+        <p:txBody>
+          <a:bodyPr wrap="square" lIns="0" tIns="0" rIns="0" bIns="0" rtlCol="0" anchor="ctr"/>
+          <a:lstStyle/>
+          <a:p>
+            <a:pPr algn="ctr" indent="0" marL="0">
+              <a:buNone/>
+            </a:pPr>
+            <a:r>
+              <a:rPr lang="en-US" sz="1400" b="1" dirty="0">
+                <a:solidFill>
+                  <a:srgbClr val="0D9488"/>
+                </a:solidFill>
+                <a:latin typeface="Trebuchet MS" pitchFamily="34" charset="0"/>
+                <a:ea typeface="Trebuchet MS" pitchFamily="34" charset="-122"/>
+                <a:cs typeface="Trebuchet MS" pitchFamily="34" charset="-120"/>
+              </a:rPr>
+              <a:t>i</a:t>
+            </a:r>
+            <a:endParaRPr lang="en-US" sz="1400" dirty="0"/>
+          </a:p>
+        </p:txBody>
+      </p:sp>
+      <p:sp>
+        <p:nvSpPr>
+          <p:cNvPr id="27" name="Text 25"/>
+          <p:cNvSpPr/>
+          <p:nvPr/>
+        </p:nvSpPr>
+        <p:spPr>
+          <a:xfrm>
+            <a:off x="6016752" y="3364992"/>
+            <a:ext cx="411480" cy="475488"/>
+          </a:xfrm>
+          <a:prstGeom prst="rect">
+            <a:avLst/>
+          </a:prstGeom>
+          <a:noFill/>
+          <a:ln/>
+        </p:spPr>
+        <p:txBody>
+          <a:bodyPr wrap="square" lIns="0" tIns="0" rIns="0" bIns="0" rtlCol="0" anchor="ctr"/>
+          <a:lstStyle/>
+          <a:p>
+            <a:pPr algn="ctr" indent="0" marL="0">
+              <a:buNone/>
+            </a:pPr>
+            <a:r>
+              <a:rPr lang="en-US" sz="1600" b="1" dirty="0">
+                <a:solidFill>
+                  <a:srgbClr val="0D9488"/>
+                </a:solidFill>
+                <a:latin typeface="Trebuchet MS" pitchFamily="34" charset="0"/>
+                <a:ea typeface="Trebuchet MS" pitchFamily="34" charset="-122"/>
+                <a:cs typeface="Trebuchet MS" pitchFamily="34" charset="-120"/>
+              </a:rPr>
+              <a:t>·</a:t>
+            </a:r>
+            <a:endParaRPr lang="en-US" sz="1600" dirty="0"/>
+          </a:p>
+        </p:txBody>
+      </p:sp>
+      <p:sp>
+        <p:nvSpPr>
+          <p:cNvPr id="28" name="Shape 26"/>
+          <p:cNvSpPr/>
+          <p:nvPr/>
+        </p:nvSpPr>
+        <p:spPr>
+          <a:xfrm>
+            <a:off x="6428232" y="3364992"/>
+            <a:ext cx="1645920" cy="475488"/>
+          </a:xfrm>
+          <a:prstGeom prst="rect">
+            <a:avLst>
+              <a:gd name="adj" fmla="val 9615"/>
+            </a:avLst>
+          </a:prstGeom>
+          <a:solidFill>
+            <a:srgbClr val="FFFFFF"/>
+          </a:solidFill>
+          <a:ln w="12700">
+            <a:solidFill>
+              <a:srgbClr val="0D9488"/>
+            </a:solidFill>
+            <a:prstDash val="solid"/>
+          </a:ln>
+        </p:spPr>
+      </p:sp>
+      <p:sp>
+        <p:nvSpPr>
+          <p:cNvPr id="29" name="Text 27"/>
+          <p:cNvSpPr/>
+          <p:nvPr/>
+        </p:nvSpPr>
+        <p:spPr>
+          <a:xfrm>
+            <a:off x="6428232" y="3364992"/>
+            <a:ext cx="1645920" cy="475488"/>
+          </a:xfrm>
+          <a:prstGeom prst="rect">
+            <a:avLst/>
+          </a:prstGeom>
+          <a:noFill/>
+          <a:ln/>
+        </p:spPr>
+        <p:txBody>
+          <a:bodyPr wrap="square" lIns="0" tIns="0" rIns="0" bIns="0" rtlCol="0" anchor="ctr"/>
+          <a:lstStyle/>
+          <a:p>
+            <a:pPr algn="ctr" indent="0" marL="0">
+              <a:buNone/>
+            </a:pPr>
+            <a:r>
+              <a:rPr lang="en-US" sz="1400" b="1" dirty="0">
+                <a:solidFill>
+                  <a:srgbClr val="0D9488"/>
+                </a:solidFill>
+                <a:latin typeface="Trebuchet MS" pitchFamily="34" charset="0"/>
+                <a:ea typeface="Trebuchet MS" pitchFamily="34" charset="-122"/>
+                <a:cs typeface="Trebuchet MS" pitchFamily="34" charset="-120"/>
+              </a:rPr>
+              <a:t>cal</a:t>
+            </a:r>
+            <a:endParaRPr lang="en-US" sz="1400" dirty="0"/>
+          </a:p>
+        </p:txBody>
+      </p:sp>
+      <p:sp>
+        <p:nvSpPr>
+          <p:cNvPr id="30" name="Shape 28"/>
+          <p:cNvSpPr/>
+          <p:nvPr/>
+        </p:nvSpPr>
+        <p:spPr>
+          <a:xfrm>
+            <a:off x="365760" y="4096512"/>
+            <a:ext cx="1371600" cy="804672"/>
+          </a:xfrm>
+          <a:prstGeom prst="rect">
+            <a:avLst>
+              <a:gd name="adj" fmla="val 6818"/>
+            </a:avLst>
+          </a:prstGeom>
+          <a:solidFill>
+            <a:srgbClr val="E2E8F0"/>
+          </a:solidFill>
+          <a:ln w="12700">
+            <a:solidFill>
+              <a:srgbClr val="E2E8F0"/>
+            </a:solidFill>
+            <a:prstDash val="solid"/>
+          </a:ln>
+        </p:spPr>
+      </p:sp>
+      <p:sp>
+        <p:nvSpPr>
+          <p:cNvPr id="31" name="Text 29"/>
+          <p:cNvSpPr/>
+          <p:nvPr/>
+        </p:nvSpPr>
+        <p:spPr>
+          <a:xfrm>
+            <a:off x="365760" y="4096512"/>
+            <a:ext cx="1371600" cy="804672"/>
+          </a:xfrm>
+          <a:prstGeom prst="rect">
+            <a:avLst/>
+          </a:prstGeom>
+          <a:noFill/>
+          <a:ln/>
+        </p:spPr>
+        <p:txBody>
+          <a:bodyPr wrap="square" lIns="0" tIns="0" rIns="0" bIns="0" rtlCol="0" anchor="ctr"/>
+          <a:lstStyle/>
+          <a:p>
+            <a:pPr algn="ctr" indent="0" marL="0">
+              <a:buNone/>
+            </a:pPr>
+            <a:r>
+              <a:rPr lang="en-US" sz="1100" b="1" dirty="0">
+                <a:solidFill>
+                  <a:srgbClr val="475569"/>
+                </a:solidFill>
+                <a:latin typeface="Trebuchet MS" pitchFamily="34" charset="0"/>
+                <a:ea typeface="Trebuchet MS" pitchFamily="34" charset="-122"/>
+                <a:cs typeface="Trebuchet MS" pitchFamily="34" charset="-120"/>
+              </a:rPr>
+              <a:t>Phonemes</a:t>
+            </a:r>
+            <a:endParaRPr lang="en-US" sz="1100" dirty="0"/>
+          </a:p>
+        </p:txBody>
+      </p:sp>
+      <p:sp>
+        <p:nvSpPr>
+          <p:cNvPr id="32" name="Shape 30"/>
+          <p:cNvSpPr/>
+          <p:nvPr/>
+        </p:nvSpPr>
+        <p:spPr>
+          <a:xfrm>
+            <a:off x="1874520" y="4096512"/>
+            <a:ext cx="6903720" cy="804672"/>
+          </a:xfrm>
+          <a:prstGeom prst="rect">
+            <a:avLst>
+              <a:gd name="adj" fmla="val 6818"/>
+            </a:avLst>
+          </a:prstGeom>
+          <a:solidFill>
+            <a:srgbClr val="FCE7F3"/>
+          </a:solidFill>
+          <a:ln w="12700">
+            <a:solidFill>
+              <a:srgbClr val="DB2777"/>
+            </a:solidFill>
+            <a:prstDash val="solid"/>
+          </a:ln>
+        </p:spPr>
+      </p:sp>
+      <p:sp>
+        <p:nvSpPr>
+          <p:cNvPr id="33" name="Shape 31"/>
+          <p:cNvSpPr/>
+          <p:nvPr/>
+        </p:nvSpPr>
+        <p:spPr>
+          <a:xfrm>
+            <a:off x="2254649" y="4169664"/>
+            <a:ext cx="685800" cy="384048"/>
+          </a:xfrm>
+          <a:prstGeom prst="rect">
+            <a:avLst>
+              <a:gd name="adj" fmla="val 9524"/>
+            </a:avLst>
+          </a:prstGeom>
+          <a:solidFill>
+            <a:srgbClr val="FFFFFF"/>
+          </a:solidFill>
+          <a:ln w="12700">
+            <a:solidFill>
+              <a:srgbClr val="DB2777"/>
+            </a:solidFill>
+            <a:prstDash val="solid"/>
+          </a:ln>
+        </p:spPr>
+      </p:sp>
+      <p:sp>
+        <p:nvSpPr>
+          <p:cNvPr id="34" name="Text 32"/>
+          <p:cNvSpPr/>
+          <p:nvPr/>
+        </p:nvSpPr>
+        <p:spPr>
+          <a:xfrm>
+            <a:off x="2254649" y="4169664"/>
+            <a:ext cx="685800" cy="384048"/>
+          </a:xfrm>
+          <a:prstGeom prst="rect">
+            <a:avLst/>
+          </a:prstGeom>
+          <a:noFill/>
+          <a:ln/>
+        </p:spPr>
+        <p:txBody>
+          <a:bodyPr wrap="square" lIns="0" tIns="0" rIns="0" bIns="0" rtlCol="0" anchor="ctr"/>
+          <a:lstStyle/>
+          <a:p>
+            <a:pPr algn="ctr" indent="0" marL="0">
+              <a:buNone/>
+            </a:pPr>
+            <a:r>
+              <a:rPr lang="en-US" sz="900" b="1" dirty="0">
+                <a:solidFill>
+                  <a:srgbClr val="9D174D"/>
+                </a:solidFill>
+                <a:latin typeface="Trebuchet MS" pitchFamily="34" charset="0"/>
+                <a:ea typeface="Trebuchet MS" pitchFamily="34" charset="-122"/>
+                <a:cs typeface="Trebuchet MS" pitchFamily="34" charset="-120"/>
+              </a:rPr>
+              <a:t>l</a:t>
+            </a:r>
+            <a:endParaRPr lang="en-US" sz="900" dirty="0"/>
+          </a:p>
+        </p:txBody>
+      </p:sp>
+      <p:sp>
+        <p:nvSpPr>
+          <p:cNvPr id="35" name="Shape 33"/>
+          <p:cNvSpPr/>
+          <p:nvPr/>
+        </p:nvSpPr>
+        <p:spPr>
+          <a:xfrm>
+            <a:off x="3293146" y="4169664"/>
+            <a:ext cx="685800" cy="384048"/>
+          </a:xfrm>
+          <a:prstGeom prst="rect">
+            <a:avLst>
+              <a:gd name="adj" fmla="val 9524"/>
+            </a:avLst>
+          </a:prstGeom>
+          <a:solidFill>
+            <a:srgbClr val="FFFFFF"/>
+          </a:solidFill>
+          <a:ln w="12700">
+            <a:solidFill>
+              <a:srgbClr val="DB2777"/>
+            </a:solidFill>
+            <a:prstDash val="solid"/>
+          </a:ln>
+        </p:spPr>
+      </p:sp>
+      <p:sp>
+        <p:nvSpPr>
+          <p:cNvPr id="36" name="Text 34"/>
+          <p:cNvSpPr/>
+          <p:nvPr/>
+        </p:nvSpPr>
+        <p:spPr>
+          <a:xfrm>
+            <a:off x="3293146" y="4169664"/>
+            <a:ext cx="685800" cy="384048"/>
+          </a:xfrm>
+          <a:prstGeom prst="rect">
+            <a:avLst/>
+          </a:prstGeom>
+          <a:noFill/>
+          <a:ln/>
+        </p:spPr>
+        <p:txBody>
+          <a:bodyPr wrap="square" lIns="0" tIns="0" rIns="0" bIns="0" rtlCol="0" anchor="ctr"/>
+          <a:lstStyle/>
+          <a:p>
+            <a:pPr algn="ctr" indent="0" marL="0">
+              <a:buNone/>
+            </a:pPr>
+            <a:r>
+              <a:rPr lang="en-US" sz="900" b="1" dirty="0">
+                <a:solidFill>
+                  <a:srgbClr val="9D174D"/>
+                </a:solidFill>
+                <a:latin typeface="Trebuchet MS" pitchFamily="34" charset="0"/>
+                <a:ea typeface="Trebuchet MS" pitchFamily="34" charset="-122"/>
+                <a:cs typeface="Trebuchet MS" pitchFamily="34" charset="-120"/>
+              </a:rPr>
+              <a:t>o</a:t>
+            </a:r>
+            <a:endParaRPr lang="en-US" sz="900" dirty="0"/>
+          </a:p>
+        </p:txBody>
+      </p:sp>
+      <p:sp>
+        <p:nvSpPr>
+          <p:cNvPr id="37" name="Shape 35"/>
+          <p:cNvSpPr/>
+          <p:nvPr/>
+        </p:nvSpPr>
+        <p:spPr>
+          <a:xfrm>
+            <a:off x="4331643" y="4169664"/>
+            <a:ext cx="685800" cy="384048"/>
+          </a:xfrm>
+          <a:prstGeom prst="rect">
+            <a:avLst>
+              <a:gd name="adj" fmla="val 9524"/>
+            </a:avLst>
+          </a:prstGeom>
+          <a:solidFill>
+            <a:srgbClr val="FFFFFF"/>
+          </a:solidFill>
+          <a:ln w="12700">
+            <a:solidFill>
+              <a:srgbClr val="DB2777"/>
+            </a:solidFill>
+            <a:prstDash val="solid"/>
+          </a:ln>
+        </p:spPr>
+      </p:sp>
+      <p:sp>
+        <p:nvSpPr>
+          <p:cNvPr id="38" name="Text 36"/>
+          <p:cNvSpPr/>
+          <p:nvPr/>
+        </p:nvSpPr>
+        <p:spPr>
+          <a:xfrm>
+            <a:off x="4331643" y="4169664"/>
+            <a:ext cx="685800" cy="384048"/>
+          </a:xfrm>
+          <a:prstGeom prst="rect">
+            <a:avLst/>
+          </a:prstGeom>
+          <a:noFill/>
+          <a:ln/>
+        </p:spPr>
+        <p:txBody>
+          <a:bodyPr wrap="square" lIns="0" tIns="0" rIns="0" bIns="0" rtlCol="0" anchor="ctr"/>
+          <a:lstStyle/>
+          <a:p>
+            <a:pPr algn="ctr" indent="0" marL="0">
+              <a:buNone/>
+            </a:pPr>
+            <a:r>
+              <a:rPr lang="en-US" sz="900" b="1" dirty="0">
+                <a:solidFill>
+                  <a:srgbClr val="9D174D"/>
+                </a:solidFill>
+                <a:latin typeface="Trebuchet MS" pitchFamily="34" charset="0"/>
+                <a:ea typeface="Trebuchet MS" pitchFamily="34" charset="-122"/>
+                <a:cs typeface="Trebuchet MS" pitchFamily="34" charset="-120"/>
+              </a:rPr>
+              <a:t>g</a:t>
+            </a:r>
+            <a:endParaRPr lang="en-US" sz="900" dirty="0"/>
+          </a:p>
+        </p:txBody>
+      </p:sp>
+      <p:sp>
+        <p:nvSpPr>
+          <p:cNvPr id="39" name="Shape 37"/>
+          <p:cNvSpPr/>
+          <p:nvPr/>
+        </p:nvSpPr>
+        <p:spPr>
+          <a:xfrm>
+            <a:off x="5370141" y="4169664"/>
+            <a:ext cx="685800" cy="384048"/>
+          </a:xfrm>
+          <a:prstGeom prst="rect">
+            <a:avLst>
+              <a:gd name="adj" fmla="val 9524"/>
+            </a:avLst>
+          </a:prstGeom>
+          <a:solidFill>
+            <a:srgbClr val="FFFFFF"/>
+          </a:solidFill>
+          <a:ln w="12700">
+            <a:solidFill>
+              <a:srgbClr val="DB2777"/>
+            </a:solidFill>
+            <a:prstDash val="solid"/>
+          </a:ln>
+        </p:spPr>
+      </p:sp>
+      <p:sp>
+        <p:nvSpPr>
+          <p:cNvPr id="40" name="Text 38"/>
+          <p:cNvSpPr/>
+          <p:nvPr/>
+        </p:nvSpPr>
+        <p:spPr>
+          <a:xfrm>
+            <a:off x="5370141" y="4169664"/>
+            <a:ext cx="685800" cy="384048"/>
+          </a:xfrm>
+          <a:prstGeom prst="rect">
+            <a:avLst/>
+          </a:prstGeom>
+          <a:noFill/>
+          <a:ln/>
+        </p:spPr>
+        <p:txBody>
+          <a:bodyPr wrap="square" lIns="0" tIns="0" rIns="0" bIns="0" rtlCol="0" anchor="ctr"/>
+          <a:lstStyle/>
+          <a:p>
+            <a:pPr algn="ctr" indent="0" marL="0">
+              <a:buNone/>
+            </a:pPr>
+            <a:r>
+              <a:rPr lang="en-US" sz="900" b="1" dirty="0">
+                <a:solidFill>
+                  <a:srgbClr val="9D174D"/>
+                </a:solidFill>
+                <a:latin typeface="Trebuchet MS" pitchFamily="34" charset="0"/>
+                <a:ea typeface="Trebuchet MS" pitchFamily="34" charset="-122"/>
+                <a:cs typeface="Trebuchet MS" pitchFamily="34" charset="-120"/>
+              </a:rPr>
+              <a:t>i</a:t>
+            </a:r>
+            <a:endParaRPr lang="en-US" sz="900" dirty="0"/>
+          </a:p>
+        </p:txBody>
+      </p:sp>
+      <p:sp>
+        <p:nvSpPr>
+          <p:cNvPr id="41" name="Shape 39"/>
+          <p:cNvSpPr/>
+          <p:nvPr/>
+        </p:nvSpPr>
+        <p:spPr>
+          <a:xfrm>
+            <a:off x="6408638" y="4169664"/>
+            <a:ext cx="685800" cy="384048"/>
+          </a:xfrm>
+          <a:prstGeom prst="rect">
+            <a:avLst>
+              <a:gd name="adj" fmla="val 9524"/>
+            </a:avLst>
+          </a:prstGeom>
+          <a:solidFill>
+            <a:srgbClr val="FFFFFF"/>
+          </a:solidFill>
+          <a:ln w="12700">
+            <a:solidFill>
+              <a:srgbClr val="DB2777"/>
+            </a:solidFill>
+            <a:prstDash val="solid"/>
+          </a:ln>
+        </p:spPr>
+      </p:sp>
+      <p:sp>
+        <p:nvSpPr>
+          <p:cNvPr id="42" name="Text 40"/>
+          <p:cNvSpPr/>
+          <p:nvPr/>
+        </p:nvSpPr>
+        <p:spPr>
+          <a:xfrm>
+            <a:off x="6408638" y="4169664"/>
+            <a:ext cx="685800" cy="384048"/>
+          </a:xfrm>
+          <a:prstGeom prst="rect">
+            <a:avLst/>
+          </a:prstGeom>
+          <a:noFill/>
+          <a:ln/>
+        </p:spPr>
+        <p:txBody>
+          <a:bodyPr wrap="square" lIns="0" tIns="0" rIns="0" bIns="0" rtlCol="0" anchor="ctr"/>
+          <a:lstStyle/>
+          <a:p>
+            <a:pPr algn="ctr" indent="0" marL="0">
+              <a:buNone/>
+            </a:pPr>
+            <a:r>
+              <a:rPr lang="en-US" sz="900" b="1" dirty="0">
+                <a:solidFill>
+                  <a:srgbClr val="9D174D"/>
+                </a:solidFill>
+                <a:latin typeface="Trebuchet MS" pitchFamily="34" charset="0"/>
+                <a:ea typeface="Trebuchet MS" pitchFamily="34" charset="-122"/>
+                <a:cs typeface="Trebuchet MS" pitchFamily="34" charset="-120"/>
+              </a:rPr>
+              <a:t>c</a:t>
+            </a:r>
+            <a:endParaRPr lang="en-US" sz="900" dirty="0"/>
+          </a:p>
+        </p:txBody>
+      </p:sp>
+      <p:sp>
+        <p:nvSpPr>
+          <p:cNvPr id="43" name="Text 41"/>
+          <p:cNvSpPr/>
+          <p:nvPr/>
+        </p:nvSpPr>
+        <p:spPr>
+          <a:xfrm>
+            <a:off x="6408638" y="4572000"/>
+            <a:ext cx="685800" cy="219456"/>
           </a:xfrm>
           <a:prstGeom prst="rect">
             <a:avLst/>
@@ -15916,702 +16201,30 @@
               <a:buNone/>
             </a:pPr>
             <a:r>
-              <a:rPr lang="en-US" sz="850" dirty="0">
-                <a:solidFill>
-                  <a:srgbClr val="475569"/>
+              <a:rPr lang="en-US" sz="750" i="1" dirty="0">
+                <a:solidFill>
+                  <a:srgbClr val="94A3B8"/>
                 </a:solidFill>
                 <a:latin typeface="Calibri" pitchFamily="34" charset="0"/>
                 <a:ea typeface="Calibri" pitchFamily="34" charset="-122"/>
                 <a:cs typeface="Calibri" pitchFamily="34" charset="-120"/>
               </a:rPr>
-              <a:t>relating to reason or study</a:t>
-            </a:r>
-            <a:endParaRPr lang="en-US" sz="850" dirty="0"/>
-          </a:p>
-        </p:txBody>
-      </p:sp>
-      <p:sp>
-        <p:nvSpPr>
-          <p:cNvPr id="22" name="Shape 20"/>
-          <p:cNvSpPr/>
-          <p:nvPr/>
-        </p:nvSpPr>
-        <p:spPr>
-          <a:xfrm>
-            <a:off x="365760" y="3273552"/>
-            <a:ext cx="1371600" cy="658368"/>
-          </a:xfrm>
-          <a:prstGeom prst="rect">
-            <a:avLst>
-              <a:gd name="adj" fmla="val 8333"/>
-            </a:avLst>
-          </a:prstGeom>
-          <a:solidFill>
-            <a:srgbClr val="E2E8F0"/>
-          </a:solidFill>
-          <a:ln w="12700">
-            <a:solidFill>
-              <a:srgbClr val="E2E8F0"/>
-            </a:solidFill>
-            <a:prstDash val="solid"/>
-          </a:ln>
-        </p:spPr>
-      </p:sp>
-      <p:sp>
-        <p:nvSpPr>
-          <p:cNvPr id="23" name="Text 21"/>
-          <p:cNvSpPr/>
-          <p:nvPr/>
-        </p:nvSpPr>
-        <p:spPr>
-          <a:xfrm>
-            <a:off x="365760" y="3273552"/>
-            <a:ext cx="1371600" cy="658368"/>
-          </a:xfrm>
-          <a:prstGeom prst="rect">
-            <a:avLst/>
-          </a:prstGeom>
-          <a:noFill/>
-          <a:ln/>
-        </p:spPr>
-        <p:txBody>
-          <a:bodyPr wrap="square" lIns="0" tIns="0" rIns="0" bIns="0" rtlCol="0" anchor="ctr"/>
-          <a:lstStyle/>
-          <a:p>
-            <a:pPr algn="ctr" indent="0" marL="0">
-              <a:buNone/>
-            </a:pPr>
-            <a:r>
-              <a:rPr lang="en-US" sz="1100" b="1" dirty="0">
-                <a:solidFill>
-                  <a:srgbClr val="475569"/>
-                </a:solidFill>
-                <a:latin typeface="Trebuchet MS" pitchFamily="34" charset="0"/>
-                <a:ea typeface="Trebuchet MS" pitchFamily="34" charset="-122"/>
-                <a:cs typeface="Trebuchet MS" pitchFamily="34" charset="-120"/>
-              </a:rPr>
-              <a:t>Syllables</a:t>
-            </a:r>
-            <a:endParaRPr lang="en-US" sz="1100" dirty="0"/>
-          </a:p>
-        </p:txBody>
-      </p:sp>
-      <p:sp>
-        <p:nvSpPr>
-          <p:cNvPr id="24" name="Shape 22"/>
-          <p:cNvSpPr/>
-          <p:nvPr/>
-        </p:nvSpPr>
-        <p:spPr>
-          <a:xfrm>
-            <a:off x="1874520" y="3273552"/>
-            <a:ext cx="6903720" cy="658368"/>
-          </a:xfrm>
-          <a:prstGeom prst="rect">
-            <a:avLst>
-              <a:gd name="adj" fmla="val 8333"/>
-            </a:avLst>
-          </a:prstGeom>
-          <a:solidFill>
-            <a:srgbClr val="CCFBF1"/>
-          </a:solidFill>
-          <a:ln w="12700">
-            <a:solidFill>
-              <a:srgbClr val="0D9488"/>
-            </a:solidFill>
-            <a:prstDash val="solid"/>
-          </a:ln>
-        </p:spPr>
-      </p:sp>
-      <p:sp>
-        <p:nvSpPr>
-          <p:cNvPr id="25" name="Shape 23"/>
-          <p:cNvSpPr/>
-          <p:nvPr/>
-        </p:nvSpPr>
-        <p:spPr>
-          <a:xfrm>
-            <a:off x="1978152" y="3364992"/>
-            <a:ext cx="1225296" cy="475488"/>
-          </a:xfrm>
-          <a:prstGeom prst="rect">
-            <a:avLst>
-              <a:gd name="adj" fmla="val 9615"/>
-            </a:avLst>
-          </a:prstGeom>
-          <a:solidFill>
-            <a:srgbClr val="FFFFFF"/>
-          </a:solidFill>
-          <a:ln w="12700">
-            <a:solidFill>
-              <a:srgbClr val="0D9488"/>
-            </a:solidFill>
-            <a:prstDash val="solid"/>
-          </a:ln>
-        </p:spPr>
-      </p:sp>
-      <p:sp>
-        <p:nvSpPr>
-          <p:cNvPr id="26" name="Text 24"/>
-          <p:cNvSpPr/>
-          <p:nvPr/>
-        </p:nvSpPr>
-        <p:spPr>
-          <a:xfrm>
-            <a:off x="1978152" y="3364992"/>
-            <a:ext cx="1225296" cy="475488"/>
-          </a:xfrm>
-          <a:prstGeom prst="rect">
-            <a:avLst/>
-          </a:prstGeom>
-          <a:noFill/>
-          <a:ln/>
-        </p:spPr>
-        <p:txBody>
-          <a:bodyPr wrap="square" lIns="0" tIns="0" rIns="0" bIns="0" rtlCol="0" anchor="ctr"/>
-          <a:lstStyle/>
-          <a:p>
-            <a:pPr algn="ctr" indent="0" marL="0">
-              <a:buNone/>
-            </a:pPr>
-            <a:r>
-              <a:rPr lang="en-US" sz="1400" b="1" dirty="0">
-                <a:solidFill>
-                  <a:srgbClr val="0D9488"/>
-                </a:solidFill>
-                <a:latin typeface="Trebuchet MS" pitchFamily="34" charset="0"/>
-                <a:ea typeface="Trebuchet MS" pitchFamily="34" charset="-122"/>
-                <a:cs typeface="Trebuchet MS" pitchFamily="34" charset="-120"/>
-              </a:rPr>
-              <a:t>ge</a:t>
-            </a:r>
-            <a:endParaRPr lang="en-US" sz="1400" dirty="0"/>
-          </a:p>
-        </p:txBody>
-      </p:sp>
-      <p:sp>
-        <p:nvSpPr>
-          <p:cNvPr id="27" name="Text 25"/>
-          <p:cNvSpPr/>
-          <p:nvPr/>
-        </p:nvSpPr>
-        <p:spPr>
-          <a:xfrm>
-            <a:off x="3203448" y="3364992"/>
-            <a:ext cx="76200" cy="475488"/>
-          </a:xfrm>
-          <a:prstGeom prst="rect">
-            <a:avLst/>
-          </a:prstGeom>
-          <a:noFill/>
-          <a:ln/>
-        </p:spPr>
-        <p:txBody>
-          <a:bodyPr wrap="square" lIns="0" tIns="0" rIns="0" bIns="0" rtlCol="0" anchor="ctr"/>
-          <a:lstStyle/>
-          <a:p>
-            <a:pPr algn="ctr" indent="0" marL="0">
-              <a:buNone/>
-            </a:pPr>
-            <a:r>
-              <a:rPr lang="en-US" sz="1600" b="1" dirty="0">
-                <a:solidFill>
-                  <a:srgbClr val="0D9488"/>
-                </a:solidFill>
-                <a:latin typeface="Trebuchet MS" pitchFamily="34" charset="0"/>
-                <a:ea typeface="Trebuchet MS" pitchFamily="34" charset="-122"/>
-                <a:cs typeface="Trebuchet MS" pitchFamily="34" charset="-120"/>
-              </a:rPr>
-              <a:t>·</a:t>
-            </a:r>
-            <a:endParaRPr lang="en-US" sz="1600" dirty="0"/>
-          </a:p>
-        </p:txBody>
-      </p:sp>
-      <p:sp>
-        <p:nvSpPr>
-          <p:cNvPr id="28" name="Shape 26"/>
-          <p:cNvSpPr/>
-          <p:nvPr/>
-        </p:nvSpPr>
-        <p:spPr>
-          <a:xfrm>
-            <a:off x="3279648" y="3364992"/>
-            <a:ext cx="1225296" cy="475488"/>
-          </a:xfrm>
-          <a:prstGeom prst="rect">
-            <a:avLst>
-              <a:gd name="adj" fmla="val 9615"/>
-            </a:avLst>
-          </a:prstGeom>
-          <a:solidFill>
-            <a:srgbClr val="FFFFFF"/>
-          </a:solidFill>
-          <a:ln w="12700">
-            <a:solidFill>
-              <a:srgbClr val="0D9488"/>
-            </a:solidFill>
-            <a:prstDash val="solid"/>
-          </a:ln>
-        </p:spPr>
-      </p:sp>
-      <p:sp>
-        <p:nvSpPr>
-          <p:cNvPr id="29" name="Text 27"/>
-          <p:cNvSpPr/>
-          <p:nvPr/>
-        </p:nvSpPr>
-        <p:spPr>
-          <a:xfrm>
-            <a:off x="3279648" y="3364992"/>
-            <a:ext cx="1225296" cy="475488"/>
-          </a:xfrm>
-          <a:prstGeom prst="rect">
-            <a:avLst/>
-          </a:prstGeom>
-          <a:noFill/>
-          <a:ln/>
-        </p:spPr>
-        <p:txBody>
-          <a:bodyPr wrap="square" lIns="0" tIns="0" rIns="0" bIns="0" rtlCol="0" anchor="ctr"/>
-          <a:lstStyle/>
-          <a:p>
-            <a:pPr algn="ctr" indent="0" marL="0">
-              <a:buNone/>
-            </a:pPr>
-            <a:r>
-              <a:rPr lang="en-US" sz="1400" b="1" dirty="0">
-                <a:solidFill>
-                  <a:srgbClr val="0D9488"/>
-                </a:solidFill>
-                <a:latin typeface="Trebuchet MS" pitchFamily="34" charset="0"/>
-                <a:ea typeface="Trebuchet MS" pitchFamily="34" charset="-122"/>
-                <a:cs typeface="Trebuchet MS" pitchFamily="34" charset="-120"/>
-              </a:rPr>
-              <a:t>o</a:t>
-            </a:r>
-            <a:endParaRPr lang="en-US" sz="1400" dirty="0"/>
-          </a:p>
-        </p:txBody>
-      </p:sp>
-      <p:sp>
-        <p:nvSpPr>
-          <p:cNvPr id="30" name="Text 28"/>
-          <p:cNvSpPr/>
-          <p:nvPr/>
-        </p:nvSpPr>
-        <p:spPr>
-          <a:xfrm>
-            <a:off x="4504944" y="3364992"/>
-            <a:ext cx="76200" cy="475488"/>
-          </a:xfrm>
-          <a:prstGeom prst="rect">
-            <a:avLst/>
-          </a:prstGeom>
-          <a:noFill/>
-          <a:ln/>
-        </p:spPr>
-        <p:txBody>
-          <a:bodyPr wrap="square" lIns="0" tIns="0" rIns="0" bIns="0" rtlCol="0" anchor="ctr"/>
-          <a:lstStyle/>
-          <a:p>
-            <a:pPr algn="ctr" indent="0" marL="0">
-              <a:buNone/>
-            </a:pPr>
-            <a:r>
-              <a:rPr lang="en-US" sz="1600" b="1" dirty="0">
-                <a:solidFill>
-                  <a:srgbClr val="0D9488"/>
-                </a:solidFill>
-                <a:latin typeface="Trebuchet MS" pitchFamily="34" charset="0"/>
-                <a:ea typeface="Trebuchet MS" pitchFamily="34" charset="-122"/>
-                <a:cs typeface="Trebuchet MS" pitchFamily="34" charset="-120"/>
-              </a:rPr>
-              <a:t>·</a:t>
-            </a:r>
-            <a:endParaRPr lang="en-US" sz="1600" dirty="0"/>
-          </a:p>
-        </p:txBody>
-      </p:sp>
-      <p:sp>
-        <p:nvSpPr>
-          <p:cNvPr id="31" name="Shape 29"/>
-          <p:cNvSpPr/>
-          <p:nvPr/>
-        </p:nvSpPr>
-        <p:spPr>
-          <a:xfrm>
-            <a:off x="4581144" y="3364992"/>
-            <a:ext cx="1225296" cy="475488"/>
-          </a:xfrm>
-          <a:prstGeom prst="rect">
-            <a:avLst>
-              <a:gd name="adj" fmla="val 9615"/>
-            </a:avLst>
-          </a:prstGeom>
-          <a:solidFill>
-            <a:srgbClr val="FFFFFF"/>
-          </a:solidFill>
-          <a:ln w="12700">
-            <a:solidFill>
-              <a:srgbClr val="0D9488"/>
-            </a:solidFill>
-            <a:prstDash val="solid"/>
-          </a:ln>
-        </p:spPr>
-      </p:sp>
-      <p:sp>
-        <p:nvSpPr>
-          <p:cNvPr id="32" name="Text 30"/>
-          <p:cNvSpPr/>
-          <p:nvPr/>
-        </p:nvSpPr>
-        <p:spPr>
-          <a:xfrm>
-            <a:off x="4581144" y="3364992"/>
-            <a:ext cx="1225296" cy="475488"/>
-          </a:xfrm>
-          <a:prstGeom prst="rect">
-            <a:avLst/>
-          </a:prstGeom>
-          <a:noFill/>
-          <a:ln/>
-        </p:spPr>
-        <p:txBody>
-          <a:bodyPr wrap="square" lIns="0" tIns="0" rIns="0" bIns="0" rtlCol="0" anchor="ctr"/>
-          <a:lstStyle/>
-          <a:p>
-            <a:pPr algn="ctr" indent="0" marL="0">
-              <a:buNone/>
-            </a:pPr>
-            <a:r>
-              <a:rPr lang="en-US" sz="1400" b="1" dirty="0">
-                <a:solidFill>
-                  <a:srgbClr val="0D9488"/>
-                </a:solidFill>
-                <a:latin typeface="Trebuchet MS" pitchFamily="34" charset="0"/>
-                <a:ea typeface="Trebuchet MS" pitchFamily="34" charset="-122"/>
-                <a:cs typeface="Trebuchet MS" pitchFamily="34" charset="-120"/>
-              </a:rPr>
-              <a:t>log</a:t>
-            </a:r>
-            <a:endParaRPr lang="en-US" sz="1400" dirty="0"/>
-          </a:p>
-        </p:txBody>
-      </p:sp>
-      <p:sp>
-        <p:nvSpPr>
-          <p:cNvPr id="33" name="Text 31"/>
-          <p:cNvSpPr/>
-          <p:nvPr/>
-        </p:nvSpPr>
-        <p:spPr>
-          <a:xfrm>
-            <a:off x="5806440" y="3364992"/>
-            <a:ext cx="76200" cy="475488"/>
-          </a:xfrm>
-          <a:prstGeom prst="rect">
-            <a:avLst/>
-          </a:prstGeom>
-          <a:noFill/>
-          <a:ln/>
-        </p:spPr>
-        <p:txBody>
-          <a:bodyPr wrap="square" lIns="0" tIns="0" rIns="0" bIns="0" rtlCol="0" anchor="ctr"/>
-          <a:lstStyle/>
-          <a:p>
-            <a:pPr algn="ctr" indent="0" marL="0">
-              <a:buNone/>
-            </a:pPr>
-            <a:r>
-              <a:rPr lang="en-US" sz="1600" b="1" dirty="0">
-                <a:solidFill>
-                  <a:srgbClr val="0D9488"/>
-                </a:solidFill>
-                <a:latin typeface="Trebuchet MS" pitchFamily="34" charset="0"/>
-                <a:ea typeface="Trebuchet MS" pitchFamily="34" charset="-122"/>
-                <a:cs typeface="Trebuchet MS" pitchFamily="34" charset="-120"/>
-              </a:rPr>
-              <a:t>·</a:t>
-            </a:r>
-            <a:endParaRPr lang="en-US" sz="1600" dirty="0"/>
-          </a:p>
-        </p:txBody>
-      </p:sp>
-      <p:sp>
-        <p:nvSpPr>
-          <p:cNvPr id="34" name="Shape 32"/>
-          <p:cNvSpPr/>
-          <p:nvPr/>
-        </p:nvSpPr>
-        <p:spPr>
-          <a:xfrm>
-            <a:off x="5882640" y="3364992"/>
-            <a:ext cx="1225296" cy="475488"/>
-          </a:xfrm>
-          <a:prstGeom prst="rect">
-            <a:avLst>
-              <a:gd name="adj" fmla="val 9615"/>
-            </a:avLst>
-          </a:prstGeom>
-          <a:solidFill>
-            <a:srgbClr val="FFFFFF"/>
-          </a:solidFill>
-          <a:ln w="12700">
-            <a:solidFill>
-              <a:srgbClr val="0D9488"/>
-            </a:solidFill>
-            <a:prstDash val="solid"/>
-          </a:ln>
-        </p:spPr>
-      </p:sp>
-      <p:sp>
-        <p:nvSpPr>
-          <p:cNvPr id="35" name="Text 33"/>
-          <p:cNvSpPr/>
-          <p:nvPr/>
-        </p:nvSpPr>
-        <p:spPr>
-          <a:xfrm>
-            <a:off x="5882640" y="3364992"/>
-            <a:ext cx="1225296" cy="475488"/>
-          </a:xfrm>
-          <a:prstGeom prst="rect">
-            <a:avLst/>
-          </a:prstGeom>
-          <a:noFill/>
-          <a:ln/>
-        </p:spPr>
-        <p:txBody>
-          <a:bodyPr wrap="square" lIns="0" tIns="0" rIns="0" bIns="0" rtlCol="0" anchor="ctr"/>
-          <a:lstStyle/>
-          <a:p>
-            <a:pPr algn="ctr" indent="0" marL="0">
-              <a:buNone/>
-            </a:pPr>
-            <a:r>
-              <a:rPr lang="en-US" sz="1400" b="1" dirty="0">
-                <a:solidFill>
-                  <a:srgbClr val="0D9488"/>
-                </a:solidFill>
-                <a:latin typeface="Trebuchet MS" pitchFamily="34" charset="0"/>
-                <a:ea typeface="Trebuchet MS" pitchFamily="34" charset="-122"/>
-                <a:cs typeface="Trebuchet MS" pitchFamily="34" charset="-120"/>
-              </a:rPr>
-              <a:t>i</a:t>
-            </a:r>
-            <a:endParaRPr lang="en-US" sz="1400" dirty="0"/>
-          </a:p>
-        </p:txBody>
-      </p:sp>
-      <p:sp>
-        <p:nvSpPr>
-          <p:cNvPr id="36" name="Text 34"/>
-          <p:cNvSpPr/>
-          <p:nvPr/>
-        </p:nvSpPr>
-        <p:spPr>
-          <a:xfrm>
-            <a:off x="7107936" y="3364992"/>
-            <a:ext cx="76200" cy="475488"/>
-          </a:xfrm>
-          <a:prstGeom prst="rect">
-            <a:avLst/>
-          </a:prstGeom>
-          <a:noFill/>
-          <a:ln/>
-        </p:spPr>
-        <p:txBody>
-          <a:bodyPr wrap="square" lIns="0" tIns="0" rIns="0" bIns="0" rtlCol="0" anchor="ctr"/>
-          <a:lstStyle/>
-          <a:p>
-            <a:pPr algn="ctr" indent="0" marL="0">
-              <a:buNone/>
-            </a:pPr>
-            <a:r>
-              <a:rPr lang="en-US" sz="1600" b="1" dirty="0">
-                <a:solidFill>
-                  <a:srgbClr val="0D9488"/>
-                </a:solidFill>
-                <a:latin typeface="Trebuchet MS" pitchFamily="34" charset="0"/>
-                <a:ea typeface="Trebuchet MS" pitchFamily="34" charset="-122"/>
-                <a:cs typeface="Trebuchet MS" pitchFamily="34" charset="-120"/>
-              </a:rPr>
-              <a:t>·</a:t>
-            </a:r>
-            <a:endParaRPr lang="en-US" sz="1600" dirty="0"/>
-          </a:p>
-        </p:txBody>
-      </p:sp>
-      <p:sp>
-        <p:nvSpPr>
-          <p:cNvPr id="37" name="Shape 35"/>
-          <p:cNvSpPr/>
-          <p:nvPr/>
-        </p:nvSpPr>
-        <p:spPr>
-          <a:xfrm>
-            <a:off x="7184136" y="3364992"/>
-            <a:ext cx="1225296" cy="475488"/>
-          </a:xfrm>
-          <a:prstGeom prst="rect">
-            <a:avLst>
-              <a:gd name="adj" fmla="val 9615"/>
-            </a:avLst>
-          </a:prstGeom>
-          <a:solidFill>
-            <a:srgbClr val="FFFFFF"/>
-          </a:solidFill>
-          <a:ln w="12700">
-            <a:solidFill>
-              <a:srgbClr val="0D9488"/>
-            </a:solidFill>
-            <a:prstDash val="solid"/>
-          </a:ln>
-        </p:spPr>
-      </p:sp>
-      <p:sp>
-        <p:nvSpPr>
-          <p:cNvPr id="38" name="Text 36"/>
-          <p:cNvSpPr/>
-          <p:nvPr/>
-        </p:nvSpPr>
-        <p:spPr>
-          <a:xfrm>
-            <a:off x="7184136" y="3364992"/>
-            <a:ext cx="1225296" cy="475488"/>
-          </a:xfrm>
-          <a:prstGeom prst="rect">
-            <a:avLst/>
-          </a:prstGeom>
-          <a:noFill/>
-          <a:ln/>
-        </p:spPr>
-        <p:txBody>
-          <a:bodyPr wrap="square" lIns="0" tIns="0" rIns="0" bIns="0" rtlCol="0" anchor="ctr"/>
-          <a:lstStyle/>
-          <a:p>
-            <a:pPr algn="ctr" indent="0" marL="0">
-              <a:buNone/>
-            </a:pPr>
-            <a:r>
-              <a:rPr lang="en-US" sz="1400" b="1" dirty="0">
-                <a:solidFill>
-                  <a:srgbClr val="0D9488"/>
-                </a:solidFill>
-                <a:latin typeface="Trebuchet MS" pitchFamily="34" charset="0"/>
-                <a:ea typeface="Trebuchet MS" pitchFamily="34" charset="-122"/>
-                <a:cs typeface="Trebuchet MS" pitchFamily="34" charset="-120"/>
-              </a:rPr>
-              <a:t>cal</a:t>
-            </a:r>
-            <a:endParaRPr lang="en-US" sz="1400" dirty="0"/>
-          </a:p>
-        </p:txBody>
-      </p:sp>
-      <p:sp>
-        <p:nvSpPr>
-          <p:cNvPr id="39" name="Shape 37"/>
-          <p:cNvSpPr/>
-          <p:nvPr/>
-        </p:nvSpPr>
-        <p:spPr>
-          <a:xfrm>
-            <a:off x="365760" y="4096512"/>
-            <a:ext cx="1371600" cy="804672"/>
-          </a:xfrm>
-          <a:prstGeom prst="rect">
-            <a:avLst>
-              <a:gd name="adj" fmla="val 6818"/>
-            </a:avLst>
-          </a:prstGeom>
-          <a:solidFill>
-            <a:srgbClr val="E2E8F0"/>
-          </a:solidFill>
-          <a:ln w="12700">
-            <a:solidFill>
-              <a:srgbClr val="E2E8F0"/>
-            </a:solidFill>
-            <a:prstDash val="solid"/>
-          </a:ln>
-        </p:spPr>
-      </p:sp>
-      <p:sp>
-        <p:nvSpPr>
-          <p:cNvPr id="40" name="Text 38"/>
-          <p:cNvSpPr/>
-          <p:nvPr/>
-        </p:nvSpPr>
-        <p:spPr>
-          <a:xfrm>
-            <a:off x="365760" y="4096512"/>
-            <a:ext cx="1371600" cy="804672"/>
-          </a:xfrm>
-          <a:prstGeom prst="rect">
-            <a:avLst/>
-          </a:prstGeom>
-          <a:noFill/>
-          <a:ln/>
-        </p:spPr>
-        <p:txBody>
-          <a:bodyPr wrap="square" lIns="0" tIns="0" rIns="0" bIns="0" rtlCol="0" anchor="ctr"/>
-          <a:lstStyle/>
-          <a:p>
-            <a:pPr algn="ctr" indent="0" marL="0">
-              <a:buNone/>
-            </a:pPr>
-            <a:r>
-              <a:rPr lang="en-US" sz="1100" b="1" dirty="0">
-                <a:solidFill>
-                  <a:srgbClr val="475569"/>
-                </a:solidFill>
-                <a:latin typeface="Trebuchet MS" pitchFamily="34" charset="0"/>
-                <a:ea typeface="Trebuchet MS" pitchFamily="34" charset="-122"/>
-                <a:cs typeface="Trebuchet MS" pitchFamily="34" charset="-120"/>
-              </a:rPr>
-              <a:t>Phonemes</a:t>
-            </a:r>
-            <a:endParaRPr lang="en-US" sz="1100" dirty="0"/>
-          </a:p>
-        </p:txBody>
-      </p:sp>
-      <p:sp>
-        <p:nvSpPr>
-          <p:cNvPr id="41" name="Shape 39"/>
-          <p:cNvSpPr/>
-          <p:nvPr/>
-        </p:nvSpPr>
-        <p:spPr>
-          <a:xfrm>
-            <a:off x="1874520" y="4096512"/>
-            <a:ext cx="6903720" cy="804672"/>
-          </a:xfrm>
-          <a:prstGeom prst="rect">
-            <a:avLst>
-              <a:gd name="adj" fmla="val 6818"/>
-            </a:avLst>
-          </a:prstGeom>
-          <a:solidFill>
-            <a:srgbClr val="FCE7F3"/>
-          </a:solidFill>
-          <a:ln w="12700">
-            <a:solidFill>
-              <a:srgbClr val="DB2777"/>
-            </a:solidFill>
-            <a:prstDash val="solid"/>
-          </a:ln>
-        </p:spPr>
-      </p:sp>
-      <p:sp>
-        <p:nvSpPr>
-          <p:cNvPr id="42" name="Shape 40"/>
-          <p:cNvSpPr/>
-          <p:nvPr/>
-        </p:nvSpPr>
-        <p:spPr>
-          <a:xfrm>
-            <a:off x="1951330" y="4169664"/>
-            <a:ext cx="676656" cy="384048"/>
+              <a:t>/k/</a:t>
+            </a:r>
+            <a:endParaRPr lang="en-US" sz="750" dirty="0"/>
+          </a:p>
+        </p:txBody>
+      </p:sp>
+      <p:sp>
+        <p:nvSpPr>
+          <p:cNvPr id="44" name="Shape 42"/>
+          <p:cNvSpPr/>
+          <p:nvPr/>
+        </p:nvSpPr>
+        <p:spPr>
+          <a:xfrm>
+            <a:off x="7447135" y="4169664"/>
+            <a:ext cx="685800" cy="384048"/>
           </a:xfrm>
           <a:prstGeom prst="rect">
             <a:avLst>
@@ -16631,581 +16244,14 @@
       </p:sp>
       <p:sp>
         <p:nvSpPr>
-          <p:cNvPr id="43" name="Text 41"/>
-          <p:cNvSpPr/>
-          <p:nvPr/>
-        </p:nvSpPr>
-        <p:spPr>
-          <a:xfrm>
-            <a:off x="1951330" y="4169664"/>
-            <a:ext cx="676656" cy="384048"/>
-          </a:xfrm>
-          <a:prstGeom prst="rect">
-            <a:avLst/>
-          </a:prstGeom>
-          <a:noFill/>
-          <a:ln/>
-        </p:spPr>
-        <p:txBody>
-          <a:bodyPr wrap="square" lIns="0" tIns="0" rIns="0" bIns="0" rtlCol="0" anchor="ctr"/>
-          <a:lstStyle/>
-          <a:p>
-            <a:pPr algn="ctr" indent="0" marL="0">
-              <a:buNone/>
-            </a:pPr>
-            <a:r>
-              <a:rPr lang="en-US" sz="900" b="1" dirty="0">
-                <a:solidFill>
-                  <a:srgbClr val="9D174D"/>
-                </a:solidFill>
-                <a:latin typeface="Trebuchet MS" pitchFamily="34" charset="0"/>
-                <a:ea typeface="Trebuchet MS" pitchFamily="34" charset="-122"/>
-                <a:cs typeface="Trebuchet MS" pitchFamily="34" charset="-120"/>
-              </a:rPr>
-              <a:t>g</a:t>
-            </a:r>
-            <a:endParaRPr lang="en-US" sz="900" dirty="0"/>
-          </a:p>
-        </p:txBody>
-      </p:sp>
-      <p:sp>
-        <p:nvSpPr>
-          <p:cNvPr id="44" name="Shape 42"/>
-          <p:cNvSpPr/>
-          <p:nvPr/>
-        </p:nvSpPr>
-        <p:spPr>
-          <a:xfrm>
-            <a:off x="2677363" y="4169664"/>
-            <a:ext cx="676656" cy="384048"/>
-          </a:xfrm>
-          <a:prstGeom prst="rect">
-            <a:avLst>
-              <a:gd name="adj" fmla="val 9524"/>
-            </a:avLst>
-          </a:prstGeom>
-          <a:solidFill>
-            <a:srgbClr val="FFFFFF"/>
-          </a:solidFill>
-          <a:ln w="12700">
-            <a:solidFill>
-              <a:srgbClr val="DB2777"/>
-            </a:solidFill>
-            <a:prstDash val="solid"/>
-          </a:ln>
-        </p:spPr>
-      </p:sp>
-      <p:sp>
-        <p:nvSpPr>
           <p:cNvPr id="45" name="Text 43"/>
           <p:cNvSpPr/>
           <p:nvPr/>
         </p:nvSpPr>
         <p:spPr>
           <a:xfrm>
-            <a:off x="2677363" y="4169664"/>
-            <a:ext cx="676656" cy="384048"/>
-          </a:xfrm>
-          <a:prstGeom prst="rect">
-            <a:avLst/>
-          </a:prstGeom>
-          <a:noFill/>
-          <a:ln/>
-        </p:spPr>
-        <p:txBody>
-          <a:bodyPr wrap="square" lIns="0" tIns="0" rIns="0" bIns="0" rtlCol="0" anchor="ctr"/>
-          <a:lstStyle/>
-          <a:p>
-            <a:pPr algn="ctr" indent="0" marL="0">
-              <a:buNone/>
-            </a:pPr>
-            <a:r>
-              <a:rPr lang="en-US" sz="900" b="1" dirty="0">
-                <a:solidFill>
-                  <a:srgbClr val="9D174D"/>
-                </a:solidFill>
-                <a:latin typeface="Trebuchet MS" pitchFamily="34" charset="0"/>
-                <a:ea typeface="Trebuchet MS" pitchFamily="34" charset="-122"/>
-                <a:cs typeface="Trebuchet MS" pitchFamily="34" charset="-120"/>
-              </a:rPr>
-              <a:t>e</a:t>
-            </a:r>
-            <a:endParaRPr lang="en-US" sz="900" dirty="0"/>
-          </a:p>
-        </p:txBody>
-      </p:sp>
-      <p:sp>
-        <p:nvSpPr>
-          <p:cNvPr id="46" name="Shape 44"/>
-          <p:cNvSpPr/>
-          <p:nvPr/>
-        </p:nvSpPr>
-        <p:spPr>
-          <a:xfrm>
-            <a:off x="3403397" y="4169664"/>
-            <a:ext cx="676656" cy="384048"/>
-          </a:xfrm>
-          <a:prstGeom prst="rect">
-            <a:avLst>
-              <a:gd name="adj" fmla="val 9524"/>
-            </a:avLst>
-          </a:prstGeom>
-          <a:solidFill>
-            <a:srgbClr val="FFFFFF"/>
-          </a:solidFill>
-          <a:ln w="12700">
-            <a:solidFill>
-              <a:srgbClr val="DB2777"/>
-            </a:solidFill>
-            <a:prstDash val="solid"/>
-          </a:ln>
-        </p:spPr>
-      </p:sp>
-      <p:sp>
-        <p:nvSpPr>
-          <p:cNvPr id="47" name="Text 45"/>
-          <p:cNvSpPr/>
-          <p:nvPr/>
-        </p:nvSpPr>
-        <p:spPr>
-          <a:xfrm>
-            <a:off x="3403397" y="4169664"/>
-            <a:ext cx="676656" cy="384048"/>
-          </a:xfrm>
-          <a:prstGeom prst="rect">
-            <a:avLst/>
-          </a:prstGeom>
-          <a:noFill/>
-          <a:ln/>
-        </p:spPr>
-        <p:txBody>
-          <a:bodyPr wrap="square" lIns="0" tIns="0" rIns="0" bIns="0" rtlCol="0" anchor="ctr"/>
-          <a:lstStyle/>
-          <a:p>
-            <a:pPr algn="ctr" indent="0" marL="0">
-              <a:buNone/>
-            </a:pPr>
-            <a:r>
-              <a:rPr lang="en-US" sz="900" b="1" dirty="0">
-                <a:solidFill>
-                  <a:srgbClr val="9D174D"/>
-                </a:solidFill>
-                <a:latin typeface="Trebuchet MS" pitchFamily="34" charset="0"/>
-                <a:ea typeface="Trebuchet MS" pitchFamily="34" charset="-122"/>
-                <a:cs typeface="Trebuchet MS" pitchFamily="34" charset="-120"/>
-              </a:rPr>
-              <a:t>o</a:t>
-            </a:r>
-            <a:endParaRPr lang="en-US" sz="900" dirty="0"/>
-          </a:p>
-        </p:txBody>
-      </p:sp>
-      <p:sp>
-        <p:nvSpPr>
-          <p:cNvPr id="48" name="Shape 46"/>
-          <p:cNvSpPr/>
-          <p:nvPr/>
-        </p:nvSpPr>
-        <p:spPr>
-          <a:xfrm>
-            <a:off x="4129430" y="4169664"/>
-            <a:ext cx="676656" cy="384048"/>
-          </a:xfrm>
-          <a:prstGeom prst="rect">
-            <a:avLst>
-              <a:gd name="adj" fmla="val 9524"/>
-            </a:avLst>
-          </a:prstGeom>
-          <a:solidFill>
-            <a:srgbClr val="FFFFFF"/>
-          </a:solidFill>
-          <a:ln w="12700">
-            <a:solidFill>
-              <a:srgbClr val="DB2777"/>
-            </a:solidFill>
-            <a:prstDash val="solid"/>
-          </a:ln>
-        </p:spPr>
-      </p:sp>
-      <p:sp>
-        <p:nvSpPr>
-          <p:cNvPr id="49" name="Text 47"/>
-          <p:cNvSpPr/>
-          <p:nvPr/>
-        </p:nvSpPr>
-        <p:spPr>
-          <a:xfrm>
-            <a:off x="4129430" y="4169664"/>
-            <a:ext cx="676656" cy="384048"/>
-          </a:xfrm>
-          <a:prstGeom prst="rect">
-            <a:avLst/>
-          </a:prstGeom>
-          <a:noFill/>
-          <a:ln/>
-        </p:spPr>
-        <p:txBody>
-          <a:bodyPr wrap="square" lIns="0" tIns="0" rIns="0" bIns="0" rtlCol="0" anchor="ctr"/>
-          <a:lstStyle/>
-          <a:p>
-            <a:pPr algn="ctr" indent="0" marL="0">
-              <a:buNone/>
-            </a:pPr>
-            <a:r>
-              <a:rPr lang="en-US" sz="900" b="1" dirty="0">
-                <a:solidFill>
-                  <a:srgbClr val="9D174D"/>
-                </a:solidFill>
-                <a:latin typeface="Trebuchet MS" pitchFamily="34" charset="0"/>
-                <a:ea typeface="Trebuchet MS" pitchFamily="34" charset="-122"/>
-                <a:cs typeface="Trebuchet MS" pitchFamily="34" charset="-120"/>
-              </a:rPr>
-              <a:t>l</a:t>
-            </a:r>
-            <a:endParaRPr lang="en-US" sz="900" dirty="0"/>
-          </a:p>
-        </p:txBody>
-      </p:sp>
-      <p:sp>
-        <p:nvSpPr>
-          <p:cNvPr id="50" name="Shape 48"/>
-          <p:cNvSpPr/>
-          <p:nvPr/>
-        </p:nvSpPr>
-        <p:spPr>
-          <a:xfrm>
-            <a:off x="4855464" y="4169664"/>
-            <a:ext cx="676656" cy="384048"/>
-          </a:xfrm>
-          <a:prstGeom prst="rect">
-            <a:avLst>
-              <a:gd name="adj" fmla="val 9524"/>
-            </a:avLst>
-          </a:prstGeom>
-          <a:solidFill>
-            <a:srgbClr val="FFFFFF"/>
-          </a:solidFill>
-          <a:ln w="12700">
-            <a:solidFill>
-              <a:srgbClr val="DB2777"/>
-            </a:solidFill>
-            <a:prstDash val="solid"/>
-          </a:ln>
-        </p:spPr>
-      </p:sp>
-      <p:sp>
-        <p:nvSpPr>
-          <p:cNvPr id="51" name="Text 49"/>
-          <p:cNvSpPr/>
-          <p:nvPr/>
-        </p:nvSpPr>
-        <p:spPr>
-          <a:xfrm>
-            <a:off x="4855464" y="4169664"/>
-            <a:ext cx="676656" cy="384048"/>
-          </a:xfrm>
-          <a:prstGeom prst="rect">
-            <a:avLst/>
-          </a:prstGeom>
-          <a:noFill/>
-          <a:ln/>
-        </p:spPr>
-        <p:txBody>
-          <a:bodyPr wrap="square" lIns="0" tIns="0" rIns="0" bIns="0" rtlCol="0" anchor="ctr"/>
-          <a:lstStyle/>
-          <a:p>
-            <a:pPr algn="ctr" indent="0" marL="0">
-              <a:buNone/>
-            </a:pPr>
-            <a:r>
-              <a:rPr lang="en-US" sz="900" b="1" dirty="0">
-                <a:solidFill>
-                  <a:srgbClr val="9D174D"/>
-                </a:solidFill>
-                <a:latin typeface="Trebuchet MS" pitchFamily="34" charset="0"/>
-                <a:ea typeface="Trebuchet MS" pitchFamily="34" charset="-122"/>
-                <a:cs typeface="Trebuchet MS" pitchFamily="34" charset="-120"/>
-              </a:rPr>
-              <a:t>o</a:t>
-            </a:r>
-            <a:endParaRPr lang="en-US" sz="900" dirty="0"/>
-          </a:p>
-        </p:txBody>
-      </p:sp>
-      <p:sp>
-        <p:nvSpPr>
-          <p:cNvPr id="52" name="Shape 50"/>
-          <p:cNvSpPr/>
-          <p:nvPr/>
-        </p:nvSpPr>
-        <p:spPr>
-          <a:xfrm>
-            <a:off x="5581498" y="4169664"/>
-            <a:ext cx="676656" cy="384048"/>
-          </a:xfrm>
-          <a:prstGeom prst="rect">
-            <a:avLst>
-              <a:gd name="adj" fmla="val 9524"/>
-            </a:avLst>
-          </a:prstGeom>
-          <a:solidFill>
-            <a:srgbClr val="FFFFFF"/>
-          </a:solidFill>
-          <a:ln w="12700">
-            <a:solidFill>
-              <a:srgbClr val="DB2777"/>
-            </a:solidFill>
-            <a:prstDash val="solid"/>
-          </a:ln>
-        </p:spPr>
-      </p:sp>
-      <p:sp>
-        <p:nvSpPr>
-          <p:cNvPr id="53" name="Text 51"/>
-          <p:cNvSpPr/>
-          <p:nvPr/>
-        </p:nvSpPr>
-        <p:spPr>
-          <a:xfrm>
-            <a:off x="5581498" y="4169664"/>
-            <a:ext cx="676656" cy="384048"/>
-          </a:xfrm>
-          <a:prstGeom prst="rect">
-            <a:avLst/>
-          </a:prstGeom>
-          <a:noFill/>
-          <a:ln/>
-        </p:spPr>
-        <p:txBody>
-          <a:bodyPr wrap="square" lIns="0" tIns="0" rIns="0" bIns="0" rtlCol="0" anchor="ctr"/>
-          <a:lstStyle/>
-          <a:p>
-            <a:pPr algn="ctr" indent="0" marL="0">
-              <a:buNone/>
-            </a:pPr>
-            <a:r>
-              <a:rPr lang="en-US" sz="900" b="1" dirty="0">
-                <a:solidFill>
-                  <a:srgbClr val="9D174D"/>
-                </a:solidFill>
-                <a:latin typeface="Trebuchet MS" pitchFamily="34" charset="0"/>
-                <a:ea typeface="Trebuchet MS" pitchFamily="34" charset="-122"/>
-                <a:cs typeface="Trebuchet MS" pitchFamily="34" charset="-120"/>
-              </a:rPr>
-              <a:t>g</a:t>
-            </a:r>
-            <a:endParaRPr lang="en-US" sz="900" dirty="0"/>
-          </a:p>
-        </p:txBody>
-      </p:sp>
-      <p:sp>
-        <p:nvSpPr>
-          <p:cNvPr id="54" name="Shape 52"/>
-          <p:cNvSpPr/>
-          <p:nvPr/>
-        </p:nvSpPr>
-        <p:spPr>
-          <a:xfrm>
-            <a:off x="6307531" y="4169664"/>
-            <a:ext cx="676656" cy="384048"/>
-          </a:xfrm>
-          <a:prstGeom prst="rect">
-            <a:avLst>
-              <a:gd name="adj" fmla="val 9524"/>
-            </a:avLst>
-          </a:prstGeom>
-          <a:solidFill>
-            <a:srgbClr val="FFFFFF"/>
-          </a:solidFill>
-          <a:ln w="12700">
-            <a:solidFill>
-              <a:srgbClr val="DB2777"/>
-            </a:solidFill>
-            <a:prstDash val="solid"/>
-          </a:ln>
-        </p:spPr>
-      </p:sp>
-      <p:sp>
-        <p:nvSpPr>
-          <p:cNvPr id="55" name="Text 53"/>
-          <p:cNvSpPr/>
-          <p:nvPr/>
-        </p:nvSpPr>
-        <p:spPr>
-          <a:xfrm>
-            <a:off x="6307531" y="4169664"/>
-            <a:ext cx="676656" cy="384048"/>
-          </a:xfrm>
-          <a:prstGeom prst="rect">
-            <a:avLst/>
-          </a:prstGeom>
-          <a:noFill/>
-          <a:ln/>
-        </p:spPr>
-        <p:txBody>
-          <a:bodyPr wrap="square" lIns="0" tIns="0" rIns="0" bIns="0" rtlCol="0" anchor="ctr"/>
-          <a:lstStyle/>
-          <a:p>
-            <a:pPr algn="ctr" indent="0" marL="0">
-              <a:buNone/>
-            </a:pPr>
-            <a:r>
-              <a:rPr lang="en-US" sz="900" b="1" dirty="0">
-                <a:solidFill>
-                  <a:srgbClr val="9D174D"/>
-                </a:solidFill>
-                <a:latin typeface="Trebuchet MS" pitchFamily="34" charset="0"/>
-                <a:ea typeface="Trebuchet MS" pitchFamily="34" charset="-122"/>
-                <a:cs typeface="Trebuchet MS" pitchFamily="34" charset="-120"/>
-              </a:rPr>
-              <a:t>i</a:t>
-            </a:r>
-            <a:endParaRPr lang="en-US" sz="900" dirty="0"/>
-          </a:p>
-        </p:txBody>
-      </p:sp>
-      <p:sp>
-        <p:nvSpPr>
-          <p:cNvPr id="56" name="Shape 54"/>
-          <p:cNvSpPr/>
-          <p:nvPr/>
-        </p:nvSpPr>
-        <p:spPr>
-          <a:xfrm>
-            <a:off x="7033565" y="4169664"/>
-            <a:ext cx="676656" cy="384048"/>
-          </a:xfrm>
-          <a:prstGeom prst="rect">
-            <a:avLst>
-              <a:gd name="adj" fmla="val 9524"/>
-            </a:avLst>
-          </a:prstGeom>
-          <a:solidFill>
-            <a:srgbClr val="FFFFFF"/>
-          </a:solidFill>
-          <a:ln w="12700">
-            <a:solidFill>
-              <a:srgbClr val="DB2777"/>
-            </a:solidFill>
-            <a:prstDash val="solid"/>
-          </a:ln>
-        </p:spPr>
-      </p:sp>
-      <p:sp>
-        <p:nvSpPr>
-          <p:cNvPr id="57" name="Text 55"/>
-          <p:cNvSpPr/>
-          <p:nvPr/>
-        </p:nvSpPr>
-        <p:spPr>
-          <a:xfrm>
-            <a:off x="7033565" y="4169664"/>
-            <a:ext cx="676656" cy="384048"/>
-          </a:xfrm>
-          <a:prstGeom prst="rect">
-            <a:avLst/>
-          </a:prstGeom>
-          <a:noFill/>
-          <a:ln/>
-        </p:spPr>
-        <p:txBody>
-          <a:bodyPr wrap="square" lIns="0" tIns="0" rIns="0" bIns="0" rtlCol="0" anchor="ctr"/>
-          <a:lstStyle/>
-          <a:p>
-            <a:pPr algn="ctr" indent="0" marL="0">
-              <a:buNone/>
-            </a:pPr>
-            <a:r>
-              <a:rPr lang="en-US" sz="900" b="1" dirty="0">
-                <a:solidFill>
-                  <a:srgbClr val="9D174D"/>
-                </a:solidFill>
-                <a:latin typeface="Trebuchet MS" pitchFamily="34" charset="0"/>
-                <a:ea typeface="Trebuchet MS" pitchFamily="34" charset="-122"/>
-                <a:cs typeface="Trebuchet MS" pitchFamily="34" charset="-120"/>
-              </a:rPr>
-              <a:t>c</a:t>
-            </a:r>
-            <a:endParaRPr lang="en-US" sz="900" dirty="0"/>
-          </a:p>
-        </p:txBody>
-      </p:sp>
-      <p:sp>
-        <p:nvSpPr>
-          <p:cNvPr id="58" name="Text 56"/>
-          <p:cNvSpPr/>
-          <p:nvPr/>
-        </p:nvSpPr>
-        <p:spPr>
-          <a:xfrm>
-            <a:off x="7033565" y="4572000"/>
-            <a:ext cx="676656" cy="219456"/>
-          </a:xfrm>
-          <a:prstGeom prst="rect">
-            <a:avLst/>
-          </a:prstGeom>
-          <a:noFill/>
-          <a:ln/>
-        </p:spPr>
-        <p:txBody>
-          <a:bodyPr wrap="square" lIns="0" tIns="0" rIns="0" bIns="0" rtlCol="0" anchor="t"/>
-          <a:lstStyle/>
-          <a:p>
-            <a:pPr algn="ctr" indent="0" marL="0">
-              <a:buNone/>
-            </a:pPr>
-            <a:r>
-              <a:rPr lang="en-US" sz="750" i="1" dirty="0">
-                <a:solidFill>
-                  <a:srgbClr val="94A3B8"/>
-                </a:solidFill>
-                <a:latin typeface="Calibri" pitchFamily="34" charset="0"/>
-                <a:ea typeface="Calibri" pitchFamily="34" charset="-122"/>
-                <a:cs typeface="Calibri" pitchFamily="34" charset="-120"/>
-              </a:rPr>
-              <a:t>/k/</a:t>
-            </a:r>
-            <a:endParaRPr lang="en-US" sz="750" dirty="0"/>
-          </a:p>
-        </p:txBody>
-      </p:sp>
-      <p:sp>
-        <p:nvSpPr>
-          <p:cNvPr id="59" name="Shape 57"/>
-          <p:cNvSpPr/>
-          <p:nvPr/>
-        </p:nvSpPr>
-        <p:spPr>
-          <a:xfrm>
-            <a:off x="7759598" y="4169664"/>
-            <a:ext cx="676656" cy="384048"/>
-          </a:xfrm>
-          <a:prstGeom prst="rect">
-            <a:avLst>
-              <a:gd name="adj" fmla="val 9524"/>
-            </a:avLst>
-          </a:prstGeom>
-          <a:solidFill>
-            <a:srgbClr val="FFFFFF"/>
-          </a:solidFill>
-          <a:ln w="12700">
-            <a:solidFill>
-              <a:srgbClr val="DB2777"/>
-            </a:solidFill>
-            <a:prstDash val="solid"/>
-          </a:ln>
-        </p:spPr>
-      </p:sp>
-      <p:sp>
-        <p:nvSpPr>
-          <p:cNvPr id="60" name="Text 58"/>
-          <p:cNvSpPr/>
-          <p:nvPr/>
-        </p:nvSpPr>
-        <p:spPr>
-          <a:xfrm>
-            <a:off x="7759598" y="4169664"/>
-            <a:ext cx="676656" cy="384048"/>
+            <a:off x="7447135" y="4169664"/>
+            <a:ext cx="685800" cy="384048"/>
           </a:xfrm>
           <a:prstGeom prst="rect">
             <a:avLst/>
@@ -18555,7 +17601,7 @@
                 <a:ea typeface="Calibri" pitchFamily="34" charset="-122"/>
                 <a:cs typeface="Calibri" pitchFamily="34" charset="-120"/>
               </a:rPr>
-              <a:t>The teacher asked us to think </a:t>
+              <a:t>She </a:t>
             </a:r>
             <a:pPr algn="l" indent="0" marL="0">
               <a:buNone/>
@@ -18586,7 +17632,7 @@
                 <a:ea typeface="Calibri" pitchFamily="34" charset="-122"/>
                 <a:cs typeface="Calibri" pitchFamily="34" charset="-120"/>
               </a:rPr>
-              <a:t>, arrange events </a:t>
+              <a:t> explained the </a:t>
             </a:r>
             <a:pPr algn="l" indent="0" marL="0">
               <a:buNone/>
@@ -18603,7 +17649,7 @@
                 <a:ea typeface="Calibri" pitchFamily="34" charset="-122"/>
                 <a:cs typeface="Calibri" pitchFamily="34" charset="-120"/>
               </a:rPr>
-              <a:t>chronologically</a:t>
+              <a:t>geological</a:t>
             </a:r>
             <a:pPr algn="l" indent="0" marL="0">
               <a:buNone/>
@@ -18617,7 +17663,7 @@
                 <a:ea typeface="Calibri" pitchFamily="34" charset="-122"/>
                 <a:cs typeface="Calibri" pitchFamily="34" charset="-120"/>
               </a:rPr>
-              <a:t>, and consider the </a:t>
+              <a:t> findings; her </a:t>
             </a:r>
             <a:pPr algn="l" indent="0" marL="0">
               <a:buNone/>
@@ -18648,7 +17694,7 @@
                 <a:ea typeface="Calibri" pitchFamily="34" charset="-122"/>
                 <a:cs typeface="Calibri" pitchFamily="34" charset="-120"/>
               </a:rPr>
-              <a:t> impact on the characters.</a:t>
+              <a:t> approach impressed everyone.</a:t>
             </a:r>
             <a:endParaRPr lang="en-US" sz="1800" dirty="0"/>
           </a:p>
@@ -18931,7 +17977,7 @@
                 <a:ea typeface="Trebuchet MS" pitchFamily="34" charset="-122"/>
                 <a:cs typeface="Trebuchet MS" pitchFamily="34" charset="-120"/>
               </a:rPr>
-              <a:t>chronologically</a:t>
+              <a:t>geological</a:t>
             </a:r>
             <a:endParaRPr lang="en-US" sz="1400" dirty="0"/>
           </a:p>
@@ -20534,7 +19580,7 @@
                 <a:ea typeface="Calibri" pitchFamily="34" charset="-122"/>
                 <a:cs typeface="Calibri" pitchFamily="34" charset="-120"/>
               </a:rPr>
-              <a:t>relating to reason or study</a:t>
+              <a:t>relating to reason or logic</a:t>
             </a:r>
             <a:endParaRPr lang="en-US" sz="850" dirty="0"/>
           </a:p>
@@ -20646,7 +19692,7 @@
                 <a:ea typeface="Calibri" pitchFamily="34" charset="-122"/>
                 <a:cs typeface="Calibri" pitchFamily="34" charset="-120"/>
               </a:rPr>
-              <a:t>in a way that is</a:t>
+              <a:t>in a certain way</a:t>
             </a:r>
             <a:endParaRPr lang="en-US" sz="850" dirty="0"/>
           </a:p>
@@ -21519,7 +20565,7 @@
                 <a:ea typeface="Calibri" pitchFamily="34" charset="-122"/>
                 <a:cs typeface="Calibri" pitchFamily="34" charset="-120"/>
               </a:rPr>
-              <a:t>relating to reason or study</a:t>
+              <a:t>relating to reason or logic</a:t>
             </a:r>
             <a:endParaRPr lang="en-US" sz="850" dirty="0"/>
           </a:p>
@@ -21631,7 +20677,7 @@
                 <a:ea typeface="Calibri" pitchFamily="34" charset="-122"/>
                 <a:cs typeface="Calibri" pitchFamily="34" charset="-120"/>
               </a:rPr>
-              <a:t>in a way that is</a:t>
+              <a:t>in a certain way</a:t>
             </a:r>
             <a:endParaRPr lang="en-US" sz="850" dirty="0"/>
           </a:p>
@@ -22846,7 +21892,7 @@
                 <a:ea typeface="Calibri" pitchFamily="34" charset="-122"/>
                 <a:cs typeface="Calibri" pitchFamily="34" charset="-120"/>
               </a:rPr>
-              <a:t>relating to reason or study</a:t>
+              <a:t>relating to reason or logic</a:t>
             </a:r>
             <a:endParaRPr lang="en-US" sz="850" dirty="0"/>
           </a:p>
@@ -22958,7 +22004,7 @@
                 <a:ea typeface="Calibri" pitchFamily="34" charset="-122"/>
                 <a:cs typeface="Calibri" pitchFamily="34" charset="-120"/>
               </a:rPr>
-              <a:t>in a way that is</a:t>
+              <a:t>in a certain way</a:t>
             </a:r>
             <a:endParaRPr lang="en-US" sz="850" dirty="0"/>
           </a:p>
@@ -23960,7 +23006,7 @@
                 <a:ea typeface="Trebuchet MS" pitchFamily="34" charset="-122"/>
                 <a:cs typeface="Trebuchet MS" pitchFamily="34" charset="-120"/>
               </a:rPr>
-              <a:t>a</a:t>
+              <a:t>al</a:t>
             </a:r>
             <a:endParaRPr lang="en-US" sz="900" dirty="0"/>
           </a:p>
@@ -24026,7 +23072,7 @@
                 <a:ea typeface="Trebuchet MS" pitchFamily="34" charset="-122"/>
                 <a:cs typeface="Trebuchet MS" pitchFamily="34" charset="-120"/>
               </a:rPr>
-              <a:t>ll</a:t>
+              <a:t>l</a:t>
             </a:r>
             <a:endParaRPr lang="en-US" sz="900" dirty="0"/>
           </a:p>
@@ -24523,7 +23569,7 @@
                 <a:ea typeface="Trebuchet MS" pitchFamily="34" charset="-122"/>
                 <a:cs typeface="Trebuchet MS" pitchFamily="34" charset="-120"/>
               </a:rPr>
-              <a:t>chronologically</a:t>
+              <a:t>geological</a:t>
             </a:r>
             <a:endParaRPr lang="en-US" sz="2800" dirty="0"/>
           </a:p>
@@ -25350,7 +24396,7 @@
                 <a:ea typeface="Trebuchet MS" pitchFamily="34" charset="-122"/>
                 <a:cs typeface="Trebuchet MS" pitchFamily="34" charset="-120"/>
               </a:rPr>
-              <a:t>chronologically</a:t>
+              <a:t>geological</a:t>
             </a:r>
             <a:endParaRPr lang="en-US" sz="2800" dirty="0"/>
           </a:p>
@@ -25430,7 +24476,7 @@
         </p:nvSpPr>
         <p:spPr>
           <a:xfrm>
-            <a:off x="2221992" y="2258568"/>
+            <a:off x="2938272" y="2258568"/>
             <a:ext cx="1828800" cy="292608"/>
           </a:xfrm>
           <a:prstGeom prst="rect">
@@ -25464,7 +24510,7 @@
         </p:nvSpPr>
         <p:spPr>
           <a:xfrm>
-            <a:off x="2221992" y="2258568"/>
+            <a:off x="2938272" y="2258568"/>
             <a:ext cx="1828800" cy="292608"/>
           </a:xfrm>
           <a:prstGeom prst="rect">
@@ -25489,7 +24535,7 @@
                 <a:ea typeface="Trebuchet MS" pitchFamily="34" charset="-122"/>
                 <a:cs typeface="Trebuchet MS" pitchFamily="34" charset="-120"/>
               </a:rPr>
-              <a:t>chrono</a:t>
+              <a:t>geo</a:t>
             </a:r>
             <a:endParaRPr lang="en-US" sz="1300" dirty="0"/>
           </a:p>
@@ -25503,7 +24549,7 @@
         </p:nvSpPr>
         <p:spPr>
           <a:xfrm>
-            <a:off x="2221992" y="2569464"/>
+            <a:off x="2938272" y="2569464"/>
             <a:ext cx="1828800" cy="201168"/>
           </a:xfrm>
           <a:prstGeom prst="rect">
@@ -25528,7 +24574,7 @@
                 <a:ea typeface="Calibri" pitchFamily="34" charset="-122"/>
                 <a:cs typeface="Calibri" pitchFamily="34" charset="-120"/>
               </a:rPr>
-              <a:t>time</a:t>
+              <a:t>earth</a:t>
             </a:r>
             <a:endParaRPr lang="en-US" sz="850" dirty="0"/>
           </a:p>
@@ -25542,7 +24588,7 @@
         </p:nvSpPr>
         <p:spPr>
           <a:xfrm>
-            <a:off x="4370832" y="2258568"/>
+            <a:off x="5803392" y="2258568"/>
             <a:ext cx="1828800" cy="292608"/>
           </a:xfrm>
           <a:prstGeom prst="rect">
@@ -25576,7 +24622,7 @@
         </p:nvSpPr>
         <p:spPr>
           <a:xfrm>
-            <a:off x="4370832" y="2258568"/>
+            <a:off x="5803392" y="2258568"/>
             <a:ext cx="1828800" cy="292608"/>
           </a:xfrm>
           <a:prstGeom prst="rect">
@@ -25615,7 +24661,7 @@
         </p:nvSpPr>
         <p:spPr>
           <a:xfrm>
-            <a:off x="4370832" y="2569464"/>
+            <a:off x="5803392" y="2569464"/>
             <a:ext cx="1828800" cy="201168"/>
           </a:xfrm>
           <a:prstGeom prst="rect">
@@ -25640,7 +24686,7 @@
                 <a:ea typeface="Calibri" pitchFamily="34" charset="-122"/>
                 <a:cs typeface="Calibri" pitchFamily="34" charset="-120"/>
               </a:rPr>
-              <a:t>relating to reason or study</a:t>
+              <a:t>relating to reason or logic</a:t>
             </a:r>
             <a:endParaRPr lang="en-US" sz="850" dirty="0"/>
           </a:p>
@@ -25654,30 +24700,23 @@
         </p:nvSpPr>
         <p:spPr>
           <a:xfrm>
-            <a:off x="6519672" y="2258568"/>
-            <a:ext cx="1828800" cy="292608"/>
+            <a:off x="365760" y="3273552"/>
+            <a:ext cx="1371600" cy="658368"/>
           </a:xfrm>
           <a:prstGeom prst="rect">
             <a:avLst>
-              <a:gd name="adj" fmla="val 25000"/>
+              <a:gd name="adj" fmla="val 8333"/>
             </a:avLst>
           </a:prstGeom>
           <a:solidFill>
-            <a:srgbClr val="FCE7F3"/>
-          </a:solidFill>
-          <a:ln w="19050">
-            <a:solidFill>
-              <a:srgbClr val="DB2777"/>
-            </a:solidFill>
-            <a:prstDash val="solid"/>
-          </a:ln>
-          <a:effectLst>
-            <a:outerShdw sx="100000" sy="100000" kx="0" ky="0" algn="bl" rotWithShape="0" blurRad="101600" dist="38100" dir="8100000">
-              <a:srgbClr val="000000">
-                <a:alpha val="12000"/>
-              </a:srgbClr>
-            </a:outerShdw>
-          </a:effectLst>
+            <a:srgbClr val="E2E8F0"/>
+          </a:solidFill>
+          <a:ln w="12700">
+            <a:solidFill>
+              <a:srgbClr val="E2E8F0"/>
+            </a:solidFill>
+            <a:prstDash val="solid"/>
+          </a:ln>
         </p:spPr>
       </p:sp>
       <p:sp>
@@ -25688,90 +24727,117 @@
         </p:nvSpPr>
         <p:spPr>
           <a:xfrm>
-            <a:off x="6519672" y="2258568"/>
-            <a:ext cx="1828800" cy="292608"/>
-          </a:xfrm>
-          <a:prstGeom prst="rect">
-            <a:avLst/>
-          </a:prstGeom>
-          <a:noFill/>
-          <a:ln/>
-        </p:spPr>
-        <p:txBody>
-          <a:bodyPr wrap="square" lIns="0" tIns="0" rIns="0" bIns="0" rtlCol="0" anchor="ctr"/>
-          <a:lstStyle/>
-          <a:p>
-            <a:pPr algn="ctr" indent="0" marL="0">
-              <a:buNone/>
-            </a:pPr>
-            <a:r>
-              <a:rPr lang="en-US" sz="1300" b="1" dirty="0">
-                <a:solidFill>
-                  <a:srgbClr val="9D174D"/>
+            <a:off x="365760" y="3273552"/>
+            <a:ext cx="1371600" cy="658368"/>
+          </a:xfrm>
+          <a:prstGeom prst="rect">
+            <a:avLst/>
+          </a:prstGeom>
+          <a:noFill/>
+          <a:ln/>
+        </p:spPr>
+        <p:txBody>
+          <a:bodyPr wrap="square" lIns="0" tIns="0" rIns="0" bIns="0" rtlCol="0" anchor="ctr"/>
+          <a:lstStyle/>
+          <a:p>
+            <a:pPr algn="ctr" indent="0" marL="0">
+              <a:buNone/>
+            </a:pPr>
+            <a:r>
+              <a:rPr lang="en-US" sz="1100" b="1" dirty="0">
+                <a:solidFill>
+                  <a:srgbClr val="475569"/>
                 </a:solidFill>
                 <a:latin typeface="Trebuchet MS" pitchFamily="34" charset="0"/>
                 <a:ea typeface="Trebuchet MS" pitchFamily="34" charset="-122"/>
                 <a:cs typeface="Trebuchet MS" pitchFamily="34" charset="-120"/>
               </a:rPr>
-              <a:t>ly</a:t>
-            </a:r>
-            <a:endParaRPr lang="en-US" sz="1300" dirty="0"/>
-          </a:p>
-        </p:txBody>
-      </p:sp>
-      <p:sp>
-        <p:nvSpPr>
-          <p:cNvPr id="24" name="Text 22"/>
-          <p:cNvSpPr/>
-          <p:nvPr/>
-        </p:nvSpPr>
-        <p:spPr>
-          <a:xfrm>
-            <a:off x="6519672" y="2569464"/>
-            <a:ext cx="1828800" cy="201168"/>
-          </a:xfrm>
-          <a:prstGeom prst="rect">
-            <a:avLst/>
-          </a:prstGeom>
-          <a:noFill/>
-          <a:ln/>
-        </p:spPr>
-        <p:txBody>
-          <a:bodyPr wrap="square" lIns="0" tIns="0" rIns="0" bIns="0" rtlCol="0" anchor="t"/>
-          <a:lstStyle/>
-          <a:p>
-            <a:pPr algn="ctr" indent="0" marL="0">
-              <a:buNone/>
-            </a:pPr>
-            <a:r>
-              <a:rPr lang="en-US" sz="850" dirty="0">
-                <a:solidFill>
-                  <a:srgbClr val="475569"/>
+              <a:t>Syllables</a:t>
+            </a:r>
+            <a:endParaRPr lang="en-US" sz="1100" dirty="0"/>
+          </a:p>
+        </p:txBody>
+      </p:sp>
+      <p:sp>
+        <p:nvSpPr>
+          <p:cNvPr id="24" name="Shape 22"/>
+          <p:cNvSpPr/>
+          <p:nvPr/>
+        </p:nvSpPr>
+        <p:spPr>
+          <a:xfrm>
+            <a:off x="1874520" y="3273552"/>
+            <a:ext cx="6903720" cy="658368"/>
+          </a:xfrm>
+          <a:prstGeom prst="rect">
+            <a:avLst>
+              <a:gd name="adj" fmla="val 8333"/>
+            </a:avLst>
+          </a:prstGeom>
+          <a:solidFill>
+            <a:srgbClr val="F8FAFC"/>
+          </a:solidFill>
+          <a:ln w="12700">
+            <a:solidFill>
+              <a:srgbClr val="E2E8F0"/>
+            </a:solidFill>
+            <a:prstDash val="dash"/>
+          </a:ln>
+        </p:spPr>
+      </p:sp>
+      <p:sp>
+        <p:nvSpPr>
+          <p:cNvPr id="25" name="Text 23"/>
+          <p:cNvSpPr/>
+          <p:nvPr/>
+        </p:nvSpPr>
+        <p:spPr>
+          <a:xfrm>
+            <a:off x="1874520" y="3273552"/>
+            <a:ext cx="6903720" cy="658368"/>
+          </a:xfrm>
+          <a:prstGeom prst="rect">
+            <a:avLst/>
+          </a:prstGeom>
+          <a:noFill/>
+          <a:ln/>
+        </p:spPr>
+        <p:txBody>
+          <a:bodyPr wrap="square" rtlCol="0" anchor="ctr"/>
+          <a:lstStyle/>
+          <a:p>
+            <a:pPr algn="ctr" indent="0" marL="0">
+              <a:buNone/>
+            </a:pPr>
+            <a:r>
+              <a:rPr lang="en-US" sz="1100" i="1" dirty="0">
+                <a:solidFill>
+                  <a:srgbClr val="CBD5E1"/>
                 </a:solidFill>
                 <a:latin typeface="Calibri" pitchFamily="34" charset="0"/>
                 <a:ea typeface="Calibri" pitchFamily="34" charset="-122"/>
                 <a:cs typeface="Calibri" pitchFamily="34" charset="-120"/>
               </a:rPr>
-              <a:t>in a way that is</a:t>
-            </a:r>
-            <a:endParaRPr lang="en-US" sz="850" dirty="0"/>
-          </a:p>
-        </p:txBody>
-      </p:sp>
-      <p:sp>
-        <p:nvSpPr>
-          <p:cNvPr id="25" name="Shape 23"/>
-          <p:cNvSpPr/>
-          <p:nvPr/>
-        </p:nvSpPr>
-        <p:spPr>
-          <a:xfrm>
-            <a:off x="365760" y="3273552"/>
-            <a:ext cx="1371600" cy="658368"/>
+              <a:t>Write here...</a:t>
+            </a:r>
+            <a:endParaRPr lang="en-US" sz="1100" dirty="0"/>
+          </a:p>
+        </p:txBody>
+      </p:sp>
+      <p:sp>
+        <p:nvSpPr>
+          <p:cNvPr id="26" name="Shape 24"/>
+          <p:cNvSpPr/>
+          <p:nvPr/>
+        </p:nvSpPr>
+        <p:spPr>
+          <a:xfrm>
+            <a:off x="365760" y="4096512"/>
+            <a:ext cx="1371600" cy="804672"/>
           </a:xfrm>
           <a:prstGeom prst="rect">
             <a:avLst>
-              <a:gd name="adj" fmla="val 8333"/>
+              <a:gd name="adj" fmla="val 6818"/>
             </a:avLst>
           </a:prstGeom>
           <a:solidFill>
@@ -25787,14 +24853,14 @@
       </p:sp>
       <p:sp>
         <p:nvSpPr>
-          <p:cNvPr id="26" name="Text 24"/>
-          <p:cNvSpPr/>
-          <p:nvPr/>
-        </p:nvSpPr>
-        <p:spPr>
-          <a:xfrm>
-            <a:off x="365760" y="3273552"/>
-            <a:ext cx="1371600" cy="658368"/>
+          <p:cNvPr id="27" name="Text 25"/>
+          <p:cNvSpPr/>
+          <p:nvPr/>
+        </p:nvSpPr>
+        <p:spPr>
+          <a:xfrm>
+            <a:off x="365760" y="4096512"/>
+            <a:ext cx="1371600" cy="804672"/>
           </a:xfrm>
           <a:prstGeom prst="rect">
             <a:avLst/>
@@ -25818,7 +24884,7 @@
                 <a:ea typeface="Trebuchet MS" pitchFamily="34" charset="-122"/>
                 <a:cs typeface="Trebuchet MS" pitchFamily="34" charset="-120"/>
               </a:rPr>
-              <a:t>Syllables</a:t>
+              <a:t>Phonemes</a:t>
             </a:r>
             <a:endParaRPr lang="en-US" sz="1100" dirty="0"/>
           </a:p>
@@ -25826,80 +24892,14 @@
       </p:sp>
       <p:sp>
         <p:nvSpPr>
-          <p:cNvPr id="27" name="Shape 25"/>
-          <p:cNvSpPr/>
-          <p:nvPr/>
-        </p:nvSpPr>
-        <p:spPr>
-          <a:xfrm>
-            <a:off x="1874520" y="3273552"/>
-            <a:ext cx="6903720" cy="658368"/>
-          </a:xfrm>
-          <a:prstGeom prst="rect">
-            <a:avLst>
-              <a:gd name="adj" fmla="val 8333"/>
-            </a:avLst>
-          </a:prstGeom>
-          <a:solidFill>
-            <a:srgbClr val="F8FAFC"/>
-          </a:solidFill>
-          <a:ln w="12700">
-            <a:solidFill>
-              <a:srgbClr val="E2E8F0"/>
-            </a:solidFill>
-            <a:prstDash val="dash"/>
-          </a:ln>
-        </p:spPr>
-      </p:sp>
-      <p:sp>
-        <p:nvSpPr>
-          <p:cNvPr id="28" name="Text 26"/>
-          <p:cNvSpPr/>
-          <p:nvPr/>
-        </p:nvSpPr>
-        <p:spPr>
-          <a:xfrm>
-            <a:off x="1874520" y="3273552"/>
-            <a:ext cx="6903720" cy="658368"/>
-          </a:xfrm>
-          <a:prstGeom prst="rect">
-            <a:avLst/>
-          </a:prstGeom>
-          <a:noFill/>
-          <a:ln/>
-        </p:spPr>
-        <p:txBody>
-          <a:bodyPr wrap="square" rtlCol="0" anchor="ctr"/>
-          <a:lstStyle/>
-          <a:p>
-            <a:pPr algn="ctr" indent="0" marL="0">
-              <a:buNone/>
-            </a:pPr>
-            <a:r>
-              <a:rPr lang="en-US" sz="1100" i="1" dirty="0">
-                <a:solidFill>
-                  <a:srgbClr val="CBD5E1"/>
-                </a:solidFill>
-                <a:latin typeface="Calibri" pitchFamily="34" charset="0"/>
-                <a:ea typeface="Calibri" pitchFamily="34" charset="-122"/>
-                <a:cs typeface="Calibri" pitchFamily="34" charset="-120"/>
-              </a:rPr>
-              <a:t>Write here...</a:t>
-            </a:r>
-            <a:endParaRPr lang="en-US" sz="1100" dirty="0"/>
-          </a:p>
-        </p:txBody>
-      </p:sp>
-      <p:sp>
-        <p:nvSpPr>
-          <p:cNvPr id="29" name="Shape 27"/>
-          <p:cNvSpPr/>
-          <p:nvPr/>
-        </p:nvSpPr>
-        <p:spPr>
-          <a:xfrm>
-            <a:off x="365760" y="4096512"/>
-            <a:ext cx="1371600" cy="804672"/>
+          <p:cNvPr id="28" name="Shape 26"/>
+          <p:cNvSpPr/>
+          <p:nvPr/>
+        </p:nvSpPr>
+        <p:spPr>
+          <a:xfrm>
+            <a:off x="1874520" y="4096512"/>
+            <a:ext cx="6903720" cy="804672"/>
           </a:xfrm>
           <a:prstGeom prst="rect">
             <a:avLst>
@@ -25907,85 +24907,19 @@
             </a:avLst>
           </a:prstGeom>
           <a:solidFill>
-            <a:srgbClr val="E2E8F0"/>
+            <a:srgbClr val="F8FAFC"/>
           </a:solidFill>
           <a:ln w="12700">
             <a:solidFill>
               <a:srgbClr val="E2E8F0"/>
             </a:solidFill>
-            <a:prstDash val="solid"/>
-          </a:ln>
-        </p:spPr>
-      </p:sp>
-      <p:sp>
-        <p:nvSpPr>
-          <p:cNvPr id="30" name="Text 28"/>
-          <p:cNvSpPr/>
-          <p:nvPr/>
-        </p:nvSpPr>
-        <p:spPr>
-          <a:xfrm>
-            <a:off x="365760" y="4096512"/>
-            <a:ext cx="1371600" cy="804672"/>
-          </a:xfrm>
-          <a:prstGeom prst="rect">
-            <a:avLst/>
-          </a:prstGeom>
-          <a:noFill/>
-          <a:ln/>
-        </p:spPr>
-        <p:txBody>
-          <a:bodyPr wrap="square" lIns="0" tIns="0" rIns="0" bIns="0" rtlCol="0" anchor="ctr"/>
-          <a:lstStyle/>
-          <a:p>
-            <a:pPr algn="ctr" indent="0" marL="0">
-              <a:buNone/>
-            </a:pPr>
-            <a:r>
-              <a:rPr lang="en-US" sz="1100" b="1" dirty="0">
-                <a:solidFill>
-                  <a:srgbClr val="475569"/>
-                </a:solidFill>
-                <a:latin typeface="Trebuchet MS" pitchFamily="34" charset="0"/>
-                <a:ea typeface="Trebuchet MS" pitchFamily="34" charset="-122"/>
-                <a:cs typeface="Trebuchet MS" pitchFamily="34" charset="-120"/>
-              </a:rPr>
-              <a:t>Phonemes</a:t>
-            </a:r>
-            <a:endParaRPr lang="en-US" sz="1100" dirty="0"/>
-          </a:p>
-        </p:txBody>
-      </p:sp>
-      <p:sp>
-        <p:nvSpPr>
-          <p:cNvPr id="31" name="Shape 29"/>
-          <p:cNvSpPr/>
-          <p:nvPr/>
-        </p:nvSpPr>
-        <p:spPr>
-          <a:xfrm>
-            <a:off x="1874520" y="4096512"/>
-            <a:ext cx="6903720" cy="804672"/>
-          </a:xfrm>
-          <a:prstGeom prst="rect">
-            <a:avLst>
-              <a:gd name="adj" fmla="val 6818"/>
-            </a:avLst>
-          </a:prstGeom>
-          <a:solidFill>
-            <a:srgbClr val="F8FAFC"/>
-          </a:solidFill>
-          <a:ln w="12700">
-            <a:solidFill>
-              <a:srgbClr val="E2E8F0"/>
-            </a:solidFill>
             <a:prstDash val="dash"/>
           </a:ln>
         </p:spPr>
       </p:sp>
       <p:sp>
         <p:nvSpPr>
-          <p:cNvPr id="32" name="Text 30"/>
+          <p:cNvPr id="29" name="Text 27"/>
           <p:cNvSpPr/>
           <p:nvPr/>
         </p:nvSpPr>
@@ -27166,7 +26100,7 @@
                 <a:ea typeface="Trebuchet MS" pitchFamily="34" charset="-122"/>
                 <a:cs typeface="Trebuchet MS" pitchFamily="34" charset="-120"/>
               </a:rPr>
-              <a:t>chronologically</a:t>
+              <a:t>geological</a:t>
             </a:r>
             <a:endParaRPr lang="en-US" sz="2800" dirty="0"/>
           </a:p>
@@ -27246,7 +26180,7 @@
         </p:nvSpPr>
         <p:spPr>
           <a:xfrm>
-            <a:off x="2221992" y="2258568"/>
+            <a:off x="2938272" y="2258568"/>
             <a:ext cx="1828800" cy="292608"/>
           </a:xfrm>
           <a:prstGeom prst="rect">
@@ -27280,7 +26214,7 @@
         </p:nvSpPr>
         <p:spPr>
           <a:xfrm>
-            <a:off x="2221992" y="2258568"/>
+            <a:off x="2938272" y="2258568"/>
             <a:ext cx="1828800" cy="292608"/>
           </a:xfrm>
           <a:prstGeom prst="rect">
@@ -27305,7 +26239,7 @@
                 <a:ea typeface="Trebuchet MS" pitchFamily="34" charset="-122"/>
                 <a:cs typeface="Trebuchet MS" pitchFamily="34" charset="-120"/>
               </a:rPr>
-              <a:t>chrono</a:t>
+              <a:t>geo</a:t>
             </a:r>
             <a:endParaRPr lang="en-US" sz="1300" dirty="0"/>
           </a:p>
@@ -27319,7 +26253,7 @@
         </p:nvSpPr>
         <p:spPr>
           <a:xfrm>
-            <a:off x="2221992" y="2569464"/>
+            <a:off x="2938272" y="2569464"/>
             <a:ext cx="1828800" cy="201168"/>
           </a:xfrm>
           <a:prstGeom prst="rect">
@@ -27344,7 +26278,7 @@
                 <a:ea typeface="Calibri" pitchFamily="34" charset="-122"/>
                 <a:cs typeface="Calibri" pitchFamily="34" charset="-120"/>
               </a:rPr>
-              <a:t>time</a:t>
+              <a:t>earth</a:t>
             </a:r>
             <a:endParaRPr lang="en-US" sz="850" dirty="0"/>
           </a:p>
@@ -27358,7 +26292,7 @@
         </p:nvSpPr>
         <p:spPr>
           <a:xfrm>
-            <a:off x="4370832" y="2258568"/>
+            <a:off x="5803392" y="2258568"/>
             <a:ext cx="1828800" cy="292608"/>
           </a:xfrm>
           <a:prstGeom prst="rect">
@@ -27392,7 +26326,7 @@
         </p:nvSpPr>
         <p:spPr>
           <a:xfrm>
-            <a:off x="4370832" y="2258568"/>
+            <a:off x="5803392" y="2258568"/>
             <a:ext cx="1828800" cy="292608"/>
           </a:xfrm>
           <a:prstGeom prst="rect">
@@ -27431,7 +26365,7 @@
         </p:nvSpPr>
         <p:spPr>
           <a:xfrm>
-            <a:off x="4370832" y="2569464"/>
+            <a:off x="5803392" y="2569464"/>
             <a:ext cx="1828800" cy="201168"/>
           </a:xfrm>
           <a:prstGeom prst="rect">
@@ -27456,7 +26390,7 @@
                 <a:ea typeface="Calibri" pitchFamily="34" charset="-122"/>
                 <a:cs typeface="Calibri" pitchFamily="34" charset="-120"/>
               </a:rPr>
-              <a:t>relating to reason or study</a:t>
+              <a:t>relating to reason or logic</a:t>
             </a:r>
             <a:endParaRPr lang="en-US" sz="850" dirty="0"/>
           </a:p>
@@ -27470,30 +26404,23 @@
         </p:nvSpPr>
         <p:spPr>
           <a:xfrm>
-            <a:off x="6519672" y="2258568"/>
-            <a:ext cx="1828800" cy="292608"/>
+            <a:off x="365760" y="3273552"/>
+            <a:ext cx="1371600" cy="658368"/>
           </a:xfrm>
           <a:prstGeom prst="rect">
             <a:avLst>
-              <a:gd name="adj" fmla="val 25000"/>
+              <a:gd name="adj" fmla="val 8333"/>
             </a:avLst>
           </a:prstGeom>
           <a:solidFill>
-            <a:srgbClr val="FCE7F3"/>
-          </a:solidFill>
-          <a:ln w="19050">
-            <a:solidFill>
-              <a:srgbClr val="DB2777"/>
-            </a:solidFill>
-            <a:prstDash val="solid"/>
-          </a:ln>
-          <a:effectLst>
-            <a:outerShdw sx="100000" sy="100000" kx="0" ky="0" algn="bl" rotWithShape="0" blurRad="101600" dist="38100" dir="8100000">
-              <a:srgbClr val="000000">
-                <a:alpha val="12000"/>
-              </a:srgbClr>
-            </a:outerShdw>
-          </a:effectLst>
+            <a:srgbClr val="E2E8F0"/>
+          </a:solidFill>
+          <a:ln w="12700">
+            <a:solidFill>
+              <a:srgbClr val="E2E8F0"/>
+            </a:solidFill>
+            <a:prstDash val="solid"/>
+          </a:ln>
         </p:spPr>
       </p:sp>
       <p:sp>
@@ -27504,86 +26431,47 @@
         </p:nvSpPr>
         <p:spPr>
           <a:xfrm>
-            <a:off x="6519672" y="2258568"/>
-            <a:ext cx="1828800" cy="292608"/>
-          </a:xfrm>
-          <a:prstGeom prst="rect">
-            <a:avLst/>
-          </a:prstGeom>
-          <a:noFill/>
-          <a:ln/>
-        </p:spPr>
-        <p:txBody>
-          <a:bodyPr wrap="square" lIns="0" tIns="0" rIns="0" bIns="0" rtlCol="0" anchor="ctr"/>
-          <a:lstStyle/>
-          <a:p>
-            <a:pPr algn="ctr" indent="0" marL="0">
-              <a:buNone/>
-            </a:pPr>
-            <a:r>
-              <a:rPr lang="en-US" sz="1300" b="1" dirty="0">
-                <a:solidFill>
-                  <a:srgbClr val="9D174D"/>
+            <a:off x="365760" y="3273552"/>
+            <a:ext cx="1371600" cy="658368"/>
+          </a:xfrm>
+          <a:prstGeom prst="rect">
+            <a:avLst/>
+          </a:prstGeom>
+          <a:noFill/>
+          <a:ln/>
+        </p:spPr>
+        <p:txBody>
+          <a:bodyPr wrap="square" lIns="0" tIns="0" rIns="0" bIns="0" rtlCol="0" anchor="ctr"/>
+          <a:lstStyle/>
+          <a:p>
+            <a:pPr algn="ctr" indent="0" marL="0">
+              <a:buNone/>
+            </a:pPr>
+            <a:r>
+              <a:rPr lang="en-US" sz="1100" b="1" dirty="0">
+                <a:solidFill>
+                  <a:srgbClr val="475569"/>
                 </a:solidFill>
                 <a:latin typeface="Trebuchet MS" pitchFamily="34" charset="0"/>
                 <a:ea typeface="Trebuchet MS" pitchFamily="34" charset="-122"/>
                 <a:cs typeface="Trebuchet MS" pitchFamily="34" charset="-120"/>
               </a:rPr>
-              <a:t>ly</a:t>
-            </a:r>
-            <a:endParaRPr lang="en-US" sz="1300" dirty="0"/>
-          </a:p>
-        </p:txBody>
-      </p:sp>
-      <p:sp>
-        <p:nvSpPr>
-          <p:cNvPr id="24" name="Text 22"/>
-          <p:cNvSpPr/>
-          <p:nvPr/>
-        </p:nvSpPr>
-        <p:spPr>
-          <a:xfrm>
-            <a:off x="6519672" y="2569464"/>
-            <a:ext cx="1828800" cy="201168"/>
-          </a:xfrm>
-          <a:prstGeom prst="rect">
-            <a:avLst/>
-          </a:prstGeom>
-          <a:noFill/>
-          <a:ln/>
-        </p:spPr>
-        <p:txBody>
-          <a:bodyPr wrap="square" lIns="0" tIns="0" rIns="0" bIns="0" rtlCol="0" anchor="t"/>
-          <a:lstStyle/>
-          <a:p>
-            <a:pPr algn="ctr" indent="0" marL="0">
-              <a:buNone/>
-            </a:pPr>
-            <a:r>
-              <a:rPr lang="en-US" sz="850" dirty="0">
-                <a:solidFill>
-                  <a:srgbClr val="475569"/>
-                </a:solidFill>
-                <a:latin typeface="Calibri" pitchFamily="34" charset="0"/>
-                <a:ea typeface="Calibri" pitchFamily="34" charset="-122"/>
-                <a:cs typeface="Calibri" pitchFamily="34" charset="-120"/>
-              </a:rPr>
-              <a:t>in a way that is</a:t>
-            </a:r>
-            <a:endParaRPr lang="en-US" sz="850" dirty="0"/>
-          </a:p>
-        </p:txBody>
-      </p:sp>
-      <p:sp>
-        <p:nvSpPr>
-          <p:cNvPr id="25" name="Shape 23"/>
-          <p:cNvSpPr/>
-          <p:nvPr/>
-        </p:nvSpPr>
-        <p:spPr>
-          <a:xfrm>
-            <a:off x="365760" y="3273552"/>
-            <a:ext cx="1371600" cy="658368"/>
+              <a:t>Syllables</a:t>
+            </a:r>
+            <a:endParaRPr lang="en-US" sz="1100" dirty="0"/>
+          </a:p>
+        </p:txBody>
+      </p:sp>
+      <p:sp>
+        <p:nvSpPr>
+          <p:cNvPr id="24" name="Shape 22"/>
+          <p:cNvSpPr/>
+          <p:nvPr/>
+        </p:nvSpPr>
+        <p:spPr>
+          <a:xfrm>
+            <a:off x="1874520" y="3273552"/>
+            <a:ext cx="6903720" cy="658368"/>
           </a:xfrm>
           <a:prstGeom prst="rect">
             <a:avLst>
@@ -27591,11 +26479,38 @@
             </a:avLst>
           </a:prstGeom>
           <a:solidFill>
-            <a:srgbClr val="E2E8F0"/>
-          </a:solidFill>
-          <a:ln w="12700">
-            <a:solidFill>
-              <a:srgbClr val="E2E8F0"/>
+            <a:srgbClr val="CCFBF1"/>
+          </a:solidFill>
+          <a:ln w="12700">
+            <a:solidFill>
+              <a:srgbClr val="0D9488"/>
+            </a:solidFill>
+            <a:prstDash val="solid"/>
+          </a:ln>
+        </p:spPr>
+      </p:sp>
+      <p:sp>
+        <p:nvSpPr>
+          <p:cNvPr id="25" name="Shape 23"/>
+          <p:cNvSpPr/>
+          <p:nvPr/>
+        </p:nvSpPr>
+        <p:spPr>
+          <a:xfrm>
+            <a:off x="1978152" y="3364992"/>
+            <a:ext cx="1225296" cy="475488"/>
+          </a:xfrm>
+          <a:prstGeom prst="rect">
+            <a:avLst>
+              <a:gd name="adj" fmla="val 9615"/>
+            </a:avLst>
+          </a:prstGeom>
+          <a:solidFill>
+            <a:srgbClr val="FFFFFF"/>
+          </a:solidFill>
+          <a:ln w="12700">
+            <a:solidFill>
+              <a:srgbClr val="0D9488"/>
             </a:solidFill>
             <a:prstDash val="solid"/>
           </a:ln>
@@ -27609,63 +26524,75 @@
         </p:nvSpPr>
         <p:spPr>
           <a:xfrm>
-            <a:off x="365760" y="3273552"/>
-            <a:ext cx="1371600" cy="658368"/>
-          </a:xfrm>
-          <a:prstGeom prst="rect">
-            <a:avLst/>
-          </a:prstGeom>
-          <a:noFill/>
-          <a:ln/>
-        </p:spPr>
-        <p:txBody>
-          <a:bodyPr wrap="square" lIns="0" tIns="0" rIns="0" bIns="0" rtlCol="0" anchor="ctr"/>
-          <a:lstStyle/>
-          <a:p>
-            <a:pPr algn="ctr" indent="0" marL="0">
-              <a:buNone/>
-            </a:pPr>
-            <a:r>
-              <a:rPr lang="en-US" sz="1100" b="1" dirty="0">
-                <a:solidFill>
-                  <a:srgbClr val="475569"/>
+            <a:off x="1978152" y="3364992"/>
+            <a:ext cx="1225296" cy="475488"/>
+          </a:xfrm>
+          <a:prstGeom prst="rect">
+            <a:avLst/>
+          </a:prstGeom>
+          <a:noFill/>
+          <a:ln/>
+        </p:spPr>
+        <p:txBody>
+          <a:bodyPr wrap="square" lIns="0" tIns="0" rIns="0" bIns="0" rtlCol="0" anchor="ctr"/>
+          <a:lstStyle/>
+          <a:p>
+            <a:pPr algn="ctr" indent="0" marL="0">
+              <a:buNone/>
+            </a:pPr>
+            <a:r>
+              <a:rPr lang="en-US" sz="1400" b="1" dirty="0">
+                <a:solidFill>
+                  <a:srgbClr val="0D9488"/>
                 </a:solidFill>
                 <a:latin typeface="Trebuchet MS" pitchFamily="34" charset="0"/>
                 <a:ea typeface="Trebuchet MS" pitchFamily="34" charset="-122"/>
                 <a:cs typeface="Trebuchet MS" pitchFamily="34" charset="-120"/>
               </a:rPr>
-              <a:t>Syllables</a:t>
-            </a:r>
-            <a:endParaRPr lang="en-US" sz="1100" dirty="0"/>
-          </a:p>
-        </p:txBody>
-      </p:sp>
-      <p:sp>
-        <p:nvSpPr>
-          <p:cNvPr id="27" name="Shape 25"/>
-          <p:cNvSpPr/>
-          <p:nvPr/>
-        </p:nvSpPr>
-        <p:spPr>
-          <a:xfrm>
-            <a:off x="1874520" y="3273552"/>
-            <a:ext cx="6903720" cy="658368"/>
-          </a:xfrm>
-          <a:prstGeom prst="rect">
-            <a:avLst>
-              <a:gd name="adj" fmla="val 8333"/>
-            </a:avLst>
-          </a:prstGeom>
-          <a:solidFill>
-            <a:srgbClr val="CCFBF1"/>
-          </a:solidFill>
-          <a:ln w="12700">
-            <a:solidFill>
-              <a:srgbClr val="0D9488"/>
-            </a:solidFill>
-            <a:prstDash val="solid"/>
-          </a:ln>
-        </p:spPr>
+              <a:t>ge</a:t>
+            </a:r>
+            <a:endParaRPr lang="en-US" sz="1400" dirty="0"/>
+          </a:p>
+        </p:txBody>
+      </p:sp>
+      <p:sp>
+        <p:nvSpPr>
+          <p:cNvPr id="27" name="Text 25"/>
+          <p:cNvSpPr/>
+          <p:nvPr/>
+        </p:nvSpPr>
+        <p:spPr>
+          <a:xfrm>
+            <a:off x="3203448" y="3364992"/>
+            <a:ext cx="76200" cy="475488"/>
+          </a:xfrm>
+          <a:prstGeom prst="rect">
+            <a:avLst/>
+          </a:prstGeom>
+          <a:noFill/>
+          <a:ln/>
+        </p:spPr>
+        <p:txBody>
+          <a:bodyPr wrap="square" lIns="0" tIns="0" rIns="0" bIns="0" rtlCol="0" anchor="ctr"/>
+          <a:lstStyle/>
+          <a:p>
+            <a:pPr algn="ctr" indent="0" marL="0">
+              <a:buNone/>
+            </a:pPr>
+            <a:r>
+              <a:rPr lang="en-US" sz="1600" b="1" dirty="0">
+                <a:solidFill>
+                  <a:srgbClr val="0D9488"/>
+                </a:solidFill>
+                <a:latin typeface="Trebuchet MS" pitchFamily="34" charset="0"/>
+                <a:ea typeface="Trebuchet MS" pitchFamily="34" charset="-122"/>
+                <a:cs typeface="Trebuchet MS" pitchFamily="34" charset="-120"/>
+              </a:rPr>
+              <a:t>·</a:t>
+            </a:r>
+            <a:endParaRPr lang="en-US" sz="1600" dirty="0"/>
+          </a:p>
+        </p:txBody>
       </p:sp>
       <p:sp>
         <p:nvSpPr>
@@ -27675,8 +26602,8 @@
         </p:nvSpPr>
         <p:spPr>
           <a:xfrm>
-            <a:off x="1980329" y="3364992"/>
-            <a:ext cx="1005840" cy="475488"/>
+            <a:off x="3279648" y="3364992"/>
+            <a:ext cx="1225296" cy="475488"/>
           </a:xfrm>
           <a:prstGeom prst="rect">
             <a:avLst>
@@ -27702,8 +26629,8 @@
         </p:nvSpPr>
         <p:spPr>
           <a:xfrm>
-            <a:off x="1980329" y="3364992"/>
-            <a:ext cx="1005840" cy="475488"/>
+            <a:off x="3279648" y="3364992"/>
+            <a:ext cx="1225296" cy="475488"/>
           </a:xfrm>
           <a:prstGeom prst="rect">
             <a:avLst/>
@@ -27727,7 +26654,7 @@
                 <a:ea typeface="Trebuchet MS" pitchFamily="34" charset="-122"/>
                 <a:cs typeface="Trebuchet MS" pitchFamily="34" charset="-120"/>
               </a:rPr>
-              <a:t>chron</a:t>
+              <a:t>o</a:t>
             </a:r>
             <a:endParaRPr lang="en-US" sz="1400" dirty="0"/>
           </a:p>
@@ -27741,8 +26668,8 @@
         </p:nvSpPr>
         <p:spPr>
           <a:xfrm>
-            <a:off x="2986169" y="3364992"/>
-            <a:ext cx="78377" cy="475488"/>
+            <a:off x="4504944" y="3364992"/>
+            <a:ext cx="76200" cy="475488"/>
           </a:xfrm>
           <a:prstGeom prst="rect">
             <a:avLst/>
@@ -27780,8 +26707,8 @@
         </p:nvSpPr>
         <p:spPr>
           <a:xfrm>
-            <a:off x="3064546" y="3364992"/>
-            <a:ext cx="1005840" cy="475488"/>
+            <a:off x="4581144" y="3364992"/>
+            <a:ext cx="1225296" cy="475488"/>
           </a:xfrm>
           <a:prstGeom prst="rect">
             <a:avLst>
@@ -27807,8 +26734,8 @@
         </p:nvSpPr>
         <p:spPr>
           <a:xfrm>
-            <a:off x="3064546" y="3364992"/>
-            <a:ext cx="1005840" cy="475488"/>
+            <a:off x="4581144" y="3364992"/>
+            <a:ext cx="1225296" cy="475488"/>
           </a:xfrm>
           <a:prstGeom prst="rect">
             <a:avLst/>
@@ -27832,7 +26759,7 @@
                 <a:ea typeface="Trebuchet MS" pitchFamily="34" charset="-122"/>
                 <a:cs typeface="Trebuchet MS" pitchFamily="34" charset="-120"/>
               </a:rPr>
-              <a:t>o</a:t>
+              <a:t>log</a:t>
             </a:r>
             <a:endParaRPr lang="en-US" sz="1400" dirty="0"/>
           </a:p>
@@ -27846,8 +26773,8 @@
         </p:nvSpPr>
         <p:spPr>
           <a:xfrm>
-            <a:off x="4070386" y="3364992"/>
-            <a:ext cx="78377" cy="475488"/>
+            <a:off x="5806440" y="3364992"/>
+            <a:ext cx="76200" cy="475488"/>
           </a:xfrm>
           <a:prstGeom prst="rect">
             <a:avLst/>
@@ -27885,8 +26812,8 @@
         </p:nvSpPr>
         <p:spPr>
           <a:xfrm>
-            <a:off x="4148763" y="3364992"/>
-            <a:ext cx="1005840" cy="475488"/>
+            <a:off x="5882640" y="3364992"/>
+            <a:ext cx="1225296" cy="475488"/>
           </a:xfrm>
           <a:prstGeom prst="rect">
             <a:avLst>
@@ -27912,8 +26839,8 @@
         </p:nvSpPr>
         <p:spPr>
           <a:xfrm>
-            <a:off x="4148763" y="3364992"/>
-            <a:ext cx="1005840" cy="475488"/>
+            <a:off x="5882640" y="3364992"/>
+            <a:ext cx="1225296" cy="475488"/>
           </a:xfrm>
           <a:prstGeom prst="rect">
             <a:avLst/>
@@ -27937,7 +26864,7 @@
                 <a:ea typeface="Trebuchet MS" pitchFamily="34" charset="-122"/>
                 <a:cs typeface="Trebuchet MS" pitchFamily="34" charset="-120"/>
               </a:rPr>
-              <a:t>log</a:t>
+              <a:t>i</a:t>
             </a:r>
             <a:endParaRPr lang="en-US" sz="1400" dirty="0"/>
           </a:p>
@@ -27951,8 +26878,8 @@
         </p:nvSpPr>
         <p:spPr>
           <a:xfrm>
-            <a:off x="5154603" y="3364992"/>
-            <a:ext cx="78377" cy="475488"/>
+            <a:off x="7107936" y="3364992"/>
+            <a:ext cx="76200" cy="475488"/>
           </a:xfrm>
           <a:prstGeom prst="rect">
             <a:avLst/>
@@ -27990,8 +26917,8 @@
         </p:nvSpPr>
         <p:spPr>
           <a:xfrm>
-            <a:off x="5232981" y="3364992"/>
-            <a:ext cx="1005840" cy="475488"/>
+            <a:off x="7184136" y="3364992"/>
+            <a:ext cx="1225296" cy="475488"/>
           </a:xfrm>
           <a:prstGeom prst="rect">
             <a:avLst>
@@ -28017,8 +26944,8 @@
         </p:nvSpPr>
         <p:spPr>
           <a:xfrm>
-            <a:off x="5232981" y="3364992"/>
-            <a:ext cx="1005840" cy="475488"/>
+            <a:off x="7184136" y="3364992"/>
+            <a:ext cx="1225296" cy="475488"/>
           </a:xfrm>
           <a:prstGeom prst="rect">
             <a:avLst/>
@@ -28042,7 +26969,7 @@
                 <a:ea typeface="Trebuchet MS" pitchFamily="34" charset="-122"/>
                 <a:cs typeface="Trebuchet MS" pitchFamily="34" charset="-120"/>
               </a:rPr>
-              <a:t>i</a:t>
+              <a:t>cal</a:t>
             </a:r>
             <a:endParaRPr lang="en-US" sz="1400" dirty="0"/>
           </a:p>
@@ -28050,224 +26977,80 @@
       </p:sp>
       <p:sp>
         <p:nvSpPr>
-          <p:cNvPr id="39" name="Text 37"/>
-          <p:cNvSpPr/>
-          <p:nvPr/>
-        </p:nvSpPr>
-        <p:spPr>
-          <a:xfrm>
-            <a:off x="6238821" y="3364992"/>
-            <a:ext cx="78377" cy="475488"/>
-          </a:xfrm>
-          <a:prstGeom prst="rect">
-            <a:avLst/>
-          </a:prstGeom>
-          <a:noFill/>
-          <a:ln/>
-        </p:spPr>
-        <p:txBody>
-          <a:bodyPr wrap="square" lIns="0" tIns="0" rIns="0" bIns="0" rtlCol="0" anchor="ctr"/>
-          <a:lstStyle/>
-          <a:p>
-            <a:pPr algn="ctr" indent="0" marL="0">
-              <a:buNone/>
-            </a:pPr>
-            <a:r>
-              <a:rPr lang="en-US" sz="1600" b="1" dirty="0">
-                <a:solidFill>
-                  <a:srgbClr val="0D9488"/>
+          <p:cNvPr id="39" name="Shape 37"/>
+          <p:cNvSpPr/>
+          <p:nvPr/>
+        </p:nvSpPr>
+        <p:spPr>
+          <a:xfrm>
+            <a:off x="365760" y="4096512"/>
+            <a:ext cx="1371600" cy="804672"/>
+          </a:xfrm>
+          <a:prstGeom prst="rect">
+            <a:avLst>
+              <a:gd name="adj" fmla="val 6818"/>
+            </a:avLst>
+          </a:prstGeom>
+          <a:solidFill>
+            <a:srgbClr val="E2E8F0"/>
+          </a:solidFill>
+          <a:ln w="12700">
+            <a:solidFill>
+              <a:srgbClr val="E2E8F0"/>
+            </a:solidFill>
+            <a:prstDash val="solid"/>
+          </a:ln>
+        </p:spPr>
+      </p:sp>
+      <p:sp>
+        <p:nvSpPr>
+          <p:cNvPr id="40" name="Text 38"/>
+          <p:cNvSpPr/>
+          <p:nvPr/>
+        </p:nvSpPr>
+        <p:spPr>
+          <a:xfrm>
+            <a:off x="365760" y="4096512"/>
+            <a:ext cx="1371600" cy="804672"/>
+          </a:xfrm>
+          <a:prstGeom prst="rect">
+            <a:avLst/>
+          </a:prstGeom>
+          <a:noFill/>
+          <a:ln/>
+        </p:spPr>
+        <p:txBody>
+          <a:bodyPr wrap="square" lIns="0" tIns="0" rIns="0" bIns="0" rtlCol="0" anchor="ctr"/>
+          <a:lstStyle/>
+          <a:p>
+            <a:pPr algn="ctr" indent="0" marL="0">
+              <a:buNone/>
+            </a:pPr>
+            <a:r>
+              <a:rPr lang="en-US" sz="1100" b="1" dirty="0">
+                <a:solidFill>
+                  <a:srgbClr val="475569"/>
                 </a:solidFill>
                 <a:latin typeface="Trebuchet MS" pitchFamily="34" charset="0"/>
                 <a:ea typeface="Trebuchet MS" pitchFamily="34" charset="-122"/>
                 <a:cs typeface="Trebuchet MS" pitchFamily="34" charset="-120"/>
               </a:rPr>
-              <a:t>·</a:t>
-            </a:r>
-            <a:endParaRPr lang="en-US" sz="1600" dirty="0"/>
-          </a:p>
-        </p:txBody>
-      </p:sp>
-      <p:sp>
-        <p:nvSpPr>
-          <p:cNvPr id="40" name="Shape 38"/>
-          <p:cNvSpPr/>
-          <p:nvPr/>
-        </p:nvSpPr>
-        <p:spPr>
-          <a:xfrm>
-            <a:off x="6317198" y="3364992"/>
-            <a:ext cx="1005840" cy="475488"/>
-          </a:xfrm>
-          <a:prstGeom prst="rect">
-            <a:avLst>
-              <a:gd name="adj" fmla="val 9615"/>
-            </a:avLst>
-          </a:prstGeom>
-          <a:solidFill>
-            <a:srgbClr val="FFFFFF"/>
-          </a:solidFill>
-          <a:ln w="12700">
-            <a:solidFill>
-              <a:srgbClr val="0D9488"/>
-            </a:solidFill>
-            <a:prstDash val="solid"/>
-          </a:ln>
-        </p:spPr>
-      </p:sp>
-      <p:sp>
-        <p:nvSpPr>
-          <p:cNvPr id="41" name="Text 39"/>
-          <p:cNvSpPr/>
-          <p:nvPr/>
-        </p:nvSpPr>
-        <p:spPr>
-          <a:xfrm>
-            <a:off x="6317198" y="3364992"/>
-            <a:ext cx="1005840" cy="475488"/>
-          </a:xfrm>
-          <a:prstGeom prst="rect">
-            <a:avLst/>
-          </a:prstGeom>
-          <a:noFill/>
-          <a:ln/>
-        </p:spPr>
-        <p:txBody>
-          <a:bodyPr wrap="square" lIns="0" tIns="0" rIns="0" bIns="0" rtlCol="0" anchor="ctr"/>
-          <a:lstStyle/>
-          <a:p>
-            <a:pPr algn="ctr" indent="0" marL="0">
-              <a:buNone/>
-            </a:pPr>
-            <a:r>
-              <a:rPr lang="en-US" sz="1400" b="1" dirty="0">
-                <a:solidFill>
-                  <a:srgbClr val="0D9488"/>
-                </a:solidFill>
-                <a:latin typeface="Trebuchet MS" pitchFamily="34" charset="0"/>
-                <a:ea typeface="Trebuchet MS" pitchFamily="34" charset="-122"/>
-                <a:cs typeface="Trebuchet MS" pitchFamily="34" charset="-120"/>
-              </a:rPr>
-              <a:t>cal</a:t>
-            </a:r>
-            <a:endParaRPr lang="en-US" sz="1400" dirty="0"/>
-          </a:p>
-        </p:txBody>
-      </p:sp>
-      <p:sp>
-        <p:nvSpPr>
-          <p:cNvPr id="42" name="Text 40"/>
-          <p:cNvSpPr/>
-          <p:nvPr/>
-        </p:nvSpPr>
-        <p:spPr>
-          <a:xfrm>
-            <a:off x="7323038" y="3364992"/>
-            <a:ext cx="78377" cy="475488"/>
-          </a:xfrm>
-          <a:prstGeom prst="rect">
-            <a:avLst/>
-          </a:prstGeom>
-          <a:noFill/>
-          <a:ln/>
-        </p:spPr>
-        <p:txBody>
-          <a:bodyPr wrap="square" lIns="0" tIns="0" rIns="0" bIns="0" rtlCol="0" anchor="ctr"/>
-          <a:lstStyle/>
-          <a:p>
-            <a:pPr algn="ctr" indent="0" marL="0">
-              <a:buNone/>
-            </a:pPr>
-            <a:r>
-              <a:rPr lang="en-US" sz="1600" b="1" dirty="0">
-                <a:solidFill>
-                  <a:srgbClr val="0D9488"/>
-                </a:solidFill>
-                <a:latin typeface="Trebuchet MS" pitchFamily="34" charset="0"/>
-                <a:ea typeface="Trebuchet MS" pitchFamily="34" charset="-122"/>
-                <a:cs typeface="Trebuchet MS" pitchFamily="34" charset="-120"/>
-              </a:rPr>
-              <a:t>·</a:t>
-            </a:r>
-            <a:endParaRPr lang="en-US" sz="1600" dirty="0"/>
-          </a:p>
-        </p:txBody>
-      </p:sp>
-      <p:sp>
-        <p:nvSpPr>
-          <p:cNvPr id="43" name="Shape 41"/>
-          <p:cNvSpPr/>
-          <p:nvPr/>
-        </p:nvSpPr>
-        <p:spPr>
-          <a:xfrm>
-            <a:off x="7401415" y="3364992"/>
-            <a:ext cx="1005840" cy="475488"/>
-          </a:xfrm>
-          <a:prstGeom prst="rect">
-            <a:avLst>
-              <a:gd name="adj" fmla="val 9615"/>
-            </a:avLst>
-          </a:prstGeom>
-          <a:solidFill>
-            <a:srgbClr val="FFFFFF"/>
-          </a:solidFill>
-          <a:ln w="12700">
-            <a:solidFill>
-              <a:srgbClr val="0D9488"/>
-            </a:solidFill>
-            <a:prstDash val="solid"/>
-          </a:ln>
-        </p:spPr>
-      </p:sp>
-      <p:sp>
-        <p:nvSpPr>
-          <p:cNvPr id="44" name="Text 42"/>
-          <p:cNvSpPr/>
-          <p:nvPr/>
-        </p:nvSpPr>
-        <p:spPr>
-          <a:xfrm>
-            <a:off x="7401415" y="3364992"/>
-            <a:ext cx="1005840" cy="475488"/>
-          </a:xfrm>
-          <a:prstGeom prst="rect">
-            <a:avLst/>
-          </a:prstGeom>
-          <a:noFill/>
-          <a:ln/>
-        </p:spPr>
-        <p:txBody>
-          <a:bodyPr wrap="square" lIns="0" tIns="0" rIns="0" bIns="0" rtlCol="0" anchor="ctr"/>
-          <a:lstStyle/>
-          <a:p>
-            <a:pPr algn="ctr" indent="0" marL="0">
-              <a:buNone/>
-            </a:pPr>
-            <a:r>
-              <a:rPr lang="en-US" sz="1400" b="1" dirty="0">
-                <a:solidFill>
-                  <a:srgbClr val="0D9488"/>
-                </a:solidFill>
-                <a:latin typeface="Trebuchet MS" pitchFamily="34" charset="0"/>
-                <a:ea typeface="Trebuchet MS" pitchFamily="34" charset="-122"/>
-                <a:cs typeface="Trebuchet MS" pitchFamily="34" charset="-120"/>
-              </a:rPr>
-              <a:t>ly</a:t>
-            </a:r>
-            <a:endParaRPr lang="en-US" sz="1400" dirty="0"/>
-          </a:p>
-        </p:txBody>
-      </p:sp>
-      <p:sp>
-        <p:nvSpPr>
-          <p:cNvPr id="45" name="Shape 43"/>
-          <p:cNvSpPr/>
-          <p:nvPr/>
-        </p:nvSpPr>
-        <p:spPr>
-          <a:xfrm>
-            <a:off x="365760" y="4096512"/>
-            <a:ext cx="1371600" cy="804672"/>
+              <a:t>Phonemes</a:t>
+            </a:r>
+            <a:endParaRPr lang="en-US" sz="1100" dirty="0"/>
+          </a:p>
+        </p:txBody>
+      </p:sp>
+      <p:sp>
+        <p:nvSpPr>
+          <p:cNvPr id="41" name="Shape 39"/>
+          <p:cNvSpPr/>
+          <p:nvPr/>
+        </p:nvSpPr>
+        <p:spPr>
+          <a:xfrm>
+            <a:off x="1874520" y="4096512"/>
+            <a:ext cx="6903720" cy="804672"/>
           </a:xfrm>
           <a:prstGeom prst="rect">
             <a:avLst>
@@ -28275,85 +27058,19 @@
             </a:avLst>
           </a:prstGeom>
           <a:solidFill>
-            <a:srgbClr val="E2E8F0"/>
+            <a:srgbClr val="F8FAFC"/>
           </a:solidFill>
           <a:ln w="12700">
             <a:solidFill>
               <a:srgbClr val="E2E8F0"/>
             </a:solidFill>
-            <a:prstDash val="solid"/>
-          </a:ln>
-        </p:spPr>
-      </p:sp>
-      <p:sp>
-        <p:nvSpPr>
-          <p:cNvPr id="46" name="Text 44"/>
-          <p:cNvSpPr/>
-          <p:nvPr/>
-        </p:nvSpPr>
-        <p:spPr>
-          <a:xfrm>
-            <a:off x="365760" y="4096512"/>
-            <a:ext cx="1371600" cy="804672"/>
-          </a:xfrm>
-          <a:prstGeom prst="rect">
-            <a:avLst/>
-          </a:prstGeom>
-          <a:noFill/>
-          <a:ln/>
-        </p:spPr>
-        <p:txBody>
-          <a:bodyPr wrap="square" lIns="0" tIns="0" rIns="0" bIns="0" rtlCol="0" anchor="ctr"/>
-          <a:lstStyle/>
-          <a:p>
-            <a:pPr algn="ctr" indent="0" marL="0">
-              <a:buNone/>
-            </a:pPr>
-            <a:r>
-              <a:rPr lang="en-US" sz="1100" b="1" dirty="0">
-                <a:solidFill>
-                  <a:srgbClr val="475569"/>
-                </a:solidFill>
-                <a:latin typeface="Trebuchet MS" pitchFamily="34" charset="0"/>
-                <a:ea typeface="Trebuchet MS" pitchFamily="34" charset="-122"/>
-                <a:cs typeface="Trebuchet MS" pitchFamily="34" charset="-120"/>
-              </a:rPr>
-              <a:t>Phonemes</a:t>
-            </a:r>
-            <a:endParaRPr lang="en-US" sz="1100" dirty="0"/>
-          </a:p>
-        </p:txBody>
-      </p:sp>
-      <p:sp>
-        <p:nvSpPr>
-          <p:cNvPr id="47" name="Shape 45"/>
-          <p:cNvSpPr/>
-          <p:nvPr/>
-        </p:nvSpPr>
-        <p:spPr>
-          <a:xfrm>
-            <a:off x="1874520" y="4096512"/>
-            <a:ext cx="6903720" cy="804672"/>
-          </a:xfrm>
-          <a:prstGeom prst="rect">
-            <a:avLst>
-              <a:gd name="adj" fmla="val 6818"/>
-            </a:avLst>
-          </a:prstGeom>
-          <a:solidFill>
-            <a:srgbClr val="F8FAFC"/>
-          </a:solidFill>
-          <a:ln w="12700">
-            <a:solidFill>
-              <a:srgbClr val="E2E8F0"/>
-            </a:solidFill>
             <a:prstDash val="dash"/>
           </a:ln>
         </p:spPr>
       </p:sp>
       <p:sp>
         <p:nvSpPr>
-          <p:cNvPr id="48" name="Text 46"/>
+          <p:cNvPr id="42" name="Text 40"/>
           <p:cNvSpPr/>
           <p:nvPr/>
         </p:nvSpPr>
@@ -28815,7 +27532,7 @@
                 <a:ea typeface="Trebuchet MS" pitchFamily="34" charset="-122"/>
                 <a:cs typeface="Trebuchet MS" pitchFamily="34" charset="-120"/>
               </a:rPr>
-              <a:t>chronologically</a:t>
+              <a:t>geological</a:t>
             </a:r>
             <a:endParaRPr lang="en-US" sz="2800" dirty="0"/>
           </a:p>
@@ -28895,7 +27612,7 @@
         </p:nvSpPr>
         <p:spPr>
           <a:xfrm>
-            <a:off x="2221992" y="2258568"/>
+            <a:off x="2938272" y="2258568"/>
             <a:ext cx="1828800" cy="292608"/>
           </a:xfrm>
           <a:prstGeom prst="rect">
@@ -28929,7 +27646,7 @@
         </p:nvSpPr>
         <p:spPr>
           <a:xfrm>
-            <a:off x="2221992" y="2258568"/>
+            <a:off x="2938272" y="2258568"/>
             <a:ext cx="1828800" cy="292608"/>
           </a:xfrm>
           <a:prstGeom prst="rect">
@@ -28954,7 +27671,7 @@
                 <a:ea typeface="Trebuchet MS" pitchFamily="34" charset="-122"/>
                 <a:cs typeface="Trebuchet MS" pitchFamily="34" charset="-120"/>
               </a:rPr>
-              <a:t>chrono</a:t>
+              <a:t>geo</a:t>
             </a:r>
             <a:endParaRPr lang="en-US" sz="1300" dirty="0"/>
           </a:p>
@@ -28968,7 +27685,7 @@
         </p:nvSpPr>
         <p:spPr>
           <a:xfrm>
-            <a:off x="2221992" y="2569464"/>
+            <a:off x="2938272" y="2569464"/>
             <a:ext cx="1828800" cy="201168"/>
           </a:xfrm>
           <a:prstGeom prst="rect">
@@ -28993,7 +27710,7 @@
                 <a:ea typeface="Calibri" pitchFamily="34" charset="-122"/>
                 <a:cs typeface="Calibri" pitchFamily="34" charset="-120"/>
               </a:rPr>
-              <a:t>time</a:t>
+              <a:t>earth</a:t>
             </a:r>
             <a:endParaRPr lang="en-US" sz="850" dirty="0"/>
           </a:p>
@@ -29007,7 +27724,7 @@
         </p:nvSpPr>
         <p:spPr>
           <a:xfrm>
-            <a:off x="4370832" y="2258568"/>
+            <a:off x="5803392" y="2258568"/>
             <a:ext cx="1828800" cy="292608"/>
           </a:xfrm>
           <a:prstGeom prst="rect">
@@ -29041,7 +27758,7 @@
         </p:nvSpPr>
         <p:spPr>
           <a:xfrm>
-            <a:off x="4370832" y="2258568"/>
+            <a:off x="5803392" y="2258568"/>
             <a:ext cx="1828800" cy="292608"/>
           </a:xfrm>
           <a:prstGeom prst="rect">
@@ -29080,7 +27797,7 @@
         </p:nvSpPr>
         <p:spPr>
           <a:xfrm>
-            <a:off x="4370832" y="2569464"/>
+            <a:off x="5803392" y="2569464"/>
             <a:ext cx="1828800" cy="201168"/>
           </a:xfrm>
           <a:prstGeom prst="rect">
@@ -29105,7 +27822,7 @@
                 <a:ea typeface="Calibri" pitchFamily="34" charset="-122"/>
                 <a:cs typeface="Calibri" pitchFamily="34" charset="-120"/>
               </a:rPr>
-              <a:t>relating to reason or study</a:t>
+              <a:t>relating to reason or logic</a:t>
             </a:r>
             <a:endParaRPr lang="en-US" sz="850" dirty="0"/>
           </a:p>
@@ -29119,30 +27836,23 @@
         </p:nvSpPr>
         <p:spPr>
           <a:xfrm>
-            <a:off x="6519672" y="2258568"/>
-            <a:ext cx="1828800" cy="292608"/>
+            <a:off x="365760" y="3273552"/>
+            <a:ext cx="1371600" cy="658368"/>
           </a:xfrm>
           <a:prstGeom prst="rect">
             <a:avLst>
-              <a:gd name="adj" fmla="val 25000"/>
+              <a:gd name="adj" fmla="val 8333"/>
             </a:avLst>
           </a:prstGeom>
           <a:solidFill>
-            <a:srgbClr val="FCE7F3"/>
-          </a:solidFill>
-          <a:ln w="19050">
-            <a:solidFill>
-              <a:srgbClr val="DB2777"/>
-            </a:solidFill>
-            <a:prstDash val="solid"/>
-          </a:ln>
-          <a:effectLst>
-            <a:outerShdw sx="100000" sy="100000" kx="0" ky="0" algn="bl" rotWithShape="0" blurRad="101600" dist="38100" dir="8100000">
-              <a:srgbClr val="000000">
-                <a:alpha val="12000"/>
-              </a:srgbClr>
-            </a:outerShdw>
-          </a:effectLst>
+            <a:srgbClr val="E2E8F0"/>
+          </a:solidFill>
+          <a:ln w="12700">
+            <a:solidFill>
+              <a:srgbClr val="E2E8F0"/>
+            </a:solidFill>
+            <a:prstDash val="solid"/>
+          </a:ln>
         </p:spPr>
       </p:sp>
       <p:sp>
@@ -29153,47 +27863,1181 @@
         </p:nvSpPr>
         <p:spPr>
           <a:xfrm>
-            <a:off x="6519672" y="2258568"/>
-            <a:ext cx="1828800" cy="292608"/>
-          </a:xfrm>
-          <a:prstGeom prst="rect">
-            <a:avLst/>
-          </a:prstGeom>
-          <a:noFill/>
-          <a:ln/>
-        </p:spPr>
-        <p:txBody>
-          <a:bodyPr wrap="square" lIns="0" tIns="0" rIns="0" bIns="0" rtlCol="0" anchor="ctr"/>
-          <a:lstStyle/>
-          <a:p>
-            <a:pPr algn="ctr" indent="0" marL="0">
-              <a:buNone/>
-            </a:pPr>
-            <a:r>
-              <a:rPr lang="en-US" sz="1300" b="1" dirty="0">
-                <a:solidFill>
-                  <a:srgbClr val="9D174D"/>
+            <a:off x="365760" y="3273552"/>
+            <a:ext cx="1371600" cy="658368"/>
+          </a:xfrm>
+          <a:prstGeom prst="rect">
+            <a:avLst/>
+          </a:prstGeom>
+          <a:noFill/>
+          <a:ln/>
+        </p:spPr>
+        <p:txBody>
+          <a:bodyPr wrap="square" lIns="0" tIns="0" rIns="0" bIns="0" rtlCol="0" anchor="ctr"/>
+          <a:lstStyle/>
+          <a:p>
+            <a:pPr algn="ctr" indent="0" marL="0">
+              <a:buNone/>
+            </a:pPr>
+            <a:r>
+              <a:rPr lang="en-US" sz="1100" b="1" dirty="0">
+                <a:solidFill>
+                  <a:srgbClr val="475569"/>
                 </a:solidFill>
                 <a:latin typeface="Trebuchet MS" pitchFamily="34" charset="0"/>
                 <a:ea typeface="Trebuchet MS" pitchFamily="34" charset="-122"/>
                 <a:cs typeface="Trebuchet MS" pitchFamily="34" charset="-120"/>
               </a:rPr>
-              <a:t>ly</a:t>
-            </a:r>
-            <a:endParaRPr lang="en-US" sz="1300" dirty="0"/>
-          </a:p>
-        </p:txBody>
-      </p:sp>
-      <p:sp>
-        <p:nvSpPr>
-          <p:cNvPr id="24" name="Text 22"/>
-          <p:cNvSpPr/>
-          <p:nvPr/>
-        </p:nvSpPr>
-        <p:spPr>
-          <a:xfrm>
-            <a:off x="6519672" y="2569464"/>
-            <a:ext cx="1828800" cy="201168"/>
+              <a:t>Syllables</a:t>
+            </a:r>
+            <a:endParaRPr lang="en-US" sz="1100" dirty="0"/>
+          </a:p>
+        </p:txBody>
+      </p:sp>
+      <p:sp>
+        <p:nvSpPr>
+          <p:cNvPr id="24" name="Shape 22"/>
+          <p:cNvSpPr/>
+          <p:nvPr/>
+        </p:nvSpPr>
+        <p:spPr>
+          <a:xfrm>
+            <a:off x="1874520" y="3273552"/>
+            <a:ext cx="6903720" cy="658368"/>
+          </a:xfrm>
+          <a:prstGeom prst="rect">
+            <a:avLst>
+              <a:gd name="adj" fmla="val 8333"/>
+            </a:avLst>
+          </a:prstGeom>
+          <a:solidFill>
+            <a:srgbClr val="CCFBF1"/>
+          </a:solidFill>
+          <a:ln w="12700">
+            <a:solidFill>
+              <a:srgbClr val="0D9488"/>
+            </a:solidFill>
+            <a:prstDash val="solid"/>
+          </a:ln>
+        </p:spPr>
+      </p:sp>
+      <p:sp>
+        <p:nvSpPr>
+          <p:cNvPr id="25" name="Shape 23"/>
+          <p:cNvSpPr/>
+          <p:nvPr/>
+        </p:nvSpPr>
+        <p:spPr>
+          <a:xfrm>
+            <a:off x="1978152" y="3364992"/>
+            <a:ext cx="1225296" cy="475488"/>
+          </a:xfrm>
+          <a:prstGeom prst="rect">
+            <a:avLst>
+              <a:gd name="adj" fmla="val 9615"/>
+            </a:avLst>
+          </a:prstGeom>
+          <a:solidFill>
+            <a:srgbClr val="FFFFFF"/>
+          </a:solidFill>
+          <a:ln w="12700">
+            <a:solidFill>
+              <a:srgbClr val="0D9488"/>
+            </a:solidFill>
+            <a:prstDash val="solid"/>
+          </a:ln>
+        </p:spPr>
+      </p:sp>
+      <p:sp>
+        <p:nvSpPr>
+          <p:cNvPr id="26" name="Text 24"/>
+          <p:cNvSpPr/>
+          <p:nvPr/>
+        </p:nvSpPr>
+        <p:spPr>
+          <a:xfrm>
+            <a:off x="1978152" y="3364992"/>
+            <a:ext cx="1225296" cy="475488"/>
+          </a:xfrm>
+          <a:prstGeom prst="rect">
+            <a:avLst/>
+          </a:prstGeom>
+          <a:noFill/>
+          <a:ln/>
+        </p:spPr>
+        <p:txBody>
+          <a:bodyPr wrap="square" lIns="0" tIns="0" rIns="0" bIns="0" rtlCol="0" anchor="ctr"/>
+          <a:lstStyle/>
+          <a:p>
+            <a:pPr algn="ctr" indent="0" marL="0">
+              <a:buNone/>
+            </a:pPr>
+            <a:r>
+              <a:rPr lang="en-US" sz="1400" b="1" dirty="0">
+                <a:solidFill>
+                  <a:srgbClr val="0D9488"/>
+                </a:solidFill>
+                <a:latin typeface="Trebuchet MS" pitchFamily="34" charset="0"/>
+                <a:ea typeface="Trebuchet MS" pitchFamily="34" charset="-122"/>
+                <a:cs typeface="Trebuchet MS" pitchFamily="34" charset="-120"/>
+              </a:rPr>
+              <a:t>ge</a:t>
+            </a:r>
+            <a:endParaRPr lang="en-US" sz="1400" dirty="0"/>
+          </a:p>
+        </p:txBody>
+      </p:sp>
+      <p:sp>
+        <p:nvSpPr>
+          <p:cNvPr id="27" name="Text 25"/>
+          <p:cNvSpPr/>
+          <p:nvPr/>
+        </p:nvSpPr>
+        <p:spPr>
+          <a:xfrm>
+            <a:off x="3203448" y="3364992"/>
+            <a:ext cx="76200" cy="475488"/>
+          </a:xfrm>
+          <a:prstGeom prst="rect">
+            <a:avLst/>
+          </a:prstGeom>
+          <a:noFill/>
+          <a:ln/>
+        </p:spPr>
+        <p:txBody>
+          <a:bodyPr wrap="square" lIns="0" tIns="0" rIns="0" bIns="0" rtlCol="0" anchor="ctr"/>
+          <a:lstStyle/>
+          <a:p>
+            <a:pPr algn="ctr" indent="0" marL="0">
+              <a:buNone/>
+            </a:pPr>
+            <a:r>
+              <a:rPr lang="en-US" sz="1600" b="1" dirty="0">
+                <a:solidFill>
+                  <a:srgbClr val="0D9488"/>
+                </a:solidFill>
+                <a:latin typeface="Trebuchet MS" pitchFamily="34" charset="0"/>
+                <a:ea typeface="Trebuchet MS" pitchFamily="34" charset="-122"/>
+                <a:cs typeface="Trebuchet MS" pitchFamily="34" charset="-120"/>
+              </a:rPr>
+              <a:t>·</a:t>
+            </a:r>
+            <a:endParaRPr lang="en-US" sz="1600" dirty="0"/>
+          </a:p>
+        </p:txBody>
+      </p:sp>
+      <p:sp>
+        <p:nvSpPr>
+          <p:cNvPr id="28" name="Shape 26"/>
+          <p:cNvSpPr/>
+          <p:nvPr/>
+        </p:nvSpPr>
+        <p:spPr>
+          <a:xfrm>
+            <a:off x="3279648" y="3364992"/>
+            <a:ext cx="1225296" cy="475488"/>
+          </a:xfrm>
+          <a:prstGeom prst="rect">
+            <a:avLst>
+              <a:gd name="adj" fmla="val 9615"/>
+            </a:avLst>
+          </a:prstGeom>
+          <a:solidFill>
+            <a:srgbClr val="FFFFFF"/>
+          </a:solidFill>
+          <a:ln w="12700">
+            <a:solidFill>
+              <a:srgbClr val="0D9488"/>
+            </a:solidFill>
+            <a:prstDash val="solid"/>
+          </a:ln>
+        </p:spPr>
+      </p:sp>
+      <p:sp>
+        <p:nvSpPr>
+          <p:cNvPr id="29" name="Text 27"/>
+          <p:cNvSpPr/>
+          <p:nvPr/>
+        </p:nvSpPr>
+        <p:spPr>
+          <a:xfrm>
+            <a:off x="3279648" y="3364992"/>
+            <a:ext cx="1225296" cy="475488"/>
+          </a:xfrm>
+          <a:prstGeom prst="rect">
+            <a:avLst/>
+          </a:prstGeom>
+          <a:noFill/>
+          <a:ln/>
+        </p:spPr>
+        <p:txBody>
+          <a:bodyPr wrap="square" lIns="0" tIns="0" rIns="0" bIns="0" rtlCol="0" anchor="ctr"/>
+          <a:lstStyle/>
+          <a:p>
+            <a:pPr algn="ctr" indent="0" marL="0">
+              <a:buNone/>
+            </a:pPr>
+            <a:r>
+              <a:rPr lang="en-US" sz="1400" b="1" dirty="0">
+                <a:solidFill>
+                  <a:srgbClr val="0D9488"/>
+                </a:solidFill>
+                <a:latin typeface="Trebuchet MS" pitchFamily="34" charset="0"/>
+                <a:ea typeface="Trebuchet MS" pitchFamily="34" charset="-122"/>
+                <a:cs typeface="Trebuchet MS" pitchFamily="34" charset="-120"/>
+              </a:rPr>
+              <a:t>o</a:t>
+            </a:r>
+            <a:endParaRPr lang="en-US" sz="1400" dirty="0"/>
+          </a:p>
+        </p:txBody>
+      </p:sp>
+      <p:sp>
+        <p:nvSpPr>
+          <p:cNvPr id="30" name="Text 28"/>
+          <p:cNvSpPr/>
+          <p:nvPr/>
+        </p:nvSpPr>
+        <p:spPr>
+          <a:xfrm>
+            <a:off x="4504944" y="3364992"/>
+            <a:ext cx="76200" cy="475488"/>
+          </a:xfrm>
+          <a:prstGeom prst="rect">
+            <a:avLst/>
+          </a:prstGeom>
+          <a:noFill/>
+          <a:ln/>
+        </p:spPr>
+        <p:txBody>
+          <a:bodyPr wrap="square" lIns="0" tIns="0" rIns="0" bIns="0" rtlCol="0" anchor="ctr"/>
+          <a:lstStyle/>
+          <a:p>
+            <a:pPr algn="ctr" indent="0" marL="0">
+              <a:buNone/>
+            </a:pPr>
+            <a:r>
+              <a:rPr lang="en-US" sz="1600" b="1" dirty="0">
+                <a:solidFill>
+                  <a:srgbClr val="0D9488"/>
+                </a:solidFill>
+                <a:latin typeface="Trebuchet MS" pitchFamily="34" charset="0"/>
+                <a:ea typeface="Trebuchet MS" pitchFamily="34" charset="-122"/>
+                <a:cs typeface="Trebuchet MS" pitchFamily="34" charset="-120"/>
+              </a:rPr>
+              <a:t>·</a:t>
+            </a:r>
+            <a:endParaRPr lang="en-US" sz="1600" dirty="0"/>
+          </a:p>
+        </p:txBody>
+      </p:sp>
+      <p:sp>
+        <p:nvSpPr>
+          <p:cNvPr id="31" name="Shape 29"/>
+          <p:cNvSpPr/>
+          <p:nvPr/>
+        </p:nvSpPr>
+        <p:spPr>
+          <a:xfrm>
+            <a:off x="4581144" y="3364992"/>
+            <a:ext cx="1225296" cy="475488"/>
+          </a:xfrm>
+          <a:prstGeom prst="rect">
+            <a:avLst>
+              <a:gd name="adj" fmla="val 9615"/>
+            </a:avLst>
+          </a:prstGeom>
+          <a:solidFill>
+            <a:srgbClr val="FFFFFF"/>
+          </a:solidFill>
+          <a:ln w="12700">
+            <a:solidFill>
+              <a:srgbClr val="0D9488"/>
+            </a:solidFill>
+            <a:prstDash val="solid"/>
+          </a:ln>
+        </p:spPr>
+      </p:sp>
+      <p:sp>
+        <p:nvSpPr>
+          <p:cNvPr id="32" name="Text 30"/>
+          <p:cNvSpPr/>
+          <p:nvPr/>
+        </p:nvSpPr>
+        <p:spPr>
+          <a:xfrm>
+            <a:off x="4581144" y="3364992"/>
+            <a:ext cx="1225296" cy="475488"/>
+          </a:xfrm>
+          <a:prstGeom prst="rect">
+            <a:avLst/>
+          </a:prstGeom>
+          <a:noFill/>
+          <a:ln/>
+        </p:spPr>
+        <p:txBody>
+          <a:bodyPr wrap="square" lIns="0" tIns="0" rIns="0" bIns="0" rtlCol="0" anchor="ctr"/>
+          <a:lstStyle/>
+          <a:p>
+            <a:pPr algn="ctr" indent="0" marL="0">
+              <a:buNone/>
+            </a:pPr>
+            <a:r>
+              <a:rPr lang="en-US" sz="1400" b="1" dirty="0">
+                <a:solidFill>
+                  <a:srgbClr val="0D9488"/>
+                </a:solidFill>
+                <a:latin typeface="Trebuchet MS" pitchFamily="34" charset="0"/>
+                <a:ea typeface="Trebuchet MS" pitchFamily="34" charset="-122"/>
+                <a:cs typeface="Trebuchet MS" pitchFamily="34" charset="-120"/>
+              </a:rPr>
+              <a:t>log</a:t>
+            </a:r>
+            <a:endParaRPr lang="en-US" sz="1400" dirty="0"/>
+          </a:p>
+        </p:txBody>
+      </p:sp>
+      <p:sp>
+        <p:nvSpPr>
+          <p:cNvPr id="33" name="Text 31"/>
+          <p:cNvSpPr/>
+          <p:nvPr/>
+        </p:nvSpPr>
+        <p:spPr>
+          <a:xfrm>
+            <a:off x="5806440" y="3364992"/>
+            <a:ext cx="76200" cy="475488"/>
+          </a:xfrm>
+          <a:prstGeom prst="rect">
+            <a:avLst/>
+          </a:prstGeom>
+          <a:noFill/>
+          <a:ln/>
+        </p:spPr>
+        <p:txBody>
+          <a:bodyPr wrap="square" lIns="0" tIns="0" rIns="0" bIns="0" rtlCol="0" anchor="ctr"/>
+          <a:lstStyle/>
+          <a:p>
+            <a:pPr algn="ctr" indent="0" marL="0">
+              <a:buNone/>
+            </a:pPr>
+            <a:r>
+              <a:rPr lang="en-US" sz="1600" b="1" dirty="0">
+                <a:solidFill>
+                  <a:srgbClr val="0D9488"/>
+                </a:solidFill>
+                <a:latin typeface="Trebuchet MS" pitchFamily="34" charset="0"/>
+                <a:ea typeface="Trebuchet MS" pitchFamily="34" charset="-122"/>
+                <a:cs typeface="Trebuchet MS" pitchFamily="34" charset="-120"/>
+              </a:rPr>
+              <a:t>·</a:t>
+            </a:r>
+            <a:endParaRPr lang="en-US" sz="1600" dirty="0"/>
+          </a:p>
+        </p:txBody>
+      </p:sp>
+      <p:sp>
+        <p:nvSpPr>
+          <p:cNvPr id="34" name="Shape 32"/>
+          <p:cNvSpPr/>
+          <p:nvPr/>
+        </p:nvSpPr>
+        <p:spPr>
+          <a:xfrm>
+            <a:off x="5882640" y="3364992"/>
+            <a:ext cx="1225296" cy="475488"/>
+          </a:xfrm>
+          <a:prstGeom prst="rect">
+            <a:avLst>
+              <a:gd name="adj" fmla="val 9615"/>
+            </a:avLst>
+          </a:prstGeom>
+          <a:solidFill>
+            <a:srgbClr val="FFFFFF"/>
+          </a:solidFill>
+          <a:ln w="12700">
+            <a:solidFill>
+              <a:srgbClr val="0D9488"/>
+            </a:solidFill>
+            <a:prstDash val="solid"/>
+          </a:ln>
+        </p:spPr>
+      </p:sp>
+      <p:sp>
+        <p:nvSpPr>
+          <p:cNvPr id="35" name="Text 33"/>
+          <p:cNvSpPr/>
+          <p:nvPr/>
+        </p:nvSpPr>
+        <p:spPr>
+          <a:xfrm>
+            <a:off x="5882640" y="3364992"/>
+            <a:ext cx="1225296" cy="475488"/>
+          </a:xfrm>
+          <a:prstGeom prst="rect">
+            <a:avLst/>
+          </a:prstGeom>
+          <a:noFill/>
+          <a:ln/>
+        </p:spPr>
+        <p:txBody>
+          <a:bodyPr wrap="square" lIns="0" tIns="0" rIns="0" bIns="0" rtlCol="0" anchor="ctr"/>
+          <a:lstStyle/>
+          <a:p>
+            <a:pPr algn="ctr" indent="0" marL="0">
+              <a:buNone/>
+            </a:pPr>
+            <a:r>
+              <a:rPr lang="en-US" sz="1400" b="1" dirty="0">
+                <a:solidFill>
+                  <a:srgbClr val="0D9488"/>
+                </a:solidFill>
+                <a:latin typeface="Trebuchet MS" pitchFamily="34" charset="0"/>
+                <a:ea typeface="Trebuchet MS" pitchFamily="34" charset="-122"/>
+                <a:cs typeface="Trebuchet MS" pitchFamily="34" charset="-120"/>
+              </a:rPr>
+              <a:t>i</a:t>
+            </a:r>
+            <a:endParaRPr lang="en-US" sz="1400" dirty="0"/>
+          </a:p>
+        </p:txBody>
+      </p:sp>
+      <p:sp>
+        <p:nvSpPr>
+          <p:cNvPr id="36" name="Text 34"/>
+          <p:cNvSpPr/>
+          <p:nvPr/>
+        </p:nvSpPr>
+        <p:spPr>
+          <a:xfrm>
+            <a:off x="7107936" y="3364992"/>
+            <a:ext cx="76200" cy="475488"/>
+          </a:xfrm>
+          <a:prstGeom prst="rect">
+            <a:avLst/>
+          </a:prstGeom>
+          <a:noFill/>
+          <a:ln/>
+        </p:spPr>
+        <p:txBody>
+          <a:bodyPr wrap="square" lIns="0" tIns="0" rIns="0" bIns="0" rtlCol="0" anchor="ctr"/>
+          <a:lstStyle/>
+          <a:p>
+            <a:pPr algn="ctr" indent="0" marL="0">
+              <a:buNone/>
+            </a:pPr>
+            <a:r>
+              <a:rPr lang="en-US" sz="1600" b="1" dirty="0">
+                <a:solidFill>
+                  <a:srgbClr val="0D9488"/>
+                </a:solidFill>
+                <a:latin typeface="Trebuchet MS" pitchFamily="34" charset="0"/>
+                <a:ea typeface="Trebuchet MS" pitchFamily="34" charset="-122"/>
+                <a:cs typeface="Trebuchet MS" pitchFamily="34" charset="-120"/>
+              </a:rPr>
+              <a:t>·</a:t>
+            </a:r>
+            <a:endParaRPr lang="en-US" sz="1600" dirty="0"/>
+          </a:p>
+        </p:txBody>
+      </p:sp>
+      <p:sp>
+        <p:nvSpPr>
+          <p:cNvPr id="37" name="Shape 35"/>
+          <p:cNvSpPr/>
+          <p:nvPr/>
+        </p:nvSpPr>
+        <p:spPr>
+          <a:xfrm>
+            <a:off x="7184136" y="3364992"/>
+            <a:ext cx="1225296" cy="475488"/>
+          </a:xfrm>
+          <a:prstGeom prst="rect">
+            <a:avLst>
+              <a:gd name="adj" fmla="val 9615"/>
+            </a:avLst>
+          </a:prstGeom>
+          <a:solidFill>
+            <a:srgbClr val="FFFFFF"/>
+          </a:solidFill>
+          <a:ln w="12700">
+            <a:solidFill>
+              <a:srgbClr val="0D9488"/>
+            </a:solidFill>
+            <a:prstDash val="solid"/>
+          </a:ln>
+        </p:spPr>
+      </p:sp>
+      <p:sp>
+        <p:nvSpPr>
+          <p:cNvPr id="38" name="Text 36"/>
+          <p:cNvSpPr/>
+          <p:nvPr/>
+        </p:nvSpPr>
+        <p:spPr>
+          <a:xfrm>
+            <a:off x="7184136" y="3364992"/>
+            <a:ext cx="1225296" cy="475488"/>
+          </a:xfrm>
+          <a:prstGeom prst="rect">
+            <a:avLst/>
+          </a:prstGeom>
+          <a:noFill/>
+          <a:ln/>
+        </p:spPr>
+        <p:txBody>
+          <a:bodyPr wrap="square" lIns="0" tIns="0" rIns="0" bIns="0" rtlCol="0" anchor="ctr"/>
+          <a:lstStyle/>
+          <a:p>
+            <a:pPr algn="ctr" indent="0" marL="0">
+              <a:buNone/>
+            </a:pPr>
+            <a:r>
+              <a:rPr lang="en-US" sz="1400" b="1" dirty="0">
+                <a:solidFill>
+                  <a:srgbClr val="0D9488"/>
+                </a:solidFill>
+                <a:latin typeface="Trebuchet MS" pitchFamily="34" charset="0"/>
+                <a:ea typeface="Trebuchet MS" pitchFamily="34" charset="-122"/>
+                <a:cs typeface="Trebuchet MS" pitchFamily="34" charset="-120"/>
+              </a:rPr>
+              <a:t>cal</a:t>
+            </a:r>
+            <a:endParaRPr lang="en-US" sz="1400" dirty="0"/>
+          </a:p>
+        </p:txBody>
+      </p:sp>
+      <p:sp>
+        <p:nvSpPr>
+          <p:cNvPr id="39" name="Shape 37"/>
+          <p:cNvSpPr/>
+          <p:nvPr/>
+        </p:nvSpPr>
+        <p:spPr>
+          <a:xfrm>
+            <a:off x="365760" y="4096512"/>
+            <a:ext cx="1371600" cy="804672"/>
+          </a:xfrm>
+          <a:prstGeom prst="rect">
+            <a:avLst>
+              <a:gd name="adj" fmla="val 6818"/>
+            </a:avLst>
+          </a:prstGeom>
+          <a:solidFill>
+            <a:srgbClr val="E2E8F0"/>
+          </a:solidFill>
+          <a:ln w="12700">
+            <a:solidFill>
+              <a:srgbClr val="E2E8F0"/>
+            </a:solidFill>
+            <a:prstDash val="solid"/>
+          </a:ln>
+        </p:spPr>
+      </p:sp>
+      <p:sp>
+        <p:nvSpPr>
+          <p:cNvPr id="40" name="Text 38"/>
+          <p:cNvSpPr/>
+          <p:nvPr/>
+        </p:nvSpPr>
+        <p:spPr>
+          <a:xfrm>
+            <a:off x="365760" y="4096512"/>
+            <a:ext cx="1371600" cy="804672"/>
+          </a:xfrm>
+          <a:prstGeom prst="rect">
+            <a:avLst/>
+          </a:prstGeom>
+          <a:noFill/>
+          <a:ln/>
+        </p:spPr>
+        <p:txBody>
+          <a:bodyPr wrap="square" lIns="0" tIns="0" rIns="0" bIns="0" rtlCol="0" anchor="ctr"/>
+          <a:lstStyle/>
+          <a:p>
+            <a:pPr algn="ctr" indent="0" marL="0">
+              <a:buNone/>
+            </a:pPr>
+            <a:r>
+              <a:rPr lang="en-US" sz="1100" b="1" dirty="0">
+                <a:solidFill>
+                  <a:srgbClr val="475569"/>
+                </a:solidFill>
+                <a:latin typeface="Trebuchet MS" pitchFamily="34" charset="0"/>
+                <a:ea typeface="Trebuchet MS" pitchFamily="34" charset="-122"/>
+                <a:cs typeface="Trebuchet MS" pitchFamily="34" charset="-120"/>
+              </a:rPr>
+              <a:t>Phonemes</a:t>
+            </a:r>
+            <a:endParaRPr lang="en-US" sz="1100" dirty="0"/>
+          </a:p>
+        </p:txBody>
+      </p:sp>
+      <p:sp>
+        <p:nvSpPr>
+          <p:cNvPr id="41" name="Shape 39"/>
+          <p:cNvSpPr/>
+          <p:nvPr/>
+        </p:nvSpPr>
+        <p:spPr>
+          <a:xfrm>
+            <a:off x="1874520" y="4096512"/>
+            <a:ext cx="6903720" cy="804672"/>
+          </a:xfrm>
+          <a:prstGeom prst="rect">
+            <a:avLst>
+              <a:gd name="adj" fmla="val 6818"/>
+            </a:avLst>
+          </a:prstGeom>
+          <a:solidFill>
+            <a:srgbClr val="FCE7F3"/>
+          </a:solidFill>
+          <a:ln w="12700">
+            <a:solidFill>
+              <a:srgbClr val="DB2777"/>
+            </a:solidFill>
+            <a:prstDash val="solid"/>
+          </a:ln>
+        </p:spPr>
+      </p:sp>
+      <p:sp>
+        <p:nvSpPr>
+          <p:cNvPr id="42" name="Shape 40"/>
+          <p:cNvSpPr/>
+          <p:nvPr/>
+        </p:nvSpPr>
+        <p:spPr>
+          <a:xfrm>
+            <a:off x="1951330" y="4169664"/>
+            <a:ext cx="676656" cy="384048"/>
+          </a:xfrm>
+          <a:prstGeom prst="rect">
+            <a:avLst>
+              <a:gd name="adj" fmla="val 9524"/>
+            </a:avLst>
+          </a:prstGeom>
+          <a:solidFill>
+            <a:srgbClr val="FFFFFF"/>
+          </a:solidFill>
+          <a:ln w="12700">
+            <a:solidFill>
+              <a:srgbClr val="DB2777"/>
+            </a:solidFill>
+            <a:prstDash val="solid"/>
+          </a:ln>
+        </p:spPr>
+      </p:sp>
+      <p:sp>
+        <p:nvSpPr>
+          <p:cNvPr id="43" name="Text 41"/>
+          <p:cNvSpPr/>
+          <p:nvPr/>
+        </p:nvSpPr>
+        <p:spPr>
+          <a:xfrm>
+            <a:off x="1951330" y="4169664"/>
+            <a:ext cx="676656" cy="384048"/>
+          </a:xfrm>
+          <a:prstGeom prst="rect">
+            <a:avLst/>
+          </a:prstGeom>
+          <a:noFill/>
+          <a:ln/>
+        </p:spPr>
+        <p:txBody>
+          <a:bodyPr wrap="square" lIns="0" tIns="0" rIns="0" bIns="0" rtlCol="0" anchor="ctr"/>
+          <a:lstStyle/>
+          <a:p>
+            <a:pPr algn="ctr" indent="0" marL="0">
+              <a:buNone/>
+            </a:pPr>
+            <a:r>
+              <a:rPr lang="en-US" sz="900" b="1" dirty="0">
+                <a:solidFill>
+                  <a:srgbClr val="9D174D"/>
+                </a:solidFill>
+                <a:latin typeface="Trebuchet MS" pitchFamily="34" charset="0"/>
+                <a:ea typeface="Trebuchet MS" pitchFamily="34" charset="-122"/>
+                <a:cs typeface="Trebuchet MS" pitchFamily="34" charset="-120"/>
+              </a:rPr>
+              <a:t>g</a:t>
+            </a:r>
+            <a:endParaRPr lang="en-US" sz="900" dirty="0"/>
+          </a:p>
+        </p:txBody>
+      </p:sp>
+      <p:sp>
+        <p:nvSpPr>
+          <p:cNvPr id="44" name="Shape 42"/>
+          <p:cNvSpPr/>
+          <p:nvPr/>
+        </p:nvSpPr>
+        <p:spPr>
+          <a:xfrm>
+            <a:off x="2677363" y="4169664"/>
+            <a:ext cx="676656" cy="384048"/>
+          </a:xfrm>
+          <a:prstGeom prst="rect">
+            <a:avLst>
+              <a:gd name="adj" fmla="val 9524"/>
+            </a:avLst>
+          </a:prstGeom>
+          <a:solidFill>
+            <a:srgbClr val="FFFFFF"/>
+          </a:solidFill>
+          <a:ln w="12700">
+            <a:solidFill>
+              <a:srgbClr val="DB2777"/>
+            </a:solidFill>
+            <a:prstDash val="solid"/>
+          </a:ln>
+        </p:spPr>
+      </p:sp>
+      <p:sp>
+        <p:nvSpPr>
+          <p:cNvPr id="45" name="Text 43"/>
+          <p:cNvSpPr/>
+          <p:nvPr/>
+        </p:nvSpPr>
+        <p:spPr>
+          <a:xfrm>
+            <a:off x="2677363" y="4169664"/>
+            <a:ext cx="676656" cy="384048"/>
+          </a:xfrm>
+          <a:prstGeom prst="rect">
+            <a:avLst/>
+          </a:prstGeom>
+          <a:noFill/>
+          <a:ln/>
+        </p:spPr>
+        <p:txBody>
+          <a:bodyPr wrap="square" lIns="0" tIns="0" rIns="0" bIns="0" rtlCol="0" anchor="ctr"/>
+          <a:lstStyle/>
+          <a:p>
+            <a:pPr algn="ctr" indent="0" marL="0">
+              <a:buNone/>
+            </a:pPr>
+            <a:r>
+              <a:rPr lang="en-US" sz="900" b="1" dirty="0">
+                <a:solidFill>
+                  <a:srgbClr val="9D174D"/>
+                </a:solidFill>
+                <a:latin typeface="Trebuchet MS" pitchFamily="34" charset="0"/>
+                <a:ea typeface="Trebuchet MS" pitchFamily="34" charset="-122"/>
+                <a:cs typeface="Trebuchet MS" pitchFamily="34" charset="-120"/>
+              </a:rPr>
+              <a:t>e</a:t>
+            </a:r>
+            <a:endParaRPr lang="en-US" sz="900" dirty="0"/>
+          </a:p>
+        </p:txBody>
+      </p:sp>
+      <p:sp>
+        <p:nvSpPr>
+          <p:cNvPr id="46" name="Shape 44"/>
+          <p:cNvSpPr/>
+          <p:nvPr/>
+        </p:nvSpPr>
+        <p:spPr>
+          <a:xfrm>
+            <a:off x="3403397" y="4169664"/>
+            <a:ext cx="676656" cy="384048"/>
+          </a:xfrm>
+          <a:prstGeom prst="rect">
+            <a:avLst>
+              <a:gd name="adj" fmla="val 9524"/>
+            </a:avLst>
+          </a:prstGeom>
+          <a:solidFill>
+            <a:srgbClr val="FFFFFF"/>
+          </a:solidFill>
+          <a:ln w="12700">
+            <a:solidFill>
+              <a:srgbClr val="DB2777"/>
+            </a:solidFill>
+            <a:prstDash val="solid"/>
+          </a:ln>
+        </p:spPr>
+      </p:sp>
+      <p:sp>
+        <p:nvSpPr>
+          <p:cNvPr id="47" name="Text 45"/>
+          <p:cNvSpPr/>
+          <p:nvPr/>
+        </p:nvSpPr>
+        <p:spPr>
+          <a:xfrm>
+            <a:off x="3403397" y="4169664"/>
+            <a:ext cx="676656" cy="384048"/>
+          </a:xfrm>
+          <a:prstGeom prst="rect">
+            <a:avLst/>
+          </a:prstGeom>
+          <a:noFill/>
+          <a:ln/>
+        </p:spPr>
+        <p:txBody>
+          <a:bodyPr wrap="square" lIns="0" tIns="0" rIns="0" bIns="0" rtlCol="0" anchor="ctr"/>
+          <a:lstStyle/>
+          <a:p>
+            <a:pPr algn="ctr" indent="0" marL="0">
+              <a:buNone/>
+            </a:pPr>
+            <a:r>
+              <a:rPr lang="en-US" sz="900" b="1" dirty="0">
+                <a:solidFill>
+                  <a:srgbClr val="9D174D"/>
+                </a:solidFill>
+                <a:latin typeface="Trebuchet MS" pitchFamily="34" charset="0"/>
+                <a:ea typeface="Trebuchet MS" pitchFamily="34" charset="-122"/>
+                <a:cs typeface="Trebuchet MS" pitchFamily="34" charset="-120"/>
+              </a:rPr>
+              <a:t>o</a:t>
+            </a:r>
+            <a:endParaRPr lang="en-US" sz="900" dirty="0"/>
+          </a:p>
+        </p:txBody>
+      </p:sp>
+      <p:sp>
+        <p:nvSpPr>
+          <p:cNvPr id="48" name="Shape 46"/>
+          <p:cNvSpPr/>
+          <p:nvPr/>
+        </p:nvSpPr>
+        <p:spPr>
+          <a:xfrm>
+            <a:off x="4129430" y="4169664"/>
+            <a:ext cx="676656" cy="384048"/>
+          </a:xfrm>
+          <a:prstGeom prst="rect">
+            <a:avLst>
+              <a:gd name="adj" fmla="val 9524"/>
+            </a:avLst>
+          </a:prstGeom>
+          <a:solidFill>
+            <a:srgbClr val="FFFFFF"/>
+          </a:solidFill>
+          <a:ln w="12700">
+            <a:solidFill>
+              <a:srgbClr val="DB2777"/>
+            </a:solidFill>
+            <a:prstDash val="solid"/>
+          </a:ln>
+        </p:spPr>
+      </p:sp>
+      <p:sp>
+        <p:nvSpPr>
+          <p:cNvPr id="49" name="Text 47"/>
+          <p:cNvSpPr/>
+          <p:nvPr/>
+        </p:nvSpPr>
+        <p:spPr>
+          <a:xfrm>
+            <a:off x="4129430" y="4169664"/>
+            <a:ext cx="676656" cy="384048"/>
+          </a:xfrm>
+          <a:prstGeom prst="rect">
+            <a:avLst/>
+          </a:prstGeom>
+          <a:noFill/>
+          <a:ln/>
+        </p:spPr>
+        <p:txBody>
+          <a:bodyPr wrap="square" lIns="0" tIns="0" rIns="0" bIns="0" rtlCol="0" anchor="ctr"/>
+          <a:lstStyle/>
+          <a:p>
+            <a:pPr algn="ctr" indent="0" marL="0">
+              <a:buNone/>
+            </a:pPr>
+            <a:r>
+              <a:rPr lang="en-US" sz="900" b="1" dirty="0">
+                <a:solidFill>
+                  <a:srgbClr val="9D174D"/>
+                </a:solidFill>
+                <a:latin typeface="Trebuchet MS" pitchFamily="34" charset="0"/>
+                <a:ea typeface="Trebuchet MS" pitchFamily="34" charset="-122"/>
+                <a:cs typeface="Trebuchet MS" pitchFamily="34" charset="-120"/>
+              </a:rPr>
+              <a:t>l</a:t>
+            </a:r>
+            <a:endParaRPr lang="en-US" sz="900" dirty="0"/>
+          </a:p>
+        </p:txBody>
+      </p:sp>
+      <p:sp>
+        <p:nvSpPr>
+          <p:cNvPr id="50" name="Shape 48"/>
+          <p:cNvSpPr/>
+          <p:nvPr/>
+        </p:nvSpPr>
+        <p:spPr>
+          <a:xfrm>
+            <a:off x="4855464" y="4169664"/>
+            <a:ext cx="676656" cy="384048"/>
+          </a:xfrm>
+          <a:prstGeom prst="rect">
+            <a:avLst>
+              <a:gd name="adj" fmla="val 9524"/>
+            </a:avLst>
+          </a:prstGeom>
+          <a:solidFill>
+            <a:srgbClr val="FFFFFF"/>
+          </a:solidFill>
+          <a:ln w="12700">
+            <a:solidFill>
+              <a:srgbClr val="DB2777"/>
+            </a:solidFill>
+            <a:prstDash val="solid"/>
+          </a:ln>
+        </p:spPr>
+      </p:sp>
+      <p:sp>
+        <p:nvSpPr>
+          <p:cNvPr id="51" name="Text 49"/>
+          <p:cNvSpPr/>
+          <p:nvPr/>
+        </p:nvSpPr>
+        <p:spPr>
+          <a:xfrm>
+            <a:off x="4855464" y="4169664"/>
+            <a:ext cx="676656" cy="384048"/>
+          </a:xfrm>
+          <a:prstGeom prst="rect">
+            <a:avLst/>
+          </a:prstGeom>
+          <a:noFill/>
+          <a:ln/>
+        </p:spPr>
+        <p:txBody>
+          <a:bodyPr wrap="square" lIns="0" tIns="0" rIns="0" bIns="0" rtlCol="0" anchor="ctr"/>
+          <a:lstStyle/>
+          <a:p>
+            <a:pPr algn="ctr" indent="0" marL="0">
+              <a:buNone/>
+            </a:pPr>
+            <a:r>
+              <a:rPr lang="en-US" sz="900" b="1" dirty="0">
+                <a:solidFill>
+                  <a:srgbClr val="9D174D"/>
+                </a:solidFill>
+                <a:latin typeface="Trebuchet MS" pitchFamily="34" charset="0"/>
+                <a:ea typeface="Trebuchet MS" pitchFamily="34" charset="-122"/>
+                <a:cs typeface="Trebuchet MS" pitchFamily="34" charset="-120"/>
+              </a:rPr>
+              <a:t>o</a:t>
+            </a:r>
+            <a:endParaRPr lang="en-US" sz="900" dirty="0"/>
+          </a:p>
+        </p:txBody>
+      </p:sp>
+      <p:sp>
+        <p:nvSpPr>
+          <p:cNvPr id="52" name="Shape 50"/>
+          <p:cNvSpPr/>
+          <p:nvPr/>
+        </p:nvSpPr>
+        <p:spPr>
+          <a:xfrm>
+            <a:off x="5581498" y="4169664"/>
+            <a:ext cx="676656" cy="384048"/>
+          </a:xfrm>
+          <a:prstGeom prst="rect">
+            <a:avLst>
+              <a:gd name="adj" fmla="val 9524"/>
+            </a:avLst>
+          </a:prstGeom>
+          <a:solidFill>
+            <a:srgbClr val="FFFFFF"/>
+          </a:solidFill>
+          <a:ln w="12700">
+            <a:solidFill>
+              <a:srgbClr val="DB2777"/>
+            </a:solidFill>
+            <a:prstDash val="solid"/>
+          </a:ln>
+        </p:spPr>
+      </p:sp>
+      <p:sp>
+        <p:nvSpPr>
+          <p:cNvPr id="53" name="Text 51"/>
+          <p:cNvSpPr/>
+          <p:nvPr/>
+        </p:nvSpPr>
+        <p:spPr>
+          <a:xfrm>
+            <a:off x="5581498" y="4169664"/>
+            <a:ext cx="676656" cy="384048"/>
+          </a:xfrm>
+          <a:prstGeom prst="rect">
+            <a:avLst/>
+          </a:prstGeom>
+          <a:noFill/>
+          <a:ln/>
+        </p:spPr>
+        <p:txBody>
+          <a:bodyPr wrap="square" lIns="0" tIns="0" rIns="0" bIns="0" rtlCol="0" anchor="ctr"/>
+          <a:lstStyle/>
+          <a:p>
+            <a:pPr algn="ctr" indent="0" marL="0">
+              <a:buNone/>
+            </a:pPr>
+            <a:r>
+              <a:rPr lang="en-US" sz="900" b="1" dirty="0">
+                <a:solidFill>
+                  <a:srgbClr val="9D174D"/>
+                </a:solidFill>
+                <a:latin typeface="Trebuchet MS" pitchFamily="34" charset="0"/>
+                <a:ea typeface="Trebuchet MS" pitchFamily="34" charset="-122"/>
+                <a:cs typeface="Trebuchet MS" pitchFamily="34" charset="-120"/>
+              </a:rPr>
+              <a:t>g</a:t>
+            </a:r>
+            <a:endParaRPr lang="en-US" sz="900" dirty="0"/>
+          </a:p>
+        </p:txBody>
+      </p:sp>
+      <p:sp>
+        <p:nvSpPr>
+          <p:cNvPr id="54" name="Shape 52"/>
+          <p:cNvSpPr/>
+          <p:nvPr/>
+        </p:nvSpPr>
+        <p:spPr>
+          <a:xfrm>
+            <a:off x="6307531" y="4169664"/>
+            <a:ext cx="676656" cy="384048"/>
+          </a:xfrm>
+          <a:prstGeom prst="rect">
+            <a:avLst>
+              <a:gd name="adj" fmla="val 9524"/>
+            </a:avLst>
+          </a:prstGeom>
+          <a:solidFill>
+            <a:srgbClr val="FFFFFF"/>
+          </a:solidFill>
+          <a:ln w="12700">
+            <a:solidFill>
+              <a:srgbClr val="DB2777"/>
+            </a:solidFill>
+            <a:prstDash val="solid"/>
+          </a:ln>
+        </p:spPr>
+      </p:sp>
+      <p:sp>
+        <p:nvSpPr>
+          <p:cNvPr id="55" name="Text 53"/>
+          <p:cNvSpPr/>
+          <p:nvPr/>
+        </p:nvSpPr>
+        <p:spPr>
+          <a:xfrm>
+            <a:off x="6307531" y="4169664"/>
+            <a:ext cx="676656" cy="384048"/>
+          </a:xfrm>
+          <a:prstGeom prst="rect">
+            <a:avLst/>
+          </a:prstGeom>
+          <a:noFill/>
+          <a:ln/>
+        </p:spPr>
+        <p:txBody>
+          <a:bodyPr wrap="square" lIns="0" tIns="0" rIns="0" bIns="0" rtlCol="0" anchor="ctr"/>
+          <a:lstStyle/>
+          <a:p>
+            <a:pPr algn="ctr" indent="0" marL="0">
+              <a:buNone/>
+            </a:pPr>
+            <a:r>
+              <a:rPr lang="en-US" sz="900" b="1" dirty="0">
+                <a:solidFill>
+                  <a:srgbClr val="9D174D"/>
+                </a:solidFill>
+                <a:latin typeface="Trebuchet MS" pitchFamily="34" charset="0"/>
+                <a:ea typeface="Trebuchet MS" pitchFamily="34" charset="-122"/>
+                <a:cs typeface="Trebuchet MS" pitchFamily="34" charset="-120"/>
+              </a:rPr>
+              <a:t>i</a:t>
+            </a:r>
+            <a:endParaRPr lang="en-US" sz="900" dirty="0"/>
+          </a:p>
+        </p:txBody>
+      </p:sp>
+      <p:sp>
+        <p:nvSpPr>
+          <p:cNvPr id="56" name="Shape 54"/>
+          <p:cNvSpPr/>
+          <p:nvPr/>
+        </p:nvSpPr>
+        <p:spPr>
+          <a:xfrm>
+            <a:off x="7033565" y="4169664"/>
+            <a:ext cx="676656" cy="384048"/>
+          </a:xfrm>
+          <a:prstGeom prst="rect">
+            <a:avLst>
+              <a:gd name="adj" fmla="val 9524"/>
+            </a:avLst>
+          </a:prstGeom>
+          <a:solidFill>
+            <a:srgbClr val="FFFFFF"/>
+          </a:solidFill>
+          <a:ln w="12700">
+            <a:solidFill>
+              <a:srgbClr val="DB2777"/>
+            </a:solidFill>
+            <a:prstDash val="solid"/>
+          </a:ln>
+        </p:spPr>
+      </p:sp>
+      <p:sp>
+        <p:nvSpPr>
+          <p:cNvPr id="57" name="Text 55"/>
+          <p:cNvSpPr/>
+          <p:nvPr/>
+        </p:nvSpPr>
+        <p:spPr>
+          <a:xfrm>
+            <a:off x="7033565" y="4169664"/>
+            <a:ext cx="676656" cy="384048"/>
+          </a:xfrm>
+          <a:prstGeom prst="rect">
+            <a:avLst/>
+          </a:prstGeom>
+          <a:noFill/>
+          <a:ln/>
+        </p:spPr>
+        <p:txBody>
+          <a:bodyPr wrap="square" lIns="0" tIns="0" rIns="0" bIns="0" rtlCol="0" anchor="ctr"/>
+          <a:lstStyle/>
+          <a:p>
+            <a:pPr algn="ctr" indent="0" marL="0">
+              <a:buNone/>
+            </a:pPr>
+            <a:r>
+              <a:rPr lang="en-US" sz="900" b="1" dirty="0">
+                <a:solidFill>
+                  <a:srgbClr val="9D174D"/>
+                </a:solidFill>
+                <a:latin typeface="Trebuchet MS" pitchFamily="34" charset="0"/>
+                <a:ea typeface="Trebuchet MS" pitchFamily="34" charset="-122"/>
+                <a:cs typeface="Trebuchet MS" pitchFamily="34" charset="-120"/>
+              </a:rPr>
+              <a:t>c</a:t>
+            </a:r>
+            <a:endParaRPr lang="en-US" sz="900" dirty="0"/>
+          </a:p>
+        </p:txBody>
+      </p:sp>
+      <p:sp>
+        <p:nvSpPr>
+          <p:cNvPr id="58" name="Text 56"/>
+          <p:cNvSpPr/>
+          <p:nvPr/>
+        </p:nvSpPr>
+        <p:spPr>
+          <a:xfrm>
+            <a:off x="7033565" y="4572000"/>
+            <a:ext cx="676656" cy="219456"/>
           </a:xfrm>
           <a:prstGeom prst="rect">
             <a:avLst/>
@@ -29209,1728 +29053,81 @@
               <a:buNone/>
             </a:pPr>
             <a:r>
-              <a:rPr lang="en-US" sz="850" dirty="0">
-                <a:solidFill>
-                  <a:srgbClr val="475569"/>
+              <a:rPr lang="en-US" sz="750" i="1" dirty="0">
+                <a:solidFill>
+                  <a:srgbClr val="94A3B8"/>
                 </a:solidFill>
                 <a:latin typeface="Calibri" pitchFamily="34" charset="0"/>
                 <a:ea typeface="Calibri" pitchFamily="34" charset="-122"/>
                 <a:cs typeface="Calibri" pitchFamily="34" charset="-120"/>
               </a:rPr>
-              <a:t>in a way that is</a:t>
-            </a:r>
-            <a:endParaRPr lang="en-US" sz="850" dirty="0"/>
-          </a:p>
-        </p:txBody>
-      </p:sp>
-      <p:sp>
-        <p:nvSpPr>
-          <p:cNvPr id="25" name="Shape 23"/>
-          <p:cNvSpPr/>
-          <p:nvPr/>
-        </p:nvSpPr>
-        <p:spPr>
-          <a:xfrm>
-            <a:off x="365760" y="3273552"/>
-            <a:ext cx="1371600" cy="658368"/>
+              <a:t>/k/</a:t>
+            </a:r>
+            <a:endParaRPr lang="en-US" sz="750" dirty="0"/>
+          </a:p>
+        </p:txBody>
+      </p:sp>
+      <p:sp>
+        <p:nvSpPr>
+          <p:cNvPr id="59" name="Shape 57"/>
+          <p:cNvSpPr/>
+          <p:nvPr/>
+        </p:nvSpPr>
+        <p:spPr>
+          <a:xfrm>
+            <a:off x="7759598" y="4169664"/>
+            <a:ext cx="676656" cy="384048"/>
           </a:xfrm>
           <a:prstGeom prst="rect">
             <a:avLst>
-              <a:gd name="adj" fmla="val 8333"/>
+              <a:gd name="adj" fmla="val 9524"/>
             </a:avLst>
           </a:prstGeom>
           <a:solidFill>
-            <a:srgbClr val="E2E8F0"/>
-          </a:solidFill>
-          <a:ln w="12700">
-            <a:solidFill>
-              <a:srgbClr val="E2E8F0"/>
-            </a:solidFill>
-            <a:prstDash val="solid"/>
-          </a:ln>
-        </p:spPr>
-      </p:sp>
-      <p:sp>
-        <p:nvSpPr>
-          <p:cNvPr id="26" name="Text 24"/>
-          <p:cNvSpPr/>
-          <p:nvPr/>
-        </p:nvSpPr>
-        <p:spPr>
-          <a:xfrm>
-            <a:off x="365760" y="3273552"/>
-            <a:ext cx="1371600" cy="658368"/>
-          </a:xfrm>
-          <a:prstGeom prst="rect">
-            <a:avLst/>
-          </a:prstGeom>
-          <a:noFill/>
-          <a:ln/>
-        </p:spPr>
-        <p:txBody>
-          <a:bodyPr wrap="square" lIns="0" tIns="0" rIns="0" bIns="0" rtlCol="0" anchor="ctr"/>
-          <a:lstStyle/>
-          <a:p>
-            <a:pPr algn="ctr" indent="0" marL="0">
-              <a:buNone/>
-            </a:pPr>
-            <a:r>
-              <a:rPr lang="en-US" sz="1100" b="1" dirty="0">
-                <a:solidFill>
-                  <a:srgbClr val="475569"/>
+            <a:srgbClr val="FFFFFF"/>
+          </a:solidFill>
+          <a:ln w="12700">
+            <a:solidFill>
+              <a:srgbClr val="DB2777"/>
+            </a:solidFill>
+            <a:prstDash val="solid"/>
+          </a:ln>
+        </p:spPr>
+      </p:sp>
+      <p:sp>
+        <p:nvSpPr>
+          <p:cNvPr id="60" name="Text 58"/>
+          <p:cNvSpPr/>
+          <p:nvPr/>
+        </p:nvSpPr>
+        <p:spPr>
+          <a:xfrm>
+            <a:off x="7759598" y="4169664"/>
+            <a:ext cx="676656" cy="384048"/>
+          </a:xfrm>
+          <a:prstGeom prst="rect">
+            <a:avLst/>
+          </a:prstGeom>
+          <a:noFill/>
+          <a:ln/>
+        </p:spPr>
+        <p:txBody>
+          <a:bodyPr wrap="square" lIns="0" tIns="0" rIns="0" bIns="0" rtlCol="0" anchor="ctr"/>
+          <a:lstStyle/>
+          <a:p>
+            <a:pPr algn="ctr" indent="0" marL="0">
+              <a:buNone/>
+            </a:pPr>
+            <a:r>
+              <a:rPr lang="en-US" sz="900" b="1" dirty="0">
+                <a:solidFill>
+                  <a:srgbClr val="9D174D"/>
                 </a:solidFill>
                 <a:latin typeface="Trebuchet MS" pitchFamily="34" charset="0"/>
                 <a:ea typeface="Trebuchet MS" pitchFamily="34" charset="-122"/>
                 <a:cs typeface="Trebuchet MS" pitchFamily="34" charset="-120"/>
               </a:rPr>
-              <a:t>Syllables</a:t>
-            </a:r>
-            <a:endParaRPr lang="en-US" sz="1100" dirty="0"/>
-          </a:p>
-        </p:txBody>
-      </p:sp>
-      <p:sp>
-        <p:nvSpPr>
-          <p:cNvPr id="27" name="Shape 25"/>
-          <p:cNvSpPr/>
-          <p:nvPr/>
-        </p:nvSpPr>
-        <p:spPr>
-          <a:xfrm>
-            <a:off x="1874520" y="3273552"/>
-            <a:ext cx="6903720" cy="658368"/>
-          </a:xfrm>
-          <a:prstGeom prst="rect">
-            <a:avLst>
-              <a:gd name="adj" fmla="val 8333"/>
-            </a:avLst>
-          </a:prstGeom>
-          <a:solidFill>
-            <a:srgbClr val="CCFBF1"/>
-          </a:solidFill>
-          <a:ln w="12700">
-            <a:solidFill>
-              <a:srgbClr val="0D9488"/>
-            </a:solidFill>
-            <a:prstDash val="solid"/>
-          </a:ln>
-        </p:spPr>
-      </p:sp>
-      <p:sp>
-        <p:nvSpPr>
-          <p:cNvPr id="28" name="Shape 26"/>
-          <p:cNvSpPr/>
-          <p:nvPr/>
-        </p:nvSpPr>
-        <p:spPr>
-          <a:xfrm>
-            <a:off x="1980329" y="3364992"/>
-            <a:ext cx="1005840" cy="475488"/>
-          </a:xfrm>
-          <a:prstGeom prst="rect">
-            <a:avLst>
-              <a:gd name="adj" fmla="val 9615"/>
-            </a:avLst>
-          </a:prstGeom>
-          <a:solidFill>
-            <a:srgbClr val="FFFFFF"/>
-          </a:solidFill>
-          <a:ln w="12700">
-            <a:solidFill>
-              <a:srgbClr val="0D9488"/>
-            </a:solidFill>
-            <a:prstDash val="solid"/>
-          </a:ln>
-        </p:spPr>
-      </p:sp>
-      <p:sp>
-        <p:nvSpPr>
-          <p:cNvPr id="29" name="Text 27"/>
-          <p:cNvSpPr/>
-          <p:nvPr/>
-        </p:nvSpPr>
-        <p:spPr>
-          <a:xfrm>
-            <a:off x="1980329" y="3364992"/>
-            <a:ext cx="1005840" cy="475488"/>
-          </a:xfrm>
-          <a:prstGeom prst="rect">
-            <a:avLst/>
-          </a:prstGeom>
-          <a:noFill/>
-          <a:ln/>
-        </p:spPr>
-        <p:txBody>
-          <a:bodyPr wrap="square" lIns="0" tIns="0" rIns="0" bIns="0" rtlCol="0" anchor="ctr"/>
-          <a:lstStyle/>
-          <a:p>
-            <a:pPr algn="ctr" indent="0" marL="0">
-              <a:buNone/>
-            </a:pPr>
-            <a:r>
-              <a:rPr lang="en-US" sz="1400" b="1" dirty="0">
-                <a:solidFill>
-                  <a:srgbClr val="0D9488"/>
-                </a:solidFill>
-                <a:latin typeface="Trebuchet MS" pitchFamily="34" charset="0"/>
-                <a:ea typeface="Trebuchet MS" pitchFamily="34" charset="-122"/>
-                <a:cs typeface="Trebuchet MS" pitchFamily="34" charset="-120"/>
-              </a:rPr>
-              <a:t>chron</a:t>
-            </a:r>
-            <a:endParaRPr lang="en-US" sz="1400" dirty="0"/>
-          </a:p>
-        </p:txBody>
-      </p:sp>
-      <p:sp>
-        <p:nvSpPr>
-          <p:cNvPr id="30" name="Text 28"/>
-          <p:cNvSpPr/>
-          <p:nvPr/>
-        </p:nvSpPr>
-        <p:spPr>
-          <a:xfrm>
-            <a:off x="2986169" y="3364992"/>
-            <a:ext cx="78377" cy="475488"/>
-          </a:xfrm>
-          <a:prstGeom prst="rect">
-            <a:avLst/>
-          </a:prstGeom>
-          <a:noFill/>
-          <a:ln/>
-        </p:spPr>
-        <p:txBody>
-          <a:bodyPr wrap="square" lIns="0" tIns="0" rIns="0" bIns="0" rtlCol="0" anchor="ctr"/>
-          <a:lstStyle/>
-          <a:p>
-            <a:pPr algn="ctr" indent="0" marL="0">
-              <a:buNone/>
-            </a:pPr>
-            <a:r>
-              <a:rPr lang="en-US" sz="1600" b="1" dirty="0">
-                <a:solidFill>
-                  <a:srgbClr val="0D9488"/>
-                </a:solidFill>
-                <a:latin typeface="Trebuchet MS" pitchFamily="34" charset="0"/>
-                <a:ea typeface="Trebuchet MS" pitchFamily="34" charset="-122"/>
-                <a:cs typeface="Trebuchet MS" pitchFamily="34" charset="-120"/>
-              </a:rPr>
-              <a:t>·</a:t>
-            </a:r>
-            <a:endParaRPr lang="en-US" sz="1600" dirty="0"/>
-          </a:p>
-        </p:txBody>
-      </p:sp>
-      <p:sp>
-        <p:nvSpPr>
-          <p:cNvPr id="31" name="Shape 29"/>
-          <p:cNvSpPr/>
-          <p:nvPr/>
-        </p:nvSpPr>
-        <p:spPr>
-          <a:xfrm>
-            <a:off x="3064546" y="3364992"/>
-            <a:ext cx="1005840" cy="475488"/>
-          </a:xfrm>
-          <a:prstGeom prst="rect">
-            <a:avLst>
-              <a:gd name="adj" fmla="val 9615"/>
-            </a:avLst>
-          </a:prstGeom>
-          <a:solidFill>
-            <a:srgbClr val="FFFFFF"/>
-          </a:solidFill>
-          <a:ln w="12700">
-            <a:solidFill>
-              <a:srgbClr val="0D9488"/>
-            </a:solidFill>
-            <a:prstDash val="solid"/>
-          </a:ln>
-        </p:spPr>
-      </p:sp>
-      <p:sp>
-        <p:nvSpPr>
-          <p:cNvPr id="32" name="Text 30"/>
-          <p:cNvSpPr/>
-          <p:nvPr/>
-        </p:nvSpPr>
-        <p:spPr>
-          <a:xfrm>
-            <a:off x="3064546" y="3364992"/>
-            <a:ext cx="1005840" cy="475488"/>
-          </a:xfrm>
-          <a:prstGeom prst="rect">
-            <a:avLst/>
-          </a:prstGeom>
-          <a:noFill/>
-          <a:ln/>
-        </p:spPr>
-        <p:txBody>
-          <a:bodyPr wrap="square" lIns="0" tIns="0" rIns="0" bIns="0" rtlCol="0" anchor="ctr"/>
-          <a:lstStyle/>
-          <a:p>
-            <a:pPr algn="ctr" indent="0" marL="0">
-              <a:buNone/>
-            </a:pPr>
-            <a:r>
-              <a:rPr lang="en-US" sz="1400" b="1" dirty="0">
-                <a:solidFill>
-                  <a:srgbClr val="0D9488"/>
-                </a:solidFill>
-                <a:latin typeface="Trebuchet MS" pitchFamily="34" charset="0"/>
-                <a:ea typeface="Trebuchet MS" pitchFamily="34" charset="-122"/>
-                <a:cs typeface="Trebuchet MS" pitchFamily="34" charset="-120"/>
-              </a:rPr>
-              <a:t>o</a:t>
-            </a:r>
-            <a:endParaRPr lang="en-US" sz="1400" dirty="0"/>
-          </a:p>
-        </p:txBody>
-      </p:sp>
-      <p:sp>
-        <p:nvSpPr>
-          <p:cNvPr id="33" name="Text 31"/>
-          <p:cNvSpPr/>
-          <p:nvPr/>
-        </p:nvSpPr>
-        <p:spPr>
-          <a:xfrm>
-            <a:off x="4070386" y="3364992"/>
-            <a:ext cx="78377" cy="475488"/>
-          </a:xfrm>
-          <a:prstGeom prst="rect">
-            <a:avLst/>
-          </a:prstGeom>
-          <a:noFill/>
-          <a:ln/>
-        </p:spPr>
-        <p:txBody>
-          <a:bodyPr wrap="square" lIns="0" tIns="0" rIns="0" bIns="0" rtlCol="0" anchor="ctr"/>
-          <a:lstStyle/>
-          <a:p>
-            <a:pPr algn="ctr" indent="0" marL="0">
-              <a:buNone/>
-            </a:pPr>
-            <a:r>
-              <a:rPr lang="en-US" sz="1600" b="1" dirty="0">
-                <a:solidFill>
-                  <a:srgbClr val="0D9488"/>
-                </a:solidFill>
-                <a:latin typeface="Trebuchet MS" pitchFamily="34" charset="0"/>
-                <a:ea typeface="Trebuchet MS" pitchFamily="34" charset="-122"/>
-                <a:cs typeface="Trebuchet MS" pitchFamily="34" charset="-120"/>
-              </a:rPr>
-              <a:t>·</a:t>
-            </a:r>
-            <a:endParaRPr lang="en-US" sz="1600" dirty="0"/>
-          </a:p>
-        </p:txBody>
-      </p:sp>
-      <p:sp>
-        <p:nvSpPr>
-          <p:cNvPr id="34" name="Shape 32"/>
-          <p:cNvSpPr/>
-          <p:nvPr/>
-        </p:nvSpPr>
-        <p:spPr>
-          <a:xfrm>
-            <a:off x="4148763" y="3364992"/>
-            <a:ext cx="1005840" cy="475488"/>
-          </a:xfrm>
-          <a:prstGeom prst="rect">
-            <a:avLst>
-              <a:gd name="adj" fmla="val 9615"/>
-            </a:avLst>
-          </a:prstGeom>
-          <a:solidFill>
-            <a:srgbClr val="FFFFFF"/>
-          </a:solidFill>
-          <a:ln w="12700">
-            <a:solidFill>
-              <a:srgbClr val="0D9488"/>
-            </a:solidFill>
-            <a:prstDash val="solid"/>
-          </a:ln>
-        </p:spPr>
-      </p:sp>
-      <p:sp>
-        <p:nvSpPr>
-          <p:cNvPr id="35" name="Text 33"/>
-          <p:cNvSpPr/>
-          <p:nvPr/>
-        </p:nvSpPr>
-        <p:spPr>
-          <a:xfrm>
-            <a:off x="4148763" y="3364992"/>
-            <a:ext cx="1005840" cy="475488"/>
-          </a:xfrm>
-          <a:prstGeom prst="rect">
-            <a:avLst/>
-          </a:prstGeom>
-          <a:noFill/>
-          <a:ln/>
-        </p:spPr>
-        <p:txBody>
-          <a:bodyPr wrap="square" lIns="0" tIns="0" rIns="0" bIns="0" rtlCol="0" anchor="ctr"/>
-          <a:lstStyle/>
-          <a:p>
-            <a:pPr algn="ctr" indent="0" marL="0">
-              <a:buNone/>
-            </a:pPr>
-            <a:r>
-              <a:rPr lang="en-US" sz="1400" b="1" dirty="0">
-                <a:solidFill>
-                  <a:srgbClr val="0D9488"/>
-                </a:solidFill>
-                <a:latin typeface="Trebuchet MS" pitchFamily="34" charset="0"/>
-                <a:ea typeface="Trebuchet MS" pitchFamily="34" charset="-122"/>
-                <a:cs typeface="Trebuchet MS" pitchFamily="34" charset="-120"/>
-              </a:rPr>
-              <a:t>log</a:t>
-            </a:r>
-            <a:endParaRPr lang="en-US" sz="1400" dirty="0"/>
-          </a:p>
-        </p:txBody>
-      </p:sp>
-      <p:sp>
-        <p:nvSpPr>
-          <p:cNvPr id="36" name="Text 34"/>
-          <p:cNvSpPr/>
-          <p:nvPr/>
-        </p:nvSpPr>
-        <p:spPr>
-          <a:xfrm>
-            <a:off x="5154603" y="3364992"/>
-            <a:ext cx="78377" cy="475488"/>
-          </a:xfrm>
-          <a:prstGeom prst="rect">
-            <a:avLst/>
-          </a:prstGeom>
-          <a:noFill/>
-          <a:ln/>
-        </p:spPr>
-        <p:txBody>
-          <a:bodyPr wrap="square" lIns="0" tIns="0" rIns="0" bIns="0" rtlCol="0" anchor="ctr"/>
-          <a:lstStyle/>
-          <a:p>
-            <a:pPr algn="ctr" indent="0" marL="0">
-              <a:buNone/>
-            </a:pPr>
-            <a:r>
-              <a:rPr lang="en-US" sz="1600" b="1" dirty="0">
-                <a:solidFill>
-                  <a:srgbClr val="0D9488"/>
-                </a:solidFill>
-                <a:latin typeface="Trebuchet MS" pitchFamily="34" charset="0"/>
-                <a:ea typeface="Trebuchet MS" pitchFamily="34" charset="-122"/>
-                <a:cs typeface="Trebuchet MS" pitchFamily="34" charset="-120"/>
-              </a:rPr>
-              <a:t>·</a:t>
-            </a:r>
-            <a:endParaRPr lang="en-US" sz="1600" dirty="0"/>
-          </a:p>
-        </p:txBody>
-      </p:sp>
-      <p:sp>
-        <p:nvSpPr>
-          <p:cNvPr id="37" name="Shape 35"/>
-          <p:cNvSpPr/>
-          <p:nvPr/>
-        </p:nvSpPr>
-        <p:spPr>
-          <a:xfrm>
-            <a:off x="5232981" y="3364992"/>
-            <a:ext cx="1005840" cy="475488"/>
-          </a:xfrm>
-          <a:prstGeom prst="rect">
-            <a:avLst>
-              <a:gd name="adj" fmla="val 9615"/>
-            </a:avLst>
-          </a:prstGeom>
-          <a:solidFill>
-            <a:srgbClr val="FFFFFF"/>
-          </a:solidFill>
-          <a:ln w="12700">
-            <a:solidFill>
-              <a:srgbClr val="0D9488"/>
-            </a:solidFill>
-            <a:prstDash val="solid"/>
-          </a:ln>
-        </p:spPr>
-      </p:sp>
-      <p:sp>
-        <p:nvSpPr>
-          <p:cNvPr id="38" name="Text 36"/>
-          <p:cNvSpPr/>
-          <p:nvPr/>
-        </p:nvSpPr>
-        <p:spPr>
-          <a:xfrm>
-            <a:off x="5232981" y="3364992"/>
-            <a:ext cx="1005840" cy="475488"/>
-          </a:xfrm>
-          <a:prstGeom prst="rect">
-            <a:avLst/>
-          </a:prstGeom>
-          <a:noFill/>
-          <a:ln/>
-        </p:spPr>
-        <p:txBody>
-          <a:bodyPr wrap="square" lIns="0" tIns="0" rIns="0" bIns="0" rtlCol="0" anchor="ctr"/>
-          <a:lstStyle/>
-          <a:p>
-            <a:pPr algn="ctr" indent="0" marL="0">
-              <a:buNone/>
-            </a:pPr>
-            <a:r>
-              <a:rPr lang="en-US" sz="1400" b="1" dirty="0">
-                <a:solidFill>
-                  <a:srgbClr val="0D9488"/>
-                </a:solidFill>
-                <a:latin typeface="Trebuchet MS" pitchFamily="34" charset="0"/>
-                <a:ea typeface="Trebuchet MS" pitchFamily="34" charset="-122"/>
-                <a:cs typeface="Trebuchet MS" pitchFamily="34" charset="-120"/>
-              </a:rPr>
-              <a:t>i</a:t>
-            </a:r>
-            <a:endParaRPr lang="en-US" sz="1400" dirty="0"/>
-          </a:p>
-        </p:txBody>
-      </p:sp>
-      <p:sp>
-        <p:nvSpPr>
-          <p:cNvPr id="39" name="Text 37"/>
-          <p:cNvSpPr/>
-          <p:nvPr/>
-        </p:nvSpPr>
-        <p:spPr>
-          <a:xfrm>
-            <a:off x="6238821" y="3364992"/>
-            <a:ext cx="78377" cy="475488"/>
-          </a:xfrm>
-          <a:prstGeom prst="rect">
-            <a:avLst/>
-          </a:prstGeom>
-          <a:noFill/>
-          <a:ln/>
-        </p:spPr>
-        <p:txBody>
-          <a:bodyPr wrap="square" lIns="0" tIns="0" rIns="0" bIns="0" rtlCol="0" anchor="ctr"/>
-          <a:lstStyle/>
-          <a:p>
-            <a:pPr algn="ctr" indent="0" marL="0">
-              <a:buNone/>
-            </a:pPr>
-            <a:r>
-              <a:rPr lang="en-US" sz="1600" b="1" dirty="0">
-                <a:solidFill>
-                  <a:srgbClr val="0D9488"/>
-                </a:solidFill>
-                <a:latin typeface="Trebuchet MS" pitchFamily="34" charset="0"/>
-                <a:ea typeface="Trebuchet MS" pitchFamily="34" charset="-122"/>
-                <a:cs typeface="Trebuchet MS" pitchFamily="34" charset="-120"/>
-              </a:rPr>
-              <a:t>·</a:t>
-            </a:r>
-            <a:endParaRPr lang="en-US" sz="1600" dirty="0"/>
-          </a:p>
-        </p:txBody>
-      </p:sp>
-      <p:sp>
-        <p:nvSpPr>
-          <p:cNvPr id="40" name="Shape 38"/>
-          <p:cNvSpPr/>
-          <p:nvPr/>
-        </p:nvSpPr>
-        <p:spPr>
-          <a:xfrm>
-            <a:off x="6317198" y="3364992"/>
-            <a:ext cx="1005840" cy="475488"/>
-          </a:xfrm>
-          <a:prstGeom prst="rect">
-            <a:avLst>
-              <a:gd name="adj" fmla="val 9615"/>
-            </a:avLst>
-          </a:prstGeom>
-          <a:solidFill>
-            <a:srgbClr val="FFFFFF"/>
-          </a:solidFill>
-          <a:ln w="12700">
-            <a:solidFill>
-              <a:srgbClr val="0D9488"/>
-            </a:solidFill>
-            <a:prstDash val="solid"/>
-          </a:ln>
-        </p:spPr>
-      </p:sp>
-      <p:sp>
-        <p:nvSpPr>
-          <p:cNvPr id="41" name="Text 39"/>
-          <p:cNvSpPr/>
-          <p:nvPr/>
-        </p:nvSpPr>
-        <p:spPr>
-          <a:xfrm>
-            <a:off x="6317198" y="3364992"/>
-            <a:ext cx="1005840" cy="475488"/>
-          </a:xfrm>
-          <a:prstGeom prst="rect">
-            <a:avLst/>
-          </a:prstGeom>
-          <a:noFill/>
-          <a:ln/>
-        </p:spPr>
-        <p:txBody>
-          <a:bodyPr wrap="square" lIns="0" tIns="0" rIns="0" bIns="0" rtlCol="0" anchor="ctr"/>
-          <a:lstStyle/>
-          <a:p>
-            <a:pPr algn="ctr" indent="0" marL="0">
-              <a:buNone/>
-            </a:pPr>
-            <a:r>
-              <a:rPr lang="en-US" sz="1400" b="1" dirty="0">
-                <a:solidFill>
-                  <a:srgbClr val="0D9488"/>
-                </a:solidFill>
-                <a:latin typeface="Trebuchet MS" pitchFamily="34" charset="0"/>
-                <a:ea typeface="Trebuchet MS" pitchFamily="34" charset="-122"/>
-                <a:cs typeface="Trebuchet MS" pitchFamily="34" charset="-120"/>
-              </a:rPr>
-              <a:t>cal</a:t>
-            </a:r>
-            <a:endParaRPr lang="en-US" sz="1400" dirty="0"/>
-          </a:p>
-        </p:txBody>
-      </p:sp>
-      <p:sp>
-        <p:nvSpPr>
-          <p:cNvPr id="42" name="Text 40"/>
-          <p:cNvSpPr/>
-          <p:nvPr/>
-        </p:nvSpPr>
-        <p:spPr>
-          <a:xfrm>
-            <a:off x="7323038" y="3364992"/>
-            <a:ext cx="78377" cy="475488"/>
-          </a:xfrm>
-          <a:prstGeom prst="rect">
-            <a:avLst/>
-          </a:prstGeom>
-          <a:noFill/>
-          <a:ln/>
-        </p:spPr>
-        <p:txBody>
-          <a:bodyPr wrap="square" lIns="0" tIns="0" rIns="0" bIns="0" rtlCol="0" anchor="ctr"/>
-          <a:lstStyle/>
-          <a:p>
-            <a:pPr algn="ctr" indent="0" marL="0">
-              <a:buNone/>
-            </a:pPr>
-            <a:r>
-              <a:rPr lang="en-US" sz="1600" b="1" dirty="0">
-                <a:solidFill>
-                  <a:srgbClr val="0D9488"/>
-                </a:solidFill>
-                <a:latin typeface="Trebuchet MS" pitchFamily="34" charset="0"/>
-                <a:ea typeface="Trebuchet MS" pitchFamily="34" charset="-122"/>
-                <a:cs typeface="Trebuchet MS" pitchFamily="34" charset="-120"/>
-              </a:rPr>
-              <a:t>·</a:t>
-            </a:r>
-            <a:endParaRPr lang="en-US" sz="1600" dirty="0"/>
-          </a:p>
-        </p:txBody>
-      </p:sp>
-      <p:sp>
-        <p:nvSpPr>
-          <p:cNvPr id="43" name="Shape 41"/>
-          <p:cNvSpPr/>
-          <p:nvPr/>
-        </p:nvSpPr>
-        <p:spPr>
-          <a:xfrm>
-            <a:off x="7401415" y="3364992"/>
-            <a:ext cx="1005840" cy="475488"/>
-          </a:xfrm>
-          <a:prstGeom prst="rect">
-            <a:avLst>
-              <a:gd name="adj" fmla="val 9615"/>
-            </a:avLst>
-          </a:prstGeom>
-          <a:solidFill>
-            <a:srgbClr val="FFFFFF"/>
-          </a:solidFill>
-          <a:ln w="12700">
-            <a:solidFill>
-              <a:srgbClr val="0D9488"/>
-            </a:solidFill>
-            <a:prstDash val="solid"/>
-          </a:ln>
-        </p:spPr>
-      </p:sp>
-      <p:sp>
-        <p:nvSpPr>
-          <p:cNvPr id="44" name="Text 42"/>
-          <p:cNvSpPr/>
-          <p:nvPr/>
-        </p:nvSpPr>
-        <p:spPr>
-          <a:xfrm>
-            <a:off x="7401415" y="3364992"/>
-            <a:ext cx="1005840" cy="475488"/>
-          </a:xfrm>
-          <a:prstGeom prst="rect">
-            <a:avLst/>
-          </a:prstGeom>
-          <a:noFill/>
-          <a:ln/>
-        </p:spPr>
-        <p:txBody>
-          <a:bodyPr wrap="square" lIns="0" tIns="0" rIns="0" bIns="0" rtlCol="0" anchor="ctr"/>
-          <a:lstStyle/>
-          <a:p>
-            <a:pPr algn="ctr" indent="0" marL="0">
-              <a:buNone/>
-            </a:pPr>
-            <a:r>
-              <a:rPr lang="en-US" sz="1400" b="1" dirty="0">
-                <a:solidFill>
-                  <a:srgbClr val="0D9488"/>
-                </a:solidFill>
-                <a:latin typeface="Trebuchet MS" pitchFamily="34" charset="0"/>
-                <a:ea typeface="Trebuchet MS" pitchFamily="34" charset="-122"/>
-                <a:cs typeface="Trebuchet MS" pitchFamily="34" charset="-120"/>
-              </a:rPr>
-              <a:t>ly</a:t>
-            </a:r>
-            <a:endParaRPr lang="en-US" sz="1400" dirty="0"/>
-          </a:p>
-        </p:txBody>
-      </p:sp>
-      <p:sp>
-        <p:nvSpPr>
-          <p:cNvPr id="45" name="Shape 43"/>
-          <p:cNvSpPr/>
-          <p:nvPr/>
-        </p:nvSpPr>
-        <p:spPr>
-          <a:xfrm>
-            <a:off x="365760" y="4096512"/>
-            <a:ext cx="1371600" cy="804672"/>
-          </a:xfrm>
-          <a:prstGeom prst="rect">
-            <a:avLst>
-              <a:gd name="adj" fmla="val 6818"/>
-            </a:avLst>
-          </a:prstGeom>
-          <a:solidFill>
-            <a:srgbClr val="E2E8F0"/>
-          </a:solidFill>
-          <a:ln w="12700">
-            <a:solidFill>
-              <a:srgbClr val="E2E8F0"/>
-            </a:solidFill>
-            <a:prstDash val="solid"/>
-          </a:ln>
-        </p:spPr>
-      </p:sp>
-      <p:sp>
-        <p:nvSpPr>
-          <p:cNvPr id="46" name="Text 44"/>
-          <p:cNvSpPr/>
-          <p:nvPr/>
-        </p:nvSpPr>
-        <p:spPr>
-          <a:xfrm>
-            <a:off x="365760" y="4096512"/>
-            <a:ext cx="1371600" cy="804672"/>
-          </a:xfrm>
-          <a:prstGeom prst="rect">
-            <a:avLst/>
-          </a:prstGeom>
-          <a:noFill/>
-          <a:ln/>
-        </p:spPr>
-        <p:txBody>
-          <a:bodyPr wrap="square" lIns="0" tIns="0" rIns="0" bIns="0" rtlCol="0" anchor="ctr"/>
-          <a:lstStyle/>
-          <a:p>
-            <a:pPr algn="ctr" indent="0" marL="0">
-              <a:buNone/>
-            </a:pPr>
-            <a:r>
-              <a:rPr lang="en-US" sz="1100" b="1" dirty="0">
-                <a:solidFill>
-                  <a:srgbClr val="475569"/>
-                </a:solidFill>
-                <a:latin typeface="Trebuchet MS" pitchFamily="34" charset="0"/>
-                <a:ea typeface="Trebuchet MS" pitchFamily="34" charset="-122"/>
-                <a:cs typeface="Trebuchet MS" pitchFamily="34" charset="-120"/>
-              </a:rPr>
-              <a:t>Phonemes</a:t>
-            </a:r>
-            <a:endParaRPr lang="en-US" sz="1100" dirty="0"/>
-          </a:p>
-        </p:txBody>
-      </p:sp>
-      <p:sp>
-        <p:nvSpPr>
-          <p:cNvPr id="47" name="Shape 45"/>
-          <p:cNvSpPr/>
-          <p:nvPr/>
-        </p:nvSpPr>
-        <p:spPr>
-          <a:xfrm>
-            <a:off x="1874520" y="4096512"/>
-            <a:ext cx="6903720" cy="804672"/>
-          </a:xfrm>
-          <a:prstGeom prst="rect">
-            <a:avLst>
-              <a:gd name="adj" fmla="val 6818"/>
-            </a:avLst>
-          </a:prstGeom>
-          <a:solidFill>
-            <a:srgbClr val="FCE7F3"/>
-          </a:solidFill>
-          <a:ln w="12700">
-            <a:solidFill>
-              <a:srgbClr val="DB2777"/>
-            </a:solidFill>
-            <a:prstDash val="solid"/>
-          </a:ln>
-        </p:spPr>
-      </p:sp>
-      <p:sp>
-        <p:nvSpPr>
-          <p:cNvPr id="48" name="Shape 46"/>
-          <p:cNvSpPr/>
-          <p:nvPr/>
-        </p:nvSpPr>
-        <p:spPr>
-          <a:xfrm>
-            <a:off x="1952897" y="4169664"/>
-            <a:ext cx="451573" cy="384048"/>
-          </a:xfrm>
-          <a:prstGeom prst="rect">
-            <a:avLst>
-              <a:gd name="adj" fmla="val 9524"/>
-            </a:avLst>
-          </a:prstGeom>
-          <a:solidFill>
-            <a:srgbClr val="FFFFFF"/>
-          </a:solidFill>
-          <a:ln w="12700">
-            <a:solidFill>
-              <a:srgbClr val="DB2777"/>
-            </a:solidFill>
-            <a:prstDash val="solid"/>
-          </a:ln>
-        </p:spPr>
-      </p:sp>
-      <p:sp>
-        <p:nvSpPr>
-          <p:cNvPr id="49" name="Text 47"/>
-          <p:cNvSpPr/>
-          <p:nvPr/>
-        </p:nvSpPr>
-        <p:spPr>
-          <a:xfrm>
-            <a:off x="1952897" y="4169664"/>
-            <a:ext cx="451573" cy="384048"/>
-          </a:xfrm>
-          <a:prstGeom prst="rect">
-            <a:avLst/>
-          </a:prstGeom>
-          <a:noFill/>
-          <a:ln/>
-        </p:spPr>
-        <p:txBody>
-          <a:bodyPr wrap="square" lIns="0" tIns="0" rIns="0" bIns="0" rtlCol="0" anchor="ctr"/>
-          <a:lstStyle/>
-          <a:p>
-            <a:pPr algn="ctr" indent="0" marL="0">
-              <a:buNone/>
-            </a:pPr>
-            <a:r>
-              <a:rPr lang="en-US" sz="900" b="1" dirty="0">
-                <a:solidFill>
-                  <a:srgbClr val="9D174D"/>
-                </a:solidFill>
-                <a:latin typeface="Trebuchet MS" pitchFamily="34" charset="0"/>
-                <a:ea typeface="Trebuchet MS" pitchFamily="34" charset="-122"/>
-                <a:cs typeface="Trebuchet MS" pitchFamily="34" charset="-120"/>
-              </a:rPr>
-              <a:t>ch</a:t>
-            </a:r>
-            <a:endParaRPr lang="en-US" sz="900" dirty="0"/>
-          </a:p>
-        </p:txBody>
-      </p:sp>
-      <p:sp>
-        <p:nvSpPr>
-          <p:cNvPr id="50" name="Text 48"/>
-          <p:cNvSpPr/>
-          <p:nvPr/>
-        </p:nvSpPr>
-        <p:spPr>
-          <a:xfrm>
-            <a:off x="1952897" y="4572000"/>
-            <a:ext cx="451573" cy="219456"/>
-          </a:xfrm>
-          <a:prstGeom prst="rect">
-            <a:avLst/>
-          </a:prstGeom>
-          <a:noFill/>
-          <a:ln/>
-        </p:spPr>
-        <p:txBody>
-          <a:bodyPr wrap="square" lIns="0" tIns="0" rIns="0" bIns="0" rtlCol="0" anchor="t"/>
-          <a:lstStyle/>
-          <a:p>
-            <a:pPr algn="ctr" indent="0" marL="0">
-              <a:buNone/>
-            </a:pPr>
-            <a:r>
-              <a:rPr lang="en-US" sz="750" i="1" dirty="0">
-                <a:solidFill>
-                  <a:srgbClr val="94A3B8"/>
-                </a:solidFill>
-                <a:latin typeface="Calibri" pitchFamily="34" charset="0"/>
-                <a:ea typeface="Calibri" pitchFamily="34" charset="-122"/>
-                <a:cs typeface="Calibri" pitchFamily="34" charset="-120"/>
-              </a:rPr>
-              <a:t>/k/</a:t>
-            </a:r>
-            <a:endParaRPr lang="en-US" sz="750" dirty="0"/>
-          </a:p>
-        </p:txBody>
-      </p:sp>
-      <p:sp>
-        <p:nvSpPr>
-          <p:cNvPr id="51" name="Shape 49"/>
-          <p:cNvSpPr/>
-          <p:nvPr/>
-        </p:nvSpPr>
-        <p:spPr>
-          <a:xfrm>
-            <a:off x="2455415" y="4169664"/>
-            <a:ext cx="451573" cy="384048"/>
-          </a:xfrm>
-          <a:prstGeom prst="rect">
-            <a:avLst>
-              <a:gd name="adj" fmla="val 9524"/>
-            </a:avLst>
-          </a:prstGeom>
-          <a:solidFill>
-            <a:srgbClr val="FFFFFF"/>
-          </a:solidFill>
-          <a:ln w="12700">
-            <a:solidFill>
-              <a:srgbClr val="DB2777"/>
-            </a:solidFill>
-            <a:prstDash val="solid"/>
-          </a:ln>
-        </p:spPr>
-      </p:sp>
-      <p:sp>
-        <p:nvSpPr>
-          <p:cNvPr id="52" name="Text 50"/>
-          <p:cNvSpPr/>
-          <p:nvPr/>
-        </p:nvSpPr>
-        <p:spPr>
-          <a:xfrm>
-            <a:off x="2455415" y="4169664"/>
-            <a:ext cx="451573" cy="384048"/>
-          </a:xfrm>
-          <a:prstGeom prst="rect">
-            <a:avLst/>
-          </a:prstGeom>
-          <a:noFill/>
-          <a:ln/>
-        </p:spPr>
-        <p:txBody>
-          <a:bodyPr wrap="square" lIns="0" tIns="0" rIns="0" bIns="0" rtlCol="0" anchor="ctr"/>
-          <a:lstStyle/>
-          <a:p>
-            <a:pPr algn="ctr" indent="0" marL="0">
-              <a:buNone/>
-            </a:pPr>
-            <a:r>
-              <a:rPr lang="en-US" sz="900" b="1" dirty="0">
-                <a:solidFill>
-                  <a:srgbClr val="9D174D"/>
-                </a:solidFill>
-                <a:latin typeface="Trebuchet MS" pitchFamily="34" charset="0"/>
-                <a:ea typeface="Trebuchet MS" pitchFamily="34" charset="-122"/>
-                <a:cs typeface="Trebuchet MS" pitchFamily="34" charset="-120"/>
-              </a:rPr>
-              <a:t>r</a:t>
-            </a:r>
-            <a:endParaRPr lang="en-US" sz="900" dirty="0"/>
-          </a:p>
-        </p:txBody>
-      </p:sp>
-      <p:sp>
-        <p:nvSpPr>
-          <p:cNvPr id="53" name="Shape 51"/>
-          <p:cNvSpPr/>
-          <p:nvPr/>
-        </p:nvSpPr>
-        <p:spPr>
-          <a:xfrm>
-            <a:off x="2957933" y="4169664"/>
-            <a:ext cx="451573" cy="384048"/>
-          </a:xfrm>
-          <a:prstGeom prst="rect">
-            <a:avLst>
-              <a:gd name="adj" fmla="val 9524"/>
-            </a:avLst>
-          </a:prstGeom>
-          <a:solidFill>
-            <a:srgbClr val="FFFFFF"/>
-          </a:solidFill>
-          <a:ln w="12700">
-            <a:solidFill>
-              <a:srgbClr val="DB2777"/>
-            </a:solidFill>
-            <a:prstDash val="solid"/>
-          </a:ln>
-        </p:spPr>
-      </p:sp>
-      <p:sp>
-        <p:nvSpPr>
-          <p:cNvPr id="54" name="Text 52"/>
-          <p:cNvSpPr/>
-          <p:nvPr/>
-        </p:nvSpPr>
-        <p:spPr>
-          <a:xfrm>
-            <a:off x="2957933" y="4169664"/>
-            <a:ext cx="451573" cy="384048"/>
-          </a:xfrm>
-          <a:prstGeom prst="rect">
-            <a:avLst/>
-          </a:prstGeom>
-          <a:noFill/>
-          <a:ln/>
-        </p:spPr>
-        <p:txBody>
-          <a:bodyPr wrap="square" lIns="0" tIns="0" rIns="0" bIns="0" rtlCol="0" anchor="ctr"/>
-          <a:lstStyle/>
-          <a:p>
-            <a:pPr algn="ctr" indent="0" marL="0">
-              <a:buNone/>
-            </a:pPr>
-            <a:r>
-              <a:rPr lang="en-US" sz="900" b="1" dirty="0">
-                <a:solidFill>
-                  <a:srgbClr val="9D174D"/>
-                </a:solidFill>
-                <a:latin typeface="Trebuchet MS" pitchFamily="34" charset="0"/>
-                <a:ea typeface="Trebuchet MS" pitchFamily="34" charset="-122"/>
-                <a:cs typeface="Trebuchet MS" pitchFamily="34" charset="-120"/>
-              </a:rPr>
-              <a:t>o</a:t>
-            </a:r>
-            <a:endParaRPr lang="en-US" sz="900" dirty="0"/>
-          </a:p>
-        </p:txBody>
-      </p:sp>
-      <p:sp>
-        <p:nvSpPr>
-          <p:cNvPr id="55" name="Shape 53"/>
-          <p:cNvSpPr/>
-          <p:nvPr/>
-        </p:nvSpPr>
-        <p:spPr>
-          <a:xfrm>
-            <a:off x="3460451" y="4169664"/>
-            <a:ext cx="451573" cy="384048"/>
-          </a:xfrm>
-          <a:prstGeom prst="rect">
-            <a:avLst>
-              <a:gd name="adj" fmla="val 9524"/>
-            </a:avLst>
-          </a:prstGeom>
-          <a:solidFill>
-            <a:srgbClr val="FFFFFF"/>
-          </a:solidFill>
-          <a:ln w="12700">
-            <a:solidFill>
-              <a:srgbClr val="DB2777"/>
-            </a:solidFill>
-            <a:prstDash val="solid"/>
-          </a:ln>
-        </p:spPr>
-      </p:sp>
-      <p:sp>
-        <p:nvSpPr>
-          <p:cNvPr id="56" name="Text 54"/>
-          <p:cNvSpPr/>
-          <p:nvPr/>
-        </p:nvSpPr>
-        <p:spPr>
-          <a:xfrm>
-            <a:off x="3460451" y="4169664"/>
-            <a:ext cx="451573" cy="384048"/>
-          </a:xfrm>
-          <a:prstGeom prst="rect">
-            <a:avLst/>
-          </a:prstGeom>
-          <a:noFill/>
-          <a:ln/>
-        </p:spPr>
-        <p:txBody>
-          <a:bodyPr wrap="square" lIns="0" tIns="0" rIns="0" bIns="0" rtlCol="0" anchor="ctr"/>
-          <a:lstStyle/>
-          <a:p>
-            <a:pPr algn="ctr" indent="0" marL="0">
-              <a:buNone/>
-            </a:pPr>
-            <a:r>
-              <a:rPr lang="en-US" sz="900" b="1" dirty="0">
-                <a:solidFill>
-                  <a:srgbClr val="9D174D"/>
-                </a:solidFill>
-                <a:latin typeface="Trebuchet MS" pitchFamily="34" charset="0"/>
-                <a:ea typeface="Trebuchet MS" pitchFamily="34" charset="-122"/>
-                <a:cs typeface="Trebuchet MS" pitchFamily="34" charset="-120"/>
-              </a:rPr>
-              <a:t>n</a:t>
-            </a:r>
-            <a:endParaRPr lang="en-US" sz="900" dirty="0"/>
-          </a:p>
-        </p:txBody>
-      </p:sp>
-      <p:sp>
-        <p:nvSpPr>
-          <p:cNvPr id="57" name="Shape 55"/>
-          <p:cNvSpPr/>
-          <p:nvPr/>
-        </p:nvSpPr>
-        <p:spPr>
-          <a:xfrm>
-            <a:off x="3962969" y="4169664"/>
-            <a:ext cx="451573" cy="384048"/>
-          </a:xfrm>
-          <a:prstGeom prst="rect">
-            <a:avLst>
-              <a:gd name="adj" fmla="val 9524"/>
-            </a:avLst>
-          </a:prstGeom>
-          <a:solidFill>
-            <a:srgbClr val="FFFFFF"/>
-          </a:solidFill>
-          <a:ln w="12700">
-            <a:solidFill>
-              <a:srgbClr val="DB2777"/>
-            </a:solidFill>
-            <a:prstDash val="solid"/>
-          </a:ln>
-        </p:spPr>
-      </p:sp>
-      <p:sp>
-        <p:nvSpPr>
-          <p:cNvPr id="58" name="Text 56"/>
-          <p:cNvSpPr/>
-          <p:nvPr/>
-        </p:nvSpPr>
-        <p:spPr>
-          <a:xfrm>
-            <a:off x="3962969" y="4169664"/>
-            <a:ext cx="451573" cy="384048"/>
-          </a:xfrm>
-          <a:prstGeom prst="rect">
-            <a:avLst/>
-          </a:prstGeom>
-          <a:noFill/>
-          <a:ln/>
-        </p:spPr>
-        <p:txBody>
-          <a:bodyPr wrap="square" lIns="0" tIns="0" rIns="0" bIns="0" rtlCol="0" anchor="ctr"/>
-          <a:lstStyle/>
-          <a:p>
-            <a:pPr algn="ctr" indent="0" marL="0">
-              <a:buNone/>
-            </a:pPr>
-            <a:r>
-              <a:rPr lang="en-US" sz="900" b="1" dirty="0">
-                <a:solidFill>
-                  <a:srgbClr val="9D174D"/>
-                </a:solidFill>
-                <a:latin typeface="Trebuchet MS" pitchFamily="34" charset="0"/>
-                <a:ea typeface="Trebuchet MS" pitchFamily="34" charset="-122"/>
-                <a:cs typeface="Trebuchet MS" pitchFamily="34" charset="-120"/>
-              </a:rPr>
-              <a:t>o</a:t>
-            </a:r>
-            <a:endParaRPr lang="en-US" sz="900" dirty="0"/>
-          </a:p>
-        </p:txBody>
-      </p:sp>
-      <p:sp>
-        <p:nvSpPr>
-          <p:cNvPr id="59" name="Shape 57"/>
-          <p:cNvSpPr/>
-          <p:nvPr/>
-        </p:nvSpPr>
-        <p:spPr>
-          <a:xfrm>
-            <a:off x="4465487" y="4169664"/>
-            <a:ext cx="451573" cy="384048"/>
-          </a:xfrm>
-          <a:prstGeom prst="rect">
-            <a:avLst>
-              <a:gd name="adj" fmla="val 9524"/>
-            </a:avLst>
-          </a:prstGeom>
-          <a:solidFill>
-            <a:srgbClr val="FFFFFF"/>
-          </a:solidFill>
-          <a:ln w="12700">
-            <a:solidFill>
-              <a:srgbClr val="DB2777"/>
-            </a:solidFill>
-            <a:prstDash val="solid"/>
-          </a:ln>
-        </p:spPr>
-      </p:sp>
-      <p:sp>
-        <p:nvSpPr>
-          <p:cNvPr id="60" name="Text 58"/>
-          <p:cNvSpPr/>
-          <p:nvPr/>
-        </p:nvSpPr>
-        <p:spPr>
-          <a:xfrm>
-            <a:off x="4465487" y="4169664"/>
-            <a:ext cx="451573" cy="384048"/>
-          </a:xfrm>
-          <a:prstGeom prst="rect">
-            <a:avLst/>
-          </a:prstGeom>
-          <a:noFill/>
-          <a:ln/>
-        </p:spPr>
-        <p:txBody>
-          <a:bodyPr wrap="square" lIns="0" tIns="0" rIns="0" bIns="0" rtlCol="0" anchor="ctr"/>
-          <a:lstStyle/>
-          <a:p>
-            <a:pPr algn="ctr" indent="0" marL="0">
-              <a:buNone/>
-            </a:pPr>
-            <a:r>
-              <a:rPr lang="en-US" sz="900" b="1" dirty="0">
-                <a:solidFill>
-                  <a:srgbClr val="9D174D"/>
-                </a:solidFill>
-                <a:latin typeface="Trebuchet MS" pitchFamily="34" charset="0"/>
-                <a:ea typeface="Trebuchet MS" pitchFamily="34" charset="-122"/>
-                <a:cs typeface="Trebuchet MS" pitchFamily="34" charset="-120"/>
-              </a:rPr>
-              <a:t>l</a:t>
-            </a:r>
-            <a:endParaRPr lang="en-US" sz="900" dirty="0"/>
-          </a:p>
-        </p:txBody>
-      </p:sp>
-      <p:sp>
-        <p:nvSpPr>
-          <p:cNvPr id="61" name="Shape 59"/>
-          <p:cNvSpPr/>
-          <p:nvPr/>
-        </p:nvSpPr>
-        <p:spPr>
-          <a:xfrm>
-            <a:off x="4968006" y="4169664"/>
-            <a:ext cx="451573" cy="384048"/>
-          </a:xfrm>
-          <a:prstGeom prst="rect">
-            <a:avLst>
-              <a:gd name="adj" fmla="val 9524"/>
-            </a:avLst>
-          </a:prstGeom>
-          <a:solidFill>
-            <a:srgbClr val="FFFFFF"/>
-          </a:solidFill>
-          <a:ln w="12700">
-            <a:solidFill>
-              <a:srgbClr val="DB2777"/>
-            </a:solidFill>
-            <a:prstDash val="solid"/>
-          </a:ln>
-        </p:spPr>
-      </p:sp>
-      <p:sp>
-        <p:nvSpPr>
-          <p:cNvPr id="62" name="Text 60"/>
-          <p:cNvSpPr/>
-          <p:nvPr/>
-        </p:nvSpPr>
-        <p:spPr>
-          <a:xfrm>
-            <a:off x="4968006" y="4169664"/>
-            <a:ext cx="451573" cy="384048"/>
-          </a:xfrm>
-          <a:prstGeom prst="rect">
-            <a:avLst/>
-          </a:prstGeom>
-          <a:noFill/>
-          <a:ln/>
-        </p:spPr>
-        <p:txBody>
-          <a:bodyPr wrap="square" lIns="0" tIns="0" rIns="0" bIns="0" rtlCol="0" anchor="ctr"/>
-          <a:lstStyle/>
-          <a:p>
-            <a:pPr algn="ctr" indent="0" marL="0">
-              <a:buNone/>
-            </a:pPr>
-            <a:r>
-              <a:rPr lang="en-US" sz="900" b="1" dirty="0">
-                <a:solidFill>
-                  <a:srgbClr val="9D174D"/>
-                </a:solidFill>
-                <a:latin typeface="Trebuchet MS" pitchFamily="34" charset="0"/>
-                <a:ea typeface="Trebuchet MS" pitchFamily="34" charset="-122"/>
-                <a:cs typeface="Trebuchet MS" pitchFamily="34" charset="-120"/>
-              </a:rPr>
-              <a:t>o</a:t>
-            </a:r>
-            <a:endParaRPr lang="en-US" sz="900" dirty="0"/>
-          </a:p>
-        </p:txBody>
-      </p:sp>
-      <p:sp>
-        <p:nvSpPr>
-          <p:cNvPr id="63" name="Shape 61"/>
-          <p:cNvSpPr/>
-          <p:nvPr/>
-        </p:nvSpPr>
-        <p:spPr>
-          <a:xfrm>
-            <a:off x="5470524" y="4169664"/>
-            <a:ext cx="451573" cy="384048"/>
-          </a:xfrm>
-          <a:prstGeom prst="rect">
-            <a:avLst>
-              <a:gd name="adj" fmla="val 9524"/>
-            </a:avLst>
-          </a:prstGeom>
-          <a:solidFill>
-            <a:srgbClr val="FFFFFF"/>
-          </a:solidFill>
-          <a:ln w="12700">
-            <a:solidFill>
-              <a:srgbClr val="DB2777"/>
-            </a:solidFill>
-            <a:prstDash val="solid"/>
-          </a:ln>
-        </p:spPr>
-      </p:sp>
-      <p:sp>
-        <p:nvSpPr>
-          <p:cNvPr id="64" name="Text 62"/>
-          <p:cNvSpPr/>
-          <p:nvPr/>
-        </p:nvSpPr>
-        <p:spPr>
-          <a:xfrm>
-            <a:off x="5470524" y="4169664"/>
-            <a:ext cx="451573" cy="384048"/>
-          </a:xfrm>
-          <a:prstGeom prst="rect">
-            <a:avLst/>
-          </a:prstGeom>
-          <a:noFill/>
-          <a:ln/>
-        </p:spPr>
-        <p:txBody>
-          <a:bodyPr wrap="square" lIns="0" tIns="0" rIns="0" bIns="0" rtlCol="0" anchor="ctr"/>
-          <a:lstStyle/>
-          <a:p>
-            <a:pPr algn="ctr" indent="0" marL="0">
-              <a:buNone/>
-            </a:pPr>
-            <a:r>
-              <a:rPr lang="en-US" sz="900" b="1" dirty="0">
-                <a:solidFill>
-                  <a:srgbClr val="9D174D"/>
-                </a:solidFill>
-                <a:latin typeface="Trebuchet MS" pitchFamily="34" charset="0"/>
-                <a:ea typeface="Trebuchet MS" pitchFamily="34" charset="-122"/>
-                <a:cs typeface="Trebuchet MS" pitchFamily="34" charset="-120"/>
-              </a:rPr>
-              <a:t>g</a:t>
-            </a:r>
-            <a:endParaRPr lang="en-US" sz="900" dirty="0"/>
-          </a:p>
-        </p:txBody>
-      </p:sp>
-      <p:sp>
-        <p:nvSpPr>
-          <p:cNvPr id="65" name="Shape 63"/>
-          <p:cNvSpPr/>
-          <p:nvPr/>
-        </p:nvSpPr>
-        <p:spPr>
-          <a:xfrm>
-            <a:off x="5973042" y="4169664"/>
-            <a:ext cx="451573" cy="384048"/>
-          </a:xfrm>
-          <a:prstGeom prst="rect">
-            <a:avLst>
-              <a:gd name="adj" fmla="val 9524"/>
-            </a:avLst>
-          </a:prstGeom>
-          <a:solidFill>
-            <a:srgbClr val="FFFFFF"/>
-          </a:solidFill>
-          <a:ln w="12700">
-            <a:solidFill>
-              <a:srgbClr val="DB2777"/>
-            </a:solidFill>
-            <a:prstDash val="solid"/>
-          </a:ln>
-        </p:spPr>
-      </p:sp>
-      <p:sp>
-        <p:nvSpPr>
-          <p:cNvPr id="66" name="Text 64"/>
-          <p:cNvSpPr/>
-          <p:nvPr/>
-        </p:nvSpPr>
-        <p:spPr>
-          <a:xfrm>
-            <a:off x="5973042" y="4169664"/>
-            <a:ext cx="451573" cy="384048"/>
-          </a:xfrm>
-          <a:prstGeom prst="rect">
-            <a:avLst/>
-          </a:prstGeom>
-          <a:noFill/>
-          <a:ln/>
-        </p:spPr>
-        <p:txBody>
-          <a:bodyPr wrap="square" lIns="0" tIns="0" rIns="0" bIns="0" rtlCol="0" anchor="ctr"/>
-          <a:lstStyle/>
-          <a:p>
-            <a:pPr algn="ctr" indent="0" marL="0">
-              <a:buNone/>
-            </a:pPr>
-            <a:r>
-              <a:rPr lang="en-US" sz="900" b="1" dirty="0">
-                <a:solidFill>
-                  <a:srgbClr val="9D174D"/>
-                </a:solidFill>
-                <a:latin typeface="Trebuchet MS" pitchFamily="34" charset="0"/>
-                <a:ea typeface="Trebuchet MS" pitchFamily="34" charset="-122"/>
-                <a:cs typeface="Trebuchet MS" pitchFamily="34" charset="-120"/>
-              </a:rPr>
-              <a:t>i</a:t>
-            </a:r>
-            <a:endParaRPr lang="en-US" sz="900" dirty="0"/>
-          </a:p>
-        </p:txBody>
-      </p:sp>
-      <p:sp>
-        <p:nvSpPr>
-          <p:cNvPr id="67" name="Shape 65"/>
-          <p:cNvSpPr/>
-          <p:nvPr/>
-        </p:nvSpPr>
-        <p:spPr>
-          <a:xfrm>
-            <a:off x="6475560" y="4169664"/>
-            <a:ext cx="451573" cy="384048"/>
-          </a:xfrm>
-          <a:prstGeom prst="rect">
-            <a:avLst>
-              <a:gd name="adj" fmla="val 9524"/>
-            </a:avLst>
-          </a:prstGeom>
-          <a:solidFill>
-            <a:srgbClr val="FFFFFF"/>
-          </a:solidFill>
-          <a:ln w="12700">
-            <a:solidFill>
-              <a:srgbClr val="DB2777"/>
-            </a:solidFill>
-            <a:prstDash val="solid"/>
-          </a:ln>
-        </p:spPr>
-      </p:sp>
-      <p:sp>
-        <p:nvSpPr>
-          <p:cNvPr id="68" name="Text 66"/>
-          <p:cNvSpPr/>
-          <p:nvPr/>
-        </p:nvSpPr>
-        <p:spPr>
-          <a:xfrm>
-            <a:off x="6475560" y="4169664"/>
-            <a:ext cx="451573" cy="384048"/>
-          </a:xfrm>
-          <a:prstGeom prst="rect">
-            <a:avLst/>
-          </a:prstGeom>
-          <a:noFill/>
-          <a:ln/>
-        </p:spPr>
-        <p:txBody>
-          <a:bodyPr wrap="square" lIns="0" tIns="0" rIns="0" bIns="0" rtlCol="0" anchor="ctr"/>
-          <a:lstStyle/>
-          <a:p>
-            <a:pPr algn="ctr" indent="0" marL="0">
-              <a:buNone/>
-            </a:pPr>
-            <a:r>
-              <a:rPr lang="en-US" sz="900" b="1" dirty="0">
-                <a:solidFill>
-                  <a:srgbClr val="9D174D"/>
-                </a:solidFill>
-                <a:latin typeface="Trebuchet MS" pitchFamily="34" charset="0"/>
-                <a:ea typeface="Trebuchet MS" pitchFamily="34" charset="-122"/>
-                <a:cs typeface="Trebuchet MS" pitchFamily="34" charset="-120"/>
-              </a:rPr>
-              <a:t>c</a:t>
-            </a:r>
-            <a:endParaRPr lang="en-US" sz="900" dirty="0"/>
-          </a:p>
-        </p:txBody>
-      </p:sp>
-      <p:sp>
-        <p:nvSpPr>
-          <p:cNvPr id="69" name="Text 67"/>
-          <p:cNvSpPr/>
-          <p:nvPr/>
-        </p:nvSpPr>
-        <p:spPr>
-          <a:xfrm>
-            <a:off x="6475560" y="4572000"/>
-            <a:ext cx="451573" cy="219456"/>
-          </a:xfrm>
-          <a:prstGeom prst="rect">
-            <a:avLst/>
-          </a:prstGeom>
-          <a:noFill/>
-          <a:ln/>
-        </p:spPr>
-        <p:txBody>
-          <a:bodyPr wrap="square" lIns="0" tIns="0" rIns="0" bIns="0" rtlCol="0" anchor="t"/>
-          <a:lstStyle/>
-          <a:p>
-            <a:pPr algn="ctr" indent="0" marL="0">
-              <a:buNone/>
-            </a:pPr>
-            <a:r>
-              <a:rPr lang="en-US" sz="750" i="1" dirty="0">
-                <a:solidFill>
-                  <a:srgbClr val="94A3B8"/>
-                </a:solidFill>
-                <a:latin typeface="Calibri" pitchFamily="34" charset="0"/>
-                <a:ea typeface="Calibri" pitchFamily="34" charset="-122"/>
-                <a:cs typeface="Calibri" pitchFamily="34" charset="-120"/>
-              </a:rPr>
-              <a:t>/k/</a:t>
-            </a:r>
-            <a:endParaRPr lang="en-US" sz="750" dirty="0"/>
-          </a:p>
-        </p:txBody>
-      </p:sp>
-      <p:sp>
-        <p:nvSpPr>
-          <p:cNvPr id="70" name="Shape 68"/>
-          <p:cNvSpPr/>
-          <p:nvPr/>
-        </p:nvSpPr>
-        <p:spPr>
-          <a:xfrm>
-            <a:off x="6978078" y="4169664"/>
-            <a:ext cx="451573" cy="384048"/>
-          </a:xfrm>
-          <a:prstGeom prst="rect">
-            <a:avLst>
-              <a:gd name="adj" fmla="val 9524"/>
-            </a:avLst>
-          </a:prstGeom>
-          <a:solidFill>
-            <a:srgbClr val="FFFFFF"/>
-          </a:solidFill>
-          <a:ln w="12700">
-            <a:solidFill>
-              <a:srgbClr val="DB2777"/>
-            </a:solidFill>
-            <a:prstDash val="solid"/>
-          </a:ln>
-        </p:spPr>
-      </p:sp>
-      <p:sp>
-        <p:nvSpPr>
-          <p:cNvPr id="71" name="Text 69"/>
-          <p:cNvSpPr/>
-          <p:nvPr/>
-        </p:nvSpPr>
-        <p:spPr>
-          <a:xfrm>
-            <a:off x="6978078" y="4169664"/>
-            <a:ext cx="451573" cy="384048"/>
-          </a:xfrm>
-          <a:prstGeom prst="rect">
-            <a:avLst/>
-          </a:prstGeom>
-          <a:noFill/>
-          <a:ln/>
-        </p:spPr>
-        <p:txBody>
-          <a:bodyPr wrap="square" lIns="0" tIns="0" rIns="0" bIns="0" rtlCol="0" anchor="ctr"/>
-          <a:lstStyle/>
-          <a:p>
-            <a:pPr algn="ctr" indent="0" marL="0">
-              <a:buNone/>
-            </a:pPr>
-            <a:r>
-              <a:rPr lang="en-US" sz="900" b="1" dirty="0">
-                <a:solidFill>
-                  <a:srgbClr val="9D174D"/>
-                </a:solidFill>
-                <a:latin typeface="Trebuchet MS" pitchFamily="34" charset="0"/>
-                <a:ea typeface="Trebuchet MS" pitchFamily="34" charset="-122"/>
-                <a:cs typeface="Trebuchet MS" pitchFamily="34" charset="-120"/>
-              </a:rPr>
-              <a:t>a</a:t>
-            </a:r>
-            <a:endParaRPr lang="en-US" sz="900" dirty="0"/>
-          </a:p>
-        </p:txBody>
-      </p:sp>
-      <p:sp>
-        <p:nvSpPr>
-          <p:cNvPr id="72" name="Shape 70"/>
-          <p:cNvSpPr/>
-          <p:nvPr/>
-        </p:nvSpPr>
-        <p:spPr>
-          <a:xfrm>
-            <a:off x="7480596" y="4169664"/>
-            <a:ext cx="451573" cy="384048"/>
-          </a:xfrm>
-          <a:prstGeom prst="rect">
-            <a:avLst>
-              <a:gd name="adj" fmla="val 9524"/>
-            </a:avLst>
-          </a:prstGeom>
-          <a:solidFill>
-            <a:srgbClr val="FFFFFF"/>
-          </a:solidFill>
-          <a:ln w="12700">
-            <a:solidFill>
-              <a:srgbClr val="DB2777"/>
-            </a:solidFill>
-            <a:prstDash val="solid"/>
-          </a:ln>
-        </p:spPr>
-      </p:sp>
-      <p:sp>
-        <p:nvSpPr>
-          <p:cNvPr id="73" name="Text 71"/>
-          <p:cNvSpPr/>
-          <p:nvPr/>
-        </p:nvSpPr>
-        <p:spPr>
-          <a:xfrm>
-            <a:off x="7480596" y="4169664"/>
-            <a:ext cx="451573" cy="384048"/>
-          </a:xfrm>
-          <a:prstGeom prst="rect">
-            <a:avLst/>
-          </a:prstGeom>
-          <a:noFill/>
-          <a:ln/>
-        </p:spPr>
-        <p:txBody>
-          <a:bodyPr wrap="square" lIns="0" tIns="0" rIns="0" bIns="0" rtlCol="0" anchor="ctr"/>
-          <a:lstStyle/>
-          <a:p>
-            <a:pPr algn="ctr" indent="0" marL="0">
-              <a:buNone/>
-            </a:pPr>
-            <a:r>
-              <a:rPr lang="en-US" sz="900" b="1" dirty="0">
-                <a:solidFill>
-                  <a:srgbClr val="9D174D"/>
-                </a:solidFill>
-                <a:latin typeface="Trebuchet MS" pitchFamily="34" charset="0"/>
-                <a:ea typeface="Trebuchet MS" pitchFamily="34" charset="-122"/>
-                <a:cs typeface="Trebuchet MS" pitchFamily="34" charset="-120"/>
-              </a:rPr>
-              <a:t>ll</a:t>
-            </a:r>
-            <a:endParaRPr lang="en-US" sz="900" dirty="0"/>
-          </a:p>
-        </p:txBody>
-      </p:sp>
-      <p:sp>
-        <p:nvSpPr>
-          <p:cNvPr id="74" name="Shape 72"/>
-          <p:cNvSpPr/>
-          <p:nvPr/>
-        </p:nvSpPr>
-        <p:spPr>
-          <a:xfrm>
-            <a:off x="7983114" y="4169664"/>
-            <a:ext cx="451573" cy="384048"/>
-          </a:xfrm>
-          <a:prstGeom prst="rect">
-            <a:avLst>
-              <a:gd name="adj" fmla="val 9524"/>
-            </a:avLst>
-          </a:prstGeom>
-          <a:solidFill>
-            <a:srgbClr val="FFFFFF"/>
-          </a:solidFill>
-          <a:ln w="12700">
-            <a:solidFill>
-              <a:srgbClr val="DB2777"/>
-            </a:solidFill>
-            <a:prstDash val="solid"/>
-          </a:ln>
-        </p:spPr>
-      </p:sp>
-      <p:sp>
-        <p:nvSpPr>
-          <p:cNvPr id="75" name="Text 73"/>
-          <p:cNvSpPr/>
-          <p:nvPr/>
-        </p:nvSpPr>
-        <p:spPr>
-          <a:xfrm>
-            <a:off x="7983114" y="4169664"/>
-            <a:ext cx="451573" cy="384048"/>
-          </a:xfrm>
-          <a:prstGeom prst="rect">
-            <a:avLst/>
-          </a:prstGeom>
-          <a:noFill/>
-          <a:ln/>
-        </p:spPr>
-        <p:txBody>
-          <a:bodyPr wrap="square" lIns="0" tIns="0" rIns="0" bIns="0" rtlCol="0" anchor="ctr"/>
-          <a:lstStyle/>
-          <a:p>
-            <a:pPr algn="ctr" indent="0" marL="0">
-              <a:buNone/>
-            </a:pPr>
-            <a:r>
-              <a:rPr lang="en-US" sz="900" b="1" dirty="0">
-                <a:solidFill>
-                  <a:srgbClr val="9D174D"/>
-                </a:solidFill>
-                <a:latin typeface="Trebuchet MS" pitchFamily="34" charset="0"/>
-                <a:ea typeface="Trebuchet MS" pitchFamily="34" charset="-122"/>
-                <a:cs typeface="Trebuchet MS" pitchFamily="34" charset="-120"/>
-              </a:rPr>
-              <a:t>y</a:t>
+              <a:t>al</a:t>
             </a:r>
             <a:endParaRPr lang="en-US" sz="900" dirty="0"/>
           </a:p>
@@ -32478,7 +30675,7 @@
                 <a:ea typeface="Calibri" pitchFamily="34" charset="-122"/>
                 <a:cs typeface="Calibri" pitchFamily="34" charset="-120"/>
               </a:rPr>
-              <a:t>relating to reason or study</a:t>
+              <a:t>relating to reason or logic</a:t>
             </a:r>
             <a:endParaRPr lang="en-US" sz="850" dirty="0"/>
           </a:p>
@@ -33463,7 +31660,7 @@
                 <a:ea typeface="Calibri" pitchFamily="34" charset="-122"/>
                 <a:cs typeface="Calibri" pitchFamily="34" charset="-120"/>
               </a:rPr>
-              <a:t>relating to reason or study</a:t>
+              <a:t>relating to reason or logic</a:t>
             </a:r>
             <a:endParaRPr lang="en-US" sz="850" dirty="0"/>
           </a:p>
@@ -34895,7 +33092,7 @@
                 <a:ea typeface="Calibri" pitchFamily="34" charset="-122"/>
                 <a:cs typeface="Calibri" pitchFamily="34" charset="-120"/>
               </a:rPr>
-              <a:t>relating to reason or study</a:t>
+              <a:t>relating to reason or logic</a:t>
             </a:r>
             <a:endParaRPr lang="en-US" sz="850" dirty="0"/>
           </a:p>
@@ -38604,7 +36801,7 @@
                 <a:ea typeface="Trebuchet MS" pitchFamily="34" charset="-122"/>
                 <a:cs typeface="Trebuchet MS" pitchFamily="34" charset="-120"/>
               </a:rPr>
-              <a:t>techno-</a:t>
+              <a:t>psycho-</a:t>
             </a:r>
             <a:endParaRPr lang="en-US" sz="1300" dirty="0"/>
           </a:p>
@@ -38757,7 +36954,7 @@
                 <a:ea typeface="Trebuchet MS" pitchFamily="34" charset="-122"/>
                 <a:cs typeface="Trebuchet MS" pitchFamily="34" charset="-120"/>
               </a:rPr>
-              <a:t>psycho-</a:t>
+              <a:t>techno-</a:t>
             </a:r>
             <a:endParaRPr lang="en-US" sz="1300" dirty="0"/>
           </a:p>
@@ -39017,7 +37214,7 @@
                 <a:ea typeface="Trebuchet MS" pitchFamily="34" charset="-122"/>
                 <a:cs typeface="Trebuchet MS" pitchFamily="34" charset="-120"/>
               </a:rPr>
-              <a:t>biological</a:t>
+              <a:t>illogical</a:t>
             </a:r>
             <a:endParaRPr lang="en-US" sz="1200" dirty="0"/>
           </a:p>
@@ -39083,7 +37280,7 @@
                 <a:ea typeface="Trebuchet MS" pitchFamily="34" charset="-122"/>
                 <a:cs typeface="Trebuchet MS" pitchFamily="34" charset="-120"/>
               </a:rPr>
-              <a:t>geological</a:t>
+              <a:t>biological</a:t>
             </a:r>
             <a:endParaRPr lang="en-US" sz="1200" dirty="0"/>
           </a:p>
@@ -39149,7 +37346,7 @@
                 <a:ea typeface="Trebuchet MS" pitchFamily="34" charset="-122"/>
                 <a:cs typeface="Trebuchet MS" pitchFamily="34" charset="-120"/>
               </a:rPr>
-              <a:t>chronological</a:t>
+              <a:t>geological</a:t>
             </a:r>
             <a:endParaRPr lang="en-US" sz="1200" dirty="0"/>
           </a:p>
@@ -39215,7 +37412,7 @@
                 <a:ea typeface="Trebuchet MS" pitchFamily="34" charset="-122"/>
                 <a:cs typeface="Trebuchet MS" pitchFamily="34" charset="-120"/>
               </a:rPr>
-              <a:t>technological</a:t>
+              <a:t>chronological</a:t>
             </a:r>
             <a:endParaRPr lang="en-US" sz="1200" dirty="0"/>
           </a:p>
@@ -39347,7 +37544,7 @@
                 <a:ea typeface="Trebuchet MS" pitchFamily="34" charset="-122"/>
                 <a:cs typeface="Trebuchet MS" pitchFamily="34" charset="-120"/>
               </a:rPr>
-              <a:t>logically</a:t>
+              <a:t>technological</a:t>
             </a:r>
             <a:endParaRPr lang="en-US" sz="1200" dirty="0"/>
           </a:p>
@@ -39413,7 +37610,7 @@
                 <a:ea typeface="Trebuchet MS" pitchFamily="34" charset="-122"/>
                 <a:cs typeface="Trebuchet MS" pitchFamily="34" charset="-120"/>
               </a:rPr>
-              <a:t>illogical</a:t>
+              <a:t>logically</a:t>
             </a:r>
             <a:endParaRPr lang="en-US" sz="1200" dirty="0"/>
           </a:p>
@@ -40601,7 +38798,7 @@
                 <a:ea typeface="Calibri" pitchFamily="34" charset="-122"/>
                 <a:cs typeface="Calibri" pitchFamily="34" charset="-120"/>
               </a:rPr>
-              <a:t>1.  The root 'logical' comes from Greek and relates to reason.</a:t>
+              <a:t>1.  The prefix 'bio' added to 'logical' makes the word 'biological', which relates to living things.</a:t>
             </a:r>
             <a:endParaRPr lang="en-US" sz="1300" dirty="0"/>
           </a:p>
@@ -40740,7 +38937,7 @@
                 <a:ea typeface="Calibri" pitchFamily="34" charset="-122"/>
                 <a:cs typeface="Calibri" pitchFamily="34" charset="-120"/>
               </a:rPr>
-              <a:t>2.  The word 'biological' means relating to rocks and the Earth.</a:t>
+              <a:t>2.  The morpheme 'logical' comes from the Greek word 'logikos'.</a:t>
             </a:r>
             <a:endParaRPr lang="en-US" sz="1300" dirty="0"/>
           </a:p>
@@ -40763,11 +38960,11 @@
             </a:avLst>
           </a:prstGeom>
           <a:solidFill>
-            <a:srgbClr val="FEE2E2"/>
-          </a:solidFill>
-          <a:ln w="12700">
-            <a:solidFill>
-              <a:srgbClr val="DC2626"/>
+            <a:srgbClr val="DCFCE7"/>
+          </a:solidFill>
+          <a:ln w="12700">
+            <a:solidFill>
+              <a:srgbClr val="16A34A"/>
             </a:solidFill>
             <a:prstDash val="solid"/>
           </a:ln>
@@ -40800,13 +38997,13 @@
             <a:r>
               <a:rPr lang="en-US" sz="1100" b="1" dirty="0">
                 <a:solidFill>
-                  <a:srgbClr val="DC2626"/>
+                  <a:srgbClr val="16A34A"/>
                 </a:solidFill>
                 <a:latin typeface="Trebuchet MS" pitchFamily="34" charset="0"/>
                 <a:ea typeface="Trebuchet MS" pitchFamily="34" charset="-122"/>
                 <a:cs typeface="Trebuchet MS" pitchFamily="34" charset="-120"/>
               </a:rPr>
-              <a:t>FALSE</a:t>
+              <a:t>TRUE</a:t>
             </a:r>
             <a:endParaRPr lang="en-US" sz="1100" dirty="0"/>
           </a:p>
@@ -40879,7 +39076,7 @@
                 <a:ea typeface="Calibri" pitchFamily="34" charset="-122"/>
                 <a:cs typeface="Calibri" pitchFamily="34" charset="-120"/>
               </a:rPr>
-              <a:t>3.  Adding 'il-' before 'logical' creates a word meaning not logical.</a:t>
+              <a:t>3.  The word 'illogical' means something that makes perfect sense.</a:t>
             </a:r>
             <a:endParaRPr lang="en-US" sz="1300" dirty="0"/>
           </a:p>
@@ -40902,11 +39099,11 @@
             </a:avLst>
           </a:prstGeom>
           <a:solidFill>
-            <a:srgbClr val="DCFCE7"/>
-          </a:solidFill>
-          <a:ln w="12700">
-            <a:solidFill>
-              <a:srgbClr val="16A34A"/>
+            <a:srgbClr val="FEE2E2"/>
+          </a:solidFill>
+          <a:ln w="12700">
+            <a:solidFill>
+              <a:srgbClr val="DC2626"/>
             </a:solidFill>
             <a:prstDash val="solid"/>
           </a:ln>
@@ -40939,13 +39136,13 @@
             <a:r>
               <a:rPr lang="en-US" sz="1100" b="1" dirty="0">
                 <a:solidFill>
-                  <a:srgbClr val="16A34A"/>
+                  <a:srgbClr val="DC2626"/>
                 </a:solidFill>
                 <a:latin typeface="Trebuchet MS" pitchFamily="34" charset="0"/>
                 <a:ea typeface="Trebuchet MS" pitchFamily="34" charset="-122"/>
                 <a:cs typeface="Trebuchet MS" pitchFamily="34" charset="-120"/>
               </a:rPr>
-              <a:t>TRUE</a:t>
+              <a:t>FALSE</a:t>
             </a:r>
             <a:endParaRPr lang="en-US" sz="1100" dirty="0"/>
           </a:p>
@@ -41018,7 +39215,7 @@
                 <a:ea typeface="Calibri" pitchFamily="34" charset="-122"/>
                 <a:cs typeface="Calibri" pitchFamily="34" charset="-120"/>
               </a:rPr>
-              <a:t>4.  The word 'chronological' means arranged in time order.</a:t>
+              <a:t>4.  Adding '-ly' to 'logical' makes the word 'logically', which describes doing something in a sensible way.</a:t>
             </a:r>
             <a:endParaRPr lang="en-US" sz="1300" dirty="0"/>
           </a:p>
@@ -41157,7 +39354,7 @@
                 <a:ea typeface="Calibri" pitchFamily="34" charset="-122"/>
                 <a:cs typeface="Calibri" pitchFamily="34" charset="-120"/>
               </a:rPr>
-              <a:t>5.  The suffix '-ly' changes 'logical' into a noun.</a:t>
+              <a:t>5.  The word 'chronological' has nothing to do with time or order.</a:t>
             </a:r>
             <a:endParaRPr lang="en-US" sz="1300" dirty="0"/>
           </a:p>
@@ -41862,7 +40059,7 @@
                 <a:ea typeface="Trebuchet MS" pitchFamily="34" charset="-122"/>
                 <a:cs typeface="Trebuchet MS" pitchFamily="34" charset="-120"/>
               </a:rPr>
-              <a:t>biological</a:t>
+              <a:t>illogical</a:t>
             </a:r>
             <a:endParaRPr lang="en-US" sz="1300" dirty="0"/>
           </a:p>
@@ -41928,7 +40125,7 @@
                 <a:ea typeface="Trebuchet MS" pitchFamily="34" charset="-122"/>
                 <a:cs typeface="Trebuchet MS" pitchFamily="34" charset="-120"/>
               </a:rPr>
-              <a:t>geological</a:t>
+              <a:t>biological</a:t>
             </a:r>
             <a:endParaRPr lang="en-US" sz="1300" dirty="0"/>
           </a:p>
@@ -41994,7 +40191,7 @@
                 <a:ea typeface="Trebuchet MS" pitchFamily="34" charset="-122"/>
                 <a:cs typeface="Trebuchet MS" pitchFamily="34" charset="-120"/>
               </a:rPr>
-              <a:t>chronological</a:t>
+              <a:t>geological</a:t>
             </a:r>
             <a:endParaRPr lang="en-US" sz="1300" dirty="0"/>
           </a:p>
@@ -42060,7 +40257,7 @@
                 <a:ea typeface="Trebuchet MS" pitchFamily="34" charset="-122"/>
                 <a:cs typeface="Trebuchet MS" pitchFamily="34" charset="-120"/>
               </a:rPr>
-              <a:t>technological</a:t>
+              <a:t>chronological</a:t>
             </a:r>
             <a:endParaRPr lang="en-US" sz="1300" dirty="0"/>
           </a:p>
@@ -42192,7 +40389,7 @@
                 <a:ea typeface="Trebuchet MS" pitchFamily="34" charset="-122"/>
                 <a:cs typeface="Trebuchet MS" pitchFamily="34" charset="-120"/>
               </a:rPr>
-              <a:t>logically</a:t>
+              <a:t>technological</a:t>
             </a:r>
             <a:endParaRPr lang="en-US" sz="1300" dirty="0"/>
           </a:p>
@@ -43283,7 +41480,7 @@
                 <a:ea typeface="Trebuchet MS" pitchFamily="34" charset="-122"/>
                 <a:cs typeface="Trebuchet MS" pitchFamily="34" charset="-120"/>
               </a:rPr>
-              <a:t>techno-</a:t>
+              <a:t>psycho-</a:t>
             </a:r>
             <a:endParaRPr lang="en-US" sz="1300" dirty="0"/>
           </a:p>
@@ -43436,7 +41633,7 @@
                 <a:ea typeface="Trebuchet MS" pitchFamily="34" charset="-122"/>
                 <a:cs typeface="Trebuchet MS" pitchFamily="34" charset="-120"/>
               </a:rPr>
-              <a:t>psycho-</a:t>
+              <a:t>techno-</a:t>
             </a:r>
             <a:endParaRPr lang="en-US" sz="1300" dirty="0"/>
           </a:p>
@@ -44436,7 +42633,7 @@
                 <a:ea typeface="Calibri" pitchFamily="34" charset="-122"/>
                 <a:cs typeface="Calibri" pitchFamily="34" charset="-120"/>
               </a:rPr>
-              <a:t>When something makes sense and follows clear reasoning.</a:t>
+              <a:t>When something makes sense and follows clear reasoning, like solving a maths problem step by step.</a:t>
             </a:r>
             <a:endParaRPr lang="en-US" sz="1200" dirty="0"/>
           </a:p>
@@ -44509,7 +42706,7 @@
                 <a:ea typeface="Trebuchet MS" pitchFamily="34" charset="-122"/>
                 <a:cs typeface="Trebuchet MS" pitchFamily="34" charset="-120"/>
               </a:rPr>
-              <a:t>biological</a:t>
+              <a:t>illogical</a:t>
             </a:r>
             <a:endParaRPr lang="en-US" sz="1200" dirty="0"/>
           </a:p>
@@ -44575,7 +42772,7 @@
                 <a:ea typeface="Calibri" pitchFamily="34" charset="-122"/>
                 <a:cs typeface="Calibri" pitchFamily="34" charset="-120"/>
               </a:rPr>
-              <a:t>Done in a way that is sensible and well-reasoned.</a:t>
+              <a:t>Relating to machines, computers, and tools that make our lives easier.</a:t>
             </a:r>
             <a:endParaRPr lang="en-US" sz="1200" dirty="0"/>
           </a:p>
@@ -44648,7 +42845,7 @@
                 <a:ea typeface="Trebuchet MS" pitchFamily="34" charset="-122"/>
                 <a:cs typeface="Trebuchet MS" pitchFamily="34" charset="-120"/>
               </a:rPr>
-              <a:t>geological</a:t>
+              <a:t>biological</a:t>
             </a:r>
             <a:endParaRPr lang="en-US" sz="1200" dirty="0"/>
           </a:p>
@@ -44714,7 +42911,7 @@
                 <a:ea typeface="Calibri" pitchFamily="34" charset="-122"/>
                 <a:cs typeface="Calibri" pitchFamily="34" charset="-120"/>
               </a:rPr>
-              <a:t>Relating to rocks, land, and the history of the Earth.</a:t>
+              <a:t>Relating to living things and how they grow, live, and function.</a:t>
             </a:r>
             <a:endParaRPr lang="en-US" sz="1200" dirty="0"/>
           </a:p>
@@ -44787,7 +42984,7 @@
                 <a:ea typeface="Trebuchet MS" pitchFamily="34" charset="-122"/>
                 <a:cs typeface="Trebuchet MS" pitchFamily="34" charset="-120"/>
               </a:rPr>
-              <a:t>chronological</a:t>
+              <a:t>geological</a:t>
             </a:r>
             <a:endParaRPr lang="en-US" sz="1200" dirty="0"/>
           </a:p>
@@ -44853,7 +43050,7 @@
                 <a:ea typeface="Calibri" pitchFamily="34" charset="-122"/>
                 <a:cs typeface="Calibri" pitchFamily="34" charset="-120"/>
               </a:rPr>
-              <a:t>Relating to machines, computers, and modern inventions.</a:t>
+              <a:t>Arranged in the order that things happened, from first to last.</a:t>
             </a:r>
             <a:endParaRPr lang="en-US" sz="1200" dirty="0"/>
           </a:p>
@@ -44926,7 +43123,7 @@
                 <a:ea typeface="Trebuchet MS" pitchFamily="34" charset="-122"/>
                 <a:cs typeface="Trebuchet MS" pitchFamily="34" charset="-120"/>
               </a:rPr>
-              <a:t>technological</a:t>
+              <a:t>chronological</a:t>
             </a:r>
             <a:endParaRPr lang="en-US" sz="1200" dirty="0"/>
           </a:p>
@@ -44992,7 +43189,7 @@
                 <a:ea typeface="Calibri" pitchFamily="34" charset="-122"/>
                 <a:cs typeface="Calibri" pitchFamily="34" charset="-120"/>
               </a:rPr>
-              <a:t>Arranged in the order that things happened in time.</a:t>
+              <a:t>Relating to rocks, land, and the physical history of the Earth.</a:t>
             </a:r>
             <a:endParaRPr lang="en-US" sz="1200" dirty="0"/>
           </a:p>
@@ -45131,7 +43328,7 @@
                 <a:ea typeface="Calibri" pitchFamily="34" charset="-122"/>
                 <a:cs typeface="Calibri" pitchFamily="34" charset="-120"/>
               </a:rPr>
-              <a:t>Relating to the mind and how people think and feel.</a:t>
+              <a:t>Relating to the mind and how people think, feel, and behave.</a:t>
             </a:r>
             <a:endParaRPr lang="en-US" sz="1200" dirty="0"/>
           </a:p>
@@ -45204,7 +43401,7 @@
                 <a:ea typeface="Trebuchet MS" pitchFamily="34" charset="-122"/>
                 <a:cs typeface="Trebuchet MS" pitchFamily="34" charset="-120"/>
               </a:rPr>
-              <a:t>logically</a:t>
+              <a:t>technological</a:t>
             </a:r>
             <a:endParaRPr lang="en-US" sz="1200" dirty="0"/>
           </a:p>
@@ -45270,7 +43467,7 @@
                 <a:ea typeface="Calibri" pitchFamily="34" charset="-122"/>
                 <a:cs typeface="Calibri" pitchFamily="34" charset="-120"/>
               </a:rPr>
-              <a:t>Relating to living things and how they grow and work.</a:t>
+              <a:t>When something does not make sense or has no clear reason behind it.</a:t>
             </a:r>
             <a:endParaRPr lang="en-US" sz="1200" dirty="0"/>
           </a:p>
@@ -45765,7 +43962,7 @@
                 <a:ea typeface="Calibri" pitchFamily="34" charset="-122"/>
                 <a:cs typeface="Calibri" pitchFamily="34" charset="-120"/>
               </a:rPr>
-              <a:t>The scientist gave a logical explanation for why the ice melted so quickly in the sun.</a:t>
+              <a:t>The scientist gave a logical explanation for why the volcano erupted, using evidence from the rocks.</a:t>
             </a:r>
             <a:endParaRPr lang="en-US" sz="1500" dirty="0"/>
           </a:p>
@@ -45929,7 +44126,7 @@
                 <a:ea typeface="Calibri" pitchFamily="34" charset="-122"/>
                 <a:cs typeface="Calibri" pitchFamily="34" charset="-120"/>
               </a:rPr>
-              <a:t>We put the events in chronological order so the story made sense from beginning to end.</a:t>
+              <a:t>It is illogical to leave your umbrella at home when the weather forecast says it will rain heavily.</a:t>
             </a:r>
             <a:endParaRPr lang="en-US" sz="1500" dirty="0"/>
           </a:p>
@@ -46093,7 +44290,7 @@
                 <a:ea typeface="Calibri" pitchFamily="34" charset="-122"/>
                 <a:cs typeface="Calibri" pitchFamily="34" charset="-120"/>
               </a:rPr>
-              <a:t>The technological changes over the last twenty years have completely changed the way we learn.</a:t>
+              <a:t>The students arranged the events of the story in chronological order, starting from the very beginning.</a:t>
             </a:r>
             <a:endParaRPr lang="en-US" sz="1500" dirty="0"/>
           </a:p>

--- a/output/wordlabs-logical-3day.pptx
+++ b/output/wordlabs-logical-3day.pptx
@@ -4240,7 +4240,7 @@
                 <a:ea typeface="Calibri" pitchFamily="34" charset="-122"/>
                 <a:cs typeface="Calibri" pitchFamily="34" charset="-120"/>
               </a:rPr>
-              <a:t>"relating to reason or logic"</a:t>
+              <a:t>"making sense"</a:t>
             </a:r>
             <a:endParaRPr lang="en-US" sz="2200" dirty="0"/>
           </a:p>
@@ -4279,7 +4279,7 @@
                 <a:ea typeface="Calibri" pitchFamily="34" charset="-122"/>
                 <a:cs typeface="Calibri" pitchFamily="34" charset="-120"/>
               </a:rPr>
-              <a:t>Origin: Greek: logikos</a:t>
+              <a:t>Origin: Core English root</a:t>
             </a:r>
             <a:endParaRPr lang="en-US" sz="1300" dirty="0"/>
           </a:p>
@@ -5288,7 +5288,7 @@
                 <a:ea typeface="Calibri" pitchFamily="34" charset="-122"/>
                 <a:cs typeface="Calibri" pitchFamily="34" charset="-120"/>
               </a:rPr>
-              <a:t>Word Labs  •  wordlabs.app  •  Root: 'logical' = relating to reason or logic</a:t>
+              <a:t>Word Labs  •  wordlabs.app  •  Root: 'logical' = making sense</a:t>
             </a:r>
             <a:endParaRPr lang="en-US" sz="800" dirty="0"/>
           </a:p>
@@ -5928,7 +5928,7 @@
                 <a:ea typeface="Calibri" pitchFamily="34" charset="-122"/>
                 <a:cs typeface="Calibri" pitchFamily="34" charset="-120"/>
               </a:rPr>
-              <a:t>Word Labs  •  wordlabs.app  •  Root: 'logical' = relating to reason or logic</a:t>
+              <a:t>Word Labs  •  wordlabs.app  •  Root: 'logical' = making sense</a:t>
             </a:r>
             <a:endParaRPr lang="en-US" sz="800" dirty="0"/>
           </a:p>
@@ -6040,7 +6040,7 @@
                 <a:ea typeface="Calibri" pitchFamily="34" charset="-122"/>
                 <a:cs typeface="Calibri" pitchFamily="34" charset="-120"/>
               </a:rPr>
-              <a:t>The </a:t>
+              <a:t>The new phone uses some amazing </a:t>
             </a:r>
             <a:pPr algn="l" indent="0" marL="0">
               <a:buNone/>
@@ -6057,7 +6057,7 @@
                 <a:ea typeface="Calibri" pitchFamily="34" charset="-122"/>
                 <a:cs typeface="Calibri" pitchFamily="34" charset="-120"/>
               </a:rPr>
-              <a:t>biological</a:t>
+              <a:t>technological</a:t>
             </a:r>
             <a:pPr algn="l" indent="0" marL="0">
               <a:buNone/>
@@ -6071,7 +6071,7 @@
                 <a:ea typeface="Calibri" pitchFamily="34" charset="-122"/>
                 <a:cs typeface="Calibri" pitchFamily="34" charset="-120"/>
               </a:rPr>
-              <a:t> report was well written, and the teacher said our thinking was very </a:t>
+              <a:t> features. The photos were arranged </a:t>
             </a:r>
             <a:pPr algn="l" indent="0" marL="0">
               <a:buNone/>
@@ -6088,7 +6088,7 @@
                 <a:ea typeface="Calibri" pitchFamily="34" charset="-122"/>
                 <a:cs typeface="Calibri" pitchFamily="34" charset="-120"/>
               </a:rPr>
-              <a:t>logical</a:t>
+              <a:t>chronologically</a:t>
             </a:r>
             <a:pPr algn="l" indent="0" marL="0">
               <a:buNone/>
@@ -6102,7 +6102,7 @@
                 <a:ea typeface="Calibri" pitchFamily="34" charset="-122"/>
                 <a:cs typeface="Calibri" pitchFamily="34" charset="-120"/>
               </a:rPr>
-              <a:t>.</a:t>
+              <a:t>, starting with the earliest holiday.</a:t>
             </a:r>
             <a:endParaRPr lang="en-US" sz="1800" dirty="0"/>
           </a:p>
@@ -6257,7 +6257,7 @@
                 <a:ea typeface="Trebuchet MS" pitchFamily="34" charset="-122"/>
                 <a:cs typeface="Trebuchet MS" pitchFamily="34" charset="-120"/>
               </a:rPr>
-              <a:t>biological</a:t>
+              <a:t>technological</a:t>
             </a:r>
             <a:endParaRPr lang="en-US" sz="1400" dirty="0"/>
           </a:p>
@@ -6385,7 +6385,7 @@
                 <a:ea typeface="Trebuchet MS" pitchFamily="34" charset="-122"/>
                 <a:cs typeface="Trebuchet MS" pitchFamily="34" charset="-120"/>
               </a:rPr>
-              <a:t>logical</a:t>
+              <a:t>chronologically</a:t>
             </a:r>
             <a:endParaRPr lang="en-US" sz="1400" dirty="0"/>
           </a:p>
@@ -6716,7 +6716,7 @@
                 <a:ea typeface="Calibri" pitchFamily="34" charset="-122"/>
                 <a:cs typeface="Calibri" pitchFamily="34" charset="-120"/>
               </a:rPr>
-              <a:t>Word Labs  •  wordlabs.app  •  Root: 'logical' = relating to reason or logic</a:t>
+              <a:t>Word Labs  •  wordlabs.app  •  Root: 'logical' = making sense</a:t>
             </a:r>
             <a:endParaRPr lang="en-US" sz="800" dirty="0"/>
           </a:p>
@@ -6855,7 +6855,7 @@
                 <a:ea typeface="Trebuchet MS" pitchFamily="34" charset="-122"/>
                 <a:cs typeface="Trebuchet MS" pitchFamily="34" charset="-120"/>
               </a:rPr>
-              <a:t>biological</a:t>
+              <a:t>technological</a:t>
             </a:r>
             <a:endParaRPr lang="en-US" sz="2800" dirty="0"/>
           </a:p>
@@ -7543,7 +7543,7 @@
                 <a:ea typeface="Calibri" pitchFamily="34" charset="-122"/>
                 <a:cs typeface="Calibri" pitchFamily="34" charset="-120"/>
               </a:rPr>
-              <a:t>Word Labs  •  wordlabs.app  •  Root: 'logical' = relating to reason or logic</a:t>
+              <a:t>Word Labs  •  wordlabs.app  •  Root: 'logical' = making sense</a:t>
             </a:r>
             <a:endParaRPr lang="en-US" sz="800" dirty="0"/>
           </a:p>
@@ -7682,7 +7682,7 @@
                 <a:ea typeface="Trebuchet MS" pitchFamily="34" charset="-122"/>
                 <a:cs typeface="Trebuchet MS" pitchFamily="34" charset="-120"/>
               </a:rPr>
-              <a:t>biological</a:t>
+              <a:t>technological</a:t>
             </a:r>
             <a:endParaRPr lang="en-US" sz="2800" dirty="0"/>
           </a:p>
@@ -7821,7 +7821,7 @@
                 <a:ea typeface="Trebuchet MS" pitchFamily="34" charset="-122"/>
                 <a:cs typeface="Trebuchet MS" pitchFamily="34" charset="-120"/>
               </a:rPr>
-              <a:t>bio</a:t>
+              <a:t>techno</a:t>
             </a:r>
             <a:endParaRPr lang="en-US" sz="1300" dirty="0"/>
           </a:p>
@@ -7860,7 +7860,7 @@
                 <a:ea typeface="Calibri" pitchFamily="34" charset="-122"/>
                 <a:cs typeface="Calibri" pitchFamily="34" charset="-120"/>
               </a:rPr>
-              <a:t>life</a:t>
+              <a:t>technology; skill</a:t>
             </a:r>
             <a:endParaRPr lang="en-US" sz="850" dirty="0"/>
           </a:p>
@@ -7972,7 +7972,7 @@
                 <a:ea typeface="Calibri" pitchFamily="34" charset="-122"/>
                 <a:cs typeface="Calibri" pitchFamily="34" charset="-120"/>
               </a:rPr>
-              <a:t>relating to reason or logic</a:t>
+              <a:t>making sense</a:t>
             </a:r>
             <a:endParaRPr lang="en-US" sz="850" dirty="0"/>
           </a:p>
@@ -8528,7 +8528,7 @@
                 <a:ea typeface="Calibri" pitchFamily="34" charset="-122"/>
                 <a:cs typeface="Calibri" pitchFamily="34" charset="-120"/>
               </a:rPr>
-              <a:t>Word Labs  •  wordlabs.app  •  Root: 'logical' = relating to reason or logic</a:t>
+              <a:t>Word Labs  •  wordlabs.app  •  Root: 'logical' = making sense</a:t>
             </a:r>
             <a:endParaRPr lang="en-US" sz="800" dirty="0"/>
           </a:p>
@@ -8667,7 +8667,7 @@
                 <a:ea typeface="Trebuchet MS" pitchFamily="34" charset="-122"/>
                 <a:cs typeface="Trebuchet MS" pitchFamily="34" charset="-120"/>
               </a:rPr>
-              <a:t>biological</a:t>
+              <a:t>technological</a:t>
             </a:r>
             <a:endParaRPr lang="en-US" sz="2800" dirty="0"/>
           </a:p>
@@ -8806,7 +8806,7 @@
                 <a:ea typeface="Trebuchet MS" pitchFamily="34" charset="-122"/>
                 <a:cs typeface="Trebuchet MS" pitchFamily="34" charset="-120"/>
               </a:rPr>
-              <a:t>bio</a:t>
+              <a:t>techno</a:t>
             </a:r>
             <a:endParaRPr lang="en-US" sz="1300" dirty="0"/>
           </a:p>
@@ -8845,7 +8845,7 @@
                 <a:ea typeface="Calibri" pitchFamily="34" charset="-122"/>
                 <a:cs typeface="Calibri" pitchFamily="34" charset="-120"/>
               </a:rPr>
-              <a:t>life</a:t>
+              <a:t>technology; skill</a:t>
             </a:r>
             <a:endParaRPr lang="en-US" sz="850" dirty="0"/>
           </a:p>
@@ -8957,7 +8957,7 @@
                 <a:ea typeface="Calibri" pitchFamily="34" charset="-122"/>
                 <a:cs typeface="Calibri" pitchFamily="34" charset="-120"/>
               </a:rPr>
-              <a:t>relating to reason or logic</a:t>
+              <a:t>making sense</a:t>
             </a:r>
             <a:endParaRPr lang="en-US" sz="850" dirty="0"/>
           </a:p>
@@ -9116,7 +9116,7 @@
                 <a:ea typeface="Trebuchet MS" pitchFamily="34" charset="-122"/>
                 <a:cs typeface="Trebuchet MS" pitchFamily="34" charset="-120"/>
               </a:rPr>
-              <a:t>bi</a:t>
+              <a:t>tech</a:t>
             </a:r>
             <a:endParaRPr lang="en-US" sz="1400" dirty="0"/>
           </a:p>
@@ -9221,7 +9221,7 @@
                 <a:ea typeface="Trebuchet MS" pitchFamily="34" charset="-122"/>
                 <a:cs typeface="Trebuchet MS" pitchFamily="34" charset="-120"/>
               </a:rPr>
-              <a:t>o</a:t>
+              <a:t>no</a:t>
             </a:r>
             <a:endParaRPr lang="en-US" sz="1400" dirty="0"/>
           </a:p>
@@ -9960,7 +9960,7 @@
                 <a:ea typeface="Calibri" pitchFamily="34" charset="-122"/>
                 <a:cs typeface="Calibri" pitchFamily="34" charset="-120"/>
               </a:rPr>
-              <a:t>Word Labs  •  wordlabs.app  •  Root: 'logical' = relating to reason or logic</a:t>
+              <a:t>Word Labs  •  wordlabs.app  •  Root: 'logical' = making sense</a:t>
             </a:r>
             <a:endParaRPr lang="en-US" sz="800" dirty="0"/>
           </a:p>
@@ -10099,7 +10099,7 @@
                 <a:ea typeface="Trebuchet MS" pitchFamily="34" charset="-122"/>
                 <a:cs typeface="Trebuchet MS" pitchFamily="34" charset="-120"/>
               </a:rPr>
-              <a:t>biological</a:t>
+              <a:t>technological</a:t>
             </a:r>
             <a:endParaRPr lang="en-US" sz="2800" dirty="0"/>
           </a:p>
@@ -10238,7 +10238,7 @@
                 <a:ea typeface="Trebuchet MS" pitchFamily="34" charset="-122"/>
                 <a:cs typeface="Trebuchet MS" pitchFamily="34" charset="-120"/>
               </a:rPr>
-              <a:t>bio</a:t>
+              <a:t>techno</a:t>
             </a:r>
             <a:endParaRPr lang="en-US" sz="1300" dirty="0"/>
           </a:p>
@@ -10277,7 +10277,7 @@
                 <a:ea typeface="Calibri" pitchFamily="34" charset="-122"/>
                 <a:cs typeface="Calibri" pitchFamily="34" charset="-120"/>
               </a:rPr>
-              <a:t>life</a:t>
+              <a:t>technology; skill</a:t>
             </a:r>
             <a:endParaRPr lang="en-US" sz="850" dirty="0"/>
           </a:p>
@@ -10389,7 +10389,7 @@
                 <a:ea typeface="Calibri" pitchFamily="34" charset="-122"/>
                 <a:cs typeface="Calibri" pitchFamily="34" charset="-120"/>
               </a:rPr>
-              <a:t>relating to reason or logic</a:t>
+              <a:t>making sense</a:t>
             </a:r>
             <a:endParaRPr lang="en-US" sz="850" dirty="0"/>
           </a:p>
@@ -10548,7 +10548,7 @@
                 <a:ea typeface="Trebuchet MS" pitchFamily="34" charset="-122"/>
                 <a:cs typeface="Trebuchet MS" pitchFamily="34" charset="-120"/>
               </a:rPr>
-              <a:t>bi</a:t>
+              <a:t>tech</a:t>
             </a:r>
             <a:endParaRPr lang="en-US" sz="1400" dirty="0"/>
           </a:p>
@@ -10653,7 +10653,7 @@
                 <a:ea typeface="Trebuchet MS" pitchFamily="34" charset="-122"/>
                 <a:cs typeface="Trebuchet MS" pitchFamily="34" charset="-120"/>
               </a:rPr>
-              <a:t>o</a:t>
+              <a:t>no</a:t>
             </a:r>
             <a:endParaRPr lang="en-US" sz="1400" dirty="0"/>
           </a:p>
@@ -11049,11 +11049,11 @@
         <p:spPr>
           <a:xfrm>
             <a:off x="1874520" y="4096512"/>
-            <a:ext cx="6903720" cy="804672"/>
+            <a:ext cx="6903720" cy="658368"/>
           </a:xfrm>
           <a:prstGeom prst="rect">
             <a:avLst>
-              <a:gd name="adj" fmla="val 6818"/>
+              <a:gd name="adj" fmla="val 8333"/>
             </a:avLst>
           </a:prstGeom>
           <a:solidFill>
@@ -11075,12 +11075,12 @@
         </p:nvSpPr>
         <p:spPr>
           <a:xfrm>
-            <a:off x="1951330" y="4169664"/>
-            <a:ext cx="676656" cy="384048"/>
+            <a:off x="1952596" y="4169664"/>
+            <a:ext cx="493776" cy="475488"/>
           </a:xfrm>
           <a:prstGeom prst="rect">
             <a:avLst>
-              <a:gd name="adj" fmla="val 9524"/>
+              <a:gd name="adj" fmla="val 7692"/>
             </a:avLst>
           </a:prstGeom>
           <a:solidFill>
@@ -11102,8 +11102,8 @@
         </p:nvSpPr>
         <p:spPr>
           <a:xfrm>
-            <a:off x="1951330" y="4169664"/>
-            <a:ext cx="676656" cy="384048"/>
+            <a:off x="1952596" y="4169664"/>
+            <a:ext cx="493776" cy="475488"/>
           </a:xfrm>
           <a:prstGeom prst="rect">
             <a:avLst/>
@@ -11127,7 +11127,7 @@
                 <a:ea typeface="Trebuchet MS" pitchFamily="34" charset="-122"/>
                 <a:cs typeface="Trebuchet MS" pitchFamily="34" charset="-120"/>
               </a:rPr>
-              <a:t>b</a:t>
+              <a:t>t</a:t>
             </a:r>
             <a:endParaRPr lang="en-US" sz="900" dirty="0"/>
           </a:p>
@@ -11141,12 +11141,12 @@
         </p:nvSpPr>
         <p:spPr>
           <a:xfrm>
-            <a:off x="2677363" y="4169664"/>
-            <a:ext cx="676656" cy="384048"/>
+            <a:off x="2497015" y="4169664"/>
+            <a:ext cx="493776" cy="475488"/>
           </a:xfrm>
           <a:prstGeom prst="rect">
             <a:avLst>
-              <a:gd name="adj" fmla="val 9524"/>
+              <a:gd name="adj" fmla="val 7692"/>
             </a:avLst>
           </a:prstGeom>
           <a:solidFill>
@@ -11168,8 +11168,8 @@
         </p:nvSpPr>
         <p:spPr>
           <a:xfrm>
-            <a:off x="2677363" y="4169664"/>
-            <a:ext cx="676656" cy="384048"/>
+            <a:off x="2497015" y="4169664"/>
+            <a:ext cx="493776" cy="475488"/>
           </a:xfrm>
           <a:prstGeom prst="rect">
             <a:avLst/>
@@ -11193,7 +11193,7 @@
                 <a:ea typeface="Trebuchet MS" pitchFamily="34" charset="-122"/>
                 <a:cs typeface="Trebuchet MS" pitchFamily="34" charset="-120"/>
               </a:rPr>
-              <a:t>i</a:t>
+              <a:t>e</a:t>
             </a:r>
             <a:endParaRPr lang="en-US" sz="900" dirty="0"/>
           </a:p>
@@ -11207,12 +11207,12 @@
         </p:nvSpPr>
         <p:spPr>
           <a:xfrm>
-            <a:off x="3403397" y="4169664"/>
-            <a:ext cx="676656" cy="384048"/>
+            <a:off x="3041435" y="4169664"/>
+            <a:ext cx="493776" cy="475488"/>
           </a:xfrm>
           <a:prstGeom prst="rect">
             <a:avLst>
-              <a:gd name="adj" fmla="val 9524"/>
+              <a:gd name="adj" fmla="val 7692"/>
             </a:avLst>
           </a:prstGeom>
           <a:solidFill>
@@ -11234,8 +11234,8 @@
         </p:nvSpPr>
         <p:spPr>
           <a:xfrm>
-            <a:off x="3403397" y="4169664"/>
-            <a:ext cx="676656" cy="384048"/>
+            <a:off x="3041435" y="4169664"/>
+            <a:ext cx="493776" cy="475488"/>
           </a:xfrm>
           <a:prstGeom prst="rect">
             <a:avLst/>
@@ -11259,7 +11259,7 @@
                 <a:ea typeface="Trebuchet MS" pitchFamily="34" charset="-122"/>
                 <a:cs typeface="Trebuchet MS" pitchFamily="34" charset="-120"/>
               </a:rPr>
-              <a:t>o</a:t>
+              <a:t>ch</a:t>
             </a:r>
             <a:endParaRPr lang="en-US" sz="900" dirty="0"/>
           </a:p>
@@ -11273,12 +11273,12 @@
         </p:nvSpPr>
         <p:spPr>
           <a:xfrm>
-            <a:off x="4129430" y="4169664"/>
-            <a:ext cx="676656" cy="384048"/>
+            <a:off x="3585855" y="4169664"/>
+            <a:ext cx="493776" cy="475488"/>
           </a:xfrm>
           <a:prstGeom prst="rect">
             <a:avLst>
-              <a:gd name="adj" fmla="val 9524"/>
+              <a:gd name="adj" fmla="val 7692"/>
             </a:avLst>
           </a:prstGeom>
           <a:solidFill>
@@ -11300,8 +11300,8 @@
         </p:nvSpPr>
         <p:spPr>
           <a:xfrm>
-            <a:off x="4129430" y="4169664"/>
-            <a:ext cx="676656" cy="384048"/>
+            <a:off x="3585855" y="4169664"/>
+            <a:ext cx="493776" cy="475488"/>
           </a:xfrm>
           <a:prstGeom prst="rect">
             <a:avLst/>
@@ -11325,7 +11325,7 @@
                 <a:ea typeface="Trebuchet MS" pitchFamily="34" charset="-122"/>
                 <a:cs typeface="Trebuchet MS" pitchFamily="34" charset="-120"/>
               </a:rPr>
-              <a:t>l</a:t>
+              <a:t>n</a:t>
             </a:r>
             <a:endParaRPr lang="en-US" sz="900" dirty="0"/>
           </a:p>
@@ -11339,12 +11339,12 @@
         </p:nvSpPr>
         <p:spPr>
           <a:xfrm>
-            <a:off x="4855464" y="4169664"/>
-            <a:ext cx="676656" cy="384048"/>
+            <a:off x="4130274" y="4169664"/>
+            <a:ext cx="493776" cy="475488"/>
           </a:xfrm>
           <a:prstGeom prst="rect">
             <a:avLst>
-              <a:gd name="adj" fmla="val 9524"/>
+              <a:gd name="adj" fmla="val 7692"/>
             </a:avLst>
           </a:prstGeom>
           <a:solidFill>
@@ -11366,8 +11366,8 @@
         </p:nvSpPr>
         <p:spPr>
           <a:xfrm>
-            <a:off x="4855464" y="4169664"/>
-            <a:ext cx="676656" cy="384048"/>
+            <a:off x="4130274" y="4169664"/>
+            <a:ext cx="493776" cy="475488"/>
           </a:xfrm>
           <a:prstGeom prst="rect">
             <a:avLst/>
@@ -11405,12 +11405,12 @@
         </p:nvSpPr>
         <p:spPr>
           <a:xfrm>
-            <a:off x="5581498" y="4169664"/>
-            <a:ext cx="676656" cy="384048"/>
+            <a:off x="4674694" y="4169664"/>
+            <a:ext cx="493776" cy="475488"/>
           </a:xfrm>
           <a:prstGeom prst="rect">
             <a:avLst>
-              <a:gd name="adj" fmla="val 9524"/>
+              <a:gd name="adj" fmla="val 7692"/>
             </a:avLst>
           </a:prstGeom>
           <a:solidFill>
@@ -11432,8 +11432,8 @@
         </p:nvSpPr>
         <p:spPr>
           <a:xfrm>
-            <a:off x="5581498" y="4169664"/>
-            <a:ext cx="676656" cy="384048"/>
+            <a:off x="4674694" y="4169664"/>
+            <a:ext cx="493776" cy="475488"/>
           </a:xfrm>
           <a:prstGeom prst="rect">
             <a:avLst/>
@@ -11457,7 +11457,7 @@
                 <a:ea typeface="Trebuchet MS" pitchFamily="34" charset="-122"/>
                 <a:cs typeface="Trebuchet MS" pitchFamily="34" charset="-120"/>
               </a:rPr>
-              <a:t>g</a:t>
+              <a:t>l</a:t>
             </a:r>
             <a:endParaRPr lang="en-US" sz="900" dirty="0"/>
           </a:p>
@@ -11471,12 +11471,12 @@
         </p:nvSpPr>
         <p:spPr>
           <a:xfrm>
-            <a:off x="6307531" y="4169664"/>
-            <a:ext cx="676656" cy="384048"/>
+            <a:off x="5219114" y="4169664"/>
+            <a:ext cx="493776" cy="475488"/>
           </a:xfrm>
           <a:prstGeom prst="rect">
             <a:avLst>
-              <a:gd name="adj" fmla="val 9524"/>
+              <a:gd name="adj" fmla="val 7692"/>
             </a:avLst>
           </a:prstGeom>
           <a:solidFill>
@@ -11498,8 +11498,8 @@
         </p:nvSpPr>
         <p:spPr>
           <a:xfrm>
-            <a:off x="6307531" y="4169664"/>
-            <a:ext cx="676656" cy="384048"/>
+            <a:off x="5219114" y="4169664"/>
+            <a:ext cx="493776" cy="475488"/>
           </a:xfrm>
           <a:prstGeom prst="rect">
             <a:avLst/>
@@ -11523,7 +11523,7 @@
                 <a:ea typeface="Trebuchet MS" pitchFamily="34" charset="-122"/>
                 <a:cs typeface="Trebuchet MS" pitchFamily="34" charset="-120"/>
               </a:rPr>
-              <a:t>i</a:t>
+              <a:t>o</a:t>
             </a:r>
             <a:endParaRPr lang="en-US" sz="900" dirty="0"/>
           </a:p>
@@ -11537,12 +11537,12 @@
         </p:nvSpPr>
         <p:spPr>
           <a:xfrm>
-            <a:off x="7033565" y="4169664"/>
-            <a:ext cx="676656" cy="384048"/>
+            <a:off x="5763534" y="4169664"/>
+            <a:ext cx="493776" cy="475488"/>
           </a:xfrm>
           <a:prstGeom prst="rect">
             <a:avLst>
-              <a:gd name="adj" fmla="val 9524"/>
+              <a:gd name="adj" fmla="val 7692"/>
             </a:avLst>
           </a:prstGeom>
           <a:solidFill>
@@ -11564,8 +11564,8 @@
         </p:nvSpPr>
         <p:spPr>
           <a:xfrm>
-            <a:off x="7033565" y="4169664"/>
-            <a:ext cx="676656" cy="384048"/>
+            <a:off x="5763534" y="4169664"/>
+            <a:ext cx="493776" cy="475488"/>
           </a:xfrm>
           <a:prstGeom prst="rect">
             <a:avLst/>
@@ -11589,7 +11589,7 @@
                 <a:ea typeface="Trebuchet MS" pitchFamily="34" charset="-122"/>
                 <a:cs typeface="Trebuchet MS" pitchFamily="34" charset="-120"/>
               </a:rPr>
-              <a:t>c</a:t>
+              <a:t>g</a:t>
             </a:r>
             <a:endParaRPr lang="en-US" sz="900" dirty="0"/>
           </a:p>
@@ -11597,57 +11597,18 @@
       </p:sp>
       <p:sp>
         <p:nvSpPr>
-          <p:cNvPr id="58" name="Text 56"/>
-          <p:cNvSpPr/>
-          <p:nvPr/>
-        </p:nvSpPr>
-        <p:spPr>
-          <a:xfrm>
-            <a:off x="7033565" y="4572000"/>
-            <a:ext cx="676656" cy="219456"/>
-          </a:xfrm>
-          <a:prstGeom prst="rect">
-            <a:avLst/>
-          </a:prstGeom>
-          <a:noFill/>
-          <a:ln/>
-        </p:spPr>
-        <p:txBody>
-          <a:bodyPr wrap="square" lIns="0" tIns="0" rIns="0" bIns="0" rtlCol="0" anchor="t"/>
-          <a:lstStyle/>
-          <a:p>
-            <a:pPr algn="ctr" indent="0" marL="0">
-              <a:buNone/>
-            </a:pPr>
-            <a:r>
-              <a:rPr lang="en-US" sz="750" i="1" dirty="0">
-                <a:solidFill>
-                  <a:srgbClr val="94A3B8"/>
-                </a:solidFill>
-                <a:latin typeface="Calibri" pitchFamily="34" charset="0"/>
-                <a:ea typeface="Calibri" pitchFamily="34" charset="-122"/>
-                <a:cs typeface="Calibri" pitchFamily="34" charset="-120"/>
-              </a:rPr>
-              <a:t>/k/</a:t>
-            </a:r>
-            <a:endParaRPr lang="en-US" sz="750" dirty="0"/>
-          </a:p>
-        </p:txBody>
-      </p:sp>
-      <p:sp>
-        <p:nvSpPr>
-          <p:cNvPr id="59" name="Shape 57"/>
-          <p:cNvSpPr/>
-          <p:nvPr/>
-        </p:nvSpPr>
-        <p:spPr>
-          <a:xfrm>
-            <a:off x="7759598" y="4169664"/>
-            <a:ext cx="676656" cy="384048"/>
+          <p:cNvPr id="58" name="Shape 56"/>
+          <p:cNvSpPr/>
+          <p:nvPr/>
+        </p:nvSpPr>
+        <p:spPr>
+          <a:xfrm>
+            <a:off x="6307953" y="4169664"/>
+            <a:ext cx="493776" cy="475488"/>
           </a:xfrm>
           <a:prstGeom prst="rect">
             <a:avLst>
-              <a:gd name="adj" fmla="val 9524"/>
+              <a:gd name="adj" fmla="val 7692"/>
             </a:avLst>
           </a:prstGeom>
           <a:solidFill>
@@ -11663,14 +11624,14 @@
       </p:sp>
       <p:sp>
         <p:nvSpPr>
-          <p:cNvPr id="60" name="Text 58"/>
-          <p:cNvSpPr/>
-          <p:nvPr/>
-        </p:nvSpPr>
-        <p:spPr>
-          <a:xfrm>
-            <a:off x="7759598" y="4169664"/>
-            <a:ext cx="676656" cy="384048"/>
+          <p:cNvPr id="59" name="Text 57"/>
+          <p:cNvSpPr/>
+          <p:nvPr/>
+        </p:nvSpPr>
+        <p:spPr>
+          <a:xfrm>
+            <a:off x="6307953" y="4169664"/>
+            <a:ext cx="493776" cy="475488"/>
           </a:xfrm>
           <a:prstGeom prst="rect">
             <a:avLst/>
@@ -11694,7 +11655,205 @@
                 <a:ea typeface="Trebuchet MS" pitchFamily="34" charset="-122"/>
                 <a:cs typeface="Trebuchet MS" pitchFamily="34" charset="-120"/>
               </a:rPr>
-              <a:t>al</a:t>
+              <a:t>i</a:t>
+            </a:r>
+            <a:endParaRPr lang="en-US" sz="900" dirty="0"/>
+          </a:p>
+        </p:txBody>
+      </p:sp>
+      <p:sp>
+        <p:nvSpPr>
+          <p:cNvPr id="60" name="Shape 58"/>
+          <p:cNvSpPr/>
+          <p:nvPr/>
+        </p:nvSpPr>
+        <p:spPr>
+          <a:xfrm>
+            <a:off x="6852373" y="4169664"/>
+            <a:ext cx="493776" cy="475488"/>
+          </a:xfrm>
+          <a:prstGeom prst="rect">
+            <a:avLst>
+              <a:gd name="adj" fmla="val 7692"/>
+            </a:avLst>
+          </a:prstGeom>
+          <a:solidFill>
+            <a:srgbClr val="FFFFFF"/>
+          </a:solidFill>
+          <a:ln w="12700">
+            <a:solidFill>
+              <a:srgbClr val="DB2777"/>
+            </a:solidFill>
+            <a:prstDash val="solid"/>
+          </a:ln>
+        </p:spPr>
+      </p:sp>
+      <p:sp>
+        <p:nvSpPr>
+          <p:cNvPr id="61" name="Text 59"/>
+          <p:cNvSpPr/>
+          <p:nvPr/>
+        </p:nvSpPr>
+        <p:spPr>
+          <a:xfrm>
+            <a:off x="6852373" y="4169664"/>
+            <a:ext cx="493776" cy="475488"/>
+          </a:xfrm>
+          <a:prstGeom prst="rect">
+            <a:avLst/>
+          </a:prstGeom>
+          <a:noFill/>
+          <a:ln/>
+        </p:spPr>
+        <p:txBody>
+          <a:bodyPr wrap="square" lIns="0" tIns="0" rIns="0" bIns="0" rtlCol="0" anchor="ctr"/>
+          <a:lstStyle/>
+          <a:p>
+            <a:pPr algn="ctr" indent="0" marL="0">
+              <a:buNone/>
+            </a:pPr>
+            <a:r>
+              <a:rPr lang="en-US" sz="900" b="1" dirty="0">
+                <a:solidFill>
+                  <a:srgbClr val="9D174D"/>
+                </a:solidFill>
+                <a:latin typeface="Trebuchet MS" pitchFamily="34" charset="0"/>
+                <a:ea typeface="Trebuchet MS" pitchFamily="34" charset="-122"/>
+                <a:cs typeface="Trebuchet MS" pitchFamily="34" charset="-120"/>
+              </a:rPr>
+              <a:t>c</a:t>
+            </a:r>
+            <a:endParaRPr lang="en-US" sz="900" dirty="0"/>
+          </a:p>
+        </p:txBody>
+      </p:sp>
+      <p:sp>
+        <p:nvSpPr>
+          <p:cNvPr id="62" name="Shape 60"/>
+          <p:cNvSpPr/>
+          <p:nvPr/>
+        </p:nvSpPr>
+        <p:spPr>
+          <a:xfrm>
+            <a:off x="7396793" y="4169664"/>
+            <a:ext cx="493776" cy="475488"/>
+          </a:xfrm>
+          <a:prstGeom prst="rect">
+            <a:avLst>
+              <a:gd name="adj" fmla="val 7692"/>
+            </a:avLst>
+          </a:prstGeom>
+          <a:solidFill>
+            <a:srgbClr val="FFFFFF"/>
+          </a:solidFill>
+          <a:ln w="12700">
+            <a:solidFill>
+              <a:srgbClr val="DB2777"/>
+            </a:solidFill>
+            <a:prstDash val="solid"/>
+          </a:ln>
+        </p:spPr>
+      </p:sp>
+      <p:sp>
+        <p:nvSpPr>
+          <p:cNvPr id="63" name="Text 61"/>
+          <p:cNvSpPr/>
+          <p:nvPr/>
+        </p:nvSpPr>
+        <p:spPr>
+          <a:xfrm>
+            <a:off x="7396793" y="4169664"/>
+            <a:ext cx="493776" cy="475488"/>
+          </a:xfrm>
+          <a:prstGeom prst="rect">
+            <a:avLst/>
+          </a:prstGeom>
+          <a:noFill/>
+          <a:ln/>
+        </p:spPr>
+        <p:txBody>
+          <a:bodyPr wrap="square" lIns="0" tIns="0" rIns="0" bIns="0" rtlCol="0" anchor="ctr"/>
+          <a:lstStyle/>
+          <a:p>
+            <a:pPr algn="ctr" indent="0" marL="0">
+              <a:buNone/>
+            </a:pPr>
+            <a:r>
+              <a:rPr lang="en-US" sz="900" b="1" dirty="0">
+                <a:solidFill>
+                  <a:srgbClr val="9D174D"/>
+                </a:solidFill>
+                <a:latin typeface="Trebuchet MS" pitchFamily="34" charset="0"/>
+                <a:ea typeface="Trebuchet MS" pitchFamily="34" charset="-122"/>
+                <a:cs typeface="Trebuchet MS" pitchFamily="34" charset="-120"/>
+              </a:rPr>
+              <a:t>a</a:t>
+            </a:r>
+            <a:endParaRPr lang="en-US" sz="900" dirty="0"/>
+          </a:p>
+        </p:txBody>
+      </p:sp>
+      <p:sp>
+        <p:nvSpPr>
+          <p:cNvPr id="64" name="Shape 62"/>
+          <p:cNvSpPr/>
+          <p:nvPr/>
+        </p:nvSpPr>
+        <p:spPr>
+          <a:xfrm>
+            <a:off x="7941212" y="4169664"/>
+            <a:ext cx="493776" cy="475488"/>
+          </a:xfrm>
+          <a:prstGeom prst="rect">
+            <a:avLst>
+              <a:gd name="adj" fmla="val 7692"/>
+            </a:avLst>
+          </a:prstGeom>
+          <a:solidFill>
+            <a:srgbClr val="FFFFFF"/>
+          </a:solidFill>
+          <a:ln w="12700">
+            <a:solidFill>
+              <a:srgbClr val="DB2777"/>
+            </a:solidFill>
+            <a:prstDash val="solid"/>
+          </a:ln>
+        </p:spPr>
+      </p:sp>
+      <p:sp>
+        <p:nvSpPr>
+          <p:cNvPr id="65" name="Text 63"/>
+          <p:cNvSpPr/>
+          <p:nvPr/>
+        </p:nvSpPr>
+        <p:spPr>
+          <a:xfrm>
+            <a:off x="7941212" y="4169664"/>
+            <a:ext cx="493776" cy="475488"/>
+          </a:xfrm>
+          <a:prstGeom prst="rect">
+            <a:avLst/>
+          </a:prstGeom>
+          <a:noFill/>
+          <a:ln/>
+        </p:spPr>
+        <p:txBody>
+          <a:bodyPr wrap="square" lIns="0" tIns="0" rIns="0" bIns="0" rtlCol="0" anchor="ctr"/>
+          <a:lstStyle/>
+          <a:p>
+            <a:pPr algn="ctr" indent="0" marL="0">
+              <a:buNone/>
+            </a:pPr>
+            <a:r>
+              <a:rPr lang="en-US" sz="900" b="1" dirty="0">
+                <a:solidFill>
+                  <a:srgbClr val="9D174D"/>
+                </a:solidFill>
+                <a:latin typeface="Trebuchet MS" pitchFamily="34" charset="0"/>
+                <a:ea typeface="Trebuchet MS" pitchFamily="34" charset="-122"/>
+                <a:cs typeface="Trebuchet MS" pitchFamily="34" charset="-120"/>
+              </a:rPr>
+              <a:t>l</a:t>
             </a:r>
             <a:endParaRPr lang="en-US" sz="900" dirty="0"/>
           </a:p>
@@ -11986,7 +12145,7 @@
                 <a:ea typeface="Calibri" pitchFamily="34" charset="-122"/>
                 <a:cs typeface="Calibri" pitchFamily="34" charset="-120"/>
               </a:rPr>
-              <a:t>Word Labs  •  wordlabs.app  •  Root: 'logical' = relating to reason or logic</a:t>
+              <a:t>Word Labs  •  wordlabs.app  •  Root: 'logical' = making sense</a:t>
             </a:r>
             <a:endParaRPr lang="en-US" sz="800" dirty="0"/>
           </a:p>
@@ -12125,7 +12284,7 @@
                 <a:ea typeface="Trebuchet MS" pitchFamily="34" charset="-122"/>
                 <a:cs typeface="Trebuchet MS" pitchFamily="34" charset="-120"/>
               </a:rPr>
-              <a:t>logical</a:t>
+              <a:t>chronologically</a:t>
             </a:r>
             <a:endParaRPr lang="en-US" sz="2800" dirty="0"/>
           </a:p>
@@ -12813,7 +12972,7 @@
                 <a:ea typeface="Calibri" pitchFamily="34" charset="-122"/>
                 <a:cs typeface="Calibri" pitchFamily="34" charset="-120"/>
               </a:rPr>
-              <a:t>Word Labs  •  wordlabs.app  •  Root: 'logical' = relating to reason or logic</a:t>
+              <a:t>Word Labs  •  wordlabs.app  •  Root: 'logical' = making sense</a:t>
             </a:r>
             <a:endParaRPr lang="en-US" sz="800" dirty="0"/>
           </a:p>
@@ -12952,7 +13111,7 @@
                 <a:ea typeface="Trebuchet MS" pitchFamily="34" charset="-122"/>
                 <a:cs typeface="Trebuchet MS" pitchFamily="34" charset="-120"/>
               </a:rPr>
-              <a:t>logical</a:t>
+              <a:t>chronologically</a:t>
             </a:r>
             <a:endParaRPr lang="en-US" sz="2800" dirty="0"/>
           </a:p>
@@ -13032,7 +13191,7 @@
         </p:nvSpPr>
         <p:spPr>
           <a:xfrm>
-            <a:off x="4370832" y="2258568"/>
+            <a:off x="2221992" y="2258568"/>
             <a:ext cx="1828800" cy="292608"/>
           </a:xfrm>
           <a:prstGeom prst="rect">
@@ -13041,11 +13200,11 @@
             </a:avLst>
           </a:prstGeom>
           <a:solidFill>
-            <a:srgbClr val="CCFBF1"/>
+            <a:srgbClr val="DDD6FE"/>
           </a:solidFill>
           <a:ln w="19050">
             <a:solidFill>
-              <a:srgbClr val="0D9488"/>
+              <a:srgbClr val="7C3AED"/>
             </a:solidFill>
             <a:prstDash val="solid"/>
           </a:ln>
@@ -13066,7 +13225,7 @@
         </p:nvSpPr>
         <p:spPr>
           <a:xfrm>
-            <a:off x="4370832" y="2258568"/>
+            <a:off x="2221992" y="2258568"/>
             <a:ext cx="1828800" cy="292608"/>
           </a:xfrm>
           <a:prstGeom prst="rect">
@@ -13085,13 +13244,13 @@
             <a:r>
               <a:rPr lang="en-US" sz="1300" b="1" dirty="0">
                 <a:solidFill>
-                  <a:srgbClr val="0F766E"/>
+                  <a:srgbClr val="4C1D95"/>
                 </a:solidFill>
                 <a:latin typeface="Trebuchet MS" pitchFamily="34" charset="0"/>
                 <a:ea typeface="Trebuchet MS" pitchFamily="34" charset="-122"/>
                 <a:cs typeface="Trebuchet MS" pitchFamily="34" charset="-120"/>
               </a:rPr>
-              <a:t>logical</a:t>
+              <a:t>chrono</a:t>
             </a:r>
             <a:endParaRPr lang="en-US" sz="1300" dirty="0"/>
           </a:p>
@@ -13105,7 +13264,7 @@
         </p:nvSpPr>
         <p:spPr>
           <a:xfrm>
-            <a:off x="4370832" y="2569464"/>
+            <a:off x="2221992" y="2569464"/>
             <a:ext cx="1828800" cy="201168"/>
           </a:xfrm>
           <a:prstGeom prst="rect">
@@ -13130,7 +13289,7 @@
                 <a:ea typeface="Calibri" pitchFamily="34" charset="-122"/>
                 <a:cs typeface="Calibri" pitchFamily="34" charset="-120"/>
               </a:rPr>
-              <a:t>relating to reason or logic</a:t>
+              <a:t>time</a:t>
             </a:r>
             <a:endParaRPr lang="en-US" sz="850" dirty="0"/>
           </a:p>
@@ -13139,6 +13298,230 @@
       <p:sp>
         <p:nvSpPr>
           <p:cNvPr id="19" name="Shape 17"/>
+          <p:cNvSpPr/>
+          <p:nvPr/>
+        </p:nvSpPr>
+        <p:spPr>
+          <a:xfrm>
+            <a:off x="4370832" y="2258568"/>
+            <a:ext cx="1828800" cy="292608"/>
+          </a:xfrm>
+          <a:prstGeom prst="rect">
+            <a:avLst>
+              <a:gd name="adj" fmla="val 25000"/>
+            </a:avLst>
+          </a:prstGeom>
+          <a:solidFill>
+            <a:srgbClr val="CCFBF1"/>
+          </a:solidFill>
+          <a:ln w="19050">
+            <a:solidFill>
+              <a:srgbClr val="0D9488"/>
+            </a:solidFill>
+            <a:prstDash val="solid"/>
+          </a:ln>
+          <a:effectLst>
+            <a:outerShdw sx="100000" sy="100000" kx="0" ky="0" algn="bl" rotWithShape="0" blurRad="101600" dist="38100" dir="8100000">
+              <a:srgbClr val="000000">
+                <a:alpha val="12000"/>
+              </a:srgbClr>
+            </a:outerShdw>
+          </a:effectLst>
+        </p:spPr>
+      </p:sp>
+      <p:sp>
+        <p:nvSpPr>
+          <p:cNvPr id="20" name="Text 18"/>
+          <p:cNvSpPr/>
+          <p:nvPr/>
+        </p:nvSpPr>
+        <p:spPr>
+          <a:xfrm>
+            <a:off x="4370832" y="2258568"/>
+            <a:ext cx="1828800" cy="292608"/>
+          </a:xfrm>
+          <a:prstGeom prst="rect">
+            <a:avLst/>
+          </a:prstGeom>
+          <a:noFill/>
+          <a:ln/>
+        </p:spPr>
+        <p:txBody>
+          <a:bodyPr wrap="square" lIns="0" tIns="0" rIns="0" bIns="0" rtlCol="0" anchor="ctr"/>
+          <a:lstStyle/>
+          <a:p>
+            <a:pPr algn="ctr" indent="0" marL="0">
+              <a:buNone/>
+            </a:pPr>
+            <a:r>
+              <a:rPr lang="en-US" sz="1300" b="1" dirty="0">
+                <a:solidFill>
+                  <a:srgbClr val="0F766E"/>
+                </a:solidFill>
+                <a:latin typeface="Trebuchet MS" pitchFamily="34" charset="0"/>
+                <a:ea typeface="Trebuchet MS" pitchFamily="34" charset="-122"/>
+                <a:cs typeface="Trebuchet MS" pitchFamily="34" charset="-120"/>
+              </a:rPr>
+              <a:t>logical</a:t>
+            </a:r>
+            <a:endParaRPr lang="en-US" sz="1300" dirty="0"/>
+          </a:p>
+        </p:txBody>
+      </p:sp>
+      <p:sp>
+        <p:nvSpPr>
+          <p:cNvPr id="21" name="Text 19"/>
+          <p:cNvSpPr/>
+          <p:nvPr/>
+        </p:nvSpPr>
+        <p:spPr>
+          <a:xfrm>
+            <a:off x="4370832" y="2569464"/>
+            <a:ext cx="1828800" cy="201168"/>
+          </a:xfrm>
+          <a:prstGeom prst="rect">
+            <a:avLst/>
+          </a:prstGeom>
+          <a:noFill/>
+          <a:ln/>
+        </p:spPr>
+        <p:txBody>
+          <a:bodyPr wrap="square" lIns="0" tIns="0" rIns="0" bIns="0" rtlCol="0" anchor="t"/>
+          <a:lstStyle/>
+          <a:p>
+            <a:pPr algn="ctr" indent="0" marL="0">
+              <a:buNone/>
+            </a:pPr>
+            <a:r>
+              <a:rPr lang="en-US" sz="850" dirty="0">
+                <a:solidFill>
+                  <a:srgbClr val="475569"/>
+                </a:solidFill>
+                <a:latin typeface="Calibri" pitchFamily="34" charset="0"/>
+                <a:ea typeface="Calibri" pitchFamily="34" charset="-122"/>
+                <a:cs typeface="Calibri" pitchFamily="34" charset="-120"/>
+              </a:rPr>
+              <a:t>making sense</a:t>
+            </a:r>
+            <a:endParaRPr lang="en-US" sz="850" dirty="0"/>
+          </a:p>
+        </p:txBody>
+      </p:sp>
+      <p:sp>
+        <p:nvSpPr>
+          <p:cNvPr id="22" name="Shape 20"/>
+          <p:cNvSpPr/>
+          <p:nvPr/>
+        </p:nvSpPr>
+        <p:spPr>
+          <a:xfrm>
+            <a:off x="6519672" y="2258568"/>
+            <a:ext cx="1828800" cy="292608"/>
+          </a:xfrm>
+          <a:prstGeom prst="rect">
+            <a:avLst>
+              <a:gd name="adj" fmla="val 25000"/>
+            </a:avLst>
+          </a:prstGeom>
+          <a:solidFill>
+            <a:srgbClr val="FCE7F3"/>
+          </a:solidFill>
+          <a:ln w="19050">
+            <a:solidFill>
+              <a:srgbClr val="DB2777"/>
+            </a:solidFill>
+            <a:prstDash val="solid"/>
+          </a:ln>
+          <a:effectLst>
+            <a:outerShdw sx="100000" sy="100000" kx="0" ky="0" algn="bl" rotWithShape="0" blurRad="101600" dist="38100" dir="8100000">
+              <a:srgbClr val="000000">
+                <a:alpha val="12000"/>
+              </a:srgbClr>
+            </a:outerShdw>
+          </a:effectLst>
+        </p:spPr>
+      </p:sp>
+      <p:sp>
+        <p:nvSpPr>
+          <p:cNvPr id="23" name="Text 21"/>
+          <p:cNvSpPr/>
+          <p:nvPr/>
+        </p:nvSpPr>
+        <p:spPr>
+          <a:xfrm>
+            <a:off x="6519672" y="2258568"/>
+            <a:ext cx="1828800" cy="292608"/>
+          </a:xfrm>
+          <a:prstGeom prst="rect">
+            <a:avLst/>
+          </a:prstGeom>
+          <a:noFill/>
+          <a:ln/>
+        </p:spPr>
+        <p:txBody>
+          <a:bodyPr wrap="square" lIns="0" tIns="0" rIns="0" bIns="0" rtlCol="0" anchor="ctr"/>
+          <a:lstStyle/>
+          <a:p>
+            <a:pPr algn="ctr" indent="0" marL="0">
+              <a:buNone/>
+            </a:pPr>
+            <a:r>
+              <a:rPr lang="en-US" sz="1300" b="1" dirty="0">
+                <a:solidFill>
+                  <a:srgbClr val="9D174D"/>
+                </a:solidFill>
+                <a:latin typeface="Trebuchet MS" pitchFamily="34" charset="0"/>
+                <a:ea typeface="Trebuchet MS" pitchFamily="34" charset="-122"/>
+                <a:cs typeface="Trebuchet MS" pitchFamily="34" charset="-120"/>
+              </a:rPr>
+              <a:t>ly</a:t>
+            </a:r>
+            <a:endParaRPr lang="en-US" sz="1300" dirty="0"/>
+          </a:p>
+        </p:txBody>
+      </p:sp>
+      <p:sp>
+        <p:nvSpPr>
+          <p:cNvPr id="24" name="Text 22"/>
+          <p:cNvSpPr/>
+          <p:nvPr/>
+        </p:nvSpPr>
+        <p:spPr>
+          <a:xfrm>
+            <a:off x="6519672" y="2569464"/>
+            <a:ext cx="1828800" cy="201168"/>
+          </a:xfrm>
+          <a:prstGeom prst="rect">
+            <a:avLst/>
+          </a:prstGeom>
+          <a:noFill/>
+          <a:ln/>
+        </p:spPr>
+        <p:txBody>
+          <a:bodyPr wrap="square" lIns="0" tIns="0" rIns="0" bIns="0" rtlCol="0" anchor="t"/>
+          <a:lstStyle/>
+          <a:p>
+            <a:pPr algn="ctr" indent="0" marL="0">
+              <a:buNone/>
+            </a:pPr>
+            <a:r>
+              <a:rPr lang="en-US" sz="850" dirty="0">
+                <a:solidFill>
+                  <a:srgbClr val="475569"/>
+                </a:solidFill>
+                <a:latin typeface="Calibri" pitchFamily="34" charset="0"/>
+                <a:ea typeface="Calibri" pitchFamily="34" charset="-122"/>
+                <a:cs typeface="Calibri" pitchFamily="34" charset="-120"/>
+              </a:rPr>
+              <a:t>in a way</a:t>
+            </a:r>
+            <a:endParaRPr lang="en-US" sz="850" dirty="0"/>
+          </a:p>
+        </p:txBody>
+      </p:sp>
+      <p:sp>
+        <p:nvSpPr>
+          <p:cNvPr id="25" name="Shape 23"/>
           <p:cNvSpPr/>
           <p:nvPr/>
         </p:nvSpPr>
@@ -13165,7 +13548,7 @@
       </p:sp>
       <p:sp>
         <p:nvSpPr>
-          <p:cNvPr id="20" name="Text 18"/>
+          <p:cNvPr id="26" name="Text 24"/>
           <p:cNvSpPr/>
           <p:nvPr/>
         </p:nvSpPr>
@@ -13204,7 +13587,7 @@
       </p:sp>
       <p:sp>
         <p:nvSpPr>
-          <p:cNvPr id="21" name="Shape 19"/>
+          <p:cNvPr id="27" name="Shape 25"/>
           <p:cNvSpPr/>
           <p:nvPr/>
         </p:nvSpPr>
@@ -13231,7 +13614,7 @@
       </p:sp>
       <p:sp>
         <p:nvSpPr>
-          <p:cNvPr id="22" name="Text 20"/>
+          <p:cNvPr id="28" name="Text 26"/>
           <p:cNvSpPr/>
           <p:nvPr/>
         </p:nvSpPr>
@@ -13270,7 +13653,7 @@
       </p:sp>
       <p:sp>
         <p:nvSpPr>
-          <p:cNvPr id="23" name="Shape 21"/>
+          <p:cNvPr id="29" name="Shape 27"/>
           <p:cNvSpPr/>
           <p:nvPr/>
         </p:nvSpPr>
@@ -13297,7 +13680,7 @@
       </p:sp>
       <p:sp>
         <p:nvSpPr>
-          <p:cNvPr id="24" name="Text 22"/>
+          <p:cNvPr id="30" name="Text 28"/>
           <p:cNvSpPr/>
           <p:nvPr/>
         </p:nvSpPr>
@@ -13336,7 +13719,7 @@
       </p:sp>
       <p:sp>
         <p:nvSpPr>
-          <p:cNvPr id="25" name="Shape 23"/>
+          <p:cNvPr id="31" name="Shape 29"/>
           <p:cNvSpPr/>
           <p:nvPr/>
         </p:nvSpPr>
@@ -13363,7 +13746,7 @@
       </p:sp>
       <p:sp>
         <p:nvSpPr>
-          <p:cNvPr id="26" name="Text 24"/>
+          <p:cNvPr id="32" name="Text 30"/>
           <p:cNvSpPr/>
           <p:nvPr/>
         </p:nvSpPr>
@@ -13686,7 +14069,7 @@
                 <a:ea typeface="Calibri" pitchFamily="34" charset="-122"/>
                 <a:cs typeface="Calibri" pitchFamily="34" charset="-120"/>
               </a:rPr>
-              <a:t>Word Labs  •  wordlabs.app  •  Root: 'logical' = relating to reason or logic</a:t>
+              <a:t>Word Labs  •  wordlabs.app  •  Root: 'logical' = making sense</a:t>
             </a:r>
             <a:endParaRPr lang="en-US" sz="800" dirty="0"/>
           </a:p>
@@ -13825,7 +14208,7 @@
                 <a:ea typeface="Trebuchet MS" pitchFamily="34" charset="-122"/>
                 <a:cs typeface="Trebuchet MS" pitchFamily="34" charset="-120"/>
               </a:rPr>
-              <a:t>logical</a:t>
+              <a:t>chronologically</a:t>
             </a:r>
             <a:endParaRPr lang="en-US" sz="2800" dirty="0"/>
           </a:p>
@@ -13905,7 +14288,7 @@
         </p:nvSpPr>
         <p:spPr>
           <a:xfrm>
-            <a:off x="4370832" y="2258568"/>
+            <a:off x="2221992" y="2258568"/>
             <a:ext cx="1828800" cy="292608"/>
           </a:xfrm>
           <a:prstGeom prst="rect">
@@ -13914,11 +14297,11 @@
             </a:avLst>
           </a:prstGeom>
           <a:solidFill>
-            <a:srgbClr val="CCFBF1"/>
+            <a:srgbClr val="DDD6FE"/>
           </a:solidFill>
           <a:ln w="19050">
             <a:solidFill>
-              <a:srgbClr val="0D9488"/>
+              <a:srgbClr val="7C3AED"/>
             </a:solidFill>
             <a:prstDash val="solid"/>
           </a:ln>
@@ -13939,7 +14322,7 @@
         </p:nvSpPr>
         <p:spPr>
           <a:xfrm>
-            <a:off x="4370832" y="2258568"/>
+            <a:off x="2221992" y="2258568"/>
             <a:ext cx="1828800" cy="292608"/>
           </a:xfrm>
           <a:prstGeom prst="rect">
@@ -13958,13 +14341,13 @@
             <a:r>
               <a:rPr lang="en-US" sz="1300" b="1" dirty="0">
                 <a:solidFill>
-                  <a:srgbClr val="0F766E"/>
+                  <a:srgbClr val="4C1D95"/>
                 </a:solidFill>
                 <a:latin typeface="Trebuchet MS" pitchFamily="34" charset="0"/>
                 <a:ea typeface="Trebuchet MS" pitchFamily="34" charset="-122"/>
                 <a:cs typeface="Trebuchet MS" pitchFamily="34" charset="-120"/>
               </a:rPr>
-              <a:t>logical</a:t>
+              <a:t>chrono</a:t>
             </a:r>
             <a:endParaRPr lang="en-US" sz="1300" dirty="0"/>
           </a:p>
@@ -13978,7 +14361,7 @@
         </p:nvSpPr>
         <p:spPr>
           <a:xfrm>
-            <a:off x="4370832" y="2569464"/>
+            <a:off x="2221992" y="2569464"/>
             <a:ext cx="1828800" cy="201168"/>
           </a:xfrm>
           <a:prstGeom prst="rect">
@@ -14003,7 +14386,7 @@
                 <a:ea typeface="Calibri" pitchFamily="34" charset="-122"/>
                 <a:cs typeface="Calibri" pitchFamily="34" charset="-120"/>
               </a:rPr>
-              <a:t>relating to reason or logic</a:t>
+              <a:t>time</a:t>
             </a:r>
             <a:endParaRPr lang="en-US" sz="850" dirty="0"/>
           </a:p>
@@ -14012,6 +14395,230 @@
       <p:sp>
         <p:nvSpPr>
           <p:cNvPr id="19" name="Shape 17"/>
+          <p:cNvSpPr/>
+          <p:nvPr/>
+        </p:nvSpPr>
+        <p:spPr>
+          <a:xfrm>
+            <a:off x="4370832" y="2258568"/>
+            <a:ext cx="1828800" cy="292608"/>
+          </a:xfrm>
+          <a:prstGeom prst="rect">
+            <a:avLst>
+              <a:gd name="adj" fmla="val 25000"/>
+            </a:avLst>
+          </a:prstGeom>
+          <a:solidFill>
+            <a:srgbClr val="CCFBF1"/>
+          </a:solidFill>
+          <a:ln w="19050">
+            <a:solidFill>
+              <a:srgbClr val="0D9488"/>
+            </a:solidFill>
+            <a:prstDash val="solid"/>
+          </a:ln>
+          <a:effectLst>
+            <a:outerShdw sx="100000" sy="100000" kx="0" ky="0" algn="bl" rotWithShape="0" blurRad="101600" dist="38100" dir="8100000">
+              <a:srgbClr val="000000">
+                <a:alpha val="12000"/>
+              </a:srgbClr>
+            </a:outerShdw>
+          </a:effectLst>
+        </p:spPr>
+      </p:sp>
+      <p:sp>
+        <p:nvSpPr>
+          <p:cNvPr id="20" name="Text 18"/>
+          <p:cNvSpPr/>
+          <p:nvPr/>
+        </p:nvSpPr>
+        <p:spPr>
+          <a:xfrm>
+            <a:off x="4370832" y="2258568"/>
+            <a:ext cx="1828800" cy="292608"/>
+          </a:xfrm>
+          <a:prstGeom prst="rect">
+            <a:avLst/>
+          </a:prstGeom>
+          <a:noFill/>
+          <a:ln/>
+        </p:spPr>
+        <p:txBody>
+          <a:bodyPr wrap="square" lIns="0" tIns="0" rIns="0" bIns="0" rtlCol="0" anchor="ctr"/>
+          <a:lstStyle/>
+          <a:p>
+            <a:pPr algn="ctr" indent="0" marL="0">
+              <a:buNone/>
+            </a:pPr>
+            <a:r>
+              <a:rPr lang="en-US" sz="1300" b="1" dirty="0">
+                <a:solidFill>
+                  <a:srgbClr val="0F766E"/>
+                </a:solidFill>
+                <a:latin typeface="Trebuchet MS" pitchFamily="34" charset="0"/>
+                <a:ea typeface="Trebuchet MS" pitchFamily="34" charset="-122"/>
+                <a:cs typeface="Trebuchet MS" pitchFamily="34" charset="-120"/>
+              </a:rPr>
+              <a:t>logical</a:t>
+            </a:r>
+            <a:endParaRPr lang="en-US" sz="1300" dirty="0"/>
+          </a:p>
+        </p:txBody>
+      </p:sp>
+      <p:sp>
+        <p:nvSpPr>
+          <p:cNvPr id="21" name="Text 19"/>
+          <p:cNvSpPr/>
+          <p:nvPr/>
+        </p:nvSpPr>
+        <p:spPr>
+          <a:xfrm>
+            <a:off x="4370832" y="2569464"/>
+            <a:ext cx="1828800" cy="201168"/>
+          </a:xfrm>
+          <a:prstGeom prst="rect">
+            <a:avLst/>
+          </a:prstGeom>
+          <a:noFill/>
+          <a:ln/>
+        </p:spPr>
+        <p:txBody>
+          <a:bodyPr wrap="square" lIns="0" tIns="0" rIns="0" bIns="0" rtlCol="0" anchor="t"/>
+          <a:lstStyle/>
+          <a:p>
+            <a:pPr algn="ctr" indent="0" marL="0">
+              <a:buNone/>
+            </a:pPr>
+            <a:r>
+              <a:rPr lang="en-US" sz="850" dirty="0">
+                <a:solidFill>
+                  <a:srgbClr val="475569"/>
+                </a:solidFill>
+                <a:latin typeface="Calibri" pitchFamily="34" charset="0"/>
+                <a:ea typeface="Calibri" pitchFamily="34" charset="-122"/>
+                <a:cs typeface="Calibri" pitchFamily="34" charset="-120"/>
+              </a:rPr>
+              <a:t>making sense</a:t>
+            </a:r>
+            <a:endParaRPr lang="en-US" sz="850" dirty="0"/>
+          </a:p>
+        </p:txBody>
+      </p:sp>
+      <p:sp>
+        <p:nvSpPr>
+          <p:cNvPr id="22" name="Shape 20"/>
+          <p:cNvSpPr/>
+          <p:nvPr/>
+        </p:nvSpPr>
+        <p:spPr>
+          <a:xfrm>
+            <a:off x="6519672" y="2258568"/>
+            <a:ext cx="1828800" cy="292608"/>
+          </a:xfrm>
+          <a:prstGeom prst="rect">
+            <a:avLst>
+              <a:gd name="adj" fmla="val 25000"/>
+            </a:avLst>
+          </a:prstGeom>
+          <a:solidFill>
+            <a:srgbClr val="FCE7F3"/>
+          </a:solidFill>
+          <a:ln w="19050">
+            <a:solidFill>
+              <a:srgbClr val="DB2777"/>
+            </a:solidFill>
+            <a:prstDash val="solid"/>
+          </a:ln>
+          <a:effectLst>
+            <a:outerShdw sx="100000" sy="100000" kx="0" ky="0" algn="bl" rotWithShape="0" blurRad="101600" dist="38100" dir="8100000">
+              <a:srgbClr val="000000">
+                <a:alpha val="12000"/>
+              </a:srgbClr>
+            </a:outerShdw>
+          </a:effectLst>
+        </p:spPr>
+      </p:sp>
+      <p:sp>
+        <p:nvSpPr>
+          <p:cNvPr id="23" name="Text 21"/>
+          <p:cNvSpPr/>
+          <p:nvPr/>
+        </p:nvSpPr>
+        <p:spPr>
+          <a:xfrm>
+            <a:off x="6519672" y="2258568"/>
+            <a:ext cx="1828800" cy="292608"/>
+          </a:xfrm>
+          <a:prstGeom prst="rect">
+            <a:avLst/>
+          </a:prstGeom>
+          <a:noFill/>
+          <a:ln/>
+        </p:spPr>
+        <p:txBody>
+          <a:bodyPr wrap="square" lIns="0" tIns="0" rIns="0" bIns="0" rtlCol="0" anchor="ctr"/>
+          <a:lstStyle/>
+          <a:p>
+            <a:pPr algn="ctr" indent="0" marL="0">
+              <a:buNone/>
+            </a:pPr>
+            <a:r>
+              <a:rPr lang="en-US" sz="1300" b="1" dirty="0">
+                <a:solidFill>
+                  <a:srgbClr val="9D174D"/>
+                </a:solidFill>
+                <a:latin typeface="Trebuchet MS" pitchFamily="34" charset="0"/>
+                <a:ea typeface="Trebuchet MS" pitchFamily="34" charset="-122"/>
+                <a:cs typeface="Trebuchet MS" pitchFamily="34" charset="-120"/>
+              </a:rPr>
+              <a:t>ly</a:t>
+            </a:r>
+            <a:endParaRPr lang="en-US" sz="1300" dirty="0"/>
+          </a:p>
+        </p:txBody>
+      </p:sp>
+      <p:sp>
+        <p:nvSpPr>
+          <p:cNvPr id="24" name="Text 22"/>
+          <p:cNvSpPr/>
+          <p:nvPr/>
+        </p:nvSpPr>
+        <p:spPr>
+          <a:xfrm>
+            <a:off x="6519672" y="2569464"/>
+            <a:ext cx="1828800" cy="201168"/>
+          </a:xfrm>
+          <a:prstGeom prst="rect">
+            <a:avLst/>
+          </a:prstGeom>
+          <a:noFill/>
+          <a:ln/>
+        </p:spPr>
+        <p:txBody>
+          <a:bodyPr wrap="square" lIns="0" tIns="0" rIns="0" bIns="0" rtlCol="0" anchor="t"/>
+          <a:lstStyle/>
+          <a:p>
+            <a:pPr algn="ctr" indent="0" marL="0">
+              <a:buNone/>
+            </a:pPr>
+            <a:r>
+              <a:rPr lang="en-US" sz="850" dirty="0">
+                <a:solidFill>
+                  <a:srgbClr val="475569"/>
+                </a:solidFill>
+                <a:latin typeface="Calibri" pitchFamily="34" charset="0"/>
+                <a:ea typeface="Calibri" pitchFamily="34" charset="-122"/>
+                <a:cs typeface="Calibri" pitchFamily="34" charset="-120"/>
+              </a:rPr>
+              <a:t>in a way</a:t>
+            </a:r>
+            <a:endParaRPr lang="en-US" sz="850" dirty="0"/>
+          </a:p>
+        </p:txBody>
+      </p:sp>
+      <p:sp>
+        <p:nvSpPr>
+          <p:cNvPr id="25" name="Shape 23"/>
           <p:cNvSpPr/>
           <p:nvPr/>
         </p:nvSpPr>
@@ -14038,7 +14645,7 @@
       </p:sp>
       <p:sp>
         <p:nvSpPr>
-          <p:cNvPr id="20" name="Text 18"/>
+          <p:cNvPr id="26" name="Text 24"/>
           <p:cNvSpPr/>
           <p:nvPr/>
         </p:nvSpPr>
@@ -14077,7 +14684,7 @@
       </p:sp>
       <p:sp>
         <p:nvSpPr>
-          <p:cNvPr id="21" name="Shape 19"/>
+          <p:cNvPr id="27" name="Shape 25"/>
           <p:cNvSpPr/>
           <p:nvPr/>
         </p:nvSpPr>
@@ -14104,14 +14711,14 @@
       </p:sp>
       <p:sp>
         <p:nvSpPr>
-          <p:cNvPr id="22" name="Shape 20"/>
-          <p:cNvSpPr/>
-          <p:nvPr/>
-        </p:nvSpPr>
-        <p:spPr>
-          <a:xfrm>
-            <a:off x="2313432" y="3364992"/>
-            <a:ext cx="1645920" cy="475488"/>
+          <p:cNvPr id="28" name="Shape 26"/>
+          <p:cNvSpPr/>
+          <p:nvPr/>
+        </p:nvSpPr>
+        <p:spPr>
+          <a:xfrm>
+            <a:off x="1980329" y="3364992"/>
+            <a:ext cx="1005840" cy="475488"/>
           </a:xfrm>
           <a:prstGeom prst="rect">
             <a:avLst>
@@ -14131,14 +14738,14 @@
       </p:sp>
       <p:sp>
         <p:nvSpPr>
-          <p:cNvPr id="23" name="Text 21"/>
-          <p:cNvSpPr/>
-          <p:nvPr/>
-        </p:nvSpPr>
-        <p:spPr>
-          <a:xfrm>
-            <a:off x="2313432" y="3364992"/>
-            <a:ext cx="1645920" cy="475488"/>
+          <p:cNvPr id="29" name="Text 27"/>
+          <p:cNvSpPr/>
+          <p:nvPr/>
+        </p:nvSpPr>
+        <p:spPr>
+          <a:xfrm>
+            <a:off x="1980329" y="3364992"/>
+            <a:ext cx="1005840" cy="475488"/>
           </a:xfrm>
           <a:prstGeom prst="rect">
             <a:avLst/>
@@ -14162,7 +14769,7 @@
                 <a:ea typeface="Trebuchet MS" pitchFamily="34" charset="-122"/>
                 <a:cs typeface="Trebuchet MS" pitchFamily="34" charset="-120"/>
               </a:rPr>
-              <a:t>log</a:t>
+              <a:t>chron</a:t>
             </a:r>
             <a:endParaRPr lang="en-US" sz="1400" dirty="0"/>
           </a:p>
@@ -14170,14 +14777,14 @@
       </p:sp>
       <p:sp>
         <p:nvSpPr>
-          <p:cNvPr id="24" name="Text 22"/>
-          <p:cNvSpPr/>
-          <p:nvPr/>
-        </p:nvSpPr>
-        <p:spPr>
-          <a:xfrm>
-            <a:off x="3959352" y="3364992"/>
-            <a:ext cx="411480" cy="475488"/>
+          <p:cNvPr id="30" name="Text 28"/>
+          <p:cNvSpPr/>
+          <p:nvPr/>
+        </p:nvSpPr>
+        <p:spPr>
+          <a:xfrm>
+            <a:off x="2986169" y="3364992"/>
+            <a:ext cx="78377" cy="475488"/>
           </a:xfrm>
           <a:prstGeom prst="rect">
             <a:avLst/>
@@ -14209,14 +14816,14 @@
       </p:sp>
       <p:sp>
         <p:nvSpPr>
-          <p:cNvPr id="25" name="Shape 23"/>
-          <p:cNvSpPr/>
-          <p:nvPr/>
-        </p:nvSpPr>
-        <p:spPr>
-          <a:xfrm>
-            <a:off x="4370832" y="3364992"/>
-            <a:ext cx="1645920" cy="475488"/>
+          <p:cNvPr id="31" name="Shape 29"/>
+          <p:cNvSpPr/>
+          <p:nvPr/>
+        </p:nvSpPr>
+        <p:spPr>
+          <a:xfrm>
+            <a:off x="3064546" y="3364992"/>
+            <a:ext cx="1005840" cy="475488"/>
           </a:xfrm>
           <a:prstGeom prst="rect">
             <a:avLst>
@@ -14236,14 +14843,14 @@
       </p:sp>
       <p:sp>
         <p:nvSpPr>
-          <p:cNvPr id="26" name="Text 24"/>
-          <p:cNvSpPr/>
-          <p:nvPr/>
-        </p:nvSpPr>
-        <p:spPr>
-          <a:xfrm>
-            <a:off x="4370832" y="3364992"/>
-            <a:ext cx="1645920" cy="475488"/>
+          <p:cNvPr id="32" name="Text 30"/>
+          <p:cNvSpPr/>
+          <p:nvPr/>
+        </p:nvSpPr>
+        <p:spPr>
+          <a:xfrm>
+            <a:off x="3064546" y="3364992"/>
+            <a:ext cx="1005840" cy="475488"/>
           </a:xfrm>
           <a:prstGeom prst="rect">
             <a:avLst/>
@@ -14267,7 +14874,7 @@
                 <a:ea typeface="Trebuchet MS" pitchFamily="34" charset="-122"/>
                 <a:cs typeface="Trebuchet MS" pitchFamily="34" charset="-120"/>
               </a:rPr>
-              <a:t>i</a:t>
+              <a:t>o</a:t>
             </a:r>
             <a:endParaRPr lang="en-US" sz="1400" dirty="0"/>
           </a:p>
@@ -14275,14 +14882,14 @@
       </p:sp>
       <p:sp>
         <p:nvSpPr>
-          <p:cNvPr id="27" name="Text 25"/>
-          <p:cNvSpPr/>
-          <p:nvPr/>
-        </p:nvSpPr>
-        <p:spPr>
-          <a:xfrm>
-            <a:off x="6016752" y="3364992"/>
-            <a:ext cx="411480" cy="475488"/>
+          <p:cNvPr id="33" name="Text 31"/>
+          <p:cNvSpPr/>
+          <p:nvPr/>
+        </p:nvSpPr>
+        <p:spPr>
+          <a:xfrm>
+            <a:off x="4070386" y="3364992"/>
+            <a:ext cx="78377" cy="475488"/>
           </a:xfrm>
           <a:prstGeom prst="rect">
             <a:avLst/>
@@ -14314,14 +14921,14 @@
       </p:sp>
       <p:sp>
         <p:nvSpPr>
-          <p:cNvPr id="28" name="Shape 26"/>
-          <p:cNvSpPr/>
-          <p:nvPr/>
-        </p:nvSpPr>
-        <p:spPr>
-          <a:xfrm>
-            <a:off x="6428232" y="3364992"/>
-            <a:ext cx="1645920" cy="475488"/>
+          <p:cNvPr id="34" name="Shape 32"/>
+          <p:cNvSpPr/>
+          <p:nvPr/>
+        </p:nvSpPr>
+        <p:spPr>
+          <a:xfrm>
+            <a:off x="4148763" y="3364992"/>
+            <a:ext cx="1005840" cy="475488"/>
           </a:xfrm>
           <a:prstGeom prst="rect">
             <a:avLst>
@@ -14341,14 +14948,14 @@
       </p:sp>
       <p:sp>
         <p:nvSpPr>
-          <p:cNvPr id="29" name="Text 27"/>
-          <p:cNvSpPr/>
-          <p:nvPr/>
-        </p:nvSpPr>
-        <p:spPr>
-          <a:xfrm>
-            <a:off x="6428232" y="3364992"/>
-            <a:ext cx="1645920" cy="475488"/>
+          <p:cNvPr id="35" name="Text 33"/>
+          <p:cNvSpPr/>
+          <p:nvPr/>
+        </p:nvSpPr>
+        <p:spPr>
+          <a:xfrm>
+            <a:off x="4148763" y="3364992"/>
+            <a:ext cx="1005840" cy="475488"/>
           </a:xfrm>
           <a:prstGeom prst="rect">
             <a:avLst/>
@@ -14372,6 +14979,216 @@
                 <a:ea typeface="Trebuchet MS" pitchFamily="34" charset="-122"/>
                 <a:cs typeface="Trebuchet MS" pitchFamily="34" charset="-120"/>
               </a:rPr>
+              <a:t>log</a:t>
+            </a:r>
+            <a:endParaRPr lang="en-US" sz="1400" dirty="0"/>
+          </a:p>
+        </p:txBody>
+      </p:sp>
+      <p:sp>
+        <p:nvSpPr>
+          <p:cNvPr id="36" name="Text 34"/>
+          <p:cNvSpPr/>
+          <p:nvPr/>
+        </p:nvSpPr>
+        <p:spPr>
+          <a:xfrm>
+            <a:off x="5154603" y="3364992"/>
+            <a:ext cx="78377" cy="475488"/>
+          </a:xfrm>
+          <a:prstGeom prst="rect">
+            <a:avLst/>
+          </a:prstGeom>
+          <a:noFill/>
+          <a:ln/>
+        </p:spPr>
+        <p:txBody>
+          <a:bodyPr wrap="square" lIns="0" tIns="0" rIns="0" bIns="0" rtlCol="0" anchor="ctr"/>
+          <a:lstStyle/>
+          <a:p>
+            <a:pPr algn="ctr" indent="0" marL="0">
+              <a:buNone/>
+            </a:pPr>
+            <a:r>
+              <a:rPr lang="en-US" sz="1600" b="1" dirty="0">
+                <a:solidFill>
+                  <a:srgbClr val="0D9488"/>
+                </a:solidFill>
+                <a:latin typeface="Trebuchet MS" pitchFamily="34" charset="0"/>
+                <a:ea typeface="Trebuchet MS" pitchFamily="34" charset="-122"/>
+                <a:cs typeface="Trebuchet MS" pitchFamily="34" charset="-120"/>
+              </a:rPr>
+              <a:t>·</a:t>
+            </a:r>
+            <a:endParaRPr lang="en-US" sz="1600" dirty="0"/>
+          </a:p>
+        </p:txBody>
+      </p:sp>
+      <p:sp>
+        <p:nvSpPr>
+          <p:cNvPr id="37" name="Shape 35"/>
+          <p:cNvSpPr/>
+          <p:nvPr/>
+        </p:nvSpPr>
+        <p:spPr>
+          <a:xfrm>
+            <a:off x="5232981" y="3364992"/>
+            <a:ext cx="1005840" cy="475488"/>
+          </a:xfrm>
+          <a:prstGeom prst="rect">
+            <a:avLst>
+              <a:gd name="adj" fmla="val 9615"/>
+            </a:avLst>
+          </a:prstGeom>
+          <a:solidFill>
+            <a:srgbClr val="FFFFFF"/>
+          </a:solidFill>
+          <a:ln w="12700">
+            <a:solidFill>
+              <a:srgbClr val="0D9488"/>
+            </a:solidFill>
+            <a:prstDash val="solid"/>
+          </a:ln>
+        </p:spPr>
+      </p:sp>
+      <p:sp>
+        <p:nvSpPr>
+          <p:cNvPr id="38" name="Text 36"/>
+          <p:cNvSpPr/>
+          <p:nvPr/>
+        </p:nvSpPr>
+        <p:spPr>
+          <a:xfrm>
+            <a:off x="5232981" y="3364992"/>
+            <a:ext cx="1005840" cy="475488"/>
+          </a:xfrm>
+          <a:prstGeom prst="rect">
+            <a:avLst/>
+          </a:prstGeom>
+          <a:noFill/>
+          <a:ln/>
+        </p:spPr>
+        <p:txBody>
+          <a:bodyPr wrap="square" lIns="0" tIns="0" rIns="0" bIns="0" rtlCol="0" anchor="ctr"/>
+          <a:lstStyle/>
+          <a:p>
+            <a:pPr algn="ctr" indent="0" marL="0">
+              <a:buNone/>
+            </a:pPr>
+            <a:r>
+              <a:rPr lang="en-US" sz="1400" b="1" dirty="0">
+                <a:solidFill>
+                  <a:srgbClr val="0D9488"/>
+                </a:solidFill>
+                <a:latin typeface="Trebuchet MS" pitchFamily="34" charset="0"/>
+                <a:ea typeface="Trebuchet MS" pitchFamily="34" charset="-122"/>
+                <a:cs typeface="Trebuchet MS" pitchFamily="34" charset="-120"/>
+              </a:rPr>
+              <a:t>i</a:t>
+            </a:r>
+            <a:endParaRPr lang="en-US" sz="1400" dirty="0"/>
+          </a:p>
+        </p:txBody>
+      </p:sp>
+      <p:sp>
+        <p:nvSpPr>
+          <p:cNvPr id="39" name="Text 37"/>
+          <p:cNvSpPr/>
+          <p:nvPr/>
+        </p:nvSpPr>
+        <p:spPr>
+          <a:xfrm>
+            <a:off x="6238821" y="3364992"/>
+            <a:ext cx="78377" cy="475488"/>
+          </a:xfrm>
+          <a:prstGeom prst="rect">
+            <a:avLst/>
+          </a:prstGeom>
+          <a:noFill/>
+          <a:ln/>
+        </p:spPr>
+        <p:txBody>
+          <a:bodyPr wrap="square" lIns="0" tIns="0" rIns="0" bIns="0" rtlCol="0" anchor="ctr"/>
+          <a:lstStyle/>
+          <a:p>
+            <a:pPr algn="ctr" indent="0" marL="0">
+              <a:buNone/>
+            </a:pPr>
+            <a:r>
+              <a:rPr lang="en-US" sz="1600" b="1" dirty="0">
+                <a:solidFill>
+                  <a:srgbClr val="0D9488"/>
+                </a:solidFill>
+                <a:latin typeface="Trebuchet MS" pitchFamily="34" charset="0"/>
+                <a:ea typeface="Trebuchet MS" pitchFamily="34" charset="-122"/>
+                <a:cs typeface="Trebuchet MS" pitchFamily="34" charset="-120"/>
+              </a:rPr>
+              <a:t>·</a:t>
+            </a:r>
+            <a:endParaRPr lang="en-US" sz="1600" dirty="0"/>
+          </a:p>
+        </p:txBody>
+      </p:sp>
+      <p:sp>
+        <p:nvSpPr>
+          <p:cNvPr id="40" name="Shape 38"/>
+          <p:cNvSpPr/>
+          <p:nvPr/>
+        </p:nvSpPr>
+        <p:spPr>
+          <a:xfrm>
+            <a:off x="6317198" y="3364992"/>
+            <a:ext cx="1005840" cy="475488"/>
+          </a:xfrm>
+          <a:prstGeom prst="rect">
+            <a:avLst>
+              <a:gd name="adj" fmla="val 9615"/>
+            </a:avLst>
+          </a:prstGeom>
+          <a:solidFill>
+            <a:srgbClr val="FFFFFF"/>
+          </a:solidFill>
+          <a:ln w="12700">
+            <a:solidFill>
+              <a:srgbClr val="0D9488"/>
+            </a:solidFill>
+            <a:prstDash val="solid"/>
+          </a:ln>
+        </p:spPr>
+      </p:sp>
+      <p:sp>
+        <p:nvSpPr>
+          <p:cNvPr id="41" name="Text 39"/>
+          <p:cNvSpPr/>
+          <p:nvPr/>
+        </p:nvSpPr>
+        <p:spPr>
+          <a:xfrm>
+            <a:off x="6317198" y="3364992"/>
+            <a:ext cx="1005840" cy="475488"/>
+          </a:xfrm>
+          <a:prstGeom prst="rect">
+            <a:avLst/>
+          </a:prstGeom>
+          <a:noFill/>
+          <a:ln/>
+        </p:spPr>
+        <p:txBody>
+          <a:bodyPr wrap="square" lIns="0" tIns="0" rIns="0" bIns="0" rtlCol="0" anchor="ctr"/>
+          <a:lstStyle/>
+          <a:p>
+            <a:pPr algn="ctr" indent="0" marL="0">
+              <a:buNone/>
+            </a:pPr>
+            <a:r>
+              <a:rPr lang="en-US" sz="1400" b="1" dirty="0">
+                <a:solidFill>
+                  <a:srgbClr val="0D9488"/>
+                </a:solidFill>
+                <a:latin typeface="Trebuchet MS" pitchFamily="34" charset="0"/>
+                <a:ea typeface="Trebuchet MS" pitchFamily="34" charset="-122"/>
+                <a:cs typeface="Trebuchet MS" pitchFamily="34" charset="-120"/>
+              </a:rPr>
               <a:t>cal</a:t>
             </a:r>
             <a:endParaRPr lang="en-US" sz="1400" dirty="0"/>
@@ -14380,7 +15197,112 @@
       </p:sp>
       <p:sp>
         <p:nvSpPr>
-          <p:cNvPr id="30" name="Shape 28"/>
+          <p:cNvPr id="42" name="Text 40"/>
+          <p:cNvSpPr/>
+          <p:nvPr/>
+        </p:nvSpPr>
+        <p:spPr>
+          <a:xfrm>
+            <a:off x="7323038" y="3364992"/>
+            <a:ext cx="78377" cy="475488"/>
+          </a:xfrm>
+          <a:prstGeom prst="rect">
+            <a:avLst/>
+          </a:prstGeom>
+          <a:noFill/>
+          <a:ln/>
+        </p:spPr>
+        <p:txBody>
+          <a:bodyPr wrap="square" lIns="0" tIns="0" rIns="0" bIns="0" rtlCol="0" anchor="ctr"/>
+          <a:lstStyle/>
+          <a:p>
+            <a:pPr algn="ctr" indent="0" marL="0">
+              <a:buNone/>
+            </a:pPr>
+            <a:r>
+              <a:rPr lang="en-US" sz="1600" b="1" dirty="0">
+                <a:solidFill>
+                  <a:srgbClr val="0D9488"/>
+                </a:solidFill>
+                <a:latin typeface="Trebuchet MS" pitchFamily="34" charset="0"/>
+                <a:ea typeface="Trebuchet MS" pitchFamily="34" charset="-122"/>
+                <a:cs typeface="Trebuchet MS" pitchFamily="34" charset="-120"/>
+              </a:rPr>
+              <a:t>·</a:t>
+            </a:r>
+            <a:endParaRPr lang="en-US" sz="1600" dirty="0"/>
+          </a:p>
+        </p:txBody>
+      </p:sp>
+      <p:sp>
+        <p:nvSpPr>
+          <p:cNvPr id="43" name="Shape 41"/>
+          <p:cNvSpPr/>
+          <p:nvPr/>
+        </p:nvSpPr>
+        <p:spPr>
+          <a:xfrm>
+            <a:off x="7401415" y="3364992"/>
+            <a:ext cx="1005840" cy="475488"/>
+          </a:xfrm>
+          <a:prstGeom prst="rect">
+            <a:avLst>
+              <a:gd name="adj" fmla="val 9615"/>
+            </a:avLst>
+          </a:prstGeom>
+          <a:solidFill>
+            <a:srgbClr val="FFFFFF"/>
+          </a:solidFill>
+          <a:ln w="12700">
+            <a:solidFill>
+              <a:srgbClr val="0D9488"/>
+            </a:solidFill>
+            <a:prstDash val="solid"/>
+          </a:ln>
+        </p:spPr>
+      </p:sp>
+      <p:sp>
+        <p:nvSpPr>
+          <p:cNvPr id="44" name="Text 42"/>
+          <p:cNvSpPr/>
+          <p:nvPr/>
+        </p:nvSpPr>
+        <p:spPr>
+          <a:xfrm>
+            <a:off x="7401415" y="3364992"/>
+            <a:ext cx="1005840" cy="475488"/>
+          </a:xfrm>
+          <a:prstGeom prst="rect">
+            <a:avLst/>
+          </a:prstGeom>
+          <a:noFill/>
+          <a:ln/>
+        </p:spPr>
+        <p:txBody>
+          <a:bodyPr wrap="square" lIns="0" tIns="0" rIns="0" bIns="0" rtlCol="0" anchor="ctr"/>
+          <a:lstStyle/>
+          <a:p>
+            <a:pPr algn="ctr" indent="0" marL="0">
+              <a:buNone/>
+            </a:pPr>
+            <a:r>
+              <a:rPr lang="en-US" sz="1400" b="1" dirty="0">
+                <a:solidFill>
+                  <a:srgbClr val="0D9488"/>
+                </a:solidFill>
+                <a:latin typeface="Trebuchet MS" pitchFamily="34" charset="0"/>
+                <a:ea typeface="Trebuchet MS" pitchFamily="34" charset="-122"/>
+                <a:cs typeface="Trebuchet MS" pitchFamily="34" charset="-120"/>
+              </a:rPr>
+              <a:t>ly</a:t>
+            </a:r>
+            <a:endParaRPr lang="en-US" sz="1400" dirty="0"/>
+          </a:p>
+        </p:txBody>
+      </p:sp>
+      <p:sp>
+        <p:nvSpPr>
+          <p:cNvPr id="45" name="Shape 43"/>
           <p:cNvSpPr/>
           <p:nvPr/>
         </p:nvSpPr>
@@ -14407,7 +15329,7 @@
       </p:sp>
       <p:sp>
         <p:nvSpPr>
-          <p:cNvPr id="31" name="Text 29"/>
+          <p:cNvPr id="46" name="Text 44"/>
           <p:cNvSpPr/>
           <p:nvPr/>
         </p:nvSpPr>
@@ -14446,7 +15368,7 @@
       </p:sp>
       <p:sp>
         <p:nvSpPr>
-          <p:cNvPr id="32" name="Shape 30"/>
+          <p:cNvPr id="47" name="Shape 45"/>
           <p:cNvSpPr/>
           <p:nvPr/>
         </p:nvSpPr>
@@ -14473,7 +15395,7 @@
       </p:sp>
       <p:sp>
         <p:nvSpPr>
-          <p:cNvPr id="33" name="Text 31"/>
+          <p:cNvPr id="48" name="Text 46"/>
           <p:cNvSpPr/>
           <p:nvPr/>
         </p:nvSpPr>
@@ -14705,7 +15627,7 @@
                 <a:ea typeface="Calibri" pitchFamily="34" charset="-122"/>
                 <a:cs typeface="Calibri" pitchFamily="34" charset="-120"/>
               </a:rPr>
-              <a:t>Root 'logical' — relating to reason or logic</a:t>
+              <a:t>Root 'logical' — making sense</a:t>
             </a:r>
             <a:endParaRPr lang="en-US" sz="1600" dirty="0"/>
           </a:p>
@@ -15061,7 +15983,7 @@
                 <a:ea typeface="Calibri" pitchFamily="34" charset="-122"/>
                 <a:cs typeface="Calibri" pitchFamily="34" charset="-120"/>
               </a:rPr>
-              <a:t>Word Labs  •  wordlabs.app  •  Root: 'logical' = relating to reason or logic</a:t>
+              <a:t>Word Labs  •  wordlabs.app  •  Root: 'logical' = making sense</a:t>
             </a:r>
             <a:endParaRPr lang="en-US" sz="800" dirty="0"/>
           </a:p>
@@ -15200,7 +16122,7 @@
                 <a:ea typeface="Trebuchet MS" pitchFamily="34" charset="-122"/>
                 <a:cs typeface="Trebuchet MS" pitchFamily="34" charset="-120"/>
               </a:rPr>
-              <a:t>logical</a:t>
+              <a:t>chronologically</a:t>
             </a:r>
             <a:endParaRPr lang="en-US" sz="2800" dirty="0"/>
           </a:p>
@@ -15280,7 +16202,7 @@
         </p:nvSpPr>
         <p:spPr>
           <a:xfrm>
-            <a:off x="4370832" y="2258568"/>
+            <a:off x="2221992" y="2258568"/>
             <a:ext cx="1828800" cy="292608"/>
           </a:xfrm>
           <a:prstGeom prst="rect">
@@ -15289,11 +16211,11 @@
             </a:avLst>
           </a:prstGeom>
           <a:solidFill>
-            <a:srgbClr val="CCFBF1"/>
+            <a:srgbClr val="DDD6FE"/>
           </a:solidFill>
           <a:ln w="19050">
             <a:solidFill>
-              <a:srgbClr val="0D9488"/>
+              <a:srgbClr val="7C3AED"/>
             </a:solidFill>
             <a:prstDash val="solid"/>
           </a:ln>
@@ -15314,7 +16236,7 @@
         </p:nvSpPr>
         <p:spPr>
           <a:xfrm>
-            <a:off x="4370832" y="2258568"/>
+            <a:off x="2221992" y="2258568"/>
             <a:ext cx="1828800" cy="292608"/>
           </a:xfrm>
           <a:prstGeom prst="rect">
@@ -15333,13 +16255,13 @@
             <a:r>
               <a:rPr lang="en-US" sz="1300" b="1" dirty="0">
                 <a:solidFill>
-                  <a:srgbClr val="0F766E"/>
+                  <a:srgbClr val="4C1D95"/>
                 </a:solidFill>
                 <a:latin typeface="Trebuchet MS" pitchFamily="34" charset="0"/>
                 <a:ea typeface="Trebuchet MS" pitchFamily="34" charset="-122"/>
                 <a:cs typeface="Trebuchet MS" pitchFamily="34" charset="-120"/>
               </a:rPr>
-              <a:t>logical</a:t>
+              <a:t>chrono</a:t>
             </a:r>
             <a:endParaRPr lang="en-US" sz="1300" dirty="0"/>
           </a:p>
@@ -15353,7 +16275,7 @@
         </p:nvSpPr>
         <p:spPr>
           <a:xfrm>
-            <a:off x="4370832" y="2569464"/>
+            <a:off x="2221992" y="2569464"/>
             <a:ext cx="1828800" cy="201168"/>
           </a:xfrm>
           <a:prstGeom prst="rect">
@@ -15378,7 +16300,7 @@
                 <a:ea typeface="Calibri" pitchFamily="34" charset="-122"/>
                 <a:cs typeface="Calibri" pitchFamily="34" charset="-120"/>
               </a:rPr>
-              <a:t>relating to reason or logic</a:t>
+              <a:t>time</a:t>
             </a:r>
             <a:endParaRPr lang="en-US" sz="850" dirty="0"/>
           </a:p>
@@ -15387,6 +16309,230 @@
       <p:sp>
         <p:nvSpPr>
           <p:cNvPr id="19" name="Shape 17"/>
+          <p:cNvSpPr/>
+          <p:nvPr/>
+        </p:nvSpPr>
+        <p:spPr>
+          <a:xfrm>
+            <a:off x="4370832" y="2258568"/>
+            <a:ext cx="1828800" cy="292608"/>
+          </a:xfrm>
+          <a:prstGeom prst="rect">
+            <a:avLst>
+              <a:gd name="adj" fmla="val 25000"/>
+            </a:avLst>
+          </a:prstGeom>
+          <a:solidFill>
+            <a:srgbClr val="CCFBF1"/>
+          </a:solidFill>
+          <a:ln w="19050">
+            <a:solidFill>
+              <a:srgbClr val="0D9488"/>
+            </a:solidFill>
+            <a:prstDash val="solid"/>
+          </a:ln>
+          <a:effectLst>
+            <a:outerShdw sx="100000" sy="100000" kx="0" ky="0" algn="bl" rotWithShape="0" blurRad="101600" dist="38100" dir="8100000">
+              <a:srgbClr val="000000">
+                <a:alpha val="12000"/>
+              </a:srgbClr>
+            </a:outerShdw>
+          </a:effectLst>
+        </p:spPr>
+      </p:sp>
+      <p:sp>
+        <p:nvSpPr>
+          <p:cNvPr id="20" name="Text 18"/>
+          <p:cNvSpPr/>
+          <p:nvPr/>
+        </p:nvSpPr>
+        <p:spPr>
+          <a:xfrm>
+            <a:off x="4370832" y="2258568"/>
+            <a:ext cx="1828800" cy="292608"/>
+          </a:xfrm>
+          <a:prstGeom prst="rect">
+            <a:avLst/>
+          </a:prstGeom>
+          <a:noFill/>
+          <a:ln/>
+        </p:spPr>
+        <p:txBody>
+          <a:bodyPr wrap="square" lIns="0" tIns="0" rIns="0" bIns="0" rtlCol="0" anchor="ctr"/>
+          <a:lstStyle/>
+          <a:p>
+            <a:pPr algn="ctr" indent="0" marL="0">
+              <a:buNone/>
+            </a:pPr>
+            <a:r>
+              <a:rPr lang="en-US" sz="1300" b="1" dirty="0">
+                <a:solidFill>
+                  <a:srgbClr val="0F766E"/>
+                </a:solidFill>
+                <a:latin typeface="Trebuchet MS" pitchFamily="34" charset="0"/>
+                <a:ea typeface="Trebuchet MS" pitchFamily="34" charset="-122"/>
+                <a:cs typeface="Trebuchet MS" pitchFamily="34" charset="-120"/>
+              </a:rPr>
+              <a:t>logical</a:t>
+            </a:r>
+            <a:endParaRPr lang="en-US" sz="1300" dirty="0"/>
+          </a:p>
+        </p:txBody>
+      </p:sp>
+      <p:sp>
+        <p:nvSpPr>
+          <p:cNvPr id="21" name="Text 19"/>
+          <p:cNvSpPr/>
+          <p:nvPr/>
+        </p:nvSpPr>
+        <p:spPr>
+          <a:xfrm>
+            <a:off x="4370832" y="2569464"/>
+            <a:ext cx="1828800" cy="201168"/>
+          </a:xfrm>
+          <a:prstGeom prst="rect">
+            <a:avLst/>
+          </a:prstGeom>
+          <a:noFill/>
+          <a:ln/>
+        </p:spPr>
+        <p:txBody>
+          <a:bodyPr wrap="square" lIns="0" tIns="0" rIns="0" bIns="0" rtlCol="0" anchor="t"/>
+          <a:lstStyle/>
+          <a:p>
+            <a:pPr algn="ctr" indent="0" marL="0">
+              <a:buNone/>
+            </a:pPr>
+            <a:r>
+              <a:rPr lang="en-US" sz="850" dirty="0">
+                <a:solidFill>
+                  <a:srgbClr val="475569"/>
+                </a:solidFill>
+                <a:latin typeface="Calibri" pitchFamily="34" charset="0"/>
+                <a:ea typeface="Calibri" pitchFamily="34" charset="-122"/>
+                <a:cs typeface="Calibri" pitchFamily="34" charset="-120"/>
+              </a:rPr>
+              <a:t>making sense</a:t>
+            </a:r>
+            <a:endParaRPr lang="en-US" sz="850" dirty="0"/>
+          </a:p>
+        </p:txBody>
+      </p:sp>
+      <p:sp>
+        <p:nvSpPr>
+          <p:cNvPr id="22" name="Shape 20"/>
+          <p:cNvSpPr/>
+          <p:nvPr/>
+        </p:nvSpPr>
+        <p:spPr>
+          <a:xfrm>
+            <a:off x="6519672" y="2258568"/>
+            <a:ext cx="1828800" cy="292608"/>
+          </a:xfrm>
+          <a:prstGeom prst="rect">
+            <a:avLst>
+              <a:gd name="adj" fmla="val 25000"/>
+            </a:avLst>
+          </a:prstGeom>
+          <a:solidFill>
+            <a:srgbClr val="FCE7F3"/>
+          </a:solidFill>
+          <a:ln w="19050">
+            <a:solidFill>
+              <a:srgbClr val="DB2777"/>
+            </a:solidFill>
+            <a:prstDash val="solid"/>
+          </a:ln>
+          <a:effectLst>
+            <a:outerShdw sx="100000" sy="100000" kx="0" ky="0" algn="bl" rotWithShape="0" blurRad="101600" dist="38100" dir="8100000">
+              <a:srgbClr val="000000">
+                <a:alpha val="12000"/>
+              </a:srgbClr>
+            </a:outerShdw>
+          </a:effectLst>
+        </p:spPr>
+      </p:sp>
+      <p:sp>
+        <p:nvSpPr>
+          <p:cNvPr id="23" name="Text 21"/>
+          <p:cNvSpPr/>
+          <p:nvPr/>
+        </p:nvSpPr>
+        <p:spPr>
+          <a:xfrm>
+            <a:off x="6519672" y="2258568"/>
+            <a:ext cx="1828800" cy="292608"/>
+          </a:xfrm>
+          <a:prstGeom prst="rect">
+            <a:avLst/>
+          </a:prstGeom>
+          <a:noFill/>
+          <a:ln/>
+        </p:spPr>
+        <p:txBody>
+          <a:bodyPr wrap="square" lIns="0" tIns="0" rIns="0" bIns="0" rtlCol="0" anchor="ctr"/>
+          <a:lstStyle/>
+          <a:p>
+            <a:pPr algn="ctr" indent="0" marL="0">
+              <a:buNone/>
+            </a:pPr>
+            <a:r>
+              <a:rPr lang="en-US" sz="1300" b="1" dirty="0">
+                <a:solidFill>
+                  <a:srgbClr val="9D174D"/>
+                </a:solidFill>
+                <a:latin typeface="Trebuchet MS" pitchFamily="34" charset="0"/>
+                <a:ea typeface="Trebuchet MS" pitchFamily="34" charset="-122"/>
+                <a:cs typeface="Trebuchet MS" pitchFamily="34" charset="-120"/>
+              </a:rPr>
+              <a:t>ly</a:t>
+            </a:r>
+            <a:endParaRPr lang="en-US" sz="1300" dirty="0"/>
+          </a:p>
+        </p:txBody>
+      </p:sp>
+      <p:sp>
+        <p:nvSpPr>
+          <p:cNvPr id="24" name="Text 22"/>
+          <p:cNvSpPr/>
+          <p:nvPr/>
+        </p:nvSpPr>
+        <p:spPr>
+          <a:xfrm>
+            <a:off x="6519672" y="2569464"/>
+            <a:ext cx="1828800" cy="201168"/>
+          </a:xfrm>
+          <a:prstGeom prst="rect">
+            <a:avLst/>
+          </a:prstGeom>
+          <a:noFill/>
+          <a:ln/>
+        </p:spPr>
+        <p:txBody>
+          <a:bodyPr wrap="square" lIns="0" tIns="0" rIns="0" bIns="0" rtlCol="0" anchor="t"/>
+          <a:lstStyle/>
+          <a:p>
+            <a:pPr algn="ctr" indent="0" marL="0">
+              <a:buNone/>
+            </a:pPr>
+            <a:r>
+              <a:rPr lang="en-US" sz="850" dirty="0">
+                <a:solidFill>
+                  <a:srgbClr val="475569"/>
+                </a:solidFill>
+                <a:latin typeface="Calibri" pitchFamily="34" charset="0"/>
+                <a:ea typeface="Calibri" pitchFamily="34" charset="-122"/>
+                <a:cs typeface="Calibri" pitchFamily="34" charset="-120"/>
+              </a:rPr>
+              <a:t>in a way</a:t>
+            </a:r>
+            <a:endParaRPr lang="en-US" sz="850" dirty="0"/>
+          </a:p>
+        </p:txBody>
+      </p:sp>
+      <p:sp>
+        <p:nvSpPr>
+          <p:cNvPr id="25" name="Shape 23"/>
           <p:cNvSpPr/>
           <p:nvPr/>
         </p:nvSpPr>
@@ -15413,7 +16559,7 @@
       </p:sp>
       <p:sp>
         <p:nvSpPr>
-          <p:cNvPr id="20" name="Text 18"/>
+          <p:cNvPr id="26" name="Text 24"/>
           <p:cNvSpPr/>
           <p:nvPr/>
         </p:nvSpPr>
@@ -15452,7 +16598,7 @@
       </p:sp>
       <p:sp>
         <p:nvSpPr>
-          <p:cNvPr id="21" name="Shape 19"/>
+          <p:cNvPr id="27" name="Shape 25"/>
           <p:cNvSpPr/>
           <p:nvPr/>
         </p:nvSpPr>
@@ -15479,14 +16625,14 @@
       </p:sp>
       <p:sp>
         <p:nvSpPr>
-          <p:cNvPr id="22" name="Shape 20"/>
-          <p:cNvSpPr/>
-          <p:nvPr/>
-        </p:nvSpPr>
-        <p:spPr>
-          <a:xfrm>
-            <a:off x="2313432" y="3364992"/>
-            <a:ext cx="1645920" cy="475488"/>
+          <p:cNvPr id="28" name="Shape 26"/>
+          <p:cNvSpPr/>
+          <p:nvPr/>
+        </p:nvSpPr>
+        <p:spPr>
+          <a:xfrm>
+            <a:off x="1980329" y="3364992"/>
+            <a:ext cx="1005840" cy="475488"/>
           </a:xfrm>
           <a:prstGeom prst="rect">
             <a:avLst>
@@ -15506,14 +16652,14 @@
       </p:sp>
       <p:sp>
         <p:nvSpPr>
-          <p:cNvPr id="23" name="Text 21"/>
-          <p:cNvSpPr/>
-          <p:nvPr/>
-        </p:nvSpPr>
-        <p:spPr>
-          <a:xfrm>
-            <a:off x="2313432" y="3364992"/>
-            <a:ext cx="1645920" cy="475488"/>
+          <p:cNvPr id="29" name="Text 27"/>
+          <p:cNvSpPr/>
+          <p:nvPr/>
+        </p:nvSpPr>
+        <p:spPr>
+          <a:xfrm>
+            <a:off x="1980329" y="3364992"/>
+            <a:ext cx="1005840" cy="475488"/>
           </a:xfrm>
           <a:prstGeom prst="rect">
             <a:avLst/>
@@ -15537,7 +16683,7 @@
                 <a:ea typeface="Trebuchet MS" pitchFamily="34" charset="-122"/>
                 <a:cs typeface="Trebuchet MS" pitchFamily="34" charset="-120"/>
               </a:rPr>
-              <a:t>log</a:t>
+              <a:t>chron</a:t>
             </a:r>
             <a:endParaRPr lang="en-US" sz="1400" dirty="0"/>
           </a:p>
@@ -15545,14 +16691,14 @@
       </p:sp>
       <p:sp>
         <p:nvSpPr>
-          <p:cNvPr id="24" name="Text 22"/>
-          <p:cNvSpPr/>
-          <p:nvPr/>
-        </p:nvSpPr>
-        <p:spPr>
-          <a:xfrm>
-            <a:off x="3959352" y="3364992"/>
-            <a:ext cx="411480" cy="475488"/>
+          <p:cNvPr id="30" name="Text 28"/>
+          <p:cNvSpPr/>
+          <p:nvPr/>
+        </p:nvSpPr>
+        <p:spPr>
+          <a:xfrm>
+            <a:off x="2986169" y="3364992"/>
+            <a:ext cx="78377" cy="475488"/>
           </a:xfrm>
           <a:prstGeom prst="rect">
             <a:avLst/>
@@ -15584,14 +16730,14 @@
       </p:sp>
       <p:sp>
         <p:nvSpPr>
-          <p:cNvPr id="25" name="Shape 23"/>
-          <p:cNvSpPr/>
-          <p:nvPr/>
-        </p:nvSpPr>
-        <p:spPr>
-          <a:xfrm>
-            <a:off x="4370832" y="3364992"/>
-            <a:ext cx="1645920" cy="475488"/>
+          <p:cNvPr id="31" name="Shape 29"/>
+          <p:cNvSpPr/>
+          <p:nvPr/>
+        </p:nvSpPr>
+        <p:spPr>
+          <a:xfrm>
+            <a:off x="3064546" y="3364992"/>
+            <a:ext cx="1005840" cy="475488"/>
           </a:xfrm>
           <a:prstGeom prst="rect">
             <a:avLst>
@@ -15611,14 +16757,14 @@
       </p:sp>
       <p:sp>
         <p:nvSpPr>
-          <p:cNvPr id="26" name="Text 24"/>
-          <p:cNvSpPr/>
-          <p:nvPr/>
-        </p:nvSpPr>
-        <p:spPr>
-          <a:xfrm>
-            <a:off x="4370832" y="3364992"/>
-            <a:ext cx="1645920" cy="475488"/>
+          <p:cNvPr id="32" name="Text 30"/>
+          <p:cNvSpPr/>
+          <p:nvPr/>
+        </p:nvSpPr>
+        <p:spPr>
+          <a:xfrm>
+            <a:off x="3064546" y="3364992"/>
+            <a:ext cx="1005840" cy="475488"/>
           </a:xfrm>
           <a:prstGeom prst="rect">
             <a:avLst/>
@@ -15642,7 +16788,7 @@
                 <a:ea typeface="Trebuchet MS" pitchFamily="34" charset="-122"/>
                 <a:cs typeface="Trebuchet MS" pitchFamily="34" charset="-120"/>
               </a:rPr>
-              <a:t>i</a:t>
+              <a:t>o</a:t>
             </a:r>
             <a:endParaRPr lang="en-US" sz="1400" dirty="0"/>
           </a:p>
@@ -15650,14 +16796,14 @@
       </p:sp>
       <p:sp>
         <p:nvSpPr>
-          <p:cNvPr id="27" name="Text 25"/>
-          <p:cNvSpPr/>
-          <p:nvPr/>
-        </p:nvSpPr>
-        <p:spPr>
-          <a:xfrm>
-            <a:off x="6016752" y="3364992"/>
-            <a:ext cx="411480" cy="475488"/>
+          <p:cNvPr id="33" name="Text 31"/>
+          <p:cNvSpPr/>
+          <p:nvPr/>
+        </p:nvSpPr>
+        <p:spPr>
+          <a:xfrm>
+            <a:off x="4070386" y="3364992"/>
+            <a:ext cx="78377" cy="475488"/>
           </a:xfrm>
           <a:prstGeom prst="rect">
             <a:avLst/>
@@ -15689,14 +16835,14 @@
       </p:sp>
       <p:sp>
         <p:nvSpPr>
-          <p:cNvPr id="28" name="Shape 26"/>
-          <p:cNvSpPr/>
-          <p:nvPr/>
-        </p:nvSpPr>
-        <p:spPr>
-          <a:xfrm>
-            <a:off x="6428232" y="3364992"/>
-            <a:ext cx="1645920" cy="475488"/>
+          <p:cNvPr id="34" name="Shape 32"/>
+          <p:cNvSpPr/>
+          <p:nvPr/>
+        </p:nvSpPr>
+        <p:spPr>
+          <a:xfrm>
+            <a:off x="4148763" y="3364992"/>
+            <a:ext cx="1005840" cy="475488"/>
           </a:xfrm>
           <a:prstGeom prst="rect">
             <a:avLst>
@@ -15716,14 +16862,14 @@
       </p:sp>
       <p:sp>
         <p:nvSpPr>
-          <p:cNvPr id="29" name="Text 27"/>
-          <p:cNvSpPr/>
-          <p:nvPr/>
-        </p:nvSpPr>
-        <p:spPr>
-          <a:xfrm>
-            <a:off x="6428232" y="3364992"/>
-            <a:ext cx="1645920" cy="475488"/>
+          <p:cNvPr id="35" name="Text 33"/>
+          <p:cNvSpPr/>
+          <p:nvPr/>
+        </p:nvSpPr>
+        <p:spPr>
+          <a:xfrm>
+            <a:off x="4148763" y="3364992"/>
+            <a:ext cx="1005840" cy="475488"/>
           </a:xfrm>
           <a:prstGeom prst="rect">
             <a:avLst/>
@@ -15747,6 +16893,216 @@
                 <a:ea typeface="Trebuchet MS" pitchFamily="34" charset="-122"/>
                 <a:cs typeface="Trebuchet MS" pitchFamily="34" charset="-120"/>
               </a:rPr>
+              <a:t>log</a:t>
+            </a:r>
+            <a:endParaRPr lang="en-US" sz="1400" dirty="0"/>
+          </a:p>
+        </p:txBody>
+      </p:sp>
+      <p:sp>
+        <p:nvSpPr>
+          <p:cNvPr id="36" name="Text 34"/>
+          <p:cNvSpPr/>
+          <p:nvPr/>
+        </p:nvSpPr>
+        <p:spPr>
+          <a:xfrm>
+            <a:off x="5154603" y="3364992"/>
+            <a:ext cx="78377" cy="475488"/>
+          </a:xfrm>
+          <a:prstGeom prst="rect">
+            <a:avLst/>
+          </a:prstGeom>
+          <a:noFill/>
+          <a:ln/>
+        </p:spPr>
+        <p:txBody>
+          <a:bodyPr wrap="square" lIns="0" tIns="0" rIns="0" bIns="0" rtlCol="0" anchor="ctr"/>
+          <a:lstStyle/>
+          <a:p>
+            <a:pPr algn="ctr" indent="0" marL="0">
+              <a:buNone/>
+            </a:pPr>
+            <a:r>
+              <a:rPr lang="en-US" sz="1600" b="1" dirty="0">
+                <a:solidFill>
+                  <a:srgbClr val="0D9488"/>
+                </a:solidFill>
+                <a:latin typeface="Trebuchet MS" pitchFamily="34" charset="0"/>
+                <a:ea typeface="Trebuchet MS" pitchFamily="34" charset="-122"/>
+                <a:cs typeface="Trebuchet MS" pitchFamily="34" charset="-120"/>
+              </a:rPr>
+              <a:t>·</a:t>
+            </a:r>
+            <a:endParaRPr lang="en-US" sz="1600" dirty="0"/>
+          </a:p>
+        </p:txBody>
+      </p:sp>
+      <p:sp>
+        <p:nvSpPr>
+          <p:cNvPr id="37" name="Shape 35"/>
+          <p:cNvSpPr/>
+          <p:nvPr/>
+        </p:nvSpPr>
+        <p:spPr>
+          <a:xfrm>
+            <a:off x="5232981" y="3364992"/>
+            <a:ext cx="1005840" cy="475488"/>
+          </a:xfrm>
+          <a:prstGeom prst="rect">
+            <a:avLst>
+              <a:gd name="adj" fmla="val 9615"/>
+            </a:avLst>
+          </a:prstGeom>
+          <a:solidFill>
+            <a:srgbClr val="FFFFFF"/>
+          </a:solidFill>
+          <a:ln w="12700">
+            <a:solidFill>
+              <a:srgbClr val="0D9488"/>
+            </a:solidFill>
+            <a:prstDash val="solid"/>
+          </a:ln>
+        </p:spPr>
+      </p:sp>
+      <p:sp>
+        <p:nvSpPr>
+          <p:cNvPr id="38" name="Text 36"/>
+          <p:cNvSpPr/>
+          <p:nvPr/>
+        </p:nvSpPr>
+        <p:spPr>
+          <a:xfrm>
+            <a:off x="5232981" y="3364992"/>
+            <a:ext cx="1005840" cy="475488"/>
+          </a:xfrm>
+          <a:prstGeom prst="rect">
+            <a:avLst/>
+          </a:prstGeom>
+          <a:noFill/>
+          <a:ln/>
+        </p:spPr>
+        <p:txBody>
+          <a:bodyPr wrap="square" lIns="0" tIns="0" rIns="0" bIns="0" rtlCol="0" anchor="ctr"/>
+          <a:lstStyle/>
+          <a:p>
+            <a:pPr algn="ctr" indent="0" marL="0">
+              <a:buNone/>
+            </a:pPr>
+            <a:r>
+              <a:rPr lang="en-US" sz="1400" b="1" dirty="0">
+                <a:solidFill>
+                  <a:srgbClr val="0D9488"/>
+                </a:solidFill>
+                <a:latin typeface="Trebuchet MS" pitchFamily="34" charset="0"/>
+                <a:ea typeface="Trebuchet MS" pitchFamily="34" charset="-122"/>
+                <a:cs typeface="Trebuchet MS" pitchFamily="34" charset="-120"/>
+              </a:rPr>
+              <a:t>i</a:t>
+            </a:r>
+            <a:endParaRPr lang="en-US" sz="1400" dirty="0"/>
+          </a:p>
+        </p:txBody>
+      </p:sp>
+      <p:sp>
+        <p:nvSpPr>
+          <p:cNvPr id="39" name="Text 37"/>
+          <p:cNvSpPr/>
+          <p:nvPr/>
+        </p:nvSpPr>
+        <p:spPr>
+          <a:xfrm>
+            <a:off x="6238821" y="3364992"/>
+            <a:ext cx="78377" cy="475488"/>
+          </a:xfrm>
+          <a:prstGeom prst="rect">
+            <a:avLst/>
+          </a:prstGeom>
+          <a:noFill/>
+          <a:ln/>
+        </p:spPr>
+        <p:txBody>
+          <a:bodyPr wrap="square" lIns="0" tIns="0" rIns="0" bIns="0" rtlCol="0" anchor="ctr"/>
+          <a:lstStyle/>
+          <a:p>
+            <a:pPr algn="ctr" indent="0" marL="0">
+              <a:buNone/>
+            </a:pPr>
+            <a:r>
+              <a:rPr lang="en-US" sz="1600" b="1" dirty="0">
+                <a:solidFill>
+                  <a:srgbClr val="0D9488"/>
+                </a:solidFill>
+                <a:latin typeface="Trebuchet MS" pitchFamily="34" charset="0"/>
+                <a:ea typeface="Trebuchet MS" pitchFamily="34" charset="-122"/>
+                <a:cs typeface="Trebuchet MS" pitchFamily="34" charset="-120"/>
+              </a:rPr>
+              <a:t>·</a:t>
+            </a:r>
+            <a:endParaRPr lang="en-US" sz="1600" dirty="0"/>
+          </a:p>
+        </p:txBody>
+      </p:sp>
+      <p:sp>
+        <p:nvSpPr>
+          <p:cNvPr id="40" name="Shape 38"/>
+          <p:cNvSpPr/>
+          <p:nvPr/>
+        </p:nvSpPr>
+        <p:spPr>
+          <a:xfrm>
+            <a:off x="6317198" y="3364992"/>
+            <a:ext cx="1005840" cy="475488"/>
+          </a:xfrm>
+          <a:prstGeom prst="rect">
+            <a:avLst>
+              <a:gd name="adj" fmla="val 9615"/>
+            </a:avLst>
+          </a:prstGeom>
+          <a:solidFill>
+            <a:srgbClr val="FFFFFF"/>
+          </a:solidFill>
+          <a:ln w="12700">
+            <a:solidFill>
+              <a:srgbClr val="0D9488"/>
+            </a:solidFill>
+            <a:prstDash val="solid"/>
+          </a:ln>
+        </p:spPr>
+      </p:sp>
+      <p:sp>
+        <p:nvSpPr>
+          <p:cNvPr id="41" name="Text 39"/>
+          <p:cNvSpPr/>
+          <p:nvPr/>
+        </p:nvSpPr>
+        <p:spPr>
+          <a:xfrm>
+            <a:off x="6317198" y="3364992"/>
+            <a:ext cx="1005840" cy="475488"/>
+          </a:xfrm>
+          <a:prstGeom prst="rect">
+            <a:avLst/>
+          </a:prstGeom>
+          <a:noFill/>
+          <a:ln/>
+        </p:spPr>
+        <p:txBody>
+          <a:bodyPr wrap="square" lIns="0" tIns="0" rIns="0" bIns="0" rtlCol="0" anchor="ctr"/>
+          <a:lstStyle/>
+          <a:p>
+            <a:pPr algn="ctr" indent="0" marL="0">
+              <a:buNone/>
+            </a:pPr>
+            <a:r>
+              <a:rPr lang="en-US" sz="1400" b="1" dirty="0">
+                <a:solidFill>
+                  <a:srgbClr val="0D9488"/>
+                </a:solidFill>
+                <a:latin typeface="Trebuchet MS" pitchFamily="34" charset="0"/>
+                <a:ea typeface="Trebuchet MS" pitchFamily="34" charset="-122"/>
+                <a:cs typeface="Trebuchet MS" pitchFamily="34" charset="-120"/>
+              </a:rPr>
               <a:t>cal</a:t>
             </a:r>
             <a:endParaRPr lang="en-US" sz="1400" dirty="0"/>
@@ -15755,7 +17111,112 @@
       </p:sp>
       <p:sp>
         <p:nvSpPr>
-          <p:cNvPr id="30" name="Shape 28"/>
+          <p:cNvPr id="42" name="Text 40"/>
+          <p:cNvSpPr/>
+          <p:nvPr/>
+        </p:nvSpPr>
+        <p:spPr>
+          <a:xfrm>
+            <a:off x="7323038" y="3364992"/>
+            <a:ext cx="78377" cy="475488"/>
+          </a:xfrm>
+          <a:prstGeom prst="rect">
+            <a:avLst/>
+          </a:prstGeom>
+          <a:noFill/>
+          <a:ln/>
+        </p:spPr>
+        <p:txBody>
+          <a:bodyPr wrap="square" lIns="0" tIns="0" rIns="0" bIns="0" rtlCol="0" anchor="ctr"/>
+          <a:lstStyle/>
+          <a:p>
+            <a:pPr algn="ctr" indent="0" marL="0">
+              <a:buNone/>
+            </a:pPr>
+            <a:r>
+              <a:rPr lang="en-US" sz="1600" b="1" dirty="0">
+                <a:solidFill>
+                  <a:srgbClr val="0D9488"/>
+                </a:solidFill>
+                <a:latin typeface="Trebuchet MS" pitchFamily="34" charset="0"/>
+                <a:ea typeface="Trebuchet MS" pitchFamily="34" charset="-122"/>
+                <a:cs typeface="Trebuchet MS" pitchFamily="34" charset="-120"/>
+              </a:rPr>
+              <a:t>·</a:t>
+            </a:r>
+            <a:endParaRPr lang="en-US" sz="1600" dirty="0"/>
+          </a:p>
+        </p:txBody>
+      </p:sp>
+      <p:sp>
+        <p:nvSpPr>
+          <p:cNvPr id="43" name="Shape 41"/>
+          <p:cNvSpPr/>
+          <p:nvPr/>
+        </p:nvSpPr>
+        <p:spPr>
+          <a:xfrm>
+            <a:off x="7401415" y="3364992"/>
+            <a:ext cx="1005840" cy="475488"/>
+          </a:xfrm>
+          <a:prstGeom prst="rect">
+            <a:avLst>
+              <a:gd name="adj" fmla="val 9615"/>
+            </a:avLst>
+          </a:prstGeom>
+          <a:solidFill>
+            <a:srgbClr val="FFFFFF"/>
+          </a:solidFill>
+          <a:ln w="12700">
+            <a:solidFill>
+              <a:srgbClr val="0D9488"/>
+            </a:solidFill>
+            <a:prstDash val="solid"/>
+          </a:ln>
+        </p:spPr>
+      </p:sp>
+      <p:sp>
+        <p:nvSpPr>
+          <p:cNvPr id="44" name="Text 42"/>
+          <p:cNvSpPr/>
+          <p:nvPr/>
+        </p:nvSpPr>
+        <p:spPr>
+          <a:xfrm>
+            <a:off x="7401415" y="3364992"/>
+            <a:ext cx="1005840" cy="475488"/>
+          </a:xfrm>
+          <a:prstGeom prst="rect">
+            <a:avLst/>
+          </a:prstGeom>
+          <a:noFill/>
+          <a:ln/>
+        </p:spPr>
+        <p:txBody>
+          <a:bodyPr wrap="square" lIns="0" tIns="0" rIns="0" bIns="0" rtlCol="0" anchor="ctr"/>
+          <a:lstStyle/>
+          <a:p>
+            <a:pPr algn="ctr" indent="0" marL="0">
+              <a:buNone/>
+            </a:pPr>
+            <a:r>
+              <a:rPr lang="en-US" sz="1400" b="1" dirty="0">
+                <a:solidFill>
+                  <a:srgbClr val="0D9488"/>
+                </a:solidFill>
+                <a:latin typeface="Trebuchet MS" pitchFamily="34" charset="0"/>
+                <a:ea typeface="Trebuchet MS" pitchFamily="34" charset="-122"/>
+                <a:cs typeface="Trebuchet MS" pitchFamily="34" charset="-120"/>
+              </a:rPr>
+              <a:t>ly</a:t>
+            </a:r>
+            <a:endParaRPr lang="en-US" sz="1400" dirty="0"/>
+          </a:p>
+        </p:txBody>
+      </p:sp>
+      <p:sp>
+        <p:nvSpPr>
+          <p:cNvPr id="45" name="Shape 43"/>
           <p:cNvSpPr/>
           <p:nvPr/>
         </p:nvSpPr>
@@ -15782,7 +17243,7 @@
       </p:sp>
       <p:sp>
         <p:nvSpPr>
-          <p:cNvPr id="31" name="Text 29"/>
+          <p:cNvPr id="46" name="Text 44"/>
           <p:cNvSpPr/>
           <p:nvPr/>
         </p:nvSpPr>
@@ -15821,18 +17282,18 @@
       </p:sp>
       <p:sp>
         <p:nvSpPr>
-          <p:cNvPr id="32" name="Shape 30"/>
+          <p:cNvPr id="47" name="Shape 45"/>
           <p:cNvSpPr/>
           <p:nvPr/>
         </p:nvSpPr>
         <p:spPr>
           <a:xfrm>
             <a:off x="1874520" y="4096512"/>
-            <a:ext cx="6903720" cy="804672"/>
+            <a:ext cx="6903720" cy="658368"/>
           </a:xfrm>
           <a:prstGeom prst="rect">
             <a:avLst>
-              <a:gd name="adj" fmla="val 6818"/>
+              <a:gd name="adj" fmla="val 8333"/>
             </a:avLst>
           </a:prstGeom>
           <a:solidFill>
@@ -15848,18 +17309,18 @@
       </p:sp>
       <p:sp>
         <p:nvSpPr>
-          <p:cNvPr id="33" name="Shape 31"/>
-          <p:cNvSpPr/>
-          <p:nvPr/>
-        </p:nvSpPr>
-        <p:spPr>
-          <a:xfrm>
-            <a:off x="2254649" y="4169664"/>
-            <a:ext cx="685800" cy="384048"/>
+          <p:cNvPr id="48" name="Shape 46"/>
+          <p:cNvSpPr/>
+          <p:nvPr/>
+        </p:nvSpPr>
+        <p:spPr>
+          <a:xfrm>
+            <a:off x="1953158" y="4169664"/>
+            <a:ext cx="415399" cy="475488"/>
           </a:xfrm>
           <a:prstGeom prst="rect">
             <a:avLst>
-              <a:gd name="adj" fmla="val 9524"/>
+              <a:gd name="adj" fmla="val 8805"/>
             </a:avLst>
           </a:prstGeom>
           <a:solidFill>
@@ -15875,14 +17336,14 @@
       </p:sp>
       <p:sp>
         <p:nvSpPr>
-          <p:cNvPr id="34" name="Text 32"/>
-          <p:cNvSpPr/>
-          <p:nvPr/>
-        </p:nvSpPr>
-        <p:spPr>
-          <a:xfrm>
-            <a:off x="2254649" y="4169664"/>
-            <a:ext cx="685800" cy="384048"/>
+          <p:cNvPr id="49" name="Text 47"/>
+          <p:cNvSpPr/>
+          <p:nvPr/>
+        </p:nvSpPr>
+        <p:spPr>
+          <a:xfrm>
+            <a:off x="1953158" y="4169664"/>
+            <a:ext cx="415399" cy="475488"/>
           </a:xfrm>
           <a:prstGeom prst="rect">
             <a:avLst/>
@@ -15906,7 +17367,7 @@
                 <a:ea typeface="Trebuchet MS" pitchFamily="34" charset="-122"/>
                 <a:cs typeface="Trebuchet MS" pitchFamily="34" charset="-120"/>
               </a:rPr>
-              <a:t>l</a:t>
+              <a:t>ch</a:t>
             </a:r>
             <a:endParaRPr lang="en-US" sz="900" dirty="0"/>
           </a:p>
@@ -15914,18 +17375,18 @@
       </p:sp>
       <p:sp>
         <p:nvSpPr>
-          <p:cNvPr id="35" name="Shape 33"/>
-          <p:cNvSpPr/>
-          <p:nvPr/>
-        </p:nvSpPr>
-        <p:spPr>
-          <a:xfrm>
-            <a:off x="3293146" y="4169664"/>
-            <a:ext cx="685800" cy="384048"/>
+          <p:cNvPr id="50" name="Shape 48"/>
+          <p:cNvSpPr/>
+          <p:nvPr/>
+        </p:nvSpPr>
+        <p:spPr>
+          <a:xfrm>
+            <a:off x="2419764" y="4169664"/>
+            <a:ext cx="415399" cy="475488"/>
           </a:xfrm>
           <a:prstGeom prst="rect">
             <a:avLst>
-              <a:gd name="adj" fmla="val 9524"/>
+              <a:gd name="adj" fmla="val 8805"/>
             </a:avLst>
           </a:prstGeom>
           <a:solidFill>
@@ -15941,14 +17402,14 @@
       </p:sp>
       <p:sp>
         <p:nvSpPr>
-          <p:cNvPr id="36" name="Text 34"/>
-          <p:cNvSpPr/>
-          <p:nvPr/>
-        </p:nvSpPr>
-        <p:spPr>
-          <a:xfrm>
-            <a:off x="3293146" y="4169664"/>
-            <a:ext cx="685800" cy="384048"/>
+          <p:cNvPr id="51" name="Text 49"/>
+          <p:cNvSpPr/>
+          <p:nvPr/>
+        </p:nvSpPr>
+        <p:spPr>
+          <a:xfrm>
+            <a:off x="2419764" y="4169664"/>
+            <a:ext cx="415399" cy="475488"/>
           </a:xfrm>
           <a:prstGeom prst="rect">
             <a:avLst/>
@@ -15972,7 +17433,7 @@
                 <a:ea typeface="Trebuchet MS" pitchFamily="34" charset="-122"/>
                 <a:cs typeface="Trebuchet MS" pitchFamily="34" charset="-120"/>
               </a:rPr>
-              <a:t>o</a:t>
+              <a:t>r</a:t>
             </a:r>
             <a:endParaRPr lang="en-US" sz="900" dirty="0"/>
           </a:p>
@@ -15980,18 +17441,18 @@
       </p:sp>
       <p:sp>
         <p:nvSpPr>
-          <p:cNvPr id="37" name="Shape 35"/>
-          <p:cNvSpPr/>
-          <p:nvPr/>
-        </p:nvSpPr>
-        <p:spPr>
-          <a:xfrm>
-            <a:off x="4331643" y="4169664"/>
-            <a:ext cx="685800" cy="384048"/>
+          <p:cNvPr id="52" name="Shape 50"/>
+          <p:cNvSpPr/>
+          <p:nvPr/>
+        </p:nvSpPr>
+        <p:spPr>
+          <a:xfrm>
+            <a:off x="2886369" y="4169664"/>
+            <a:ext cx="415399" cy="475488"/>
           </a:xfrm>
           <a:prstGeom prst="rect">
             <a:avLst>
-              <a:gd name="adj" fmla="val 9524"/>
+              <a:gd name="adj" fmla="val 8805"/>
             </a:avLst>
           </a:prstGeom>
           <a:solidFill>
@@ -16007,14 +17468,14 @@
       </p:sp>
       <p:sp>
         <p:nvSpPr>
-          <p:cNvPr id="38" name="Text 36"/>
-          <p:cNvSpPr/>
-          <p:nvPr/>
-        </p:nvSpPr>
-        <p:spPr>
-          <a:xfrm>
-            <a:off x="4331643" y="4169664"/>
-            <a:ext cx="685800" cy="384048"/>
+          <p:cNvPr id="53" name="Text 51"/>
+          <p:cNvSpPr/>
+          <p:nvPr/>
+        </p:nvSpPr>
+        <p:spPr>
+          <a:xfrm>
+            <a:off x="2886369" y="4169664"/>
+            <a:ext cx="415399" cy="475488"/>
           </a:xfrm>
           <a:prstGeom prst="rect">
             <a:avLst/>
@@ -16038,7 +17499,7 @@
                 <a:ea typeface="Trebuchet MS" pitchFamily="34" charset="-122"/>
                 <a:cs typeface="Trebuchet MS" pitchFamily="34" charset="-120"/>
               </a:rPr>
-              <a:t>g</a:t>
+              <a:t>o</a:t>
             </a:r>
             <a:endParaRPr lang="en-US" sz="900" dirty="0"/>
           </a:p>
@@ -16046,18 +17507,18 @@
       </p:sp>
       <p:sp>
         <p:nvSpPr>
-          <p:cNvPr id="39" name="Shape 37"/>
-          <p:cNvSpPr/>
-          <p:nvPr/>
-        </p:nvSpPr>
-        <p:spPr>
-          <a:xfrm>
-            <a:off x="5370141" y="4169664"/>
-            <a:ext cx="685800" cy="384048"/>
+          <p:cNvPr id="54" name="Shape 52"/>
+          <p:cNvSpPr/>
+          <p:nvPr/>
+        </p:nvSpPr>
+        <p:spPr>
+          <a:xfrm>
+            <a:off x="3352974" y="4169664"/>
+            <a:ext cx="415399" cy="475488"/>
           </a:xfrm>
           <a:prstGeom prst="rect">
             <a:avLst>
-              <a:gd name="adj" fmla="val 9524"/>
+              <a:gd name="adj" fmla="val 8805"/>
             </a:avLst>
           </a:prstGeom>
           <a:solidFill>
@@ -16073,14 +17534,14 @@
       </p:sp>
       <p:sp>
         <p:nvSpPr>
-          <p:cNvPr id="40" name="Text 38"/>
-          <p:cNvSpPr/>
-          <p:nvPr/>
-        </p:nvSpPr>
-        <p:spPr>
-          <a:xfrm>
-            <a:off x="5370141" y="4169664"/>
-            <a:ext cx="685800" cy="384048"/>
+          <p:cNvPr id="55" name="Text 53"/>
+          <p:cNvSpPr/>
+          <p:nvPr/>
+        </p:nvSpPr>
+        <p:spPr>
+          <a:xfrm>
+            <a:off x="3352974" y="4169664"/>
+            <a:ext cx="415399" cy="475488"/>
           </a:xfrm>
           <a:prstGeom prst="rect">
             <a:avLst/>
@@ -16104,7 +17565,7 @@
                 <a:ea typeface="Trebuchet MS" pitchFamily="34" charset="-122"/>
                 <a:cs typeface="Trebuchet MS" pitchFamily="34" charset="-120"/>
               </a:rPr>
-              <a:t>i</a:t>
+              <a:t>n</a:t>
             </a:r>
             <a:endParaRPr lang="en-US" sz="900" dirty="0"/>
           </a:p>
@@ -16112,18 +17573,18 @@
       </p:sp>
       <p:sp>
         <p:nvSpPr>
-          <p:cNvPr id="41" name="Shape 39"/>
-          <p:cNvSpPr/>
-          <p:nvPr/>
-        </p:nvSpPr>
-        <p:spPr>
-          <a:xfrm>
-            <a:off x="6408638" y="4169664"/>
-            <a:ext cx="685800" cy="384048"/>
+          <p:cNvPr id="56" name="Shape 54"/>
+          <p:cNvSpPr/>
+          <p:nvPr/>
+        </p:nvSpPr>
+        <p:spPr>
+          <a:xfrm>
+            <a:off x="3819579" y="4169664"/>
+            <a:ext cx="415399" cy="475488"/>
           </a:xfrm>
           <a:prstGeom prst="rect">
             <a:avLst>
-              <a:gd name="adj" fmla="val 9524"/>
+              <a:gd name="adj" fmla="val 8805"/>
             </a:avLst>
           </a:prstGeom>
           <a:solidFill>
@@ -16139,14 +17600,14 @@
       </p:sp>
       <p:sp>
         <p:nvSpPr>
-          <p:cNvPr id="42" name="Text 40"/>
-          <p:cNvSpPr/>
-          <p:nvPr/>
-        </p:nvSpPr>
-        <p:spPr>
-          <a:xfrm>
-            <a:off x="6408638" y="4169664"/>
-            <a:ext cx="685800" cy="384048"/>
+          <p:cNvPr id="57" name="Text 55"/>
+          <p:cNvSpPr/>
+          <p:nvPr/>
+        </p:nvSpPr>
+        <p:spPr>
+          <a:xfrm>
+            <a:off x="3819579" y="4169664"/>
+            <a:ext cx="415399" cy="475488"/>
           </a:xfrm>
           <a:prstGeom prst="rect">
             <a:avLst/>
@@ -16170,7 +17631,7 @@
                 <a:ea typeface="Trebuchet MS" pitchFamily="34" charset="-122"/>
                 <a:cs typeface="Trebuchet MS" pitchFamily="34" charset="-120"/>
               </a:rPr>
-              <a:t>c</a:t>
+              <a:t>o</a:t>
             </a:r>
             <a:endParaRPr lang="en-US" sz="900" dirty="0"/>
           </a:p>
@@ -16178,57 +17639,18 @@
       </p:sp>
       <p:sp>
         <p:nvSpPr>
-          <p:cNvPr id="43" name="Text 41"/>
-          <p:cNvSpPr/>
-          <p:nvPr/>
-        </p:nvSpPr>
-        <p:spPr>
-          <a:xfrm>
-            <a:off x="6408638" y="4572000"/>
-            <a:ext cx="685800" cy="219456"/>
-          </a:xfrm>
-          <a:prstGeom prst="rect">
-            <a:avLst/>
-          </a:prstGeom>
-          <a:noFill/>
-          <a:ln/>
-        </p:spPr>
-        <p:txBody>
-          <a:bodyPr wrap="square" lIns="0" tIns="0" rIns="0" bIns="0" rtlCol="0" anchor="t"/>
-          <a:lstStyle/>
-          <a:p>
-            <a:pPr algn="ctr" indent="0" marL="0">
-              <a:buNone/>
-            </a:pPr>
-            <a:r>
-              <a:rPr lang="en-US" sz="750" i="1" dirty="0">
-                <a:solidFill>
-                  <a:srgbClr val="94A3B8"/>
-                </a:solidFill>
-                <a:latin typeface="Calibri" pitchFamily="34" charset="0"/>
-                <a:ea typeface="Calibri" pitchFamily="34" charset="-122"/>
-                <a:cs typeface="Calibri" pitchFamily="34" charset="-120"/>
-              </a:rPr>
-              <a:t>/k/</a:t>
-            </a:r>
-            <a:endParaRPr lang="en-US" sz="750" dirty="0"/>
-          </a:p>
-        </p:txBody>
-      </p:sp>
-      <p:sp>
-        <p:nvSpPr>
-          <p:cNvPr id="44" name="Shape 42"/>
-          <p:cNvSpPr/>
-          <p:nvPr/>
-        </p:nvSpPr>
-        <p:spPr>
-          <a:xfrm>
-            <a:off x="7447135" y="4169664"/>
-            <a:ext cx="685800" cy="384048"/>
+          <p:cNvPr id="58" name="Shape 56"/>
+          <p:cNvSpPr/>
+          <p:nvPr/>
+        </p:nvSpPr>
+        <p:spPr>
+          <a:xfrm>
+            <a:off x="4286185" y="4169664"/>
+            <a:ext cx="415399" cy="475488"/>
           </a:xfrm>
           <a:prstGeom prst="rect">
             <a:avLst>
-              <a:gd name="adj" fmla="val 9524"/>
+              <a:gd name="adj" fmla="val 8805"/>
             </a:avLst>
           </a:prstGeom>
           <a:solidFill>
@@ -16244,14 +17666,14 @@
       </p:sp>
       <p:sp>
         <p:nvSpPr>
-          <p:cNvPr id="45" name="Text 43"/>
-          <p:cNvSpPr/>
-          <p:nvPr/>
-        </p:nvSpPr>
-        <p:spPr>
-          <a:xfrm>
-            <a:off x="7447135" y="4169664"/>
-            <a:ext cx="685800" cy="384048"/>
+          <p:cNvPr id="59" name="Text 57"/>
+          <p:cNvSpPr/>
+          <p:nvPr/>
+        </p:nvSpPr>
+        <p:spPr>
+          <a:xfrm>
+            <a:off x="4286185" y="4169664"/>
+            <a:ext cx="415399" cy="475488"/>
           </a:xfrm>
           <a:prstGeom prst="rect">
             <a:avLst/>
@@ -16275,7 +17697,535 @@
                 <a:ea typeface="Trebuchet MS" pitchFamily="34" charset="-122"/>
                 <a:cs typeface="Trebuchet MS" pitchFamily="34" charset="-120"/>
               </a:rPr>
-              <a:t>al</a:t>
+              <a:t>l</a:t>
+            </a:r>
+            <a:endParaRPr lang="en-US" sz="900" dirty="0"/>
+          </a:p>
+        </p:txBody>
+      </p:sp>
+      <p:sp>
+        <p:nvSpPr>
+          <p:cNvPr id="60" name="Shape 58"/>
+          <p:cNvSpPr/>
+          <p:nvPr/>
+        </p:nvSpPr>
+        <p:spPr>
+          <a:xfrm>
+            <a:off x="4752790" y="4169664"/>
+            <a:ext cx="415399" cy="475488"/>
+          </a:xfrm>
+          <a:prstGeom prst="rect">
+            <a:avLst>
+              <a:gd name="adj" fmla="val 8805"/>
+            </a:avLst>
+          </a:prstGeom>
+          <a:solidFill>
+            <a:srgbClr val="FFFFFF"/>
+          </a:solidFill>
+          <a:ln w="12700">
+            <a:solidFill>
+              <a:srgbClr val="DB2777"/>
+            </a:solidFill>
+            <a:prstDash val="solid"/>
+          </a:ln>
+        </p:spPr>
+      </p:sp>
+      <p:sp>
+        <p:nvSpPr>
+          <p:cNvPr id="61" name="Text 59"/>
+          <p:cNvSpPr/>
+          <p:nvPr/>
+        </p:nvSpPr>
+        <p:spPr>
+          <a:xfrm>
+            <a:off x="4752790" y="4169664"/>
+            <a:ext cx="415399" cy="475488"/>
+          </a:xfrm>
+          <a:prstGeom prst="rect">
+            <a:avLst/>
+          </a:prstGeom>
+          <a:noFill/>
+          <a:ln/>
+        </p:spPr>
+        <p:txBody>
+          <a:bodyPr wrap="square" lIns="0" tIns="0" rIns="0" bIns="0" rtlCol="0" anchor="ctr"/>
+          <a:lstStyle/>
+          <a:p>
+            <a:pPr algn="ctr" indent="0" marL="0">
+              <a:buNone/>
+            </a:pPr>
+            <a:r>
+              <a:rPr lang="en-US" sz="900" b="1" dirty="0">
+                <a:solidFill>
+                  <a:srgbClr val="9D174D"/>
+                </a:solidFill>
+                <a:latin typeface="Trebuchet MS" pitchFamily="34" charset="0"/>
+                <a:ea typeface="Trebuchet MS" pitchFamily="34" charset="-122"/>
+                <a:cs typeface="Trebuchet MS" pitchFamily="34" charset="-120"/>
+              </a:rPr>
+              <a:t>o</a:t>
+            </a:r>
+            <a:endParaRPr lang="en-US" sz="900" dirty="0"/>
+          </a:p>
+        </p:txBody>
+      </p:sp>
+      <p:sp>
+        <p:nvSpPr>
+          <p:cNvPr id="62" name="Shape 60"/>
+          <p:cNvSpPr/>
+          <p:nvPr/>
+        </p:nvSpPr>
+        <p:spPr>
+          <a:xfrm>
+            <a:off x="5219395" y="4169664"/>
+            <a:ext cx="415399" cy="475488"/>
+          </a:xfrm>
+          <a:prstGeom prst="rect">
+            <a:avLst>
+              <a:gd name="adj" fmla="val 8805"/>
+            </a:avLst>
+          </a:prstGeom>
+          <a:solidFill>
+            <a:srgbClr val="FFFFFF"/>
+          </a:solidFill>
+          <a:ln w="12700">
+            <a:solidFill>
+              <a:srgbClr val="DB2777"/>
+            </a:solidFill>
+            <a:prstDash val="solid"/>
+          </a:ln>
+        </p:spPr>
+      </p:sp>
+      <p:sp>
+        <p:nvSpPr>
+          <p:cNvPr id="63" name="Text 61"/>
+          <p:cNvSpPr/>
+          <p:nvPr/>
+        </p:nvSpPr>
+        <p:spPr>
+          <a:xfrm>
+            <a:off x="5219395" y="4169664"/>
+            <a:ext cx="415399" cy="475488"/>
+          </a:xfrm>
+          <a:prstGeom prst="rect">
+            <a:avLst/>
+          </a:prstGeom>
+          <a:noFill/>
+          <a:ln/>
+        </p:spPr>
+        <p:txBody>
+          <a:bodyPr wrap="square" lIns="0" tIns="0" rIns="0" bIns="0" rtlCol="0" anchor="ctr"/>
+          <a:lstStyle/>
+          <a:p>
+            <a:pPr algn="ctr" indent="0" marL="0">
+              <a:buNone/>
+            </a:pPr>
+            <a:r>
+              <a:rPr lang="en-US" sz="900" b="1" dirty="0">
+                <a:solidFill>
+                  <a:srgbClr val="9D174D"/>
+                </a:solidFill>
+                <a:latin typeface="Trebuchet MS" pitchFamily="34" charset="0"/>
+                <a:ea typeface="Trebuchet MS" pitchFamily="34" charset="-122"/>
+                <a:cs typeface="Trebuchet MS" pitchFamily="34" charset="-120"/>
+              </a:rPr>
+              <a:t>g</a:t>
+            </a:r>
+            <a:endParaRPr lang="en-US" sz="900" dirty="0"/>
+          </a:p>
+        </p:txBody>
+      </p:sp>
+      <p:sp>
+        <p:nvSpPr>
+          <p:cNvPr id="64" name="Shape 62"/>
+          <p:cNvSpPr/>
+          <p:nvPr/>
+        </p:nvSpPr>
+        <p:spPr>
+          <a:xfrm>
+            <a:off x="5686000" y="4169664"/>
+            <a:ext cx="415399" cy="475488"/>
+          </a:xfrm>
+          <a:prstGeom prst="rect">
+            <a:avLst>
+              <a:gd name="adj" fmla="val 8805"/>
+            </a:avLst>
+          </a:prstGeom>
+          <a:solidFill>
+            <a:srgbClr val="FFFFFF"/>
+          </a:solidFill>
+          <a:ln w="12700">
+            <a:solidFill>
+              <a:srgbClr val="DB2777"/>
+            </a:solidFill>
+            <a:prstDash val="solid"/>
+          </a:ln>
+        </p:spPr>
+      </p:sp>
+      <p:sp>
+        <p:nvSpPr>
+          <p:cNvPr id="65" name="Text 63"/>
+          <p:cNvSpPr/>
+          <p:nvPr/>
+        </p:nvSpPr>
+        <p:spPr>
+          <a:xfrm>
+            <a:off x="5686000" y="4169664"/>
+            <a:ext cx="415399" cy="475488"/>
+          </a:xfrm>
+          <a:prstGeom prst="rect">
+            <a:avLst/>
+          </a:prstGeom>
+          <a:noFill/>
+          <a:ln/>
+        </p:spPr>
+        <p:txBody>
+          <a:bodyPr wrap="square" lIns="0" tIns="0" rIns="0" bIns="0" rtlCol="0" anchor="ctr"/>
+          <a:lstStyle/>
+          <a:p>
+            <a:pPr algn="ctr" indent="0" marL="0">
+              <a:buNone/>
+            </a:pPr>
+            <a:r>
+              <a:rPr lang="en-US" sz="900" b="1" dirty="0">
+                <a:solidFill>
+                  <a:srgbClr val="9D174D"/>
+                </a:solidFill>
+                <a:latin typeface="Trebuchet MS" pitchFamily="34" charset="0"/>
+                <a:ea typeface="Trebuchet MS" pitchFamily="34" charset="-122"/>
+                <a:cs typeface="Trebuchet MS" pitchFamily="34" charset="-120"/>
+              </a:rPr>
+              <a:t>i</a:t>
+            </a:r>
+            <a:endParaRPr lang="en-US" sz="900" dirty="0"/>
+          </a:p>
+        </p:txBody>
+      </p:sp>
+      <p:sp>
+        <p:nvSpPr>
+          <p:cNvPr id="66" name="Shape 64"/>
+          <p:cNvSpPr/>
+          <p:nvPr/>
+        </p:nvSpPr>
+        <p:spPr>
+          <a:xfrm>
+            <a:off x="6152606" y="4169664"/>
+            <a:ext cx="415399" cy="475488"/>
+          </a:xfrm>
+          <a:prstGeom prst="rect">
+            <a:avLst>
+              <a:gd name="adj" fmla="val 8805"/>
+            </a:avLst>
+          </a:prstGeom>
+          <a:solidFill>
+            <a:srgbClr val="FFFFFF"/>
+          </a:solidFill>
+          <a:ln w="12700">
+            <a:solidFill>
+              <a:srgbClr val="DB2777"/>
+            </a:solidFill>
+            <a:prstDash val="solid"/>
+          </a:ln>
+        </p:spPr>
+      </p:sp>
+      <p:sp>
+        <p:nvSpPr>
+          <p:cNvPr id="67" name="Text 65"/>
+          <p:cNvSpPr/>
+          <p:nvPr/>
+        </p:nvSpPr>
+        <p:spPr>
+          <a:xfrm>
+            <a:off x="6152606" y="4169664"/>
+            <a:ext cx="415399" cy="475488"/>
+          </a:xfrm>
+          <a:prstGeom prst="rect">
+            <a:avLst/>
+          </a:prstGeom>
+          <a:noFill/>
+          <a:ln/>
+        </p:spPr>
+        <p:txBody>
+          <a:bodyPr wrap="square" lIns="0" tIns="0" rIns="0" bIns="0" rtlCol="0" anchor="ctr"/>
+          <a:lstStyle/>
+          <a:p>
+            <a:pPr algn="ctr" indent="0" marL="0">
+              <a:buNone/>
+            </a:pPr>
+            <a:r>
+              <a:rPr lang="en-US" sz="900" b="1" dirty="0">
+                <a:solidFill>
+                  <a:srgbClr val="9D174D"/>
+                </a:solidFill>
+                <a:latin typeface="Trebuchet MS" pitchFamily="34" charset="0"/>
+                <a:ea typeface="Trebuchet MS" pitchFamily="34" charset="-122"/>
+                <a:cs typeface="Trebuchet MS" pitchFamily="34" charset="-120"/>
+              </a:rPr>
+              <a:t>c</a:t>
+            </a:r>
+            <a:endParaRPr lang="en-US" sz="900" dirty="0"/>
+          </a:p>
+        </p:txBody>
+      </p:sp>
+      <p:sp>
+        <p:nvSpPr>
+          <p:cNvPr id="68" name="Shape 66"/>
+          <p:cNvSpPr/>
+          <p:nvPr/>
+        </p:nvSpPr>
+        <p:spPr>
+          <a:xfrm>
+            <a:off x="6619211" y="4169664"/>
+            <a:ext cx="415399" cy="475488"/>
+          </a:xfrm>
+          <a:prstGeom prst="rect">
+            <a:avLst>
+              <a:gd name="adj" fmla="val 8805"/>
+            </a:avLst>
+          </a:prstGeom>
+          <a:solidFill>
+            <a:srgbClr val="FFFFFF"/>
+          </a:solidFill>
+          <a:ln w="12700">
+            <a:solidFill>
+              <a:srgbClr val="DB2777"/>
+            </a:solidFill>
+            <a:prstDash val="solid"/>
+          </a:ln>
+        </p:spPr>
+      </p:sp>
+      <p:sp>
+        <p:nvSpPr>
+          <p:cNvPr id="69" name="Text 67"/>
+          <p:cNvSpPr/>
+          <p:nvPr/>
+        </p:nvSpPr>
+        <p:spPr>
+          <a:xfrm>
+            <a:off x="6619211" y="4169664"/>
+            <a:ext cx="415399" cy="475488"/>
+          </a:xfrm>
+          <a:prstGeom prst="rect">
+            <a:avLst/>
+          </a:prstGeom>
+          <a:noFill/>
+          <a:ln/>
+        </p:spPr>
+        <p:txBody>
+          <a:bodyPr wrap="square" lIns="0" tIns="0" rIns="0" bIns="0" rtlCol="0" anchor="ctr"/>
+          <a:lstStyle/>
+          <a:p>
+            <a:pPr algn="ctr" indent="0" marL="0">
+              <a:buNone/>
+            </a:pPr>
+            <a:r>
+              <a:rPr lang="en-US" sz="900" b="1" dirty="0">
+                <a:solidFill>
+                  <a:srgbClr val="9D174D"/>
+                </a:solidFill>
+                <a:latin typeface="Trebuchet MS" pitchFamily="34" charset="0"/>
+                <a:ea typeface="Trebuchet MS" pitchFamily="34" charset="-122"/>
+                <a:cs typeface="Trebuchet MS" pitchFamily="34" charset="-120"/>
+              </a:rPr>
+              <a:t>a</a:t>
+            </a:r>
+            <a:endParaRPr lang="en-US" sz="900" dirty="0"/>
+          </a:p>
+        </p:txBody>
+      </p:sp>
+      <p:sp>
+        <p:nvSpPr>
+          <p:cNvPr id="70" name="Shape 68"/>
+          <p:cNvSpPr/>
+          <p:nvPr/>
+        </p:nvSpPr>
+        <p:spPr>
+          <a:xfrm>
+            <a:off x="7085816" y="4169664"/>
+            <a:ext cx="415399" cy="475488"/>
+          </a:xfrm>
+          <a:prstGeom prst="rect">
+            <a:avLst>
+              <a:gd name="adj" fmla="val 8805"/>
+            </a:avLst>
+          </a:prstGeom>
+          <a:solidFill>
+            <a:srgbClr val="FFFFFF"/>
+          </a:solidFill>
+          <a:ln w="12700">
+            <a:solidFill>
+              <a:srgbClr val="DB2777"/>
+            </a:solidFill>
+            <a:prstDash val="solid"/>
+          </a:ln>
+        </p:spPr>
+      </p:sp>
+      <p:sp>
+        <p:nvSpPr>
+          <p:cNvPr id="71" name="Text 69"/>
+          <p:cNvSpPr/>
+          <p:nvPr/>
+        </p:nvSpPr>
+        <p:spPr>
+          <a:xfrm>
+            <a:off x="7085816" y="4169664"/>
+            <a:ext cx="415399" cy="475488"/>
+          </a:xfrm>
+          <a:prstGeom prst="rect">
+            <a:avLst/>
+          </a:prstGeom>
+          <a:noFill/>
+          <a:ln/>
+        </p:spPr>
+        <p:txBody>
+          <a:bodyPr wrap="square" lIns="0" tIns="0" rIns="0" bIns="0" rtlCol="0" anchor="ctr"/>
+          <a:lstStyle/>
+          <a:p>
+            <a:pPr algn="ctr" indent="0" marL="0">
+              <a:buNone/>
+            </a:pPr>
+            <a:r>
+              <a:rPr lang="en-US" sz="900" b="1" dirty="0">
+                <a:solidFill>
+                  <a:srgbClr val="9D174D"/>
+                </a:solidFill>
+                <a:latin typeface="Trebuchet MS" pitchFamily="34" charset="0"/>
+                <a:ea typeface="Trebuchet MS" pitchFamily="34" charset="-122"/>
+                <a:cs typeface="Trebuchet MS" pitchFamily="34" charset="-120"/>
+              </a:rPr>
+              <a:t>l</a:t>
+            </a:r>
+            <a:endParaRPr lang="en-US" sz="900" dirty="0"/>
+          </a:p>
+        </p:txBody>
+      </p:sp>
+      <p:sp>
+        <p:nvSpPr>
+          <p:cNvPr id="72" name="Shape 70"/>
+          <p:cNvSpPr/>
+          <p:nvPr/>
+        </p:nvSpPr>
+        <p:spPr>
+          <a:xfrm>
+            <a:off x="7552421" y="4169664"/>
+            <a:ext cx="415399" cy="475488"/>
+          </a:xfrm>
+          <a:prstGeom prst="rect">
+            <a:avLst>
+              <a:gd name="adj" fmla="val 8805"/>
+            </a:avLst>
+          </a:prstGeom>
+          <a:solidFill>
+            <a:srgbClr val="FFFFFF"/>
+          </a:solidFill>
+          <a:ln w="12700">
+            <a:solidFill>
+              <a:srgbClr val="DB2777"/>
+            </a:solidFill>
+            <a:prstDash val="solid"/>
+          </a:ln>
+        </p:spPr>
+      </p:sp>
+      <p:sp>
+        <p:nvSpPr>
+          <p:cNvPr id="73" name="Text 71"/>
+          <p:cNvSpPr/>
+          <p:nvPr/>
+        </p:nvSpPr>
+        <p:spPr>
+          <a:xfrm>
+            <a:off x="7552421" y="4169664"/>
+            <a:ext cx="415399" cy="475488"/>
+          </a:xfrm>
+          <a:prstGeom prst="rect">
+            <a:avLst/>
+          </a:prstGeom>
+          <a:noFill/>
+          <a:ln/>
+        </p:spPr>
+        <p:txBody>
+          <a:bodyPr wrap="square" lIns="0" tIns="0" rIns="0" bIns="0" rtlCol="0" anchor="ctr"/>
+          <a:lstStyle/>
+          <a:p>
+            <a:pPr algn="ctr" indent="0" marL="0">
+              <a:buNone/>
+            </a:pPr>
+            <a:r>
+              <a:rPr lang="en-US" sz="900" b="1" dirty="0">
+                <a:solidFill>
+                  <a:srgbClr val="9D174D"/>
+                </a:solidFill>
+                <a:latin typeface="Trebuchet MS" pitchFamily="34" charset="0"/>
+                <a:ea typeface="Trebuchet MS" pitchFamily="34" charset="-122"/>
+                <a:cs typeface="Trebuchet MS" pitchFamily="34" charset="-120"/>
+              </a:rPr>
+              <a:t>l</a:t>
+            </a:r>
+            <a:endParaRPr lang="en-US" sz="900" dirty="0"/>
+          </a:p>
+        </p:txBody>
+      </p:sp>
+      <p:sp>
+        <p:nvSpPr>
+          <p:cNvPr id="74" name="Shape 72"/>
+          <p:cNvSpPr/>
+          <p:nvPr/>
+        </p:nvSpPr>
+        <p:spPr>
+          <a:xfrm>
+            <a:off x="8019027" y="4169664"/>
+            <a:ext cx="415399" cy="475488"/>
+          </a:xfrm>
+          <a:prstGeom prst="rect">
+            <a:avLst>
+              <a:gd name="adj" fmla="val 8805"/>
+            </a:avLst>
+          </a:prstGeom>
+          <a:solidFill>
+            <a:srgbClr val="FFFFFF"/>
+          </a:solidFill>
+          <a:ln w="12700">
+            <a:solidFill>
+              <a:srgbClr val="DB2777"/>
+            </a:solidFill>
+            <a:prstDash val="solid"/>
+          </a:ln>
+        </p:spPr>
+      </p:sp>
+      <p:sp>
+        <p:nvSpPr>
+          <p:cNvPr id="75" name="Text 73"/>
+          <p:cNvSpPr/>
+          <p:nvPr/>
+        </p:nvSpPr>
+        <p:spPr>
+          <a:xfrm>
+            <a:off x="8019027" y="4169664"/>
+            <a:ext cx="415399" cy="475488"/>
+          </a:xfrm>
+          <a:prstGeom prst="rect">
+            <a:avLst/>
+          </a:prstGeom>
+          <a:noFill/>
+          <a:ln/>
+        </p:spPr>
+        <p:txBody>
+          <a:bodyPr wrap="square" lIns="0" tIns="0" rIns="0" bIns="0" rtlCol="0" anchor="ctr"/>
+          <a:lstStyle/>
+          <a:p>
+            <a:pPr algn="ctr" indent="0" marL="0">
+              <a:buNone/>
+            </a:pPr>
+            <a:r>
+              <a:rPr lang="en-US" sz="900" b="1" dirty="0">
+                <a:solidFill>
+                  <a:srgbClr val="9D174D"/>
+                </a:solidFill>
+                <a:latin typeface="Trebuchet MS" pitchFamily="34" charset="0"/>
+                <a:ea typeface="Trebuchet MS" pitchFamily="34" charset="-122"/>
+                <a:cs typeface="Trebuchet MS" pitchFamily="34" charset="-120"/>
+              </a:rPr>
+              <a:t>y</a:t>
             </a:r>
             <a:endParaRPr lang="en-US" sz="900" dirty="0"/>
           </a:p>
@@ -16849,7 +18799,7 @@
                 <a:ea typeface="Calibri" pitchFamily="34" charset="-122"/>
                 <a:cs typeface="Calibri" pitchFamily="34" charset="-120"/>
               </a:rPr>
-              <a:t>Word Labs  •  wordlabs.app  •  Root: 'logical' = relating to reason or logic</a:t>
+              <a:t>Word Labs  •  wordlabs.app  •  Root: 'logical' = making sense</a:t>
             </a:r>
             <a:endParaRPr lang="en-US" sz="800" dirty="0"/>
           </a:p>
@@ -17183,7 +19133,7 @@
                 <a:ea typeface="Trebuchet MS" pitchFamily="34" charset="-122"/>
                 <a:cs typeface="Trebuchet MS" pitchFamily="34" charset="-120"/>
               </a:rPr>
-              <a:t>2</a:t>
+              <a:t>0</a:t>
             </a:r>
             <a:pPr algn="ctr" indent="0" marL="0">
               <a:buNone/>
@@ -17197,7 +19147,7 @@
                 <a:ea typeface="Trebuchet MS" pitchFamily="34" charset="-122"/>
                 <a:cs typeface="Trebuchet MS" pitchFamily="34" charset="-120"/>
               </a:rPr>
-              <a:t>  punctuation marks</a:t>
+              <a:t>  punctuation mark</a:t>
             </a:r>
             <a:endParaRPr lang="en-US" sz="2800" dirty="0"/>
           </a:p>
@@ -17489,7 +19439,7 @@
                 <a:ea typeface="Calibri" pitchFamily="34" charset="-122"/>
                 <a:cs typeface="Calibri" pitchFamily="34" charset="-120"/>
               </a:rPr>
-              <a:t>Word Labs  •  wordlabs.app  •  Root: 'logical' = relating to reason or logic</a:t>
+              <a:t>Word Labs  •  wordlabs.app  •  Root: 'logical' = making sense</a:t>
             </a:r>
             <a:endParaRPr lang="en-US" sz="800" dirty="0"/>
           </a:p>
@@ -17601,7 +19551,7 @@
                 <a:ea typeface="Calibri" pitchFamily="34" charset="-122"/>
                 <a:cs typeface="Calibri" pitchFamily="34" charset="-120"/>
               </a:rPr>
-              <a:t>She </a:t>
+              <a:t>The </a:t>
             </a:r>
             <a:pPr algn="l" indent="0" marL="0">
               <a:buNone/>
@@ -17618,7 +19568,7 @@
                 <a:ea typeface="Calibri" pitchFamily="34" charset="-122"/>
                 <a:cs typeface="Calibri" pitchFamily="34" charset="-120"/>
               </a:rPr>
-              <a:t>logically</a:t>
+              <a:t>biological</a:t>
             </a:r>
             <a:pPr algn="l" indent="0" marL="0">
               <a:buNone/>
@@ -17632,7 +19582,7 @@
                 <a:ea typeface="Calibri" pitchFamily="34" charset="-122"/>
                 <a:cs typeface="Calibri" pitchFamily="34" charset="-120"/>
               </a:rPr>
-              <a:t> explained the </a:t>
+              <a:t> process of digestion breaks down food in your body. The cliff showed </a:t>
             </a:r>
             <a:pPr algn="l" indent="0" marL="0">
               <a:buNone/>
@@ -17663,7 +19613,7 @@
                 <a:ea typeface="Calibri" pitchFamily="34" charset="-122"/>
                 <a:cs typeface="Calibri" pitchFamily="34" charset="-120"/>
               </a:rPr>
-              <a:t> findings; her </a:t>
+              <a:t> layers formed over millions of years. The doctor ran tests to check for any </a:t>
             </a:r>
             <a:pPr algn="l" indent="0" marL="0">
               <a:buNone/>
@@ -17680,7 +19630,7 @@
                 <a:ea typeface="Calibri" pitchFamily="34" charset="-122"/>
                 <a:cs typeface="Calibri" pitchFamily="34" charset="-120"/>
               </a:rPr>
-              <a:t>psychological</a:t>
+              <a:t>neurological</a:t>
             </a:r>
             <a:pPr algn="l" indent="0" marL="0">
               <a:buNone/>
@@ -17694,7 +19644,7 @@
                 <a:ea typeface="Calibri" pitchFamily="34" charset="-122"/>
                 <a:cs typeface="Calibri" pitchFamily="34" charset="-120"/>
               </a:rPr>
-              <a:t> approach impressed everyone.</a:t>
+              <a:t> problems.</a:t>
             </a:r>
             <a:endParaRPr lang="en-US" sz="1800" dirty="0"/>
           </a:p>
@@ -17849,7 +19799,7 @@
                 <a:ea typeface="Trebuchet MS" pitchFamily="34" charset="-122"/>
                 <a:cs typeface="Trebuchet MS" pitchFamily="34" charset="-120"/>
               </a:rPr>
-              <a:t>logically</a:t>
+              <a:t>biological</a:t>
             </a:r>
             <a:endParaRPr lang="en-US" sz="1400" dirty="0"/>
           </a:p>
@@ -18105,7 +20055,7 @@
                 <a:ea typeface="Trebuchet MS" pitchFamily="34" charset="-122"/>
                 <a:cs typeface="Trebuchet MS" pitchFamily="34" charset="-120"/>
               </a:rPr>
-              <a:t>psychological</a:t>
+              <a:t>neurological</a:t>
             </a:r>
             <a:endParaRPr lang="en-US" sz="1400" dirty="0"/>
           </a:p>
@@ -18436,7 +20386,7 @@
                 <a:ea typeface="Calibri" pitchFamily="34" charset="-122"/>
                 <a:cs typeface="Calibri" pitchFamily="34" charset="-120"/>
               </a:rPr>
-              <a:t>Word Labs  •  wordlabs.app  •  Root: 'logical' = relating to reason or logic</a:t>
+              <a:t>Word Labs  •  wordlabs.app  •  Root: 'logical' = making sense</a:t>
             </a:r>
             <a:endParaRPr lang="en-US" sz="800" dirty="0"/>
           </a:p>
@@ -18575,7 +20525,7 @@
                 <a:ea typeface="Trebuchet MS" pitchFamily="34" charset="-122"/>
                 <a:cs typeface="Trebuchet MS" pitchFamily="34" charset="-120"/>
               </a:rPr>
-              <a:t>logically</a:t>
+              <a:t>biological</a:t>
             </a:r>
             <a:endParaRPr lang="en-US" sz="2800" dirty="0"/>
           </a:p>
@@ -19263,7 +21213,7 @@
                 <a:ea typeface="Calibri" pitchFamily="34" charset="-122"/>
                 <a:cs typeface="Calibri" pitchFamily="34" charset="-120"/>
               </a:rPr>
-              <a:t>Word Labs  •  wordlabs.app  •  Root: 'logical' = relating to reason or logic</a:t>
+              <a:t>Word Labs  •  wordlabs.app  •  Root: 'logical' = making sense</a:t>
             </a:r>
             <a:endParaRPr lang="en-US" sz="800" dirty="0"/>
           </a:p>
@@ -19402,7 +21352,7 @@
                 <a:ea typeface="Trebuchet MS" pitchFamily="34" charset="-122"/>
                 <a:cs typeface="Trebuchet MS" pitchFamily="34" charset="-120"/>
               </a:rPr>
-              <a:t>logically</a:t>
+              <a:t>biological</a:t>
             </a:r>
             <a:endParaRPr lang="en-US" sz="2800" dirty="0"/>
           </a:p>
@@ -19491,11 +21441,11 @@
             </a:avLst>
           </a:prstGeom>
           <a:solidFill>
-            <a:srgbClr val="CCFBF1"/>
+            <a:srgbClr val="DDD6FE"/>
           </a:solidFill>
           <a:ln w="19050">
             <a:solidFill>
-              <a:srgbClr val="0D9488"/>
+              <a:srgbClr val="7C3AED"/>
             </a:solidFill>
             <a:prstDash val="solid"/>
           </a:ln>
@@ -19535,13 +21485,13 @@
             <a:r>
               <a:rPr lang="en-US" sz="1300" b="1" dirty="0">
                 <a:solidFill>
-                  <a:srgbClr val="0F766E"/>
+                  <a:srgbClr val="4C1D95"/>
                 </a:solidFill>
                 <a:latin typeface="Trebuchet MS" pitchFamily="34" charset="0"/>
                 <a:ea typeface="Trebuchet MS" pitchFamily="34" charset="-122"/>
                 <a:cs typeface="Trebuchet MS" pitchFamily="34" charset="-120"/>
               </a:rPr>
-              <a:t>logical</a:t>
+              <a:t>bio</a:t>
             </a:r>
             <a:endParaRPr lang="en-US" sz="1300" dirty="0"/>
           </a:p>
@@ -19580,7 +21530,7 @@
                 <a:ea typeface="Calibri" pitchFamily="34" charset="-122"/>
                 <a:cs typeface="Calibri" pitchFamily="34" charset="-120"/>
               </a:rPr>
-              <a:t>relating to reason or logic</a:t>
+              <a:t>life</a:t>
             </a:r>
             <a:endParaRPr lang="en-US" sz="850" dirty="0"/>
           </a:p>
@@ -19603,11 +21553,11 @@
             </a:avLst>
           </a:prstGeom>
           <a:solidFill>
-            <a:srgbClr val="FCE7F3"/>
+            <a:srgbClr val="CCFBF1"/>
           </a:solidFill>
           <a:ln w="19050">
             <a:solidFill>
-              <a:srgbClr val="DB2777"/>
+              <a:srgbClr val="0D9488"/>
             </a:solidFill>
             <a:prstDash val="solid"/>
           </a:ln>
@@ -19647,13 +21597,13 @@
             <a:r>
               <a:rPr lang="en-US" sz="1300" b="1" dirty="0">
                 <a:solidFill>
-                  <a:srgbClr val="9D174D"/>
+                  <a:srgbClr val="0F766E"/>
                 </a:solidFill>
                 <a:latin typeface="Trebuchet MS" pitchFamily="34" charset="0"/>
                 <a:ea typeface="Trebuchet MS" pitchFamily="34" charset="-122"/>
                 <a:cs typeface="Trebuchet MS" pitchFamily="34" charset="-120"/>
               </a:rPr>
-              <a:t>ly</a:t>
+              <a:t>logical</a:t>
             </a:r>
             <a:endParaRPr lang="en-US" sz="1300" dirty="0"/>
           </a:p>
@@ -19692,7 +21642,7 @@
                 <a:ea typeface="Calibri" pitchFamily="34" charset="-122"/>
                 <a:cs typeface="Calibri" pitchFamily="34" charset="-120"/>
               </a:rPr>
-              <a:t>in a certain way</a:t>
+              <a:t>making sense</a:t>
             </a:r>
             <a:endParaRPr lang="en-US" sz="850" dirty="0"/>
           </a:p>
@@ -20248,7 +22198,7 @@
                 <a:ea typeface="Calibri" pitchFamily="34" charset="-122"/>
                 <a:cs typeface="Calibri" pitchFamily="34" charset="-120"/>
               </a:rPr>
-              <a:t>Word Labs  •  wordlabs.app  •  Root: 'logical' = relating to reason or logic</a:t>
+              <a:t>Word Labs  •  wordlabs.app  •  Root: 'logical' = making sense</a:t>
             </a:r>
             <a:endParaRPr lang="en-US" sz="800" dirty="0"/>
           </a:p>
@@ -20387,7 +22337,7 @@
                 <a:ea typeface="Trebuchet MS" pitchFamily="34" charset="-122"/>
                 <a:cs typeface="Trebuchet MS" pitchFamily="34" charset="-120"/>
               </a:rPr>
-              <a:t>logically</a:t>
+              <a:t>biological</a:t>
             </a:r>
             <a:endParaRPr lang="en-US" sz="2800" dirty="0"/>
           </a:p>
@@ -20476,11 +22426,11 @@
             </a:avLst>
           </a:prstGeom>
           <a:solidFill>
-            <a:srgbClr val="CCFBF1"/>
+            <a:srgbClr val="DDD6FE"/>
           </a:solidFill>
           <a:ln w="19050">
             <a:solidFill>
-              <a:srgbClr val="0D9488"/>
+              <a:srgbClr val="7C3AED"/>
             </a:solidFill>
             <a:prstDash val="solid"/>
           </a:ln>
@@ -20520,13 +22470,13 @@
             <a:r>
               <a:rPr lang="en-US" sz="1300" b="1" dirty="0">
                 <a:solidFill>
-                  <a:srgbClr val="0F766E"/>
+                  <a:srgbClr val="4C1D95"/>
                 </a:solidFill>
                 <a:latin typeface="Trebuchet MS" pitchFamily="34" charset="0"/>
                 <a:ea typeface="Trebuchet MS" pitchFamily="34" charset="-122"/>
                 <a:cs typeface="Trebuchet MS" pitchFamily="34" charset="-120"/>
               </a:rPr>
-              <a:t>logical</a:t>
+              <a:t>bio</a:t>
             </a:r>
             <a:endParaRPr lang="en-US" sz="1300" dirty="0"/>
           </a:p>
@@ -20565,7 +22515,7 @@
                 <a:ea typeface="Calibri" pitchFamily="34" charset="-122"/>
                 <a:cs typeface="Calibri" pitchFamily="34" charset="-120"/>
               </a:rPr>
-              <a:t>relating to reason or logic</a:t>
+              <a:t>life</a:t>
             </a:r>
             <a:endParaRPr lang="en-US" sz="850" dirty="0"/>
           </a:p>
@@ -20588,11 +22538,11 @@
             </a:avLst>
           </a:prstGeom>
           <a:solidFill>
-            <a:srgbClr val="FCE7F3"/>
+            <a:srgbClr val="CCFBF1"/>
           </a:solidFill>
           <a:ln w="19050">
             <a:solidFill>
-              <a:srgbClr val="DB2777"/>
+              <a:srgbClr val="0D9488"/>
             </a:solidFill>
             <a:prstDash val="solid"/>
           </a:ln>
@@ -20632,13 +22582,13 @@
             <a:r>
               <a:rPr lang="en-US" sz="1300" b="1" dirty="0">
                 <a:solidFill>
-                  <a:srgbClr val="9D174D"/>
+                  <a:srgbClr val="0F766E"/>
                 </a:solidFill>
                 <a:latin typeface="Trebuchet MS" pitchFamily="34" charset="0"/>
                 <a:ea typeface="Trebuchet MS" pitchFamily="34" charset="-122"/>
                 <a:cs typeface="Trebuchet MS" pitchFamily="34" charset="-120"/>
               </a:rPr>
-              <a:t>ly</a:t>
+              <a:t>logical</a:t>
             </a:r>
             <a:endParaRPr lang="en-US" sz="1300" dirty="0"/>
           </a:p>
@@ -20677,7 +22627,7 @@
                 <a:ea typeface="Calibri" pitchFamily="34" charset="-122"/>
                 <a:cs typeface="Calibri" pitchFamily="34" charset="-120"/>
               </a:rPr>
-              <a:t>in a certain way</a:t>
+              <a:t>making sense</a:t>
             </a:r>
             <a:endParaRPr lang="en-US" sz="850" dirty="0"/>
           </a:p>
@@ -20784,8 +22734,8 @@
         </p:nvSpPr>
         <p:spPr>
           <a:xfrm>
-            <a:off x="1975104" y="3364992"/>
-            <a:ext cx="1554480" cy="475488"/>
+            <a:off x="1978152" y="3364992"/>
+            <a:ext cx="1225296" cy="475488"/>
           </a:xfrm>
           <a:prstGeom prst="rect">
             <a:avLst>
@@ -20811,8 +22761,8 @@
         </p:nvSpPr>
         <p:spPr>
           <a:xfrm>
-            <a:off x="1975104" y="3364992"/>
-            <a:ext cx="1554480" cy="475488"/>
+            <a:off x="1978152" y="3364992"/>
+            <a:ext cx="1225296" cy="475488"/>
           </a:xfrm>
           <a:prstGeom prst="rect">
             <a:avLst/>
@@ -20836,7 +22786,7 @@
                 <a:ea typeface="Trebuchet MS" pitchFamily="34" charset="-122"/>
                 <a:cs typeface="Trebuchet MS" pitchFamily="34" charset="-120"/>
               </a:rPr>
-              <a:t>log</a:t>
+              <a:t>bi</a:t>
             </a:r>
             <a:endParaRPr lang="en-US" sz="1400" dirty="0"/>
           </a:p>
@@ -20850,8 +22800,8 @@
         </p:nvSpPr>
         <p:spPr>
           <a:xfrm>
-            <a:off x="3529584" y="3364992"/>
-            <a:ext cx="73152" cy="475488"/>
+            <a:off x="3203448" y="3364992"/>
+            <a:ext cx="76200" cy="475488"/>
           </a:xfrm>
           <a:prstGeom prst="rect">
             <a:avLst/>
@@ -20889,8 +22839,8 @@
         </p:nvSpPr>
         <p:spPr>
           <a:xfrm>
-            <a:off x="3602736" y="3364992"/>
-            <a:ext cx="1554480" cy="475488"/>
+            <a:off x="3279648" y="3364992"/>
+            <a:ext cx="1225296" cy="475488"/>
           </a:xfrm>
           <a:prstGeom prst="rect">
             <a:avLst>
@@ -20916,8 +22866,8 @@
         </p:nvSpPr>
         <p:spPr>
           <a:xfrm>
-            <a:off x="3602736" y="3364992"/>
-            <a:ext cx="1554480" cy="475488"/>
+            <a:off x="3279648" y="3364992"/>
+            <a:ext cx="1225296" cy="475488"/>
           </a:xfrm>
           <a:prstGeom prst="rect">
             <a:avLst/>
@@ -20941,7 +22891,7 @@
                 <a:ea typeface="Trebuchet MS" pitchFamily="34" charset="-122"/>
                 <a:cs typeface="Trebuchet MS" pitchFamily="34" charset="-120"/>
               </a:rPr>
-              <a:t>i</a:t>
+              <a:t>o</a:t>
             </a:r>
             <a:endParaRPr lang="en-US" sz="1400" dirty="0"/>
           </a:p>
@@ -20955,8 +22905,8 @@
         </p:nvSpPr>
         <p:spPr>
           <a:xfrm>
-            <a:off x="5157216" y="3364992"/>
-            <a:ext cx="73152" cy="475488"/>
+            <a:off x="4504944" y="3364992"/>
+            <a:ext cx="76200" cy="475488"/>
           </a:xfrm>
           <a:prstGeom prst="rect">
             <a:avLst/>
@@ -20994,8 +22944,8 @@
         </p:nvSpPr>
         <p:spPr>
           <a:xfrm>
-            <a:off x="5230368" y="3364992"/>
-            <a:ext cx="1554480" cy="475488"/>
+            <a:off x="4581144" y="3364992"/>
+            <a:ext cx="1225296" cy="475488"/>
           </a:xfrm>
           <a:prstGeom prst="rect">
             <a:avLst>
@@ -21021,8 +22971,8 @@
         </p:nvSpPr>
         <p:spPr>
           <a:xfrm>
-            <a:off x="5230368" y="3364992"/>
-            <a:ext cx="1554480" cy="475488"/>
+            <a:off x="4581144" y="3364992"/>
+            <a:ext cx="1225296" cy="475488"/>
           </a:xfrm>
           <a:prstGeom prst="rect">
             <a:avLst/>
@@ -21046,7 +22996,7 @@
                 <a:ea typeface="Trebuchet MS" pitchFamily="34" charset="-122"/>
                 <a:cs typeface="Trebuchet MS" pitchFamily="34" charset="-120"/>
               </a:rPr>
-              <a:t>cal</a:t>
+              <a:t>log</a:t>
             </a:r>
             <a:endParaRPr lang="en-US" sz="1400" dirty="0"/>
           </a:p>
@@ -21060,8 +23010,8 @@
         </p:nvSpPr>
         <p:spPr>
           <a:xfrm>
-            <a:off x="6784848" y="3364992"/>
-            <a:ext cx="73152" cy="475488"/>
+            <a:off x="5806440" y="3364992"/>
+            <a:ext cx="76200" cy="475488"/>
           </a:xfrm>
           <a:prstGeom prst="rect">
             <a:avLst/>
@@ -21099,8 +23049,8 @@
         </p:nvSpPr>
         <p:spPr>
           <a:xfrm>
-            <a:off x="6858000" y="3364992"/>
-            <a:ext cx="1554480" cy="475488"/>
+            <a:off x="5882640" y="3364992"/>
+            <a:ext cx="1225296" cy="475488"/>
           </a:xfrm>
           <a:prstGeom prst="rect">
             <a:avLst>
@@ -21126,8 +23076,8 @@
         </p:nvSpPr>
         <p:spPr>
           <a:xfrm>
-            <a:off x="6858000" y="3364992"/>
-            <a:ext cx="1554480" cy="475488"/>
+            <a:off x="5882640" y="3364992"/>
+            <a:ext cx="1225296" cy="475488"/>
           </a:xfrm>
           <a:prstGeom prst="rect">
             <a:avLst/>
@@ -21151,7 +23101,7 @@
                 <a:ea typeface="Trebuchet MS" pitchFamily="34" charset="-122"/>
                 <a:cs typeface="Trebuchet MS" pitchFamily="34" charset="-120"/>
               </a:rPr>
-              <a:t>ly</a:t>
+              <a:t>i</a:t>
             </a:r>
             <a:endParaRPr lang="en-US" sz="1400" dirty="0"/>
           </a:p>
@@ -21159,7 +23109,112 @@
       </p:sp>
       <p:sp>
         <p:nvSpPr>
-          <p:cNvPr id="36" name="Shape 34"/>
+          <p:cNvPr id="36" name="Text 34"/>
+          <p:cNvSpPr/>
+          <p:nvPr/>
+        </p:nvSpPr>
+        <p:spPr>
+          <a:xfrm>
+            <a:off x="7107936" y="3364992"/>
+            <a:ext cx="76200" cy="475488"/>
+          </a:xfrm>
+          <a:prstGeom prst="rect">
+            <a:avLst/>
+          </a:prstGeom>
+          <a:noFill/>
+          <a:ln/>
+        </p:spPr>
+        <p:txBody>
+          <a:bodyPr wrap="square" lIns="0" tIns="0" rIns="0" bIns="0" rtlCol="0" anchor="ctr"/>
+          <a:lstStyle/>
+          <a:p>
+            <a:pPr algn="ctr" indent="0" marL="0">
+              <a:buNone/>
+            </a:pPr>
+            <a:r>
+              <a:rPr lang="en-US" sz="1600" b="1" dirty="0">
+                <a:solidFill>
+                  <a:srgbClr val="0D9488"/>
+                </a:solidFill>
+                <a:latin typeface="Trebuchet MS" pitchFamily="34" charset="0"/>
+                <a:ea typeface="Trebuchet MS" pitchFamily="34" charset="-122"/>
+                <a:cs typeface="Trebuchet MS" pitchFamily="34" charset="-120"/>
+              </a:rPr>
+              <a:t>·</a:t>
+            </a:r>
+            <a:endParaRPr lang="en-US" sz="1600" dirty="0"/>
+          </a:p>
+        </p:txBody>
+      </p:sp>
+      <p:sp>
+        <p:nvSpPr>
+          <p:cNvPr id="37" name="Shape 35"/>
+          <p:cNvSpPr/>
+          <p:nvPr/>
+        </p:nvSpPr>
+        <p:spPr>
+          <a:xfrm>
+            <a:off x="7184136" y="3364992"/>
+            <a:ext cx="1225296" cy="475488"/>
+          </a:xfrm>
+          <a:prstGeom prst="rect">
+            <a:avLst>
+              <a:gd name="adj" fmla="val 9615"/>
+            </a:avLst>
+          </a:prstGeom>
+          <a:solidFill>
+            <a:srgbClr val="FFFFFF"/>
+          </a:solidFill>
+          <a:ln w="12700">
+            <a:solidFill>
+              <a:srgbClr val="0D9488"/>
+            </a:solidFill>
+            <a:prstDash val="solid"/>
+          </a:ln>
+        </p:spPr>
+      </p:sp>
+      <p:sp>
+        <p:nvSpPr>
+          <p:cNvPr id="38" name="Text 36"/>
+          <p:cNvSpPr/>
+          <p:nvPr/>
+        </p:nvSpPr>
+        <p:spPr>
+          <a:xfrm>
+            <a:off x="7184136" y="3364992"/>
+            <a:ext cx="1225296" cy="475488"/>
+          </a:xfrm>
+          <a:prstGeom prst="rect">
+            <a:avLst/>
+          </a:prstGeom>
+          <a:noFill/>
+          <a:ln/>
+        </p:spPr>
+        <p:txBody>
+          <a:bodyPr wrap="square" lIns="0" tIns="0" rIns="0" bIns="0" rtlCol="0" anchor="ctr"/>
+          <a:lstStyle/>
+          <a:p>
+            <a:pPr algn="ctr" indent="0" marL="0">
+              <a:buNone/>
+            </a:pPr>
+            <a:r>
+              <a:rPr lang="en-US" sz="1400" b="1" dirty="0">
+                <a:solidFill>
+                  <a:srgbClr val="0D9488"/>
+                </a:solidFill>
+                <a:latin typeface="Trebuchet MS" pitchFamily="34" charset="0"/>
+                <a:ea typeface="Trebuchet MS" pitchFamily="34" charset="-122"/>
+                <a:cs typeface="Trebuchet MS" pitchFamily="34" charset="-120"/>
+              </a:rPr>
+              <a:t>cal</a:t>
+            </a:r>
+            <a:endParaRPr lang="en-US" sz="1400" dirty="0"/>
+          </a:p>
+        </p:txBody>
+      </p:sp>
+      <p:sp>
+        <p:nvSpPr>
+          <p:cNvPr id="39" name="Shape 37"/>
           <p:cNvSpPr/>
           <p:nvPr/>
         </p:nvSpPr>
@@ -21186,7 +23241,7 @@
       </p:sp>
       <p:sp>
         <p:nvSpPr>
-          <p:cNvPr id="37" name="Text 35"/>
+          <p:cNvPr id="40" name="Text 38"/>
           <p:cNvSpPr/>
           <p:nvPr/>
         </p:nvSpPr>
@@ -21225,7 +23280,7 @@
       </p:sp>
       <p:sp>
         <p:nvSpPr>
-          <p:cNvPr id="38" name="Shape 36"/>
+          <p:cNvPr id="41" name="Shape 39"/>
           <p:cNvSpPr/>
           <p:nvPr/>
         </p:nvSpPr>
@@ -21252,7 +23307,7 @@
       </p:sp>
       <p:sp>
         <p:nvSpPr>
-          <p:cNvPr id="39" name="Text 37"/>
+          <p:cNvPr id="42" name="Text 40"/>
           <p:cNvSpPr/>
           <p:nvPr/>
         </p:nvSpPr>
@@ -21575,7 +23630,7 @@
                 <a:ea typeface="Calibri" pitchFamily="34" charset="-122"/>
                 <a:cs typeface="Calibri" pitchFamily="34" charset="-120"/>
               </a:rPr>
-              <a:t>Word Labs  •  wordlabs.app  •  Root: 'logical' = relating to reason or logic</a:t>
+              <a:t>Word Labs  •  wordlabs.app  •  Root: 'logical' = making sense</a:t>
             </a:r>
             <a:endParaRPr lang="en-US" sz="800" dirty="0"/>
           </a:p>
@@ -21714,7 +23769,7 @@
                 <a:ea typeface="Trebuchet MS" pitchFamily="34" charset="-122"/>
                 <a:cs typeface="Trebuchet MS" pitchFamily="34" charset="-120"/>
               </a:rPr>
-              <a:t>logically</a:t>
+              <a:t>biological</a:t>
             </a:r>
             <a:endParaRPr lang="en-US" sz="2800" dirty="0"/>
           </a:p>
@@ -21803,11 +23858,11 @@
             </a:avLst>
           </a:prstGeom>
           <a:solidFill>
-            <a:srgbClr val="CCFBF1"/>
+            <a:srgbClr val="DDD6FE"/>
           </a:solidFill>
           <a:ln w="19050">
             <a:solidFill>
-              <a:srgbClr val="0D9488"/>
+              <a:srgbClr val="7C3AED"/>
             </a:solidFill>
             <a:prstDash val="solid"/>
           </a:ln>
@@ -21847,13 +23902,13 @@
             <a:r>
               <a:rPr lang="en-US" sz="1300" b="1" dirty="0">
                 <a:solidFill>
-                  <a:srgbClr val="0F766E"/>
+                  <a:srgbClr val="4C1D95"/>
                 </a:solidFill>
                 <a:latin typeface="Trebuchet MS" pitchFamily="34" charset="0"/>
                 <a:ea typeface="Trebuchet MS" pitchFamily="34" charset="-122"/>
                 <a:cs typeface="Trebuchet MS" pitchFamily="34" charset="-120"/>
               </a:rPr>
-              <a:t>logical</a:t>
+              <a:t>bio</a:t>
             </a:r>
             <a:endParaRPr lang="en-US" sz="1300" dirty="0"/>
           </a:p>
@@ -21892,7 +23947,7 @@
                 <a:ea typeface="Calibri" pitchFamily="34" charset="-122"/>
                 <a:cs typeface="Calibri" pitchFamily="34" charset="-120"/>
               </a:rPr>
-              <a:t>relating to reason or logic</a:t>
+              <a:t>life</a:t>
             </a:r>
             <a:endParaRPr lang="en-US" sz="850" dirty="0"/>
           </a:p>
@@ -21915,11 +23970,11 @@
             </a:avLst>
           </a:prstGeom>
           <a:solidFill>
-            <a:srgbClr val="FCE7F3"/>
+            <a:srgbClr val="CCFBF1"/>
           </a:solidFill>
           <a:ln w="19050">
             <a:solidFill>
-              <a:srgbClr val="DB2777"/>
+              <a:srgbClr val="0D9488"/>
             </a:solidFill>
             <a:prstDash val="solid"/>
           </a:ln>
@@ -21959,13 +24014,13 @@
             <a:r>
               <a:rPr lang="en-US" sz="1300" b="1" dirty="0">
                 <a:solidFill>
-                  <a:srgbClr val="9D174D"/>
+                  <a:srgbClr val="0F766E"/>
                 </a:solidFill>
                 <a:latin typeface="Trebuchet MS" pitchFamily="34" charset="0"/>
                 <a:ea typeface="Trebuchet MS" pitchFamily="34" charset="-122"/>
                 <a:cs typeface="Trebuchet MS" pitchFamily="34" charset="-120"/>
               </a:rPr>
-              <a:t>ly</a:t>
+              <a:t>logical</a:t>
             </a:r>
             <a:endParaRPr lang="en-US" sz="1300" dirty="0"/>
           </a:p>
@@ -22004,7 +24059,7 @@
                 <a:ea typeface="Calibri" pitchFamily="34" charset="-122"/>
                 <a:cs typeface="Calibri" pitchFamily="34" charset="-120"/>
               </a:rPr>
-              <a:t>in a certain way</a:t>
+              <a:t>making sense</a:t>
             </a:r>
             <a:endParaRPr lang="en-US" sz="850" dirty="0"/>
           </a:p>
@@ -22111,8 +24166,8 @@
         </p:nvSpPr>
         <p:spPr>
           <a:xfrm>
-            <a:off x="1975104" y="3364992"/>
-            <a:ext cx="1554480" cy="475488"/>
+            <a:off x="1978152" y="3364992"/>
+            <a:ext cx="1225296" cy="475488"/>
           </a:xfrm>
           <a:prstGeom prst="rect">
             <a:avLst>
@@ -22138,8 +24193,8 @@
         </p:nvSpPr>
         <p:spPr>
           <a:xfrm>
-            <a:off x="1975104" y="3364992"/>
-            <a:ext cx="1554480" cy="475488"/>
+            <a:off x="1978152" y="3364992"/>
+            <a:ext cx="1225296" cy="475488"/>
           </a:xfrm>
           <a:prstGeom prst="rect">
             <a:avLst/>
@@ -22163,7 +24218,7 @@
                 <a:ea typeface="Trebuchet MS" pitchFamily="34" charset="-122"/>
                 <a:cs typeface="Trebuchet MS" pitchFamily="34" charset="-120"/>
               </a:rPr>
-              <a:t>log</a:t>
+              <a:t>bi</a:t>
             </a:r>
             <a:endParaRPr lang="en-US" sz="1400" dirty="0"/>
           </a:p>
@@ -22177,8 +24232,8 @@
         </p:nvSpPr>
         <p:spPr>
           <a:xfrm>
-            <a:off x="3529584" y="3364992"/>
-            <a:ext cx="73152" cy="475488"/>
+            <a:off x="3203448" y="3364992"/>
+            <a:ext cx="76200" cy="475488"/>
           </a:xfrm>
           <a:prstGeom prst="rect">
             <a:avLst/>
@@ -22216,8 +24271,8 @@
         </p:nvSpPr>
         <p:spPr>
           <a:xfrm>
-            <a:off x="3602736" y="3364992"/>
-            <a:ext cx="1554480" cy="475488"/>
+            <a:off x="3279648" y="3364992"/>
+            <a:ext cx="1225296" cy="475488"/>
           </a:xfrm>
           <a:prstGeom prst="rect">
             <a:avLst>
@@ -22243,8 +24298,8 @@
         </p:nvSpPr>
         <p:spPr>
           <a:xfrm>
-            <a:off x="3602736" y="3364992"/>
-            <a:ext cx="1554480" cy="475488"/>
+            <a:off x="3279648" y="3364992"/>
+            <a:ext cx="1225296" cy="475488"/>
           </a:xfrm>
           <a:prstGeom prst="rect">
             <a:avLst/>
@@ -22268,7 +24323,7 @@
                 <a:ea typeface="Trebuchet MS" pitchFamily="34" charset="-122"/>
                 <a:cs typeface="Trebuchet MS" pitchFamily="34" charset="-120"/>
               </a:rPr>
-              <a:t>i</a:t>
+              <a:t>o</a:t>
             </a:r>
             <a:endParaRPr lang="en-US" sz="1400" dirty="0"/>
           </a:p>
@@ -22282,8 +24337,8 @@
         </p:nvSpPr>
         <p:spPr>
           <a:xfrm>
-            <a:off x="5157216" y="3364992"/>
-            <a:ext cx="73152" cy="475488"/>
+            <a:off x="4504944" y="3364992"/>
+            <a:ext cx="76200" cy="475488"/>
           </a:xfrm>
           <a:prstGeom prst="rect">
             <a:avLst/>
@@ -22321,8 +24376,8 @@
         </p:nvSpPr>
         <p:spPr>
           <a:xfrm>
-            <a:off x="5230368" y="3364992"/>
-            <a:ext cx="1554480" cy="475488"/>
+            <a:off x="4581144" y="3364992"/>
+            <a:ext cx="1225296" cy="475488"/>
           </a:xfrm>
           <a:prstGeom prst="rect">
             <a:avLst>
@@ -22348,8 +24403,8 @@
         </p:nvSpPr>
         <p:spPr>
           <a:xfrm>
-            <a:off x="5230368" y="3364992"/>
-            <a:ext cx="1554480" cy="475488"/>
+            <a:off x="4581144" y="3364992"/>
+            <a:ext cx="1225296" cy="475488"/>
           </a:xfrm>
           <a:prstGeom prst="rect">
             <a:avLst/>
@@ -22373,7 +24428,7 @@
                 <a:ea typeface="Trebuchet MS" pitchFamily="34" charset="-122"/>
                 <a:cs typeface="Trebuchet MS" pitchFamily="34" charset="-120"/>
               </a:rPr>
-              <a:t>cal</a:t>
+              <a:t>log</a:t>
             </a:r>
             <a:endParaRPr lang="en-US" sz="1400" dirty="0"/>
           </a:p>
@@ -22387,8 +24442,8 @@
         </p:nvSpPr>
         <p:spPr>
           <a:xfrm>
-            <a:off x="6784848" y="3364992"/>
-            <a:ext cx="73152" cy="475488"/>
+            <a:off x="5806440" y="3364992"/>
+            <a:ext cx="76200" cy="475488"/>
           </a:xfrm>
           <a:prstGeom prst="rect">
             <a:avLst/>
@@ -22426,8 +24481,8 @@
         </p:nvSpPr>
         <p:spPr>
           <a:xfrm>
-            <a:off x="6858000" y="3364992"/>
-            <a:ext cx="1554480" cy="475488"/>
+            <a:off x="5882640" y="3364992"/>
+            <a:ext cx="1225296" cy="475488"/>
           </a:xfrm>
           <a:prstGeom prst="rect">
             <a:avLst>
@@ -22453,8 +24508,8 @@
         </p:nvSpPr>
         <p:spPr>
           <a:xfrm>
-            <a:off x="6858000" y="3364992"/>
-            <a:ext cx="1554480" cy="475488"/>
+            <a:off x="5882640" y="3364992"/>
+            <a:ext cx="1225296" cy="475488"/>
           </a:xfrm>
           <a:prstGeom prst="rect">
             <a:avLst/>
@@ -22478,7 +24533,7 @@
                 <a:ea typeface="Trebuchet MS" pitchFamily="34" charset="-122"/>
                 <a:cs typeface="Trebuchet MS" pitchFamily="34" charset="-120"/>
               </a:rPr>
-              <a:t>ly</a:t>
+              <a:t>i</a:t>
             </a:r>
             <a:endParaRPr lang="en-US" sz="1400" dirty="0"/>
           </a:p>
@@ -22486,7 +24541,112 @@
       </p:sp>
       <p:sp>
         <p:nvSpPr>
-          <p:cNvPr id="36" name="Shape 34"/>
+          <p:cNvPr id="36" name="Text 34"/>
+          <p:cNvSpPr/>
+          <p:nvPr/>
+        </p:nvSpPr>
+        <p:spPr>
+          <a:xfrm>
+            <a:off x="7107936" y="3364992"/>
+            <a:ext cx="76200" cy="475488"/>
+          </a:xfrm>
+          <a:prstGeom prst="rect">
+            <a:avLst/>
+          </a:prstGeom>
+          <a:noFill/>
+          <a:ln/>
+        </p:spPr>
+        <p:txBody>
+          <a:bodyPr wrap="square" lIns="0" tIns="0" rIns="0" bIns="0" rtlCol="0" anchor="ctr"/>
+          <a:lstStyle/>
+          <a:p>
+            <a:pPr algn="ctr" indent="0" marL="0">
+              <a:buNone/>
+            </a:pPr>
+            <a:r>
+              <a:rPr lang="en-US" sz="1600" b="1" dirty="0">
+                <a:solidFill>
+                  <a:srgbClr val="0D9488"/>
+                </a:solidFill>
+                <a:latin typeface="Trebuchet MS" pitchFamily="34" charset="0"/>
+                <a:ea typeface="Trebuchet MS" pitchFamily="34" charset="-122"/>
+                <a:cs typeface="Trebuchet MS" pitchFamily="34" charset="-120"/>
+              </a:rPr>
+              <a:t>·</a:t>
+            </a:r>
+            <a:endParaRPr lang="en-US" sz="1600" dirty="0"/>
+          </a:p>
+        </p:txBody>
+      </p:sp>
+      <p:sp>
+        <p:nvSpPr>
+          <p:cNvPr id="37" name="Shape 35"/>
+          <p:cNvSpPr/>
+          <p:nvPr/>
+        </p:nvSpPr>
+        <p:spPr>
+          <a:xfrm>
+            <a:off x="7184136" y="3364992"/>
+            <a:ext cx="1225296" cy="475488"/>
+          </a:xfrm>
+          <a:prstGeom prst="rect">
+            <a:avLst>
+              <a:gd name="adj" fmla="val 9615"/>
+            </a:avLst>
+          </a:prstGeom>
+          <a:solidFill>
+            <a:srgbClr val="FFFFFF"/>
+          </a:solidFill>
+          <a:ln w="12700">
+            <a:solidFill>
+              <a:srgbClr val="0D9488"/>
+            </a:solidFill>
+            <a:prstDash val="solid"/>
+          </a:ln>
+        </p:spPr>
+      </p:sp>
+      <p:sp>
+        <p:nvSpPr>
+          <p:cNvPr id="38" name="Text 36"/>
+          <p:cNvSpPr/>
+          <p:nvPr/>
+        </p:nvSpPr>
+        <p:spPr>
+          <a:xfrm>
+            <a:off x="7184136" y="3364992"/>
+            <a:ext cx="1225296" cy="475488"/>
+          </a:xfrm>
+          <a:prstGeom prst="rect">
+            <a:avLst/>
+          </a:prstGeom>
+          <a:noFill/>
+          <a:ln/>
+        </p:spPr>
+        <p:txBody>
+          <a:bodyPr wrap="square" lIns="0" tIns="0" rIns="0" bIns="0" rtlCol="0" anchor="ctr"/>
+          <a:lstStyle/>
+          <a:p>
+            <a:pPr algn="ctr" indent="0" marL="0">
+              <a:buNone/>
+            </a:pPr>
+            <a:r>
+              <a:rPr lang="en-US" sz="1400" b="1" dirty="0">
+                <a:solidFill>
+                  <a:srgbClr val="0D9488"/>
+                </a:solidFill>
+                <a:latin typeface="Trebuchet MS" pitchFamily="34" charset="0"/>
+                <a:ea typeface="Trebuchet MS" pitchFamily="34" charset="-122"/>
+                <a:cs typeface="Trebuchet MS" pitchFamily="34" charset="-120"/>
+              </a:rPr>
+              <a:t>cal</a:t>
+            </a:r>
+            <a:endParaRPr lang="en-US" sz="1400" dirty="0"/>
+          </a:p>
+        </p:txBody>
+      </p:sp>
+      <p:sp>
+        <p:nvSpPr>
+          <p:cNvPr id="39" name="Shape 37"/>
           <p:cNvSpPr/>
           <p:nvPr/>
         </p:nvSpPr>
@@ -22513,7 +24673,7 @@
       </p:sp>
       <p:sp>
         <p:nvSpPr>
-          <p:cNvPr id="37" name="Text 35"/>
+          <p:cNvPr id="40" name="Text 38"/>
           <p:cNvSpPr/>
           <p:nvPr/>
         </p:nvSpPr>
@@ -22552,18 +24712,18 @@
       </p:sp>
       <p:sp>
         <p:nvSpPr>
-          <p:cNvPr id="38" name="Shape 36"/>
+          <p:cNvPr id="41" name="Shape 39"/>
           <p:cNvSpPr/>
           <p:nvPr/>
         </p:nvSpPr>
         <p:spPr>
           <a:xfrm>
             <a:off x="1874520" y="4096512"/>
-            <a:ext cx="6903720" cy="804672"/>
+            <a:ext cx="6903720" cy="658368"/>
           </a:xfrm>
           <a:prstGeom prst="rect">
             <a:avLst>
-              <a:gd name="adj" fmla="val 6818"/>
+              <a:gd name="adj" fmla="val 8333"/>
             </a:avLst>
           </a:prstGeom>
           <a:solidFill>
@@ -22579,18 +24739,18 @@
       </p:sp>
       <p:sp>
         <p:nvSpPr>
-          <p:cNvPr id="39" name="Shape 37"/>
-          <p:cNvSpPr/>
-          <p:nvPr/>
-        </p:nvSpPr>
-        <p:spPr>
-          <a:xfrm>
-            <a:off x="2023872" y="4169664"/>
-            <a:ext cx="685800" cy="384048"/>
+          <p:cNvPr id="42" name="Shape 40"/>
+          <p:cNvSpPr/>
+          <p:nvPr/>
+        </p:nvSpPr>
+        <p:spPr>
+          <a:xfrm>
+            <a:off x="1951828" y="4169664"/>
+            <a:ext cx="603504" cy="475488"/>
           </a:xfrm>
           <a:prstGeom prst="rect">
             <a:avLst>
-              <a:gd name="adj" fmla="val 9524"/>
+              <a:gd name="adj" fmla="val 7692"/>
             </a:avLst>
           </a:prstGeom>
           <a:solidFill>
@@ -22606,14 +24766,14 @@
       </p:sp>
       <p:sp>
         <p:nvSpPr>
-          <p:cNvPr id="40" name="Text 38"/>
-          <p:cNvSpPr/>
-          <p:nvPr/>
-        </p:nvSpPr>
-        <p:spPr>
-          <a:xfrm>
-            <a:off x="2023872" y="4169664"/>
-            <a:ext cx="685800" cy="384048"/>
+          <p:cNvPr id="43" name="Text 41"/>
+          <p:cNvSpPr/>
+          <p:nvPr/>
+        </p:nvSpPr>
+        <p:spPr>
+          <a:xfrm>
+            <a:off x="1951828" y="4169664"/>
+            <a:ext cx="603504" cy="475488"/>
           </a:xfrm>
           <a:prstGeom prst="rect">
             <a:avLst/>
@@ -22637,7 +24797,7 @@
                 <a:ea typeface="Trebuchet MS" pitchFamily="34" charset="-122"/>
                 <a:cs typeface="Trebuchet MS" pitchFamily="34" charset="-120"/>
               </a:rPr>
-              <a:t>l</a:t>
+              <a:t>b</a:t>
             </a:r>
             <a:endParaRPr lang="en-US" sz="900" dirty="0"/>
           </a:p>
@@ -22645,18 +24805,18 @@
       </p:sp>
       <p:sp>
         <p:nvSpPr>
-          <p:cNvPr id="41" name="Shape 39"/>
-          <p:cNvSpPr/>
-          <p:nvPr/>
-        </p:nvSpPr>
-        <p:spPr>
-          <a:xfrm>
-            <a:off x="2831592" y="4169664"/>
-            <a:ext cx="685800" cy="384048"/>
+          <p:cNvPr id="44" name="Shape 42"/>
+          <p:cNvSpPr/>
+          <p:nvPr/>
+        </p:nvSpPr>
+        <p:spPr>
+          <a:xfrm>
+            <a:off x="2605209" y="4169664"/>
+            <a:ext cx="603504" cy="475488"/>
           </a:xfrm>
           <a:prstGeom prst="rect">
             <a:avLst>
-              <a:gd name="adj" fmla="val 9524"/>
+              <a:gd name="adj" fmla="val 7692"/>
             </a:avLst>
           </a:prstGeom>
           <a:solidFill>
@@ -22672,14 +24832,14 @@
       </p:sp>
       <p:sp>
         <p:nvSpPr>
-          <p:cNvPr id="42" name="Text 40"/>
-          <p:cNvSpPr/>
-          <p:nvPr/>
-        </p:nvSpPr>
-        <p:spPr>
-          <a:xfrm>
-            <a:off x="2831592" y="4169664"/>
-            <a:ext cx="685800" cy="384048"/>
+          <p:cNvPr id="45" name="Text 43"/>
+          <p:cNvSpPr/>
+          <p:nvPr/>
+        </p:nvSpPr>
+        <p:spPr>
+          <a:xfrm>
+            <a:off x="2605209" y="4169664"/>
+            <a:ext cx="603504" cy="475488"/>
           </a:xfrm>
           <a:prstGeom prst="rect">
             <a:avLst/>
@@ -22703,7 +24863,7 @@
                 <a:ea typeface="Trebuchet MS" pitchFamily="34" charset="-122"/>
                 <a:cs typeface="Trebuchet MS" pitchFamily="34" charset="-120"/>
               </a:rPr>
-              <a:t>o</a:t>
+              <a:t>i</a:t>
             </a:r>
             <a:endParaRPr lang="en-US" sz="900" dirty="0"/>
           </a:p>
@@ -22711,18 +24871,18 @@
       </p:sp>
       <p:sp>
         <p:nvSpPr>
-          <p:cNvPr id="43" name="Shape 41"/>
-          <p:cNvSpPr/>
-          <p:nvPr/>
-        </p:nvSpPr>
-        <p:spPr>
-          <a:xfrm>
-            <a:off x="3639312" y="4169664"/>
-            <a:ext cx="685800" cy="384048"/>
+          <p:cNvPr id="46" name="Shape 44"/>
+          <p:cNvSpPr/>
+          <p:nvPr/>
+        </p:nvSpPr>
+        <p:spPr>
+          <a:xfrm>
+            <a:off x="3258589" y="4169664"/>
+            <a:ext cx="603504" cy="475488"/>
           </a:xfrm>
           <a:prstGeom prst="rect">
             <a:avLst>
-              <a:gd name="adj" fmla="val 9524"/>
+              <a:gd name="adj" fmla="val 7692"/>
             </a:avLst>
           </a:prstGeom>
           <a:solidFill>
@@ -22738,14 +24898,14 @@
       </p:sp>
       <p:sp>
         <p:nvSpPr>
-          <p:cNvPr id="44" name="Text 42"/>
-          <p:cNvSpPr/>
-          <p:nvPr/>
-        </p:nvSpPr>
-        <p:spPr>
-          <a:xfrm>
-            <a:off x="3639312" y="4169664"/>
-            <a:ext cx="685800" cy="384048"/>
+          <p:cNvPr id="47" name="Text 45"/>
+          <p:cNvSpPr/>
+          <p:nvPr/>
+        </p:nvSpPr>
+        <p:spPr>
+          <a:xfrm>
+            <a:off x="3258589" y="4169664"/>
+            <a:ext cx="603504" cy="475488"/>
           </a:xfrm>
           <a:prstGeom prst="rect">
             <a:avLst/>
@@ -22769,7 +24929,7 @@
                 <a:ea typeface="Trebuchet MS" pitchFamily="34" charset="-122"/>
                 <a:cs typeface="Trebuchet MS" pitchFamily="34" charset="-120"/>
               </a:rPr>
-              <a:t>g</a:t>
+              <a:t>o</a:t>
             </a:r>
             <a:endParaRPr lang="en-US" sz="900" dirty="0"/>
           </a:p>
@@ -22777,18 +24937,18 @@
       </p:sp>
       <p:sp>
         <p:nvSpPr>
-          <p:cNvPr id="45" name="Shape 43"/>
-          <p:cNvSpPr/>
-          <p:nvPr/>
-        </p:nvSpPr>
-        <p:spPr>
-          <a:xfrm>
-            <a:off x="4447032" y="4169664"/>
-            <a:ext cx="685800" cy="384048"/>
+          <p:cNvPr id="48" name="Shape 46"/>
+          <p:cNvSpPr/>
+          <p:nvPr/>
+        </p:nvSpPr>
+        <p:spPr>
+          <a:xfrm>
+            <a:off x="3911969" y="4169664"/>
+            <a:ext cx="603504" cy="475488"/>
           </a:xfrm>
           <a:prstGeom prst="rect">
             <a:avLst>
-              <a:gd name="adj" fmla="val 9524"/>
+              <a:gd name="adj" fmla="val 7692"/>
             </a:avLst>
           </a:prstGeom>
           <a:solidFill>
@@ -22804,14 +24964,14 @@
       </p:sp>
       <p:sp>
         <p:nvSpPr>
-          <p:cNvPr id="46" name="Text 44"/>
-          <p:cNvSpPr/>
-          <p:nvPr/>
-        </p:nvSpPr>
-        <p:spPr>
-          <a:xfrm>
-            <a:off x="4447032" y="4169664"/>
-            <a:ext cx="685800" cy="384048"/>
+          <p:cNvPr id="49" name="Text 47"/>
+          <p:cNvSpPr/>
+          <p:nvPr/>
+        </p:nvSpPr>
+        <p:spPr>
+          <a:xfrm>
+            <a:off x="3911969" y="4169664"/>
+            <a:ext cx="603504" cy="475488"/>
           </a:xfrm>
           <a:prstGeom prst="rect">
             <a:avLst/>
@@ -22835,7 +24995,7 @@
                 <a:ea typeface="Trebuchet MS" pitchFamily="34" charset="-122"/>
                 <a:cs typeface="Trebuchet MS" pitchFamily="34" charset="-120"/>
               </a:rPr>
-              <a:t>i</a:t>
+              <a:t>l</a:t>
             </a:r>
             <a:endParaRPr lang="en-US" sz="900" dirty="0"/>
           </a:p>
@@ -22843,18 +25003,18 @@
       </p:sp>
       <p:sp>
         <p:nvSpPr>
-          <p:cNvPr id="47" name="Shape 45"/>
-          <p:cNvSpPr/>
-          <p:nvPr/>
-        </p:nvSpPr>
-        <p:spPr>
-          <a:xfrm>
-            <a:off x="5254752" y="4169664"/>
-            <a:ext cx="685800" cy="384048"/>
+          <p:cNvPr id="50" name="Shape 48"/>
+          <p:cNvSpPr/>
+          <p:nvPr/>
+        </p:nvSpPr>
+        <p:spPr>
+          <a:xfrm>
+            <a:off x="4565350" y="4169664"/>
+            <a:ext cx="603504" cy="475488"/>
           </a:xfrm>
           <a:prstGeom prst="rect">
             <a:avLst>
-              <a:gd name="adj" fmla="val 9524"/>
+              <a:gd name="adj" fmla="val 7692"/>
             </a:avLst>
           </a:prstGeom>
           <a:solidFill>
@@ -22870,14 +25030,14 @@
       </p:sp>
       <p:sp>
         <p:nvSpPr>
-          <p:cNvPr id="48" name="Text 46"/>
-          <p:cNvSpPr/>
-          <p:nvPr/>
-        </p:nvSpPr>
-        <p:spPr>
-          <a:xfrm>
-            <a:off x="5254752" y="4169664"/>
-            <a:ext cx="685800" cy="384048"/>
+          <p:cNvPr id="51" name="Text 49"/>
+          <p:cNvSpPr/>
+          <p:nvPr/>
+        </p:nvSpPr>
+        <p:spPr>
+          <a:xfrm>
+            <a:off x="4565350" y="4169664"/>
+            <a:ext cx="603504" cy="475488"/>
           </a:xfrm>
           <a:prstGeom prst="rect">
             <a:avLst/>
@@ -22901,7 +25061,7 @@
                 <a:ea typeface="Trebuchet MS" pitchFamily="34" charset="-122"/>
                 <a:cs typeface="Trebuchet MS" pitchFamily="34" charset="-120"/>
               </a:rPr>
-              <a:t>c</a:t>
+              <a:t>o</a:t>
             </a:r>
             <a:endParaRPr lang="en-US" sz="900" dirty="0"/>
           </a:p>
@@ -22909,57 +25069,18 @@
       </p:sp>
       <p:sp>
         <p:nvSpPr>
-          <p:cNvPr id="49" name="Text 47"/>
-          <p:cNvSpPr/>
-          <p:nvPr/>
-        </p:nvSpPr>
-        <p:spPr>
-          <a:xfrm>
-            <a:off x="5254752" y="4572000"/>
-            <a:ext cx="685800" cy="219456"/>
-          </a:xfrm>
-          <a:prstGeom prst="rect">
-            <a:avLst/>
-          </a:prstGeom>
-          <a:noFill/>
-          <a:ln/>
-        </p:spPr>
-        <p:txBody>
-          <a:bodyPr wrap="square" lIns="0" tIns="0" rIns="0" bIns="0" rtlCol="0" anchor="t"/>
-          <a:lstStyle/>
-          <a:p>
-            <a:pPr algn="ctr" indent="0" marL="0">
-              <a:buNone/>
-            </a:pPr>
-            <a:r>
-              <a:rPr lang="en-US" sz="750" i="1" dirty="0">
-                <a:solidFill>
-                  <a:srgbClr val="94A3B8"/>
-                </a:solidFill>
-                <a:latin typeface="Calibri" pitchFamily="34" charset="0"/>
-                <a:ea typeface="Calibri" pitchFamily="34" charset="-122"/>
-                <a:cs typeface="Calibri" pitchFamily="34" charset="-120"/>
-              </a:rPr>
-              <a:t>/k/</a:t>
-            </a:r>
-            <a:endParaRPr lang="en-US" sz="750" dirty="0"/>
-          </a:p>
-        </p:txBody>
-      </p:sp>
-      <p:sp>
-        <p:nvSpPr>
-          <p:cNvPr id="50" name="Shape 48"/>
-          <p:cNvSpPr/>
-          <p:nvPr/>
-        </p:nvSpPr>
-        <p:spPr>
-          <a:xfrm>
-            <a:off x="6062472" y="4169664"/>
-            <a:ext cx="685800" cy="384048"/>
+          <p:cNvPr id="52" name="Shape 50"/>
+          <p:cNvSpPr/>
+          <p:nvPr/>
+        </p:nvSpPr>
+        <p:spPr>
+          <a:xfrm>
+            <a:off x="5218730" y="4169664"/>
+            <a:ext cx="603504" cy="475488"/>
           </a:xfrm>
           <a:prstGeom prst="rect">
             <a:avLst>
-              <a:gd name="adj" fmla="val 9524"/>
+              <a:gd name="adj" fmla="val 7692"/>
             </a:avLst>
           </a:prstGeom>
           <a:solidFill>
@@ -22975,14 +25096,14 @@
       </p:sp>
       <p:sp>
         <p:nvSpPr>
-          <p:cNvPr id="51" name="Text 49"/>
-          <p:cNvSpPr/>
-          <p:nvPr/>
-        </p:nvSpPr>
-        <p:spPr>
-          <a:xfrm>
-            <a:off x="6062472" y="4169664"/>
-            <a:ext cx="685800" cy="384048"/>
+          <p:cNvPr id="53" name="Text 51"/>
+          <p:cNvSpPr/>
+          <p:nvPr/>
+        </p:nvSpPr>
+        <p:spPr>
+          <a:xfrm>
+            <a:off x="5218730" y="4169664"/>
+            <a:ext cx="603504" cy="475488"/>
           </a:xfrm>
           <a:prstGeom prst="rect">
             <a:avLst/>
@@ -23006,7 +25127,7 @@
                 <a:ea typeface="Trebuchet MS" pitchFamily="34" charset="-122"/>
                 <a:cs typeface="Trebuchet MS" pitchFamily="34" charset="-120"/>
               </a:rPr>
-              <a:t>al</a:t>
+              <a:t>g</a:t>
             </a:r>
             <a:endParaRPr lang="en-US" sz="900" dirty="0"/>
           </a:p>
@@ -23014,18 +25135,18 @@
       </p:sp>
       <p:sp>
         <p:nvSpPr>
-          <p:cNvPr id="52" name="Shape 50"/>
-          <p:cNvSpPr/>
-          <p:nvPr/>
-        </p:nvSpPr>
-        <p:spPr>
-          <a:xfrm>
-            <a:off x="6870192" y="4169664"/>
-            <a:ext cx="685800" cy="384048"/>
+          <p:cNvPr id="54" name="Shape 52"/>
+          <p:cNvSpPr/>
+          <p:nvPr/>
+        </p:nvSpPr>
+        <p:spPr>
+          <a:xfrm>
+            <a:off x="5872111" y="4169664"/>
+            <a:ext cx="603504" cy="475488"/>
           </a:xfrm>
           <a:prstGeom prst="rect">
             <a:avLst>
-              <a:gd name="adj" fmla="val 9524"/>
+              <a:gd name="adj" fmla="val 7692"/>
             </a:avLst>
           </a:prstGeom>
           <a:solidFill>
@@ -23041,14 +25162,14 @@
       </p:sp>
       <p:sp>
         <p:nvSpPr>
-          <p:cNvPr id="53" name="Text 51"/>
-          <p:cNvSpPr/>
-          <p:nvPr/>
-        </p:nvSpPr>
-        <p:spPr>
-          <a:xfrm>
-            <a:off x="6870192" y="4169664"/>
-            <a:ext cx="685800" cy="384048"/>
+          <p:cNvPr id="55" name="Text 53"/>
+          <p:cNvSpPr/>
+          <p:nvPr/>
+        </p:nvSpPr>
+        <p:spPr>
+          <a:xfrm>
+            <a:off x="5872111" y="4169664"/>
+            <a:ext cx="603504" cy="475488"/>
           </a:xfrm>
           <a:prstGeom prst="rect">
             <a:avLst/>
@@ -23072,7 +25193,7 @@
                 <a:ea typeface="Trebuchet MS" pitchFamily="34" charset="-122"/>
                 <a:cs typeface="Trebuchet MS" pitchFamily="34" charset="-120"/>
               </a:rPr>
-              <a:t>l</a:t>
+              <a:t>i</a:t>
             </a:r>
             <a:endParaRPr lang="en-US" sz="900" dirty="0"/>
           </a:p>
@@ -23080,18 +25201,18 @@
       </p:sp>
       <p:sp>
         <p:nvSpPr>
-          <p:cNvPr id="54" name="Shape 52"/>
-          <p:cNvSpPr/>
-          <p:nvPr/>
-        </p:nvSpPr>
-        <p:spPr>
-          <a:xfrm>
-            <a:off x="7677912" y="4169664"/>
-            <a:ext cx="685800" cy="384048"/>
+          <p:cNvPr id="56" name="Shape 54"/>
+          <p:cNvSpPr/>
+          <p:nvPr/>
+        </p:nvSpPr>
+        <p:spPr>
+          <a:xfrm>
+            <a:off x="6525491" y="4169664"/>
+            <a:ext cx="603504" cy="475488"/>
           </a:xfrm>
           <a:prstGeom prst="rect">
             <a:avLst>
-              <a:gd name="adj" fmla="val 9524"/>
+              <a:gd name="adj" fmla="val 7692"/>
             </a:avLst>
           </a:prstGeom>
           <a:solidFill>
@@ -23107,14 +25228,14 @@
       </p:sp>
       <p:sp>
         <p:nvSpPr>
-          <p:cNvPr id="55" name="Text 53"/>
-          <p:cNvSpPr/>
-          <p:nvPr/>
-        </p:nvSpPr>
-        <p:spPr>
-          <a:xfrm>
-            <a:off x="7677912" y="4169664"/>
-            <a:ext cx="685800" cy="384048"/>
+          <p:cNvPr id="57" name="Text 55"/>
+          <p:cNvSpPr/>
+          <p:nvPr/>
+        </p:nvSpPr>
+        <p:spPr>
+          <a:xfrm>
+            <a:off x="6525491" y="4169664"/>
+            <a:ext cx="603504" cy="475488"/>
           </a:xfrm>
           <a:prstGeom prst="rect">
             <a:avLst/>
@@ -23138,7 +25259,139 @@
                 <a:ea typeface="Trebuchet MS" pitchFamily="34" charset="-122"/>
                 <a:cs typeface="Trebuchet MS" pitchFamily="34" charset="-120"/>
               </a:rPr>
-              <a:t>y</a:t>
+              <a:t>c</a:t>
+            </a:r>
+            <a:endParaRPr lang="en-US" sz="900" dirty="0"/>
+          </a:p>
+        </p:txBody>
+      </p:sp>
+      <p:sp>
+        <p:nvSpPr>
+          <p:cNvPr id="58" name="Shape 56"/>
+          <p:cNvSpPr/>
+          <p:nvPr/>
+        </p:nvSpPr>
+        <p:spPr>
+          <a:xfrm>
+            <a:off x="7178871" y="4169664"/>
+            <a:ext cx="603504" cy="475488"/>
+          </a:xfrm>
+          <a:prstGeom prst="rect">
+            <a:avLst>
+              <a:gd name="adj" fmla="val 7692"/>
+            </a:avLst>
+          </a:prstGeom>
+          <a:solidFill>
+            <a:srgbClr val="FFFFFF"/>
+          </a:solidFill>
+          <a:ln w="12700">
+            <a:solidFill>
+              <a:srgbClr val="DB2777"/>
+            </a:solidFill>
+            <a:prstDash val="solid"/>
+          </a:ln>
+        </p:spPr>
+      </p:sp>
+      <p:sp>
+        <p:nvSpPr>
+          <p:cNvPr id="59" name="Text 57"/>
+          <p:cNvSpPr/>
+          <p:nvPr/>
+        </p:nvSpPr>
+        <p:spPr>
+          <a:xfrm>
+            <a:off x="7178871" y="4169664"/>
+            <a:ext cx="603504" cy="475488"/>
+          </a:xfrm>
+          <a:prstGeom prst="rect">
+            <a:avLst/>
+          </a:prstGeom>
+          <a:noFill/>
+          <a:ln/>
+        </p:spPr>
+        <p:txBody>
+          <a:bodyPr wrap="square" lIns="0" tIns="0" rIns="0" bIns="0" rtlCol="0" anchor="ctr"/>
+          <a:lstStyle/>
+          <a:p>
+            <a:pPr algn="ctr" indent="0" marL="0">
+              <a:buNone/>
+            </a:pPr>
+            <a:r>
+              <a:rPr lang="en-US" sz="900" b="1" dirty="0">
+                <a:solidFill>
+                  <a:srgbClr val="9D174D"/>
+                </a:solidFill>
+                <a:latin typeface="Trebuchet MS" pitchFamily="34" charset="0"/>
+                <a:ea typeface="Trebuchet MS" pitchFamily="34" charset="-122"/>
+                <a:cs typeface="Trebuchet MS" pitchFamily="34" charset="-120"/>
+              </a:rPr>
+              <a:t>a</a:t>
+            </a:r>
+            <a:endParaRPr lang="en-US" sz="900" dirty="0"/>
+          </a:p>
+        </p:txBody>
+      </p:sp>
+      <p:sp>
+        <p:nvSpPr>
+          <p:cNvPr id="60" name="Shape 58"/>
+          <p:cNvSpPr/>
+          <p:nvPr/>
+        </p:nvSpPr>
+        <p:spPr>
+          <a:xfrm>
+            <a:off x="7832252" y="4169664"/>
+            <a:ext cx="603504" cy="475488"/>
+          </a:xfrm>
+          <a:prstGeom prst="rect">
+            <a:avLst>
+              <a:gd name="adj" fmla="val 7692"/>
+            </a:avLst>
+          </a:prstGeom>
+          <a:solidFill>
+            <a:srgbClr val="FFFFFF"/>
+          </a:solidFill>
+          <a:ln w="12700">
+            <a:solidFill>
+              <a:srgbClr val="DB2777"/>
+            </a:solidFill>
+            <a:prstDash val="solid"/>
+          </a:ln>
+        </p:spPr>
+      </p:sp>
+      <p:sp>
+        <p:nvSpPr>
+          <p:cNvPr id="61" name="Text 59"/>
+          <p:cNvSpPr/>
+          <p:nvPr/>
+        </p:nvSpPr>
+        <p:spPr>
+          <a:xfrm>
+            <a:off x="7832252" y="4169664"/>
+            <a:ext cx="603504" cy="475488"/>
+          </a:xfrm>
+          <a:prstGeom prst="rect">
+            <a:avLst/>
+          </a:prstGeom>
+          <a:noFill/>
+          <a:ln/>
+        </p:spPr>
+        <p:txBody>
+          <a:bodyPr wrap="square" lIns="0" tIns="0" rIns="0" bIns="0" rtlCol="0" anchor="ctr"/>
+          <a:lstStyle/>
+          <a:p>
+            <a:pPr algn="ctr" indent="0" marL="0">
+              <a:buNone/>
+            </a:pPr>
+            <a:r>
+              <a:rPr lang="en-US" sz="900" b="1" dirty="0">
+                <a:solidFill>
+                  <a:srgbClr val="9D174D"/>
+                </a:solidFill>
+                <a:latin typeface="Trebuchet MS" pitchFamily="34" charset="0"/>
+                <a:ea typeface="Trebuchet MS" pitchFamily="34" charset="-122"/>
+                <a:cs typeface="Trebuchet MS" pitchFamily="34" charset="-120"/>
+              </a:rPr>
+              <a:t>l</a:t>
             </a:r>
             <a:endParaRPr lang="en-US" sz="900" dirty="0"/>
           </a:p>
@@ -23430,7 +25683,7 @@
                 <a:ea typeface="Calibri" pitchFamily="34" charset="-122"/>
                 <a:cs typeface="Calibri" pitchFamily="34" charset="-120"/>
               </a:rPr>
-              <a:t>Word Labs  •  wordlabs.app  •  Root: 'logical' = relating to reason or logic</a:t>
+              <a:t>Word Labs  •  wordlabs.app  •  Root: 'logical' = making sense</a:t>
             </a:r>
             <a:endParaRPr lang="en-US" sz="800" dirty="0"/>
           </a:p>
@@ -24257,7 +26510,7 @@
                 <a:ea typeface="Calibri" pitchFamily="34" charset="-122"/>
                 <a:cs typeface="Calibri" pitchFamily="34" charset="-120"/>
               </a:rPr>
-              <a:t>Word Labs  •  wordlabs.app  •  Root: 'logical' = relating to reason or logic</a:t>
+              <a:t>Word Labs  •  wordlabs.app  •  Root: 'logical' = making sense</a:t>
             </a:r>
             <a:endParaRPr lang="en-US" sz="800" dirty="0"/>
           </a:p>
@@ -24686,7 +26939,7 @@
                 <a:ea typeface="Calibri" pitchFamily="34" charset="-122"/>
                 <a:cs typeface="Calibri" pitchFamily="34" charset="-120"/>
               </a:rPr>
-              <a:t>relating to reason or logic</a:t>
+              <a:t>making sense</a:t>
             </a:r>
             <a:endParaRPr lang="en-US" sz="850" dirty="0"/>
           </a:p>
@@ -25242,7 +27495,7 @@
                 <a:ea typeface="Calibri" pitchFamily="34" charset="-122"/>
                 <a:cs typeface="Calibri" pitchFamily="34" charset="-120"/>
               </a:rPr>
-              <a:t>Word Labs  •  wordlabs.app  •  Root: 'logical' = relating to reason or logic</a:t>
+              <a:t>Word Labs  •  wordlabs.app  •  Root: 'logical' = making sense</a:t>
             </a:r>
             <a:endParaRPr lang="en-US" sz="800" dirty="0"/>
           </a:p>
@@ -25315,7 +27568,7 @@
                 <a:ea typeface="Trebuchet MS" pitchFamily="34" charset="-122"/>
                 <a:cs typeface="Trebuchet MS" pitchFamily="34" charset="-120"/>
               </a:rPr>
-              <a:t>We are learning that the root 'logical' means 'relating to reason or logic'.</a:t>
+              <a:t>We are learning that the root 'logical' means 'making sense'.</a:t>
             </a:r>
             <a:endParaRPr lang="en-US" sz="2000" dirty="0"/>
           </a:p>
@@ -25961,7 +28214,7 @@
                 <a:ea typeface="Calibri" pitchFamily="34" charset="-122"/>
                 <a:cs typeface="Calibri" pitchFamily="34" charset="-120"/>
               </a:rPr>
-              <a:t>Word Labs  •  wordlabs.app  •  Root: 'logical' = relating to reason or logic</a:t>
+              <a:t>Word Labs  •  wordlabs.app  •  Root: 'logical' = making sense</a:t>
             </a:r>
             <a:endParaRPr lang="en-US" sz="800" dirty="0"/>
           </a:p>
@@ -26390,7 +28643,7 @@
                 <a:ea typeface="Calibri" pitchFamily="34" charset="-122"/>
                 <a:cs typeface="Calibri" pitchFamily="34" charset="-120"/>
               </a:rPr>
-              <a:t>relating to reason or logic</a:t>
+              <a:t>making sense</a:t>
             </a:r>
             <a:endParaRPr lang="en-US" sz="850" dirty="0"/>
           </a:p>
@@ -27393,7 +29646,7 @@
                 <a:ea typeface="Calibri" pitchFamily="34" charset="-122"/>
                 <a:cs typeface="Calibri" pitchFamily="34" charset="-120"/>
               </a:rPr>
-              <a:t>Word Labs  •  wordlabs.app  •  Root: 'logical' = relating to reason or logic</a:t>
+              <a:t>Word Labs  •  wordlabs.app  •  Root: 'logical' = making sense</a:t>
             </a:r>
             <a:endParaRPr lang="en-US" sz="800" dirty="0"/>
           </a:p>
@@ -27822,7 +30075,7 @@
                 <a:ea typeface="Calibri" pitchFamily="34" charset="-122"/>
                 <a:cs typeface="Calibri" pitchFamily="34" charset="-120"/>
               </a:rPr>
-              <a:t>relating to reason or logic</a:t>
+              <a:t>making sense</a:t>
             </a:r>
             <a:endParaRPr lang="en-US" sz="850" dirty="0"/>
           </a:p>
@@ -28482,11 +30735,11 @@
         <p:spPr>
           <a:xfrm>
             <a:off x="1874520" y="4096512"/>
-            <a:ext cx="6903720" cy="804672"/>
+            <a:ext cx="6903720" cy="658368"/>
           </a:xfrm>
           <a:prstGeom prst="rect">
             <a:avLst>
-              <a:gd name="adj" fmla="val 6818"/>
+              <a:gd name="adj" fmla="val 8333"/>
             </a:avLst>
           </a:prstGeom>
           <a:solidFill>
@@ -28508,12 +30761,12 @@
         </p:nvSpPr>
         <p:spPr>
           <a:xfrm>
-            <a:off x="1951330" y="4169664"/>
-            <a:ext cx="676656" cy="384048"/>
+            <a:off x="1951828" y="4169664"/>
+            <a:ext cx="603504" cy="475488"/>
           </a:xfrm>
           <a:prstGeom prst="rect">
             <a:avLst>
-              <a:gd name="adj" fmla="val 9524"/>
+              <a:gd name="adj" fmla="val 7692"/>
             </a:avLst>
           </a:prstGeom>
           <a:solidFill>
@@ -28535,8 +30788,8 @@
         </p:nvSpPr>
         <p:spPr>
           <a:xfrm>
-            <a:off x="1951330" y="4169664"/>
-            <a:ext cx="676656" cy="384048"/>
+            <a:off x="1951828" y="4169664"/>
+            <a:ext cx="603504" cy="475488"/>
           </a:xfrm>
           <a:prstGeom prst="rect">
             <a:avLst/>
@@ -28574,12 +30827,12 @@
         </p:nvSpPr>
         <p:spPr>
           <a:xfrm>
-            <a:off x="2677363" y="4169664"/>
-            <a:ext cx="676656" cy="384048"/>
+            <a:off x="2605209" y="4169664"/>
+            <a:ext cx="603504" cy="475488"/>
           </a:xfrm>
           <a:prstGeom prst="rect">
             <a:avLst>
-              <a:gd name="adj" fmla="val 9524"/>
+              <a:gd name="adj" fmla="val 7692"/>
             </a:avLst>
           </a:prstGeom>
           <a:solidFill>
@@ -28601,8 +30854,8 @@
         </p:nvSpPr>
         <p:spPr>
           <a:xfrm>
-            <a:off x="2677363" y="4169664"/>
-            <a:ext cx="676656" cy="384048"/>
+            <a:off x="2605209" y="4169664"/>
+            <a:ext cx="603504" cy="475488"/>
           </a:xfrm>
           <a:prstGeom prst="rect">
             <a:avLst/>
@@ -28640,12 +30893,12 @@
         </p:nvSpPr>
         <p:spPr>
           <a:xfrm>
-            <a:off x="3403397" y="4169664"/>
-            <a:ext cx="676656" cy="384048"/>
+            <a:off x="3258589" y="4169664"/>
+            <a:ext cx="603504" cy="475488"/>
           </a:xfrm>
           <a:prstGeom prst="rect">
             <a:avLst>
-              <a:gd name="adj" fmla="val 9524"/>
+              <a:gd name="adj" fmla="val 7692"/>
             </a:avLst>
           </a:prstGeom>
           <a:solidFill>
@@ -28667,8 +30920,8 @@
         </p:nvSpPr>
         <p:spPr>
           <a:xfrm>
-            <a:off x="3403397" y="4169664"/>
-            <a:ext cx="676656" cy="384048"/>
+            <a:off x="3258589" y="4169664"/>
+            <a:ext cx="603504" cy="475488"/>
           </a:xfrm>
           <a:prstGeom prst="rect">
             <a:avLst/>
@@ -28706,12 +30959,12 @@
         </p:nvSpPr>
         <p:spPr>
           <a:xfrm>
-            <a:off x="4129430" y="4169664"/>
-            <a:ext cx="676656" cy="384048"/>
+            <a:off x="3911969" y="4169664"/>
+            <a:ext cx="603504" cy="475488"/>
           </a:xfrm>
           <a:prstGeom prst="rect">
             <a:avLst>
-              <a:gd name="adj" fmla="val 9524"/>
+              <a:gd name="adj" fmla="val 7692"/>
             </a:avLst>
           </a:prstGeom>
           <a:solidFill>
@@ -28733,8 +30986,8 @@
         </p:nvSpPr>
         <p:spPr>
           <a:xfrm>
-            <a:off x="4129430" y="4169664"/>
-            <a:ext cx="676656" cy="384048"/>
+            <a:off x="3911969" y="4169664"/>
+            <a:ext cx="603504" cy="475488"/>
           </a:xfrm>
           <a:prstGeom prst="rect">
             <a:avLst/>
@@ -28772,12 +31025,12 @@
         </p:nvSpPr>
         <p:spPr>
           <a:xfrm>
-            <a:off x="4855464" y="4169664"/>
-            <a:ext cx="676656" cy="384048"/>
+            <a:off x="4565350" y="4169664"/>
+            <a:ext cx="603504" cy="475488"/>
           </a:xfrm>
           <a:prstGeom prst="rect">
             <a:avLst>
-              <a:gd name="adj" fmla="val 9524"/>
+              <a:gd name="adj" fmla="val 7692"/>
             </a:avLst>
           </a:prstGeom>
           <a:solidFill>
@@ -28799,8 +31052,8 @@
         </p:nvSpPr>
         <p:spPr>
           <a:xfrm>
-            <a:off x="4855464" y="4169664"/>
-            <a:ext cx="676656" cy="384048"/>
+            <a:off x="4565350" y="4169664"/>
+            <a:ext cx="603504" cy="475488"/>
           </a:xfrm>
           <a:prstGeom prst="rect">
             <a:avLst/>
@@ -28838,12 +31091,12 @@
         </p:nvSpPr>
         <p:spPr>
           <a:xfrm>
-            <a:off x="5581498" y="4169664"/>
-            <a:ext cx="676656" cy="384048"/>
+            <a:off x="5218730" y="4169664"/>
+            <a:ext cx="603504" cy="475488"/>
           </a:xfrm>
           <a:prstGeom prst="rect">
             <a:avLst>
-              <a:gd name="adj" fmla="val 9524"/>
+              <a:gd name="adj" fmla="val 7692"/>
             </a:avLst>
           </a:prstGeom>
           <a:solidFill>
@@ -28865,8 +31118,8 @@
         </p:nvSpPr>
         <p:spPr>
           <a:xfrm>
-            <a:off x="5581498" y="4169664"/>
-            <a:ext cx="676656" cy="384048"/>
+            <a:off x="5218730" y="4169664"/>
+            <a:ext cx="603504" cy="475488"/>
           </a:xfrm>
           <a:prstGeom prst="rect">
             <a:avLst/>
@@ -28904,12 +31157,12 @@
         </p:nvSpPr>
         <p:spPr>
           <a:xfrm>
-            <a:off x="6307531" y="4169664"/>
-            <a:ext cx="676656" cy="384048"/>
+            <a:off x="5872111" y="4169664"/>
+            <a:ext cx="603504" cy="475488"/>
           </a:xfrm>
           <a:prstGeom prst="rect">
             <a:avLst>
-              <a:gd name="adj" fmla="val 9524"/>
+              <a:gd name="adj" fmla="val 7692"/>
             </a:avLst>
           </a:prstGeom>
           <a:solidFill>
@@ -28931,8 +31184,8 @@
         </p:nvSpPr>
         <p:spPr>
           <a:xfrm>
-            <a:off x="6307531" y="4169664"/>
-            <a:ext cx="676656" cy="384048"/>
+            <a:off x="5872111" y="4169664"/>
+            <a:ext cx="603504" cy="475488"/>
           </a:xfrm>
           <a:prstGeom prst="rect">
             <a:avLst/>
@@ -28970,12 +31223,12 @@
         </p:nvSpPr>
         <p:spPr>
           <a:xfrm>
-            <a:off x="7033565" y="4169664"/>
-            <a:ext cx="676656" cy="384048"/>
+            <a:off x="6525491" y="4169664"/>
+            <a:ext cx="603504" cy="475488"/>
           </a:xfrm>
           <a:prstGeom prst="rect">
             <a:avLst>
-              <a:gd name="adj" fmla="val 9524"/>
+              <a:gd name="adj" fmla="val 7692"/>
             </a:avLst>
           </a:prstGeom>
           <a:solidFill>
@@ -28997,8 +31250,8 @@
         </p:nvSpPr>
         <p:spPr>
           <a:xfrm>
-            <a:off x="7033565" y="4169664"/>
-            <a:ext cx="676656" cy="384048"/>
+            <a:off x="6525491" y="4169664"/>
+            <a:ext cx="603504" cy="475488"/>
           </a:xfrm>
           <a:prstGeom prst="rect">
             <a:avLst/>
@@ -29030,57 +31283,18 @@
       </p:sp>
       <p:sp>
         <p:nvSpPr>
-          <p:cNvPr id="58" name="Text 56"/>
-          <p:cNvSpPr/>
-          <p:nvPr/>
-        </p:nvSpPr>
-        <p:spPr>
-          <a:xfrm>
-            <a:off x="7033565" y="4572000"/>
-            <a:ext cx="676656" cy="219456"/>
-          </a:xfrm>
-          <a:prstGeom prst="rect">
-            <a:avLst/>
-          </a:prstGeom>
-          <a:noFill/>
-          <a:ln/>
-        </p:spPr>
-        <p:txBody>
-          <a:bodyPr wrap="square" lIns="0" tIns="0" rIns="0" bIns="0" rtlCol="0" anchor="t"/>
-          <a:lstStyle/>
-          <a:p>
-            <a:pPr algn="ctr" indent="0" marL="0">
-              <a:buNone/>
-            </a:pPr>
-            <a:r>
-              <a:rPr lang="en-US" sz="750" i="1" dirty="0">
-                <a:solidFill>
-                  <a:srgbClr val="94A3B8"/>
-                </a:solidFill>
-                <a:latin typeface="Calibri" pitchFamily="34" charset="0"/>
-                <a:ea typeface="Calibri" pitchFamily="34" charset="-122"/>
-                <a:cs typeface="Calibri" pitchFamily="34" charset="-120"/>
-              </a:rPr>
-              <a:t>/k/</a:t>
-            </a:r>
-            <a:endParaRPr lang="en-US" sz="750" dirty="0"/>
-          </a:p>
-        </p:txBody>
-      </p:sp>
-      <p:sp>
-        <p:nvSpPr>
-          <p:cNvPr id="59" name="Shape 57"/>
-          <p:cNvSpPr/>
-          <p:nvPr/>
-        </p:nvSpPr>
-        <p:spPr>
-          <a:xfrm>
-            <a:off x="7759598" y="4169664"/>
-            <a:ext cx="676656" cy="384048"/>
+          <p:cNvPr id="58" name="Shape 56"/>
+          <p:cNvSpPr/>
+          <p:nvPr/>
+        </p:nvSpPr>
+        <p:spPr>
+          <a:xfrm>
+            <a:off x="7178871" y="4169664"/>
+            <a:ext cx="603504" cy="475488"/>
           </a:xfrm>
           <a:prstGeom prst="rect">
             <a:avLst>
-              <a:gd name="adj" fmla="val 9524"/>
+              <a:gd name="adj" fmla="val 7692"/>
             </a:avLst>
           </a:prstGeom>
           <a:solidFill>
@@ -29096,14 +31310,14 @@
       </p:sp>
       <p:sp>
         <p:nvSpPr>
-          <p:cNvPr id="60" name="Text 58"/>
-          <p:cNvSpPr/>
-          <p:nvPr/>
-        </p:nvSpPr>
-        <p:spPr>
-          <a:xfrm>
-            <a:off x="7759598" y="4169664"/>
-            <a:ext cx="676656" cy="384048"/>
+          <p:cNvPr id="59" name="Text 57"/>
+          <p:cNvSpPr/>
+          <p:nvPr/>
+        </p:nvSpPr>
+        <p:spPr>
+          <a:xfrm>
+            <a:off x="7178871" y="4169664"/>
+            <a:ext cx="603504" cy="475488"/>
           </a:xfrm>
           <a:prstGeom prst="rect">
             <a:avLst/>
@@ -29127,7 +31341,73 @@
                 <a:ea typeface="Trebuchet MS" pitchFamily="34" charset="-122"/>
                 <a:cs typeface="Trebuchet MS" pitchFamily="34" charset="-120"/>
               </a:rPr>
-              <a:t>al</a:t>
+              <a:t>a</a:t>
+            </a:r>
+            <a:endParaRPr lang="en-US" sz="900" dirty="0"/>
+          </a:p>
+        </p:txBody>
+      </p:sp>
+      <p:sp>
+        <p:nvSpPr>
+          <p:cNvPr id="60" name="Shape 58"/>
+          <p:cNvSpPr/>
+          <p:nvPr/>
+        </p:nvSpPr>
+        <p:spPr>
+          <a:xfrm>
+            <a:off x="7832252" y="4169664"/>
+            <a:ext cx="603504" cy="475488"/>
+          </a:xfrm>
+          <a:prstGeom prst="rect">
+            <a:avLst>
+              <a:gd name="adj" fmla="val 7692"/>
+            </a:avLst>
+          </a:prstGeom>
+          <a:solidFill>
+            <a:srgbClr val="FFFFFF"/>
+          </a:solidFill>
+          <a:ln w="12700">
+            <a:solidFill>
+              <a:srgbClr val="DB2777"/>
+            </a:solidFill>
+            <a:prstDash val="solid"/>
+          </a:ln>
+        </p:spPr>
+      </p:sp>
+      <p:sp>
+        <p:nvSpPr>
+          <p:cNvPr id="61" name="Text 59"/>
+          <p:cNvSpPr/>
+          <p:nvPr/>
+        </p:nvSpPr>
+        <p:spPr>
+          <a:xfrm>
+            <a:off x="7832252" y="4169664"/>
+            <a:ext cx="603504" cy="475488"/>
+          </a:xfrm>
+          <a:prstGeom prst="rect">
+            <a:avLst/>
+          </a:prstGeom>
+          <a:noFill/>
+          <a:ln/>
+        </p:spPr>
+        <p:txBody>
+          <a:bodyPr wrap="square" lIns="0" tIns="0" rIns="0" bIns="0" rtlCol="0" anchor="ctr"/>
+          <a:lstStyle/>
+          <a:p>
+            <a:pPr algn="ctr" indent="0" marL="0">
+              <a:buNone/>
+            </a:pPr>
+            <a:r>
+              <a:rPr lang="en-US" sz="900" b="1" dirty="0">
+                <a:solidFill>
+                  <a:srgbClr val="9D174D"/>
+                </a:solidFill>
+                <a:latin typeface="Trebuchet MS" pitchFamily="34" charset="0"/>
+                <a:ea typeface="Trebuchet MS" pitchFamily="34" charset="-122"/>
+                <a:cs typeface="Trebuchet MS" pitchFamily="34" charset="-120"/>
+              </a:rPr>
+              <a:t>l</a:t>
             </a:r>
             <a:endParaRPr lang="en-US" sz="900" dirty="0"/>
           </a:p>
@@ -29419,7 +31699,7 @@
                 <a:ea typeface="Calibri" pitchFamily="34" charset="-122"/>
                 <a:cs typeface="Calibri" pitchFamily="34" charset="-120"/>
               </a:rPr>
-              <a:t>Word Labs  •  wordlabs.app  •  Root: 'logical' = relating to reason or logic</a:t>
+              <a:t>Word Labs  •  wordlabs.app  •  Root: 'logical' = making sense</a:t>
             </a:r>
             <a:endParaRPr lang="en-US" sz="800" dirty="0"/>
           </a:p>
@@ -29558,7 +31838,7 @@
                 <a:ea typeface="Trebuchet MS" pitchFamily="34" charset="-122"/>
                 <a:cs typeface="Trebuchet MS" pitchFamily="34" charset="-120"/>
               </a:rPr>
-              <a:t>psychological</a:t>
+              <a:t>neurological</a:t>
             </a:r>
             <a:endParaRPr lang="en-US" sz="2800" dirty="0"/>
           </a:p>
@@ -30246,7 +32526,7 @@
                 <a:ea typeface="Calibri" pitchFamily="34" charset="-122"/>
                 <a:cs typeface="Calibri" pitchFamily="34" charset="-120"/>
               </a:rPr>
-              <a:t>Word Labs  •  wordlabs.app  •  Root: 'logical' = relating to reason or logic</a:t>
+              <a:t>Word Labs  •  wordlabs.app  •  Root: 'logical' = making sense</a:t>
             </a:r>
             <a:endParaRPr lang="en-US" sz="800" dirty="0"/>
           </a:p>
@@ -30385,7 +32665,7 @@
                 <a:ea typeface="Trebuchet MS" pitchFamily="34" charset="-122"/>
                 <a:cs typeface="Trebuchet MS" pitchFamily="34" charset="-120"/>
               </a:rPr>
-              <a:t>psychological</a:t>
+              <a:t>neurological</a:t>
             </a:r>
             <a:endParaRPr lang="en-US" sz="2800" dirty="0"/>
           </a:p>
@@ -30524,7 +32804,7 @@
                 <a:ea typeface="Trebuchet MS" pitchFamily="34" charset="-122"/>
                 <a:cs typeface="Trebuchet MS" pitchFamily="34" charset="-120"/>
               </a:rPr>
-              <a:t>psycho</a:t>
+              <a:t>neuro</a:t>
             </a:r>
             <a:endParaRPr lang="en-US" sz="1300" dirty="0"/>
           </a:p>
@@ -30563,7 +32843,7 @@
                 <a:ea typeface="Calibri" pitchFamily="34" charset="-122"/>
                 <a:cs typeface="Calibri" pitchFamily="34" charset="-120"/>
               </a:rPr>
-              <a:t>mind</a:t>
+              <a:t>nerve; nervous system</a:t>
             </a:r>
             <a:endParaRPr lang="en-US" sz="850" dirty="0"/>
           </a:p>
@@ -30675,7 +32955,7 @@
                 <a:ea typeface="Calibri" pitchFamily="34" charset="-122"/>
                 <a:cs typeface="Calibri" pitchFamily="34" charset="-120"/>
               </a:rPr>
-              <a:t>relating to reason or logic</a:t>
+              <a:t>making sense</a:t>
             </a:r>
             <a:endParaRPr lang="en-US" sz="850" dirty="0"/>
           </a:p>
@@ -31231,7 +33511,7 @@
                 <a:ea typeface="Calibri" pitchFamily="34" charset="-122"/>
                 <a:cs typeface="Calibri" pitchFamily="34" charset="-120"/>
               </a:rPr>
-              <a:t>Word Labs  •  wordlabs.app  •  Root: 'logical' = relating to reason or logic</a:t>
+              <a:t>Word Labs  •  wordlabs.app  •  Root: 'logical' = making sense</a:t>
             </a:r>
             <a:endParaRPr lang="en-US" sz="800" dirty="0"/>
           </a:p>
@@ -31370,7 +33650,7 @@
                 <a:ea typeface="Trebuchet MS" pitchFamily="34" charset="-122"/>
                 <a:cs typeface="Trebuchet MS" pitchFamily="34" charset="-120"/>
               </a:rPr>
-              <a:t>psychological</a:t>
+              <a:t>neurological</a:t>
             </a:r>
             <a:endParaRPr lang="en-US" sz="2800" dirty="0"/>
           </a:p>
@@ -31509,7 +33789,7 @@
                 <a:ea typeface="Trebuchet MS" pitchFamily="34" charset="-122"/>
                 <a:cs typeface="Trebuchet MS" pitchFamily="34" charset="-120"/>
               </a:rPr>
-              <a:t>psycho</a:t>
+              <a:t>neuro</a:t>
             </a:r>
             <a:endParaRPr lang="en-US" sz="1300" dirty="0"/>
           </a:p>
@@ -31548,7 +33828,7 @@
                 <a:ea typeface="Calibri" pitchFamily="34" charset="-122"/>
                 <a:cs typeface="Calibri" pitchFamily="34" charset="-120"/>
               </a:rPr>
-              <a:t>mind</a:t>
+              <a:t>nerve; nervous system</a:t>
             </a:r>
             <a:endParaRPr lang="en-US" sz="850" dirty="0"/>
           </a:p>
@@ -31660,7 +33940,7 @@
                 <a:ea typeface="Calibri" pitchFamily="34" charset="-122"/>
                 <a:cs typeface="Calibri" pitchFamily="34" charset="-120"/>
               </a:rPr>
-              <a:t>relating to reason or logic</a:t>
+              <a:t>making sense</a:t>
             </a:r>
             <a:endParaRPr lang="en-US" sz="850" dirty="0"/>
           </a:p>
@@ -31819,7 +34099,7 @@
                 <a:ea typeface="Trebuchet MS" pitchFamily="34" charset="-122"/>
                 <a:cs typeface="Trebuchet MS" pitchFamily="34" charset="-120"/>
               </a:rPr>
-              <a:t>psy</a:t>
+              <a:t>neu</a:t>
             </a:r>
             <a:endParaRPr lang="en-US" sz="1400" dirty="0"/>
           </a:p>
@@ -31924,7 +34204,7 @@
                 <a:ea typeface="Trebuchet MS" pitchFamily="34" charset="-122"/>
                 <a:cs typeface="Trebuchet MS" pitchFamily="34" charset="-120"/>
               </a:rPr>
-              <a:t>cho</a:t>
+              <a:t>ro</a:t>
             </a:r>
             <a:endParaRPr lang="en-US" sz="1400" dirty="0"/>
           </a:p>
@@ -32663,7 +34943,7 @@
                 <a:ea typeface="Calibri" pitchFamily="34" charset="-122"/>
                 <a:cs typeface="Calibri" pitchFamily="34" charset="-120"/>
               </a:rPr>
-              <a:t>Word Labs  •  wordlabs.app  •  Root: 'logical' = relating to reason or logic</a:t>
+              <a:t>Word Labs  •  wordlabs.app  •  Root: 'logical' = making sense</a:t>
             </a:r>
             <a:endParaRPr lang="en-US" sz="800" dirty="0"/>
           </a:p>
@@ -32802,7 +35082,7 @@
                 <a:ea typeface="Trebuchet MS" pitchFamily="34" charset="-122"/>
                 <a:cs typeface="Trebuchet MS" pitchFamily="34" charset="-120"/>
               </a:rPr>
-              <a:t>psychological</a:t>
+              <a:t>neurological</a:t>
             </a:r>
             <a:endParaRPr lang="en-US" sz="2800" dirty="0"/>
           </a:p>
@@ -32941,7 +35221,7 @@
                 <a:ea typeface="Trebuchet MS" pitchFamily="34" charset="-122"/>
                 <a:cs typeface="Trebuchet MS" pitchFamily="34" charset="-120"/>
               </a:rPr>
-              <a:t>psycho</a:t>
+              <a:t>neuro</a:t>
             </a:r>
             <a:endParaRPr lang="en-US" sz="1300" dirty="0"/>
           </a:p>
@@ -32980,7 +35260,7 @@
                 <a:ea typeface="Calibri" pitchFamily="34" charset="-122"/>
                 <a:cs typeface="Calibri" pitchFamily="34" charset="-120"/>
               </a:rPr>
-              <a:t>mind</a:t>
+              <a:t>nerve; nervous system</a:t>
             </a:r>
             <a:endParaRPr lang="en-US" sz="850" dirty="0"/>
           </a:p>
@@ -33092,7 +35372,7 @@
                 <a:ea typeface="Calibri" pitchFamily="34" charset="-122"/>
                 <a:cs typeface="Calibri" pitchFamily="34" charset="-120"/>
               </a:rPr>
-              <a:t>relating to reason or logic</a:t>
+              <a:t>making sense</a:t>
             </a:r>
             <a:endParaRPr lang="en-US" sz="850" dirty="0"/>
           </a:p>
@@ -33251,7 +35531,7 @@
                 <a:ea typeface="Trebuchet MS" pitchFamily="34" charset="-122"/>
                 <a:cs typeface="Trebuchet MS" pitchFamily="34" charset="-120"/>
               </a:rPr>
-              <a:t>psy</a:t>
+              <a:t>neu</a:t>
             </a:r>
             <a:endParaRPr lang="en-US" sz="1400" dirty="0"/>
           </a:p>
@@ -33356,7 +35636,7 @@
                 <a:ea typeface="Trebuchet MS" pitchFamily="34" charset="-122"/>
                 <a:cs typeface="Trebuchet MS" pitchFamily="34" charset="-120"/>
               </a:rPr>
-              <a:t>cho</a:t>
+              <a:t>ro</a:t>
             </a:r>
             <a:endParaRPr lang="en-US" sz="1400" dirty="0"/>
           </a:p>
@@ -33752,11 +36032,11 @@
         <p:spPr>
           <a:xfrm>
             <a:off x="1874520" y="4096512"/>
-            <a:ext cx="6903720" cy="804672"/>
+            <a:ext cx="6903720" cy="658368"/>
           </a:xfrm>
           <a:prstGeom prst="rect">
             <a:avLst>
-              <a:gd name="adj" fmla="val 6818"/>
+              <a:gd name="adj" fmla="val 8333"/>
             </a:avLst>
           </a:prstGeom>
           <a:solidFill>
@@ -33779,11 +36059,11 @@
         <p:spPr>
           <a:xfrm>
             <a:off x="1951828" y="4169664"/>
-            <a:ext cx="603504" cy="384048"/>
+            <a:ext cx="603504" cy="475488"/>
           </a:xfrm>
           <a:prstGeom prst="rect">
             <a:avLst>
-              <a:gd name="adj" fmla="val 9524"/>
+              <a:gd name="adj" fmla="val 7692"/>
             </a:avLst>
           </a:prstGeom>
           <a:solidFill>
@@ -33806,7 +36086,7 @@
         <p:spPr>
           <a:xfrm>
             <a:off x="1951828" y="4169664"/>
-            <a:ext cx="603504" cy="384048"/>
+            <a:ext cx="603504" cy="475488"/>
           </a:xfrm>
           <a:prstGeom prst="rect">
             <a:avLst/>
@@ -33830,7 +36110,7 @@
                 <a:ea typeface="Trebuchet MS" pitchFamily="34" charset="-122"/>
                 <a:cs typeface="Trebuchet MS" pitchFamily="34" charset="-120"/>
               </a:rPr>
-              <a:t>ps</a:t>
+              <a:t>n</a:t>
             </a:r>
             <a:endParaRPr lang="en-US" sz="900" dirty="0"/>
           </a:p>
@@ -33838,57 +36118,18 @@
       </p:sp>
       <p:sp>
         <p:nvSpPr>
-          <p:cNvPr id="44" name="Text 42"/>
-          <p:cNvSpPr/>
-          <p:nvPr/>
-        </p:nvSpPr>
-        <p:spPr>
-          <a:xfrm>
-            <a:off x="1951828" y="4572000"/>
-            <a:ext cx="603504" cy="219456"/>
-          </a:xfrm>
-          <a:prstGeom prst="rect">
-            <a:avLst/>
-          </a:prstGeom>
-          <a:noFill/>
-          <a:ln/>
-        </p:spPr>
-        <p:txBody>
-          <a:bodyPr wrap="square" lIns="0" tIns="0" rIns="0" bIns="0" rtlCol="0" anchor="t"/>
-          <a:lstStyle/>
-          <a:p>
-            <a:pPr algn="ctr" indent="0" marL="0">
-              <a:buNone/>
-            </a:pPr>
-            <a:r>
-              <a:rPr lang="en-US" sz="750" i="1" dirty="0">
-                <a:solidFill>
-                  <a:srgbClr val="94A3B8"/>
-                </a:solidFill>
-                <a:latin typeface="Calibri" pitchFamily="34" charset="0"/>
-                <a:ea typeface="Calibri" pitchFamily="34" charset="-122"/>
-                <a:cs typeface="Calibri" pitchFamily="34" charset="-120"/>
-              </a:rPr>
-              <a:t>/s/</a:t>
-            </a:r>
-            <a:endParaRPr lang="en-US" sz="750" dirty="0"/>
-          </a:p>
-        </p:txBody>
-      </p:sp>
-      <p:sp>
-        <p:nvSpPr>
-          <p:cNvPr id="45" name="Shape 43"/>
+          <p:cNvPr id="44" name="Shape 42"/>
           <p:cNvSpPr/>
           <p:nvPr/>
         </p:nvSpPr>
         <p:spPr>
           <a:xfrm>
             <a:off x="2605209" y="4169664"/>
-            <a:ext cx="603504" cy="384048"/>
+            <a:ext cx="603504" cy="475488"/>
           </a:xfrm>
           <a:prstGeom prst="rect">
             <a:avLst>
-              <a:gd name="adj" fmla="val 9524"/>
+              <a:gd name="adj" fmla="val 7692"/>
             </a:avLst>
           </a:prstGeom>
           <a:solidFill>
@@ -33904,14 +36145,14 @@
       </p:sp>
       <p:sp>
         <p:nvSpPr>
-          <p:cNvPr id="46" name="Text 44"/>
+          <p:cNvPr id="45" name="Text 43"/>
           <p:cNvSpPr/>
           <p:nvPr/>
         </p:nvSpPr>
         <p:spPr>
           <a:xfrm>
             <a:off x="2605209" y="4169664"/>
-            <a:ext cx="603504" cy="384048"/>
+            <a:ext cx="603504" cy="475488"/>
           </a:xfrm>
           <a:prstGeom prst="rect">
             <a:avLst/>
@@ -33935,7 +36176,7 @@
                 <a:ea typeface="Trebuchet MS" pitchFamily="34" charset="-122"/>
                 <a:cs typeface="Trebuchet MS" pitchFamily="34" charset="-120"/>
               </a:rPr>
-              <a:t>y</a:t>
+              <a:t>eu</a:t>
             </a:r>
             <a:endParaRPr lang="en-US" sz="900" dirty="0"/>
           </a:p>
@@ -33943,18 +36184,18 @@
       </p:sp>
       <p:sp>
         <p:nvSpPr>
-          <p:cNvPr id="47" name="Shape 45"/>
+          <p:cNvPr id="46" name="Shape 44"/>
           <p:cNvSpPr/>
           <p:nvPr/>
         </p:nvSpPr>
         <p:spPr>
           <a:xfrm>
             <a:off x="3258589" y="4169664"/>
-            <a:ext cx="603504" cy="384048"/>
+            <a:ext cx="603504" cy="475488"/>
           </a:xfrm>
           <a:prstGeom prst="rect">
             <a:avLst>
-              <a:gd name="adj" fmla="val 9524"/>
+              <a:gd name="adj" fmla="val 7692"/>
             </a:avLst>
           </a:prstGeom>
           <a:solidFill>
@@ -33970,14 +36211,14 @@
       </p:sp>
       <p:sp>
         <p:nvSpPr>
-          <p:cNvPr id="48" name="Text 46"/>
+          <p:cNvPr id="47" name="Text 45"/>
           <p:cNvSpPr/>
           <p:nvPr/>
         </p:nvSpPr>
         <p:spPr>
           <a:xfrm>
             <a:off x="3258589" y="4169664"/>
-            <a:ext cx="603504" cy="384048"/>
+            <a:ext cx="603504" cy="475488"/>
           </a:xfrm>
           <a:prstGeom prst="rect">
             <a:avLst/>
@@ -34001,7 +36242,7 @@
                 <a:ea typeface="Trebuchet MS" pitchFamily="34" charset="-122"/>
                 <a:cs typeface="Trebuchet MS" pitchFamily="34" charset="-120"/>
               </a:rPr>
-              <a:t>ch</a:t>
+              <a:t>r</a:t>
             </a:r>
             <a:endParaRPr lang="en-US" sz="900" dirty="0"/>
           </a:p>
@@ -34009,80 +36250,41 @@
       </p:sp>
       <p:sp>
         <p:nvSpPr>
+          <p:cNvPr id="48" name="Shape 46"/>
+          <p:cNvSpPr/>
+          <p:nvPr/>
+        </p:nvSpPr>
+        <p:spPr>
+          <a:xfrm>
+            <a:off x="3911969" y="4169664"/>
+            <a:ext cx="603504" cy="475488"/>
+          </a:xfrm>
+          <a:prstGeom prst="rect">
+            <a:avLst>
+              <a:gd name="adj" fmla="val 7692"/>
+            </a:avLst>
+          </a:prstGeom>
+          <a:solidFill>
+            <a:srgbClr val="FFFFFF"/>
+          </a:solidFill>
+          <a:ln w="12700">
+            <a:solidFill>
+              <a:srgbClr val="DB2777"/>
+            </a:solidFill>
+            <a:prstDash val="solid"/>
+          </a:ln>
+        </p:spPr>
+      </p:sp>
+      <p:sp>
+        <p:nvSpPr>
           <p:cNvPr id="49" name="Text 47"/>
           <p:cNvSpPr/>
           <p:nvPr/>
         </p:nvSpPr>
         <p:spPr>
           <a:xfrm>
-            <a:off x="3258589" y="4572000"/>
-            <a:ext cx="603504" cy="219456"/>
-          </a:xfrm>
-          <a:prstGeom prst="rect">
-            <a:avLst/>
-          </a:prstGeom>
-          <a:noFill/>
-          <a:ln/>
-        </p:spPr>
-        <p:txBody>
-          <a:bodyPr wrap="square" lIns="0" tIns="0" rIns="0" bIns="0" rtlCol="0" anchor="t"/>
-          <a:lstStyle/>
-          <a:p>
-            <a:pPr algn="ctr" indent="0" marL="0">
-              <a:buNone/>
-            </a:pPr>
-            <a:r>
-              <a:rPr lang="en-US" sz="750" i="1" dirty="0">
-                <a:solidFill>
-                  <a:srgbClr val="94A3B8"/>
-                </a:solidFill>
-                <a:latin typeface="Calibri" pitchFamily="34" charset="0"/>
-                <a:ea typeface="Calibri" pitchFamily="34" charset="-122"/>
-                <a:cs typeface="Calibri" pitchFamily="34" charset="-120"/>
-              </a:rPr>
-              <a:t>/k/</a:t>
-            </a:r>
-            <a:endParaRPr lang="en-US" sz="750" dirty="0"/>
-          </a:p>
-        </p:txBody>
-      </p:sp>
-      <p:sp>
-        <p:nvSpPr>
-          <p:cNvPr id="50" name="Shape 48"/>
-          <p:cNvSpPr/>
-          <p:nvPr/>
-        </p:nvSpPr>
-        <p:spPr>
-          <a:xfrm>
             <a:off x="3911969" y="4169664"/>
-            <a:ext cx="603504" cy="384048"/>
-          </a:xfrm>
-          <a:prstGeom prst="rect">
-            <a:avLst>
-              <a:gd name="adj" fmla="val 9524"/>
-            </a:avLst>
-          </a:prstGeom>
-          <a:solidFill>
-            <a:srgbClr val="FFFFFF"/>
-          </a:solidFill>
-          <a:ln w="12700">
-            <a:solidFill>
-              <a:srgbClr val="DB2777"/>
-            </a:solidFill>
-            <a:prstDash val="solid"/>
-          </a:ln>
-        </p:spPr>
-      </p:sp>
-      <p:sp>
-        <p:nvSpPr>
-          <p:cNvPr id="51" name="Text 49"/>
-          <p:cNvSpPr/>
-          <p:nvPr/>
-        </p:nvSpPr>
-        <p:spPr>
-          <a:xfrm>
-            <a:off x="3911969" y="4169664"/>
-            <a:ext cx="603504" cy="384048"/>
+            <a:ext cx="603504" cy="475488"/>
           </a:xfrm>
           <a:prstGeom prst="rect">
             <a:avLst/>
@@ -34114,18 +36316,18 @@
       </p:sp>
       <p:sp>
         <p:nvSpPr>
-          <p:cNvPr id="52" name="Shape 50"/>
+          <p:cNvPr id="50" name="Shape 48"/>
           <p:cNvSpPr/>
           <p:nvPr/>
         </p:nvSpPr>
         <p:spPr>
           <a:xfrm>
             <a:off x="4565350" y="4169664"/>
-            <a:ext cx="603504" cy="384048"/>
+            <a:ext cx="603504" cy="475488"/>
           </a:xfrm>
           <a:prstGeom prst="rect">
             <a:avLst>
-              <a:gd name="adj" fmla="val 9524"/>
+              <a:gd name="adj" fmla="val 7692"/>
             </a:avLst>
           </a:prstGeom>
           <a:solidFill>
@@ -34141,14 +36343,14 @@
       </p:sp>
       <p:sp>
         <p:nvSpPr>
-          <p:cNvPr id="53" name="Text 51"/>
+          <p:cNvPr id="51" name="Text 49"/>
           <p:cNvSpPr/>
           <p:nvPr/>
         </p:nvSpPr>
         <p:spPr>
           <a:xfrm>
             <a:off x="4565350" y="4169664"/>
-            <a:ext cx="603504" cy="384048"/>
+            <a:ext cx="603504" cy="475488"/>
           </a:xfrm>
           <a:prstGeom prst="rect">
             <a:avLst/>
@@ -34180,18 +36382,18 @@
       </p:sp>
       <p:sp>
         <p:nvSpPr>
-          <p:cNvPr id="54" name="Shape 52"/>
+          <p:cNvPr id="52" name="Shape 50"/>
           <p:cNvSpPr/>
           <p:nvPr/>
         </p:nvSpPr>
         <p:spPr>
           <a:xfrm>
             <a:off x="5218730" y="4169664"/>
-            <a:ext cx="603504" cy="384048"/>
+            <a:ext cx="603504" cy="475488"/>
           </a:xfrm>
           <a:prstGeom prst="rect">
             <a:avLst>
-              <a:gd name="adj" fmla="val 9524"/>
+              <a:gd name="adj" fmla="val 7692"/>
             </a:avLst>
           </a:prstGeom>
           <a:solidFill>
@@ -34207,14 +36409,14 @@
       </p:sp>
       <p:sp>
         <p:nvSpPr>
-          <p:cNvPr id="55" name="Text 53"/>
+          <p:cNvPr id="53" name="Text 51"/>
           <p:cNvSpPr/>
           <p:nvPr/>
         </p:nvSpPr>
         <p:spPr>
           <a:xfrm>
             <a:off x="5218730" y="4169664"/>
-            <a:ext cx="603504" cy="384048"/>
+            <a:ext cx="603504" cy="475488"/>
           </a:xfrm>
           <a:prstGeom prst="rect">
             <a:avLst/>
@@ -34246,18 +36448,18 @@
       </p:sp>
       <p:sp>
         <p:nvSpPr>
-          <p:cNvPr id="56" name="Shape 54"/>
+          <p:cNvPr id="54" name="Shape 52"/>
           <p:cNvSpPr/>
           <p:nvPr/>
         </p:nvSpPr>
         <p:spPr>
           <a:xfrm>
             <a:off x="5872111" y="4169664"/>
-            <a:ext cx="603504" cy="384048"/>
+            <a:ext cx="603504" cy="475488"/>
           </a:xfrm>
           <a:prstGeom prst="rect">
             <a:avLst>
-              <a:gd name="adj" fmla="val 9524"/>
+              <a:gd name="adj" fmla="val 7692"/>
             </a:avLst>
           </a:prstGeom>
           <a:solidFill>
@@ -34273,14 +36475,14 @@
       </p:sp>
       <p:sp>
         <p:nvSpPr>
-          <p:cNvPr id="57" name="Text 55"/>
+          <p:cNvPr id="55" name="Text 53"/>
           <p:cNvSpPr/>
           <p:nvPr/>
         </p:nvSpPr>
         <p:spPr>
           <a:xfrm>
             <a:off x="5872111" y="4169664"/>
-            <a:ext cx="603504" cy="384048"/>
+            <a:ext cx="603504" cy="475488"/>
           </a:xfrm>
           <a:prstGeom prst="rect">
             <a:avLst/>
@@ -34312,18 +36514,18 @@
       </p:sp>
       <p:sp>
         <p:nvSpPr>
-          <p:cNvPr id="58" name="Shape 56"/>
+          <p:cNvPr id="56" name="Shape 54"/>
           <p:cNvSpPr/>
           <p:nvPr/>
         </p:nvSpPr>
         <p:spPr>
           <a:xfrm>
             <a:off x="6525491" y="4169664"/>
-            <a:ext cx="603504" cy="384048"/>
+            <a:ext cx="603504" cy="475488"/>
           </a:xfrm>
           <a:prstGeom prst="rect">
             <a:avLst>
-              <a:gd name="adj" fmla="val 9524"/>
+              <a:gd name="adj" fmla="val 7692"/>
             </a:avLst>
           </a:prstGeom>
           <a:solidFill>
@@ -34339,14 +36541,14 @@
       </p:sp>
       <p:sp>
         <p:nvSpPr>
-          <p:cNvPr id="59" name="Text 57"/>
+          <p:cNvPr id="57" name="Text 55"/>
           <p:cNvSpPr/>
           <p:nvPr/>
         </p:nvSpPr>
         <p:spPr>
           <a:xfrm>
             <a:off x="6525491" y="4169664"/>
-            <a:ext cx="603504" cy="384048"/>
+            <a:ext cx="603504" cy="475488"/>
           </a:xfrm>
           <a:prstGeom prst="rect">
             <a:avLst/>
@@ -34378,18 +36580,18 @@
       </p:sp>
       <p:sp>
         <p:nvSpPr>
-          <p:cNvPr id="60" name="Shape 58"/>
+          <p:cNvPr id="58" name="Shape 56"/>
           <p:cNvSpPr/>
           <p:nvPr/>
         </p:nvSpPr>
         <p:spPr>
           <a:xfrm>
             <a:off x="7178871" y="4169664"/>
-            <a:ext cx="603504" cy="384048"/>
+            <a:ext cx="603504" cy="475488"/>
           </a:xfrm>
           <a:prstGeom prst="rect">
             <a:avLst>
-              <a:gd name="adj" fmla="val 9524"/>
+              <a:gd name="adj" fmla="val 7692"/>
             </a:avLst>
           </a:prstGeom>
           <a:solidFill>
@@ -34405,14 +36607,14 @@
       </p:sp>
       <p:sp>
         <p:nvSpPr>
-          <p:cNvPr id="61" name="Text 59"/>
+          <p:cNvPr id="59" name="Text 57"/>
           <p:cNvSpPr/>
           <p:nvPr/>
         </p:nvSpPr>
         <p:spPr>
           <a:xfrm>
             <a:off x="7178871" y="4169664"/>
-            <a:ext cx="603504" cy="384048"/>
+            <a:ext cx="603504" cy="475488"/>
           </a:xfrm>
           <a:prstGeom prst="rect">
             <a:avLst/>
@@ -34444,57 +36646,18 @@
       </p:sp>
       <p:sp>
         <p:nvSpPr>
-          <p:cNvPr id="62" name="Text 60"/>
-          <p:cNvSpPr/>
-          <p:nvPr/>
-        </p:nvSpPr>
-        <p:spPr>
-          <a:xfrm>
-            <a:off x="7178871" y="4572000"/>
-            <a:ext cx="603504" cy="219456"/>
-          </a:xfrm>
-          <a:prstGeom prst="rect">
-            <a:avLst/>
-          </a:prstGeom>
-          <a:noFill/>
-          <a:ln/>
-        </p:spPr>
-        <p:txBody>
-          <a:bodyPr wrap="square" lIns="0" tIns="0" rIns="0" bIns="0" rtlCol="0" anchor="t"/>
-          <a:lstStyle/>
-          <a:p>
-            <a:pPr algn="ctr" indent="0" marL="0">
-              <a:buNone/>
-            </a:pPr>
-            <a:r>
-              <a:rPr lang="en-US" sz="750" i="1" dirty="0">
-                <a:solidFill>
-                  <a:srgbClr val="94A3B8"/>
-                </a:solidFill>
-                <a:latin typeface="Calibri" pitchFamily="34" charset="0"/>
-                <a:ea typeface="Calibri" pitchFamily="34" charset="-122"/>
-                <a:cs typeface="Calibri" pitchFamily="34" charset="-120"/>
-              </a:rPr>
-              <a:t>/k/</a:t>
-            </a:r>
-            <a:endParaRPr lang="en-US" sz="750" dirty="0"/>
-          </a:p>
-        </p:txBody>
-      </p:sp>
-      <p:sp>
-        <p:nvSpPr>
-          <p:cNvPr id="63" name="Shape 61"/>
+          <p:cNvPr id="60" name="Shape 58"/>
           <p:cNvSpPr/>
           <p:nvPr/>
         </p:nvSpPr>
         <p:spPr>
           <a:xfrm>
             <a:off x="7832252" y="4169664"/>
-            <a:ext cx="603504" cy="384048"/>
+            <a:ext cx="603504" cy="475488"/>
           </a:xfrm>
           <a:prstGeom prst="rect">
             <a:avLst>
-              <a:gd name="adj" fmla="val 9524"/>
+              <a:gd name="adj" fmla="val 7692"/>
             </a:avLst>
           </a:prstGeom>
           <a:solidFill>
@@ -34510,14 +36673,14 @@
       </p:sp>
       <p:sp>
         <p:nvSpPr>
-          <p:cNvPr id="64" name="Text 62"/>
+          <p:cNvPr id="61" name="Text 59"/>
           <p:cNvSpPr/>
           <p:nvPr/>
         </p:nvSpPr>
         <p:spPr>
           <a:xfrm>
             <a:off x="7832252" y="4169664"/>
-            <a:ext cx="603504" cy="384048"/>
+            <a:ext cx="603504" cy="475488"/>
           </a:xfrm>
           <a:prstGeom prst="rect">
             <a:avLst/>
@@ -34833,7 +36996,7 @@
                 <a:ea typeface="Calibri" pitchFamily="34" charset="-122"/>
                 <a:cs typeface="Calibri" pitchFamily="34" charset="-120"/>
               </a:rPr>
-              <a:t>Word Labs  •  wordlabs.app  •  Root: 'logical' = relating to reason or logic</a:t>
+              <a:t>Word Labs  •  wordlabs.app  •  Root: 'logical' = making sense</a:t>
             </a:r>
             <a:endParaRPr lang="en-US" sz="800" dirty="0"/>
           </a:p>
@@ -36002,7 +38165,7 @@
                 <a:ea typeface="Calibri" pitchFamily="34" charset="-122"/>
                 <a:cs typeface="Calibri" pitchFamily="34" charset="-120"/>
               </a:rPr>
-              <a:t>Word Labs  •  wordlabs.app  •  Root: 'logical' = relating to reason or logic</a:t>
+              <a:t>Word Labs  •  wordlabs.app  •  Root: 'logical' = making sense</a:t>
             </a:r>
             <a:endParaRPr lang="en-US" sz="800" dirty="0"/>
           </a:p>
@@ -36495,7 +38658,7 @@
                 <a:ea typeface="Trebuchet MS" pitchFamily="34" charset="-122"/>
                 <a:cs typeface="Trebuchet MS" pitchFamily="34" charset="-120"/>
               </a:rPr>
-              <a:t>geo-</a:t>
+              <a:t>chrono-</a:t>
             </a:r>
             <a:endParaRPr lang="en-US" sz="1300" dirty="0"/>
           </a:p>
@@ -36541,7 +38704,7 @@
             <a:avLst/>
           </a:prstGeom>
           <a:solidFill>
-            <a:srgbClr val="FCE7F3"/>
+            <a:srgbClr val="F1F5F9"/>
           </a:solidFill>
           <a:ln w="12700">
             <a:solidFill>
@@ -36553,14 +38716,39 @@
       </p:sp>
       <p:sp>
         <p:nvSpPr>
-          <p:cNvPr id="27" name="Text 25"/>
-          <p:cNvSpPr/>
-          <p:nvPr/>
-        </p:nvSpPr>
-        <p:spPr>
-          <a:xfrm>
-            <a:off x="5943600" y="1984248"/>
-            <a:ext cx="2834640" cy="402336"/>
+          <p:cNvPr id="27" name="Shape 25"/>
+          <p:cNvSpPr/>
+          <p:nvPr/>
+        </p:nvSpPr>
+        <p:spPr>
+          <a:xfrm>
+            <a:off x="365760" y="2404872"/>
+            <a:ext cx="2468880" cy="402336"/>
+          </a:xfrm>
+          <a:prstGeom prst="rect">
+            <a:avLst/>
+          </a:prstGeom>
+          <a:solidFill>
+            <a:srgbClr val="DDD6FE"/>
+          </a:solidFill>
+          <a:ln w="12700">
+            <a:solidFill>
+              <a:srgbClr val="E2E8F0"/>
+            </a:solidFill>
+            <a:prstDash val="solid"/>
+          </a:ln>
+        </p:spPr>
+      </p:sp>
+      <p:sp>
+        <p:nvSpPr>
+          <p:cNvPr id="28" name="Text 26"/>
+          <p:cNvSpPr/>
+          <p:nvPr/>
+        </p:nvSpPr>
+        <p:spPr>
+          <a:xfrm>
+            <a:off x="365760" y="2404872"/>
+            <a:ext cx="2468880" cy="402336"/>
           </a:xfrm>
           <a:prstGeom prst="rect">
             <a:avLst/>
@@ -36578,13 +38766,13 @@
             <a:r>
               <a:rPr lang="en-US" sz="1300" b="1" dirty="0">
                 <a:solidFill>
-                  <a:srgbClr val="9D174D"/>
+                  <a:srgbClr val="4C1D95"/>
                 </a:solidFill>
                 <a:latin typeface="Trebuchet MS" pitchFamily="34" charset="0"/>
                 <a:ea typeface="Trebuchet MS" pitchFamily="34" charset="-122"/>
                 <a:cs typeface="Trebuchet MS" pitchFamily="34" charset="-120"/>
               </a:rPr>
-              <a:t>-ness</a:t>
+              <a:t>eco-</a:t>
             </a:r>
             <a:endParaRPr lang="en-US" sz="1300" dirty="0"/>
           </a:p>
@@ -36592,13 +38780,63 @@
       </p:sp>
       <p:sp>
         <p:nvSpPr>
-          <p:cNvPr id="28" name="Shape 26"/>
-          <p:cNvSpPr/>
-          <p:nvPr/>
-        </p:nvSpPr>
-        <p:spPr>
-          <a:xfrm>
-            <a:off x="365760" y="2404872"/>
+          <p:cNvPr id="29" name="Shape 27"/>
+          <p:cNvSpPr/>
+          <p:nvPr/>
+        </p:nvSpPr>
+        <p:spPr>
+          <a:xfrm>
+            <a:off x="2971800" y="2404872"/>
+            <a:ext cx="2834640" cy="402336"/>
+          </a:xfrm>
+          <a:prstGeom prst="rect">
+            <a:avLst/>
+          </a:prstGeom>
+          <a:solidFill>
+            <a:srgbClr val="F8FAFC"/>
+          </a:solidFill>
+          <a:ln w="12700">
+            <a:solidFill>
+              <a:srgbClr val="E2E8F0"/>
+            </a:solidFill>
+            <a:prstDash val="solid"/>
+          </a:ln>
+        </p:spPr>
+      </p:sp>
+      <p:sp>
+        <p:nvSpPr>
+          <p:cNvPr id="30" name="Shape 28"/>
+          <p:cNvSpPr/>
+          <p:nvPr/>
+        </p:nvSpPr>
+        <p:spPr>
+          <a:xfrm>
+            <a:off x="5943600" y="2404872"/>
+            <a:ext cx="2834640" cy="402336"/>
+          </a:xfrm>
+          <a:prstGeom prst="rect">
+            <a:avLst/>
+          </a:prstGeom>
+          <a:solidFill>
+            <a:srgbClr val="F8FAFC"/>
+          </a:solidFill>
+          <a:ln w="12700">
+            <a:solidFill>
+              <a:srgbClr val="E2E8F0"/>
+            </a:solidFill>
+            <a:prstDash val="solid"/>
+          </a:ln>
+        </p:spPr>
+      </p:sp>
+      <p:sp>
+        <p:nvSpPr>
+          <p:cNvPr id="31" name="Shape 29"/>
+          <p:cNvSpPr/>
+          <p:nvPr/>
+        </p:nvSpPr>
+        <p:spPr>
+          <a:xfrm>
+            <a:off x="365760" y="2825496"/>
             <a:ext cx="2468880" cy="402336"/>
           </a:xfrm>
           <a:prstGeom prst="rect">
@@ -36617,13 +38855,13 @@
       </p:sp>
       <p:sp>
         <p:nvSpPr>
-          <p:cNvPr id="29" name="Text 27"/>
-          <p:cNvSpPr/>
-          <p:nvPr/>
-        </p:nvSpPr>
-        <p:spPr>
-          <a:xfrm>
-            <a:off x="365760" y="2404872"/>
+          <p:cNvPr id="32" name="Text 30"/>
+          <p:cNvSpPr/>
+          <p:nvPr/>
+        </p:nvSpPr>
+        <p:spPr>
+          <a:xfrm>
+            <a:off x="365760" y="2825496"/>
             <a:ext cx="2468880" cy="402336"/>
           </a:xfrm>
           <a:prstGeom prst="rect">
@@ -36648,7 +38886,7 @@
                 <a:ea typeface="Trebuchet MS" pitchFamily="34" charset="-122"/>
                 <a:cs typeface="Trebuchet MS" pitchFamily="34" charset="-120"/>
               </a:rPr>
-              <a:t>chrono-</a:t>
+              <a:t>geo-</a:t>
             </a:r>
             <a:endParaRPr lang="en-US" sz="1300" dirty="0"/>
           </a:p>
@@ -36656,20 +38894,20 @@
       </p:sp>
       <p:sp>
         <p:nvSpPr>
-          <p:cNvPr id="30" name="Shape 28"/>
-          <p:cNvSpPr/>
-          <p:nvPr/>
-        </p:nvSpPr>
-        <p:spPr>
-          <a:xfrm>
-            <a:off x="2971800" y="2404872"/>
+          <p:cNvPr id="33" name="Shape 31"/>
+          <p:cNvSpPr/>
+          <p:nvPr/>
+        </p:nvSpPr>
+        <p:spPr>
+          <a:xfrm>
+            <a:off x="2971800" y="2825496"/>
             <a:ext cx="2834640" cy="402336"/>
           </a:xfrm>
           <a:prstGeom prst="rect">
             <a:avLst/>
           </a:prstGeom>
           <a:solidFill>
-            <a:srgbClr val="F8FAFC"/>
+            <a:srgbClr val="F1F5F9"/>
           </a:solidFill>
           <a:ln w="12700">
             <a:solidFill>
@@ -36681,20 +38919,20 @@
       </p:sp>
       <p:sp>
         <p:nvSpPr>
-          <p:cNvPr id="31" name="Shape 29"/>
-          <p:cNvSpPr/>
-          <p:nvPr/>
-        </p:nvSpPr>
-        <p:spPr>
-          <a:xfrm>
-            <a:off x="5943600" y="2404872"/>
+          <p:cNvPr id="34" name="Shape 32"/>
+          <p:cNvSpPr/>
+          <p:nvPr/>
+        </p:nvSpPr>
+        <p:spPr>
+          <a:xfrm>
+            <a:off x="5943600" y="2825496"/>
             <a:ext cx="2834640" cy="402336"/>
           </a:xfrm>
           <a:prstGeom prst="rect">
             <a:avLst/>
           </a:prstGeom>
           <a:solidFill>
-            <a:srgbClr val="FCE7F3"/>
+            <a:srgbClr val="F1F5F9"/>
           </a:solidFill>
           <a:ln w="12700">
             <a:solidFill>
@@ -36706,14 +38944,39 @@
       </p:sp>
       <p:sp>
         <p:nvSpPr>
-          <p:cNvPr id="32" name="Text 30"/>
-          <p:cNvSpPr/>
-          <p:nvPr/>
-        </p:nvSpPr>
-        <p:spPr>
-          <a:xfrm>
-            <a:off x="5943600" y="2404872"/>
-            <a:ext cx="2834640" cy="402336"/>
+          <p:cNvPr id="35" name="Shape 33"/>
+          <p:cNvSpPr/>
+          <p:nvPr/>
+        </p:nvSpPr>
+        <p:spPr>
+          <a:xfrm>
+            <a:off x="365760" y="3246120"/>
+            <a:ext cx="2468880" cy="402336"/>
+          </a:xfrm>
+          <a:prstGeom prst="rect">
+            <a:avLst/>
+          </a:prstGeom>
+          <a:solidFill>
+            <a:srgbClr val="DDD6FE"/>
+          </a:solidFill>
+          <a:ln w="12700">
+            <a:solidFill>
+              <a:srgbClr val="E2E8F0"/>
+            </a:solidFill>
+            <a:prstDash val="solid"/>
+          </a:ln>
+        </p:spPr>
+      </p:sp>
+      <p:sp>
+        <p:nvSpPr>
+          <p:cNvPr id="36" name="Text 34"/>
+          <p:cNvSpPr/>
+          <p:nvPr/>
+        </p:nvSpPr>
+        <p:spPr>
+          <a:xfrm>
+            <a:off x="365760" y="3246120"/>
+            <a:ext cx="2468880" cy="402336"/>
           </a:xfrm>
           <a:prstGeom prst="rect">
             <a:avLst/>
@@ -36731,13 +38994,13 @@
             <a:r>
               <a:rPr lang="en-US" sz="1300" b="1" dirty="0">
                 <a:solidFill>
-                  <a:srgbClr val="9D174D"/>
+                  <a:srgbClr val="4C1D95"/>
                 </a:solidFill>
                 <a:latin typeface="Trebuchet MS" pitchFamily="34" charset="0"/>
                 <a:ea typeface="Trebuchet MS" pitchFamily="34" charset="-122"/>
                 <a:cs typeface="Trebuchet MS" pitchFamily="34" charset="-120"/>
               </a:rPr>
-              <a:t>-ity</a:t>
+              <a:t>in-</a:t>
             </a:r>
             <a:endParaRPr lang="en-US" sz="1300" dirty="0"/>
           </a:p>
@@ -36745,13 +39008,63 @@
       </p:sp>
       <p:sp>
         <p:nvSpPr>
-          <p:cNvPr id="33" name="Shape 31"/>
-          <p:cNvSpPr/>
-          <p:nvPr/>
-        </p:nvSpPr>
-        <p:spPr>
-          <a:xfrm>
-            <a:off x="365760" y="2825496"/>
+          <p:cNvPr id="37" name="Shape 35"/>
+          <p:cNvSpPr/>
+          <p:nvPr/>
+        </p:nvSpPr>
+        <p:spPr>
+          <a:xfrm>
+            <a:off x="2971800" y="3246120"/>
+            <a:ext cx="2834640" cy="402336"/>
+          </a:xfrm>
+          <a:prstGeom prst="rect">
+            <a:avLst/>
+          </a:prstGeom>
+          <a:solidFill>
+            <a:srgbClr val="F8FAFC"/>
+          </a:solidFill>
+          <a:ln w="12700">
+            <a:solidFill>
+              <a:srgbClr val="E2E8F0"/>
+            </a:solidFill>
+            <a:prstDash val="solid"/>
+          </a:ln>
+        </p:spPr>
+      </p:sp>
+      <p:sp>
+        <p:nvSpPr>
+          <p:cNvPr id="38" name="Shape 36"/>
+          <p:cNvSpPr/>
+          <p:nvPr/>
+        </p:nvSpPr>
+        <p:spPr>
+          <a:xfrm>
+            <a:off x="5943600" y="3246120"/>
+            <a:ext cx="2834640" cy="402336"/>
+          </a:xfrm>
+          <a:prstGeom prst="rect">
+            <a:avLst/>
+          </a:prstGeom>
+          <a:solidFill>
+            <a:srgbClr val="F8FAFC"/>
+          </a:solidFill>
+          <a:ln w="12700">
+            <a:solidFill>
+              <a:srgbClr val="E2E8F0"/>
+            </a:solidFill>
+            <a:prstDash val="solid"/>
+          </a:ln>
+        </p:spPr>
+      </p:sp>
+      <p:sp>
+        <p:nvSpPr>
+          <p:cNvPr id="39" name="Shape 37"/>
+          <p:cNvSpPr/>
+          <p:nvPr/>
+        </p:nvSpPr>
+        <p:spPr>
+          <a:xfrm>
+            <a:off x="365760" y="3666744"/>
             <a:ext cx="2468880" cy="402336"/>
           </a:xfrm>
           <a:prstGeom prst="rect">
@@ -36770,13 +39083,13 @@
       </p:sp>
       <p:sp>
         <p:nvSpPr>
-          <p:cNvPr id="34" name="Text 32"/>
-          <p:cNvSpPr/>
-          <p:nvPr/>
-        </p:nvSpPr>
-        <p:spPr>
-          <a:xfrm>
-            <a:off x="365760" y="2825496"/>
+          <p:cNvPr id="40" name="Text 38"/>
+          <p:cNvSpPr/>
+          <p:nvPr/>
+        </p:nvSpPr>
+        <p:spPr>
+          <a:xfrm>
+            <a:off x="365760" y="3666744"/>
             <a:ext cx="2468880" cy="402336"/>
           </a:xfrm>
           <a:prstGeom prst="rect">
@@ -36801,7 +39114,7 @@
                 <a:ea typeface="Trebuchet MS" pitchFamily="34" charset="-122"/>
                 <a:cs typeface="Trebuchet MS" pitchFamily="34" charset="-120"/>
               </a:rPr>
-              <a:t>psycho-</a:t>
+              <a:t>neuro-</a:t>
             </a:r>
             <a:endParaRPr lang="en-US" sz="1300" dirty="0"/>
           </a:p>
@@ -36809,13 +39122,13 @@
       </p:sp>
       <p:sp>
         <p:nvSpPr>
-          <p:cNvPr id="35" name="Shape 33"/>
-          <p:cNvSpPr/>
-          <p:nvPr/>
-        </p:nvSpPr>
-        <p:spPr>
-          <a:xfrm>
-            <a:off x="2971800" y="2825496"/>
+          <p:cNvPr id="41" name="Shape 39"/>
+          <p:cNvSpPr/>
+          <p:nvPr/>
+        </p:nvSpPr>
+        <p:spPr>
+          <a:xfrm>
+            <a:off x="2971800" y="3666744"/>
             <a:ext cx="2834640" cy="402336"/>
           </a:xfrm>
           <a:prstGeom prst="rect">
@@ -36834,20 +39147,20 @@
       </p:sp>
       <p:sp>
         <p:nvSpPr>
-          <p:cNvPr id="36" name="Shape 34"/>
-          <p:cNvSpPr/>
-          <p:nvPr/>
-        </p:nvSpPr>
-        <p:spPr>
-          <a:xfrm>
-            <a:off x="5943600" y="2825496"/>
+          <p:cNvPr id="42" name="Shape 40"/>
+          <p:cNvSpPr/>
+          <p:nvPr/>
+        </p:nvSpPr>
+        <p:spPr>
+          <a:xfrm>
+            <a:off x="5943600" y="3666744"/>
             <a:ext cx="2834640" cy="402336"/>
           </a:xfrm>
           <a:prstGeom prst="rect">
             <a:avLst/>
           </a:prstGeom>
           <a:solidFill>
-            <a:srgbClr val="FCE7F3"/>
+            <a:srgbClr val="F1F5F9"/>
           </a:solidFill>
           <a:ln w="12700">
             <a:solidFill>
@@ -36859,230 +39172,236 @@
       </p:sp>
       <p:sp>
         <p:nvSpPr>
-          <p:cNvPr id="37" name="Text 35"/>
-          <p:cNvSpPr/>
-          <p:nvPr/>
-        </p:nvSpPr>
-        <p:spPr>
-          <a:xfrm>
-            <a:off x="5943600" y="2825496"/>
-            <a:ext cx="2834640" cy="402336"/>
-          </a:xfrm>
-          <a:prstGeom prst="rect">
-            <a:avLst/>
-          </a:prstGeom>
-          <a:noFill/>
-          <a:ln/>
-        </p:spPr>
-        <p:txBody>
-          <a:bodyPr wrap="square" lIns="0" tIns="0" rIns="0" bIns="0" rtlCol="0" anchor="ctr"/>
-          <a:lstStyle/>
-          <a:p>
-            <a:pPr algn="ctr" indent="0" marL="0">
-              <a:buNone/>
-            </a:pPr>
-            <a:r>
-              <a:rPr lang="en-US" sz="1300" b="1" dirty="0">
-                <a:solidFill>
-                  <a:srgbClr val="9D174D"/>
+          <p:cNvPr id="43" name="Text 41"/>
+          <p:cNvSpPr/>
+          <p:nvPr/>
+        </p:nvSpPr>
+        <p:spPr>
+          <a:xfrm>
+            <a:off x="365760" y="3611880"/>
+            <a:ext cx="1828800" cy="347472"/>
+          </a:xfrm>
+          <a:prstGeom prst="rect">
+            <a:avLst/>
+          </a:prstGeom>
+          <a:noFill/>
+          <a:ln/>
+        </p:spPr>
+        <p:txBody>
+          <a:bodyPr wrap="square" lIns="0" tIns="0" rIns="0" bIns="0" rtlCol="0" anchor="ctr"/>
+          <a:lstStyle/>
+          <a:p>
+            <a:pPr algn="l" indent="0" marL="0">
+              <a:buNone/>
+            </a:pPr>
+            <a:r>
+              <a:rPr lang="en-US" sz="1200" b="1" dirty="0">
+                <a:solidFill>
+                  <a:srgbClr val="0F172A"/>
                 </a:solidFill>
                 <a:latin typeface="Trebuchet MS" pitchFamily="34" charset="0"/>
                 <a:ea typeface="Trebuchet MS" pitchFamily="34" charset="-122"/>
                 <a:cs typeface="Trebuchet MS" pitchFamily="34" charset="-120"/>
               </a:rPr>
-              <a:t>-al</a:t>
-            </a:r>
-            <a:endParaRPr lang="en-US" sz="1300" dirty="0"/>
-          </a:p>
-        </p:txBody>
-      </p:sp>
-      <p:sp>
-        <p:nvSpPr>
-          <p:cNvPr id="38" name="Shape 36"/>
-          <p:cNvSpPr/>
-          <p:nvPr/>
-        </p:nvSpPr>
-        <p:spPr>
-          <a:xfrm>
-            <a:off x="365760" y="3246120"/>
-            <a:ext cx="2468880" cy="402336"/>
-          </a:xfrm>
-          <a:prstGeom prst="rect">
-            <a:avLst/>
-          </a:prstGeom>
-          <a:solidFill>
-            <a:srgbClr val="DDD6FE"/>
-          </a:solidFill>
-          <a:ln w="12700">
-            <a:solidFill>
-              <a:srgbClr val="E2E8F0"/>
-            </a:solidFill>
-            <a:prstDash val="solid"/>
-          </a:ln>
-        </p:spPr>
-      </p:sp>
-      <p:sp>
-        <p:nvSpPr>
-          <p:cNvPr id="39" name="Text 37"/>
-          <p:cNvSpPr/>
-          <p:nvPr/>
-        </p:nvSpPr>
-        <p:spPr>
-          <a:xfrm>
-            <a:off x="365760" y="3246120"/>
-            <a:ext cx="2468880" cy="402336"/>
-          </a:xfrm>
-          <a:prstGeom prst="rect">
-            <a:avLst/>
-          </a:prstGeom>
-          <a:noFill/>
-          <a:ln/>
-        </p:spPr>
-        <p:txBody>
-          <a:bodyPr wrap="square" lIns="0" tIns="0" rIns="0" bIns="0" rtlCol="0" anchor="ctr"/>
-          <a:lstStyle/>
-          <a:p>
-            <a:pPr algn="ctr" indent="0" marL="0">
-              <a:buNone/>
-            </a:pPr>
-            <a:r>
-              <a:rPr lang="en-US" sz="1300" b="1" dirty="0">
-                <a:solidFill>
-                  <a:srgbClr val="4C1D95"/>
+              <a:t>Sample words:</a:t>
+            </a:r>
+            <a:endParaRPr lang="en-US" sz="1200" dirty="0"/>
+          </a:p>
+        </p:txBody>
+      </p:sp>
+      <p:sp>
+        <p:nvSpPr>
+          <p:cNvPr id="44" name="Shape 42"/>
+          <p:cNvSpPr/>
+          <p:nvPr/>
+        </p:nvSpPr>
+        <p:spPr>
+          <a:xfrm>
+            <a:off x="365760" y="4023360"/>
+            <a:ext cx="2011680" cy="402336"/>
+          </a:xfrm>
+          <a:prstGeom prst="rect">
+            <a:avLst>
+              <a:gd name="adj" fmla="val 13636"/>
+            </a:avLst>
+          </a:prstGeom>
+          <a:solidFill>
+            <a:srgbClr val="EEF2FF"/>
+          </a:solidFill>
+          <a:ln w="12700">
+            <a:solidFill>
+              <a:srgbClr val="6366F1"/>
+            </a:solidFill>
+            <a:prstDash val="solid"/>
+          </a:ln>
+        </p:spPr>
+      </p:sp>
+      <p:sp>
+        <p:nvSpPr>
+          <p:cNvPr id="45" name="Text 43"/>
+          <p:cNvSpPr/>
+          <p:nvPr/>
+        </p:nvSpPr>
+        <p:spPr>
+          <a:xfrm>
+            <a:off x="365760" y="4023360"/>
+            <a:ext cx="2011680" cy="402336"/>
+          </a:xfrm>
+          <a:prstGeom prst="rect">
+            <a:avLst/>
+          </a:prstGeom>
+          <a:noFill/>
+          <a:ln/>
+        </p:spPr>
+        <p:txBody>
+          <a:bodyPr wrap="square" lIns="0" tIns="0" rIns="0" bIns="0" rtlCol="0" anchor="ctr"/>
+          <a:lstStyle/>
+          <a:p>
+            <a:pPr algn="ctr" indent="0" marL="0">
+              <a:buNone/>
+            </a:pPr>
+            <a:r>
+              <a:rPr lang="en-US" sz="1200" b="1" dirty="0">
+                <a:solidFill>
+                  <a:srgbClr val="4338CA"/>
                 </a:solidFill>
                 <a:latin typeface="Trebuchet MS" pitchFamily="34" charset="0"/>
                 <a:ea typeface="Trebuchet MS" pitchFamily="34" charset="-122"/>
                 <a:cs typeface="Trebuchet MS" pitchFamily="34" charset="-120"/>
               </a:rPr>
-              <a:t>techno-</a:t>
-            </a:r>
-            <a:endParaRPr lang="en-US" sz="1300" dirty="0"/>
-          </a:p>
-        </p:txBody>
-      </p:sp>
-      <p:sp>
-        <p:nvSpPr>
-          <p:cNvPr id="40" name="Shape 38"/>
-          <p:cNvSpPr/>
-          <p:nvPr/>
-        </p:nvSpPr>
-        <p:spPr>
-          <a:xfrm>
-            <a:off x="2971800" y="3246120"/>
-            <a:ext cx="2834640" cy="402336"/>
-          </a:xfrm>
-          <a:prstGeom prst="rect">
-            <a:avLst/>
-          </a:prstGeom>
-          <a:solidFill>
-            <a:srgbClr val="F8FAFC"/>
-          </a:solidFill>
-          <a:ln w="12700">
-            <a:solidFill>
-              <a:srgbClr val="E2E8F0"/>
-            </a:solidFill>
-            <a:prstDash val="solid"/>
-          </a:ln>
-        </p:spPr>
-      </p:sp>
-      <p:sp>
-        <p:nvSpPr>
-          <p:cNvPr id="41" name="Shape 39"/>
-          <p:cNvSpPr/>
-          <p:nvPr/>
-        </p:nvSpPr>
-        <p:spPr>
-          <a:xfrm>
-            <a:off x="5943600" y="3246120"/>
-            <a:ext cx="2834640" cy="402336"/>
-          </a:xfrm>
-          <a:prstGeom prst="rect">
-            <a:avLst/>
-          </a:prstGeom>
-          <a:solidFill>
-            <a:srgbClr val="FCE7F3"/>
-          </a:solidFill>
-          <a:ln w="12700">
-            <a:solidFill>
-              <a:srgbClr val="E2E8F0"/>
-            </a:solidFill>
-            <a:prstDash val="solid"/>
-          </a:ln>
-        </p:spPr>
-      </p:sp>
-      <p:sp>
-        <p:nvSpPr>
-          <p:cNvPr id="42" name="Text 40"/>
-          <p:cNvSpPr/>
-          <p:nvPr/>
-        </p:nvSpPr>
-        <p:spPr>
-          <a:xfrm>
-            <a:off x="5943600" y="3246120"/>
-            <a:ext cx="2834640" cy="402336"/>
-          </a:xfrm>
-          <a:prstGeom prst="rect">
-            <a:avLst/>
-          </a:prstGeom>
-          <a:noFill/>
-          <a:ln/>
-        </p:spPr>
-        <p:txBody>
-          <a:bodyPr wrap="square" lIns="0" tIns="0" rIns="0" bIns="0" rtlCol="0" anchor="ctr"/>
-          <a:lstStyle/>
-          <a:p>
-            <a:pPr algn="ctr" indent="0" marL="0">
-              <a:buNone/>
-            </a:pPr>
-            <a:r>
-              <a:rPr lang="en-US" sz="1300" b="1" dirty="0">
-                <a:solidFill>
-                  <a:srgbClr val="9D174D"/>
+              <a:t>logical</a:t>
+            </a:r>
+            <a:endParaRPr lang="en-US" sz="1200" dirty="0"/>
+          </a:p>
+        </p:txBody>
+      </p:sp>
+      <p:sp>
+        <p:nvSpPr>
+          <p:cNvPr id="46" name="Shape 44"/>
+          <p:cNvSpPr/>
+          <p:nvPr/>
+        </p:nvSpPr>
+        <p:spPr>
+          <a:xfrm>
+            <a:off x="2542032" y="4023360"/>
+            <a:ext cx="2011680" cy="402336"/>
+          </a:xfrm>
+          <a:prstGeom prst="rect">
+            <a:avLst>
+              <a:gd name="adj" fmla="val 13636"/>
+            </a:avLst>
+          </a:prstGeom>
+          <a:solidFill>
+            <a:srgbClr val="EEF2FF"/>
+          </a:solidFill>
+          <a:ln w="12700">
+            <a:solidFill>
+              <a:srgbClr val="6366F1"/>
+            </a:solidFill>
+            <a:prstDash val="solid"/>
+          </a:ln>
+        </p:spPr>
+      </p:sp>
+      <p:sp>
+        <p:nvSpPr>
+          <p:cNvPr id="47" name="Text 45"/>
+          <p:cNvSpPr/>
+          <p:nvPr/>
+        </p:nvSpPr>
+        <p:spPr>
+          <a:xfrm>
+            <a:off x="2542032" y="4023360"/>
+            <a:ext cx="2011680" cy="402336"/>
+          </a:xfrm>
+          <a:prstGeom prst="rect">
+            <a:avLst/>
+          </a:prstGeom>
+          <a:noFill/>
+          <a:ln/>
+        </p:spPr>
+        <p:txBody>
+          <a:bodyPr wrap="square" lIns="0" tIns="0" rIns="0" bIns="0" rtlCol="0" anchor="ctr"/>
+          <a:lstStyle/>
+          <a:p>
+            <a:pPr algn="ctr" indent="0" marL="0">
+              <a:buNone/>
+            </a:pPr>
+            <a:r>
+              <a:rPr lang="en-US" sz="1200" b="1" dirty="0">
+                <a:solidFill>
+                  <a:srgbClr val="4338CA"/>
                 </a:solidFill>
                 <a:latin typeface="Trebuchet MS" pitchFamily="34" charset="0"/>
                 <a:ea typeface="Trebuchet MS" pitchFamily="34" charset="-122"/>
                 <a:cs typeface="Trebuchet MS" pitchFamily="34" charset="-120"/>
               </a:rPr>
-              <a:t>-ian</a:t>
-            </a:r>
-            <a:endParaRPr lang="en-US" sz="1300" dirty="0"/>
-          </a:p>
-        </p:txBody>
-      </p:sp>
-      <p:sp>
-        <p:nvSpPr>
-          <p:cNvPr id="43" name="Text 41"/>
-          <p:cNvSpPr/>
-          <p:nvPr/>
-        </p:nvSpPr>
-        <p:spPr>
-          <a:xfrm>
-            <a:off x="365760" y="3611880"/>
-            <a:ext cx="1828800" cy="347472"/>
-          </a:xfrm>
-          <a:prstGeom prst="rect">
-            <a:avLst/>
-          </a:prstGeom>
-          <a:noFill/>
-          <a:ln/>
-        </p:spPr>
-        <p:txBody>
-          <a:bodyPr wrap="square" lIns="0" tIns="0" rIns="0" bIns="0" rtlCol="0" anchor="ctr"/>
-          <a:lstStyle/>
-          <a:p>
-            <a:pPr algn="l" indent="0" marL="0">
+              <a:t>illogical</a:t>
+            </a:r>
+            <a:endParaRPr lang="en-US" sz="1200" dirty="0"/>
+          </a:p>
+        </p:txBody>
+      </p:sp>
+      <p:sp>
+        <p:nvSpPr>
+          <p:cNvPr id="48" name="Shape 46"/>
+          <p:cNvSpPr/>
+          <p:nvPr/>
+        </p:nvSpPr>
+        <p:spPr>
+          <a:xfrm>
+            <a:off x="4718304" y="4023360"/>
+            <a:ext cx="2011680" cy="402336"/>
+          </a:xfrm>
+          <a:prstGeom prst="rect">
+            <a:avLst>
+              <a:gd name="adj" fmla="val 13636"/>
+            </a:avLst>
+          </a:prstGeom>
+          <a:solidFill>
+            <a:srgbClr val="EEF2FF"/>
+          </a:solidFill>
+          <a:ln w="12700">
+            <a:solidFill>
+              <a:srgbClr val="6366F1"/>
+            </a:solidFill>
+            <a:prstDash val="solid"/>
+          </a:ln>
+        </p:spPr>
+      </p:sp>
+      <p:sp>
+        <p:nvSpPr>
+          <p:cNvPr id="49" name="Text 47"/>
+          <p:cNvSpPr/>
+          <p:nvPr/>
+        </p:nvSpPr>
+        <p:spPr>
+          <a:xfrm>
+            <a:off x="4718304" y="4023360"/>
+            <a:ext cx="2011680" cy="402336"/>
+          </a:xfrm>
+          <a:prstGeom prst="rect">
+            <a:avLst/>
+          </a:prstGeom>
+          <a:noFill/>
+          <a:ln/>
+        </p:spPr>
+        <p:txBody>
+          <a:bodyPr wrap="square" lIns="0" tIns="0" rIns="0" bIns="0" rtlCol="0" anchor="ctr"/>
+          <a:lstStyle/>
+          <a:p>
+            <a:pPr algn="ctr" indent="0" marL="0">
               <a:buNone/>
             </a:pPr>
             <a:r>
               <a:rPr lang="en-US" sz="1200" b="1" dirty="0">
                 <a:solidFill>
-                  <a:srgbClr val="0F172A"/>
+                  <a:srgbClr val="4338CA"/>
                 </a:solidFill>
                 <a:latin typeface="Trebuchet MS" pitchFamily="34" charset="0"/>
                 <a:ea typeface="Trebuchet MS" pitchFamily="34" charset="-122"/>
                 <a:cs typeface="Trebuchet MS" pitchFamily="34" charset="-120"/>
               </a:rPr>
-              <a:t>Sample words:</a:t>
+              <a:t>logically</a:t>
             </a:r>
             <a:endParaRPr lang="en-US" sz="1200" dirty="0"/>
           </a:p>
@@ -37090,13 +39409,13 @@
       </p:sp>
       <p:sp>
         <p:nvSpPr>
-          <p:cNvPr id="44" name="Shape 42"/>
-          <p:cNvSpPr/>
-          <p:nvPr/>
-        </p:nvSpPr>
-        <p:spPr>
-          <a:xfrm>
-            <a:off x="365760" y="4023360"/>
+          <p:cNvPr id="50" name="Shape 48"/>
+          <p:cNvSpPr/>
+          <p:nvPr/>
+        </p:nvSpPr>
+        <p:spPr>
+          <a:xfrm>
+            <a:off x="6894576" y="4023360"/>
             <a:ext cx="2011680" cy="402336"/>
           </a:xfrm>
           <a:prstGeom prst="rect">
@@ -37117,13 +39436,13 @@
       </p:sp>
       <p:sp>
         <p:nvSpPr>
-          <p:cNvPr id="45" name="Text 43"/>
-          <p:cNvSpPr/>
-          <p:nvPr/>
-        </p:nvSpPr>
-        <p:spPr>
-          <a:xfrm>
-            <a:off x="365760" y="4023360"/>
+          <p:cNvPr id="51" name="Text 49"/>
+          <p:cNvSpPr/>
+          <p:nvPr/>
+        </p:nvSpPr>
+        <p:spPr>
+          <a:xfrm>
+            <a:off x="6894576" y="4023360"/>
             <a:ext cx="2011680" cy="402336"/>
           </a:xfrm>
           <a:prstGeom prst="rect">
@@ -37148,7 +39467,7 @@
                 <a:ea typeface="Trebuchet MS" pitchFamily="34" charset="-122"/>
                 <a:cs typeface="Trebuchet MS" pitchFamily="34" charset="-120"/>
               </a:rPr>
-              <a:t>logical</a:t>
+              <a:t>illogically</a:t>
             </a:r>
             <a:endParaRPr lang="en-US" sz="1200" dirty="0"/>
           </a:p>
@@ -37156,13 +39475,13 @@
       </p:sp>
       <p:sp>
         <p:nvSpPr>
-          <p:cNvPr id="46" name="Shape 44"/>
-          <p:cNvSpPr/>
-          <p:nvPr/>
-        </p:nvSpPr>
-        <p:spPr>
-          <a:xfrm>
-            <a:off x="2542032" y="4023360"/>
+          <p:cNvPr id="52" name="Shape 50"/>
+          <p:cNvSpPr/>
+          <p:nvPr/>
+        </p:nvSpPr>
+        <p:spPr>
+          <a:xfrm>
+            <a:off x="365760" y="4498848"/>
             <a:ext cx="2011680" cy="402336"/>
           </a:xfrm>
           <a:prstGeom prst="rect">
@@ -37183,13 +39502,13 @@
       </p:sp>
       <p:sp>
         <p:nvSpPr>
-          <p:cNvPr id="47" name="Text 45"/>
-          <p:cNvSpPr/>
-          <p:nvPr/>
-        </p:nvSpPr>
-        <p:spPr>
-          <a:xfrm>
-            <a:off x="2542032" y="4023360"/>
+          <p:cNvPr id="53" name="Text 51"/>
+          <p:cNvSpPr/>
+          <p:nvPr/>
+        </p:nvSpPr>
+        <p:spPr>
+          <a:xfrm>
+            <a:off x="365760" y="4498848"/>
             <a:ext cx="2011680" cy="402336"/>
           </a:xfrm>
           <a:prstGeom prst="rect">
@@ -37214,7 +39533,7 @@
                 <a:ea typeface="Trebuchet MS" pitchFamily="34" charset="-122"/>
                 <a:cs typeface="Trebuchet MS" pitchFamily="34" charset="-120"/>
               </a:rPr>
-              <a:t>illogical</a:t>
+              <a:t>ecological</a:t>
             </a:r>
             <a:endParaRPr lang="en-US" sz="1200" dirty="0"/>
           </a:p>
@@ -37222,13 +39541,13 @@
       </p:sp>
       <p:sp>
         <p:nvSpPr>
-          <p:cNvPr id="48" name="Shape 46"/>
-          <p:cNvSpPr/>
-          <p:nvPr/>
-        </p:nvSpPr>
-        <p:spPr>
-          <a:xfrm>
-            <a:off x="4718304" y="4023360"/>
+          <p:cNvPr id="54" name="Shape 52"/>
+          <p:cNvSpPr/>
+          <p:nvPr/>
+        </p:nvSpPr>
+        <p:spPr>
+          <a:xfrm>
+            <a:off x="2542032" y="4498848"/>
             <a:ext cx="2011680" cy="402336"/>
           </a:xfrm>
           <a:prstGeom prst="rect">
@@ -37249,13 +39568,13 @@
       </p:sp>
       <p:sp>
         <p:nvSpPr>
-          <p:cNvPr id="49" name="Text 47"/>
-          <p:cNvSpPr/>
-          <p:nvPr/>
-        </p:nvSpPr>
-        <p:spPr>
-          <a:xfrm>
-            <a:off x="4718304" y="4023360"/>
+          <p:cNvPr id="55" name="Text 53"/>
+          <p:cNvSpPr/>
+          <p:nvPr/>
+        </p:nvSpPr>
+        <p:spPr>
+          <a:xfrm>
+            <a:off x="2542032" y="4498848"/>
             <a:ext cx="2011680" cy="402336"/>
           </a:xfrm>
           <a:prstGeom prst="rect">
@@ -37280,7 +39599,7 @@
                 <a:ea typeface="Trebuchet MS" pitchFamily="34" charset="-122"/>
                 <a:cs typeface="Trebuchet MS" pitchFamily="34" charset="-120"/>
               </a:rPr>
-              <a:t>biological</a:t>
+              <a:t>chronological</a:t>
             </a:r>
             <a:endParaRPr lang="en-US" sz="1200" dirty="0"/>
           </a:p>
@@ -37288,13 +39607,13 @@
       </p:sp>
       <p:sp>
         <p:nvSpPr>
-          <p:cNvPr id="50" name="Shape 48"/>
-          <p:cNvSpPr/>
-          <p:nvPr/>
-        </p:nvSpPr>
-        <p:spPr>
-          <a:xfrm>
-            <a:off x="6894576" y="4023360"/>
+          <p:cNvPr id="56" name="Shape 54"/>
+          <p:cNvSpPr/>
+          <p:nvPr/>
+        </p:nvSpPr>
+        <p:spPr>
+          <a:xfrm>
+            <a:off x="4718304" y="4498848"/>
             <a:ext cx="2011680" cy="402336"/>
           </a:xfrm>
           <a:prstGeom prst="rect">
@@ -37315,13 +39634,13 @@
       </p:sp>
       <p:sp>
         <p:nvSpPr>
-          <p:cNvPr id="51" name="Text 49"/>
-          <p:cNvSpPr/>
-          <p:nvPr/>
-        </p:nvSpPr>
-        <p:spPr>
-          <a:xfrm>
-            <a:off x="6894576" y="4023360"/>
+          <p:cNvPr id="57" name="Text 55"/>
+          <p:cNvSpPr/>
+          <p:nvPr/>
+        </p:nvSpPr>
+        <p:spPr>
+          <a:xfrm>
+            <a:off x="4718304" y="4498848"/>
             <a:ext cx="2011680" cy="402336"/>
           </a:xfrm>
           <a:prstGeom prst="rect">
@@ -37346,271 +39665,7 @@
                 <a:ea typeface="Trebuchet MS" pitchFamily="34" charset="-122"/>
                 <a:cs typeface="Trebuchet MS" pitchFamily="34" charset="-120"/>
               </a:rPr>
-              <a:t>geological</a:t>
-            </a:r>
-            <a:endParaRPr lang="en-US" sz="1200" dirty="0"/>
-          </a:p>
-        </p:txBody>
-      </p:sp>
-      <p:sp>
-        <p:nvSpPr>
-          <p:cNvPr id="52" name="Shape 50"/>
-          <p:cNvSpPr/>
-          <p:nvPr/>
-        </p:nvSpPr>
-        <p:spPr>
-          <a:xfrm>
-            <a:off x="365760" y="4498848"/>
-            <a:ext cx="2011680" cy="402336"/>
-          </a:xfrm>
-          <a:prstGeom prst="rect">
-            <a:avLst>
-              <a:gd name="adj" fmla="val 13636"/>
-            </a:avLst>
-          </a:prstGeom>
-          <a:solidFill>
-            <a:srgbClr val="EEF2FF"/>
-          </a:solidFill>
-          <a:ln w="12700">
-            <a:solidFill>
-              <a:srgbClr val="6366F1"/>
-            </a:solidFill>
-            <a:prstDash val="solid"/>
-          </a:ln>
-        </p:spPr>
-      </p:sp>
-      <p:sp>
-        <p:nvSpPr>
-          <p:cNvPr id="53" name="Text 51"/>
-          <p:cNvSpPr/>
-          <p:nvPr/>
-        </p:nvSpPr>
-        <p:spPr>
-          <a:xfrm>
-            <a:off x="365760" y="4498848"/>
-            <a:ext cx="2011680" cy="402336"/>
-          </a:xfrm>
-          <a:prstGeom prst="rect">
-            <a:avLst/>
-          </a:prstGeom>
-          <a:noFill/>
-          <a:ln/>
-        </p:spPr>
-        <p:txBody>
-          <a:bodyPr wrap="square" lIns="0" tIns="0" rIns="0" bIns="0" rtlCol="0" anchor="ctr"/>
-          <a:lstStyle/>
-          <a:p>
-            <a:pPr algn="ctr" indent="0" marL="0">
-              <a:buNone/>
-            </a:pPr>
-            <a:r>
-              <a:rPr lang="en-US" sz="1200" b="1" dirty="0">
-                <a:solidFill>
-                  <a:srgbClr val="4338CA"/>
-                </a:solidFill>
-                <a:latin typeface="Trebuchet MS" pitchFamily="34" charset="0"/>
-                <a:ea typeface="Trebuchet MS" pitchFamily="34" charset="-122"/>
-                <a:cs typeface="Trebuchet MS" pitchFamily="34" charset="-120"/>
-              </a:rPr>
-              <a:t>chronological</a:t>
-            </a:r>
-            <a:endParaRPr lang="en-US" sz="1200" dirty="0"/>
-          </a:p>
-        </p:txBody>
-      </p:sp>
-      <p:sp>
-        <p:nvSpPr>
-          <p:cNvPr id="54" name="Shape 52"/>
-          <p:cNvSpPr/>
-          <p:nvPr/>
-        </p:nvSpPr>
-        <p:spPr>
-          <a:xfrm>
-            <a:off x="2542032" y="4498848"/>
-            <a:ext cx="2011680" cy="402336"/>
-          </a:xfrm>
-          <a:prstGeom prst="rect">
-            <a:avLst>
-              <a:gd name="adj" fmla="val 13636"/>
-            </a:avLst>
-          </a:prstGeom>
-          <a:solidFill>
-            <a:srgbClr val="EEF2FF"/>
-          </a:solidFill>
-          <a:ln w="12700">
-            <a:solidFill>
-              <a:srgbClr val="6366F1"/>
-            </a:solidFill>
-            <a:prstDash val="solid"/>
-          </a:ln>
-        </p:spPr>
-      </p:sp>
-      <p:sp>
-        <p:nvSpPr>
-          <p:cNvPr id="55" name="Text 53"/>
-          <p:cNvSpPr/>
-          <p:nvPr/>
-        </p:nvSpPr>
-        <p:spPr>
-          <a:xfrm>
-            <a:off x="2542032" y="4498848"/>
-            <a:ext cx="2011680" cy="402336"/>
-          </a:xfrm>
-          <a:prstGeom prst="rect">
-            <a:avLst/>
-          </a:prstGeom>
-          <a:noFill/>
-          <a:ln/>
-        </p:spPr>
-        <p:txBody>
-          <a:bodyPr wrap="square" lIns="0" tIns="0" rIns="0" bIns="0" rtlCol="0" anchor="ctr"/>
-          <a:lstStyle/>
-          <a:p>
-            <a:pPr algn="ctr" indent="0" marL="0">
-              <a:buNone/>
-            </a:pPr>
-            <a:r>
-              <a:rPr lang="en-US" sz="1200" b="1" dirty="0">
-                <a:solidFill>
-                  <a:srgbClr val="4338CA"/>
-                </a:solidFill>
-                <a:latin typeface="Trebuchet MS" pitchFamily="34" charset="0"/>
-                <a:ea typeface="Trebuchet MS" pitchFamily="34" charset="-122"/>
-                <a:cs typeface="Trebuchet MS" pitchFamily="34" charset="-120"/>
-              </a:rPr>
               <a:t>psychological</a:t>
-            </a:r>
-            <a:endParaRPr lang="en-US" sz="1200" dirty="0"/>
-          </a:p>
-        </p:txBody>
-      </p:sp>
-      <p:sp>
-        <p:nvSpPr>
-          <p:cNvPr id="56" name="Shape 54"/>
-          <p:cNvSpPr/>
-          <p:nvPr/>
-        </p:nvSpPr>
-        <p:spPr>
-          <a:xfrm>
-            <a:off x="4718304" y="4498848"/>
-            <a:ext cx="2011680" cy="402336"/>
-          </a:xfrm>
-          <a:prstGeom prst="rect">
-            <a:avLst>
-              <a:gd name="adj" fmla="val 13636"/>
-            </a:avLst>
-          </a:prstGeom>
-          <a:solidFill>
-            <a:srgbClr val="EEF2FF"/>
-          </a:solidFill>
-          <a:ln w="12700">
-            <a:solidFill>
-              <a:srgbClr val="6366F1"/>
-            </a:solidFill>
-            <a:prstDash val="solid"/>
-          </a:ln>
-        </p:spPr>
-      </p:sp>
-      <p:sp>
-        <p:nvSpPr>
-          <p:cNvPr id="57" name="Text 55"/>
-          <p:cNvSpPr/>
-          <p:nvPr/>
-        </p:nvSpPr>
-        <p:spPr>
-          <a:xfrm>
-            <a:off x="4718304" y="4498848"/>
-            <a:ext cx="2011680" cy="402336"/>
-          </a:xfrm>
-          <a:prstGeom prst="rect">
-            <a:avLst/>
-          </a:prstGeom>
-          <a:noFill/>
-          <a:ln/>
-        </p:spPr>
-        <p:txBody>
-          <a:bodyPr wrap="square" lIns="0" tIns="0" rIns="0" bIns="0" rtlCol="0" anchor="ctr"/>
-          <a:lstStyle/>
-          <a:p>
-            <a:pPr algn="ctr" indent="0" marL="0">
-              <a:buNone/>
-            </a:pPr>
-            <a:r>
-              <a:rPr lang="en-US" sz="1200" b="1" dirty="0">
-                <a:solidFill>
-                  <a:srgbClr val="4338CA"/>
-                </a:solidFill>
-                <a:latin typeface="Trebuchet MS" pitchFamily="34" charset="0"/>
-                <a:ea typeface="Trebuchet MS" pitchFamily="34" charset="-122"/>
-                <a:cs typeface="Trebuchet MS" pitchFamily="34" charset="-120"/>
-              </a:rPr>
-              <a:t>technological</a:t>
-            </a:r>
-            <a:endParaRPr lang="en-US" sz="1200" dirty="0"/>
-          </a:p>
-        </p:txBody>
-      </p:sp>
-      <p:sp>
-        <p:nvSpPr>
-          <p:cNvPr id="58" name="Shape 56"/>
-          <p:cNvSpPr/>
-          <p:nvPr/>
-        </p:nvSpPr>
-        <p:spPr>
-          <a:xfrm>
-            <a:off x="6894576" y="4498848"/>
-            <a:ext cx="2011680" cy="402336"/>
-          </a:xfrm>
-          <a:prstGeom prst="rect">
-            <a:avLst>
-              <a:gd name="adj" fmla="val 13636"/>
-            </a:avLst>
-          </a:prstGeom>
-          <a:solidFill>
-            <a:srgbClr val="EEF2FF"/>
-          </a:solidFill>
-          <a:ln w="12700">
-            <a:solidFill>
-              <a:srgbClr val="6366F1"/>
-            </a:solidFill>
-            <a:prstDash val="solid"/>
-          </a:ln>
-        </p:spPr>
-      </p:sp>
-      <p:sp>
-        <p:nvSpPr>
-          <p:cNvPr id="59" name="Text 57"/>
-          <p:cNvSpPr/>
-          <p:nvPr/>
-        </p:nvSpPr>
-        <p:spPr>
-          <a:xfrm>
-            <a:off x="6894576" y="4498848"/>
-            <a:ext cx="2011680" cy="402336"/>
-          </a:xfrm>
-          <a:prstGeom prst="rect">
-            <a:avLst/>
-          </a:prstGeom>
-          <a:noFill/>
-          <a:ln/>
-        </p:spPr>
-        <p:txBody>
-          <a:bodyPr wrap="square" lIns="0" tIns="0" rIns="0" bIns="0" rtlCol="0" anchor="ctr"/>
-          <a:lstStyle/>
-          <a:p>
-            <a:pPr algn="ctr" indent="0" marL="0">
-              <a:buNone/>
-            </a:pPr>
-            <a:r>
-              <a:rPr lang="en-US" sz="1200" b="1" dirty="0">
-                <a:solidFill>
-                  <a:srgbClr val="4338CA"/>
-                </a:solidFill>
-                <a:latin typeface="Trebuchet MS" pitchFamily="34" charset="0"/>
-                <a:ea typeface="Trebuchet MS" pitchFamily="34" charset="-122"/>
-                <a:cs typeface="Trebuchet MS" pitchFamily="34" charset="-120"/>
-              </a:rPr>
-              <a:t>logically</a:t>
             </a:r>
             <a:endParaRPr lang="en-US" sz="1200" dirty="0"/>
           </a:p>
@@ -37902,7 +39957,7 @@
                 <a:ea typeface="Calibri" pitchFamily="34" charset="-122"/>
                 <a:cs typeface="Calibri" pitchFamily="34" charset="-120"/>
               </a:rPr>
-              <a:t>Word Labs  •  wordlabs.app  •  Root: 'logical' = relating to reason or logic</a:t>
+              <a:t>Word Labs  •  wordlabs.app  •  Root: 'logical' = making sense</a:t>
             </a:r>
             <a:endParaRPr lang="en-US" sz="800" dirty="0"/>
           </a:p>
@@ -38066,7 +40121,7 @@
                 <a:ea typeface="Calibri" pitchFamily="34" charset="-122"/>
                 <a:cs typeface="Calibri" pitchFamily="34" charset="-120"/>
               </a:rPr>
-              <a:t>The core part of a word carrying its basic meaning. For example, 'logical' means 'relating to reason or logic'.</a:t>
+              <a:t>The core part of a word carrying its basic meaning. For example, 'logical' means 'making sense'.</a:t>
             </a:r>
             <a:endParaRPr lang="en-US" sz="1350" dirty="0"/>
           </a:p>
@@ -38686,7 +40741,7 @@
                 <a:ea typeface="Calibri" pitchFamily="34" charset="-122"/>
                 <a:cs typeface="Calibri" pitchFamily="34" charset="-120"/>
               </a:rPr>
-              <a:t>Word Labs  •  wordlabs.app  •  Root: 'logical' = relating to reason or logic</a:t>
+              <a:t>Word Labs  •  wordlabs.app  •  Root: 'logical' = making sense</a:t>
             </a:r>
             <a:endParaRPr lang="en-US" sz="800" dirty="0"/>
           </a:p>
@@ -38798,7 +40853,7 @@
                 <a:ea typeface="Calibri" pitchFamily="34" charset="-122"/>
                 <a:cs typeface="Calibri" pitchFamily="34" charset="-120"/>
               </a:rPr>
-              <a:t>1.  The prefix 'bio' added to 'logical' makes the word 'biological', which relates to living things.</a:t>
+              <a:t>1.  'logical' means 'extremely colourful and bright'.</a:t>
             </a:r>
             <a:endParaRPr lang="en-US" sz="1300" dirty="0"/>
           </a:p>
@@ -38821,11 +40876,11 @@
             </a:avLst>
           </a:prstGeom>
           <a:solidFill>
-            <a:srgbClr val="DCFCE7"/>
-          </a:solidFill>
-          <a:ln w="12700">
-            <a:solidFill>
-              <a:srgbClr val="16A34A"/>
+            <a:srgbClr val="FEE2E2"/>
+          </a:solidFill>
+          <a:ln w="12700">
+            <a:solidFill>
+              <a:srgbClr val="DC2626"/>
             </a:solidFill>
             <a:prstDash val="solid"/>
           </a:ln>
@@ -38858,13 +40913,13 @@
             <a:r>
               <a:rPr lang="en-US" sz="1100" b="1" dirty="0">
                 <a:solidFill>
-                  <a:srgbClr val="16A34A"/>
+                  <a:srgbClr val="DC2626"/>
                 </a:solidFill>
                 <a:latin typeface="Trebuchet MS" pitchFamily="34" charset="0"/>
                 <a:ea typeface="Trebuchet MS" pitchFamily="34" charset="-122"/>
                 <a:cs typeface="Trebuchet MS" pitchFamily="34" charset="-120"/>
               </a:rPr>
-              <a:t>TRUE</a:t>
+              <a:t>FALSE</a:t>
             </a:r>
             <a:endParaRPr lang="en-US" sz="1100" dirty="0"/>
           </a:p>
@@ -38937,7 +40992,7 @@
                 <a:ea typeface="Calibri" pitchFamily="34" charset="-122"/>
                 <a:cs typeface="Calibri" pitchFamily="34" charset="-120"/>
               </a:rPr>
-              <a:t>2.  The morpheme 'logical' comes from the Greek word 'logikos'.</a:t>
+              <a:t>2.  'logical' means 'following clear and sensible reasoning'.</a:t>
             </a:r>
             <a:endParaRPr lang="en-US" sz="1300" dirty="0"/>
           </a:p>
@@ -39076,7 +41131,7 @@
                 <a:ea typeface="Calibri" pitchFamily="34" charset="-122"/>
                 <a:cs typeface="Calibri" pitchFamily="34" charset="-120"/>
               </a:rPr>
-              <a:t>3.  The word 'illogical' means something that makes perfect sense.</a:t>
+              <a:t>3.  'illogical' means 'not sensible or reasonable; against normal logic'.</a:t>
             </a:r>
             <a:endParaRPr lang="en-US" sz="1300" dirty="0"/>
           </a:p>
@@ -39099,11 +41154,11 @@
             </a:avLst>
           </a:prstGeom>
           <a:solidFill>
-            <a:srgbClr val="FEE2E2"/>
-          </a:solidFill>
-          <a:ln w="12700">
-            <a:solidFill>
-              <a:srgbClr val="DC2626"/>
+            <a:srgbClr val="DCFCE7"/>
+          </a:solidFill>
+          <a:ln w="12700">
+            <a:solidFill>
+              <a:srgbClr val="16A34A"/>
             </a:solidFill>
             <a:prstDash val="solid"/>
           </a:ln>
@@ -39136,13 +41191,13 @@
             <a:r>
               <a:rPr lang="en-US" sz="1100" b="1" dirty="0">
                 <a:solidFill>
-                  <a:srgbClr val="DC2626"/>
+                  <a:srgbClr val="16A34A"/>
                 </a:solidFill>
                 <a:latin typeface="Trebuchet MS" pitchFamily="34" charset="0"/>
                 <a:ea typeface="Trebuchet MS" pitchFamily="34" charset="-122"/>
                 <a:cs typeface="Trebuchet MS" pitchFamily="34" charset="-120"/>
               </a:rPr>
-              <a:t>FALSE</a:t>
+              <a:t>TRUE</a:t>
             </a:r>
             <a:endParaRPr lang="en-US" sz="1100" dirty="0"/>
           </a:p>
@@ -39215,7 +41270,7 @@
                 <a:ea typeface="Calibri" pitchFamily="34" charset="-122"/>
                 <a:cs typeface="Calibri" pitchFamily="34" charset="-120"/>
               </a:rPr>
-              <a:t>4.  Adding '-ly' to 'logical' makes the word 'logically', which describes doing something in a sensible way.</a:t>
+              <a:t>4.  'illogical' means 'extremely well organised'.</a:t>
             </a:r>
             <a:endParaRPr lang="en-US" sz="1300" dirty="0"/>
           </a:p>
@@ -39238,11 +41293,11 @@
             </a:avLst>
           </a:prstGeom>
           <a:solidFill>
-            <a:srgbClr val="DCFCE7"/>
-          </a:solidFill>
-          <a:ln w="12700">
-            <a:solidFill>
-              <a:srgbClr val="16A34A"/>
+            <a:srgbClr val="FEE2E2"/>
+          </a:solidFill>
+          <a:ln w="12700">
+            <a:solidFill>
+              <a:srgbClr val="DC2626"/>
             </a:solidFill>
             <a:prstDash val="solid"/>
           </a:ln>
@@ -39275,13 +41330,13 @@
             <a:r>
               <a:rPr lang="en-US" sz="1100" b="1" dirty="0">
                 <a:solidFill>
-                  <a:srgbClr val="16A34A"/>
+                  <a:srgbClr val="DC2626"/>
                 </a:solidFill>
                 <a:latin typeface="Trebuchet MS" pitchFamily="34" charset="0"/>
                 <a:ea typeface="Trebuchet MS" pitchFamily="34" charset="-122"/>
                 <a:cs typeface="Trebuchet MS" pitchFamily="34" charset="-120"/>
               </a:rPr>
-              <a:t>TRUE</a:t>
+              <a:t>FALSE</a:t>
             </a:r>
             <a:endParaRPr lang="en-US" sz="1100" dirty="0"/>
           </a:p>
@@ -39354,7 +41409,7 @@
                 <a:ea typeface="Calibri" pitchFamily="34" charset="-122"/>
                 <a:cs typeface="Calibri" pitchFamily="34" charset="-120"/>
               </a:rPr>
-              <a:t>5.  The word 'chronological' has nothing to do with time or order.</a:t>
+              <a:t>5.  'logical' means 'making sense'.</a:t>
             </a:r>
             <a:endParaRPr lang="en-US" sz="1300" dirty="0"/>
           </a:p>
@@ -39377,11 +41432,11 @@
             </a:avLst>
           </a:prstGeom>
           <a:solidFill>
-            <a:srgbClr val="FEE2E2"/>
-          </a:solidFill>
-          <a:ln w="12700">
-            <a:solidFill>
-              <a:srgbClr val="DC2626"/>
+            <a:srgbClr val="DCFCE7"/>
+          </a:solidFill>
+          <a:ln w="12700">
+            <a:solidFill>
+              <a:srgbClr val="16A34A"/>
             </a:solidFill>
             <a:prstDash val="solid"/>
           </a:ln>
@@ -39414,13 +41469,13 @@
             <a:r>
               <a:rPr lang="en-US" sz="1100" b="1" dirty="0">
                 <a:solidFill>
-                  <a:srgbClr val="DC2626"/>
+                  <a:srgbClr val="16A34A"/>
                 </a:solidFill>
                 <a:latin typeface="Trebuchet MS" pitchFamily="34" charset="0"/>
                 <a:ea typeface="Trebuchet MS" pitchFamily="34" charset="-122"/>
                 <a:cs typeface="Trebuchet MS" pitchFamily="34" charset="-120"/>
               </a:rPr>
-              <a:t>FALSE</a:t>
+              <a:t>TRUE</a:t>
             </a:r>
             <a:endParaRPr lang="en-US" sz="1100" dirty="0"/>
           </a:p>
@@ -39712,7 +41767,7 @@
                 <a:ea typeface="Calibri" pitchFamily="34" charset="-122"/>
                 <a:cs typeface="Calibri" pitchFamily="34" charset="-120"/>
               </a:rPr>
-              <a:t>Word Labs  •  wordlabs.app  •  Root: 'logical' = relating to reason or logic</a:t>
+              <a:t>Word Labs  •  wordlabs.app  •  Root: 'logical' = making sense</a:t>
             </a:r>
             <a:endParaRPr lang="en-US" sz="800" dirty="0"/>
           </a:p>
@@ -39849,7 +41904,7 @@
                 <a:ea typeface="Trebuchet MS" pitchFamily="34" charset="-122"/>
                 <a:cs typeface="Trebuchet MS" pitchFamily="34" charset="-120"/>
               </a:rPr>
-              <a:t>relating to reason or logic</a:t>
+              <a:t>making sense</a:t>
             </a:r>
             <a:endParaRPr lang="en-US" sz="2000" dirty="0"/>
           </a:p>
@@ -39888,7 +41943,7 @@
                 <a:ea typeface="Calibri" pitchFamily="34" charset="-122"/>
                 <a:cs typeface="Calibri" pitchFamily="34" charset="-120"/>
               </a:rPr>
-              <a:t>Origin: Greek: logikos</a:t>
+              <a:t>Origin: Core English root</a:t>
             </a:r>
             <a:endParaRPr lang="en-US" sz="1100" dirty="0"/>
           </a:p>
@@ -40125,7 +42180,7 @@
                 <a:ea typeface="Trebuchet MS" pitchFamily="34" charset="-122"/>
                 <a:cs typeface="Trebuchet MS" pitchFamily="34" charset="-120"/>
               </a:rPr>
-              <a:t>biological</a:t>
+              <a:t>logically</a:t>
             </a:r>
             <a:endParaRPr lang="en-US" sz="1300" dirty="0"/>
           </a:p>
@@ -40191,7 +42246,7 @@
                 <a:ea typeface="Trebuchet MS" pitchFamily="34" charset="-122"/>
                 <a:cs typeface="Trebuchet MS" pitchFamily="34" charset="-120"/>
               </a:rPr>
-              <a:t>geological</a:t>
+              <a:t>illogically</a:t>
             </a:r>
             <a:endParaRPr lang="en-US" sz="1300" dirty="0"/>
           </a:p>
@@ -40257,7 +42312,7 @@
                 <a:ea typeface="Trebuchet MS" pitchFamily="34" charset="-122"/>
                 <a:cs typeface="Trebuchet MS" pitchFamily="34" charset="-120"/>
               </a:rPr>
-              <a:t>chronological</a:t>
+              <a:t>ecological</a:t>
             </a:r>
             <a:endParaRPr lang="en-US" sz="1300" dirty="0"/>
           </a:p>
@@ -40323,7 +42378,7 @@
                 <a:ea typeface="Trebuchet MS" pitchFamily="34" charset="-122"/>
                 <a:cs typeface="Trebuchet MS" pitchFamily="34" charset="-120"/>
               </a:rPr>
-              <a:t>psychological</a:t>
+              <a:t>chronological</a:t>
             </a:r>
             <a:endParaRPr lang="en-US" sz="1300" dirty="0"/>
           </a:p>
@@ -40389,7 +42444,7 @@
                 <a:ea typeface="Trebuchet MS" pitchFamily="34" charset="-122"/>
                 <a:cs typeface="Trebuchet MS" pitchFamily="34" charset="-120"/>
               </a:rPr>
-              <a:t>technological</a:t>
+              <a:t>psychological</a:t>
             </a:r>
             <a:endParaRPr lang="en-US" sz="1300" dirty="0"/>
           </a:p>
@@ -40681,7 +42736,7 @@
                 <a:ea typeface="Calibri" pitchFamily="34" charset="-122"/>
                 <a:cs typeface="Calibri" pitchFamily="34" charset="-120"/>
               </a:rPr>
-              <a:t>Word Labs  •  wordlabs.app  •  Root: 'logical' = relating to reason or logic</a:t>
+              <a:t>Word Labs  •  wordlabs.app  •  Root: 'logical' = making sense</a:t>
             </a:r>
             <a:endParaRPr lang="en-US" sz="800" dirty="0"/>
           </a:p>
@@ -41174,7 +43229,7 @@
                 <a:ea typeface="Trebuchet MS" pitchFamily="34" charset="-122"/>
                 <a:cs typeface="Trebuchet MS" pitchFamily="34" charset="-120"/>
               </a:rPr>
-              <a:t>geo-</a:t>
+              <a:t>chrono-</a:t>
             </a:r>
             <a:endParaRPr lang="en-US" sz="1300" dirty="0"/>
           </a:p>
@@ -41220,7 +43275,7 @@
             <a:avLst/>
           </a:prstGeom>
           <a:solidFill>
-            <a:srgbClr val="FCE7F3"/>
+            <a:srgbClr val="F1F5F9"/>
           </a:solidFill>
           <a:ln w="12700">
             <a:solidFill>
@@ -41232,18 +43287,43 @@
       </p:sp>
       <p:sp>
         <p:nvSpPr>
-          <p:cNvPr id="27" name="Text 25"/>
-          <p:cNvSpPr/>
-          <p:nvPr/>
-        </p:nvSpPr>
-        <p:spPr>
-          <a:xfrm>
-            <a:off x="5943600" y="2212848"/>
+          <p:cNvPr id="27" name="Shape 25"/>
+          <p:cNvSpPr/>
+          <p:nvPr/>
+        </p:nvSpPr>
+        <p:spPr>
+          <a:xfrm>
+            <a:off x="640080" y="2670048"/>
             <a:ext cx="1463040" cy="420624"/>
           </a:xfrm>
           <a:prstGeom prst="rect">
             <a:avLst/>
           </a:prstGeom>
+          <a:solidFill>
+            <a:srgbClr val="DDD6FE"/>
+          </a:solidFill>
+          <a:ln w="12700">
+            <a:solidFill>
+              <a:srgbClr val="E5E7EB"/>
+            </a:solidFill>
+            <a:prstDash val="solid"/>
+          </a:ln>
+        </p:spPr>
+      </p:sp>
+      <p:sp>
+        <p:nvSpPr>
+          <p:cNvPr id="28" name="Text 26"/>
+          <p:cNvSpPr/>
+          <p:nvPr/>
+        </p:nvSpPr>
+        <p:spPr>
+          <a:xfrm>
+            <a:off x="640080" y="2670048"/>
+            <a:ext cx="1463040" cy="420624"/>
+          </a:xfrm>
+          <a:prstGeom prst="rect">
+            <a:avLst/>
+          </a:prstGeom>
           <a:noFill/>
           <a:ln/>
         </p:spPr>
@@ -41257,13 +43337,13 @@
             <a:r>
               <a:rPr lang="en-US" sz="1300" b="1" dirty="0">
                 <a:solidFill>
-                  <a:srgbClr val="9D174D"/>
+                  <a:srgbClr val="4C1D95"/>
                 </a:solidFill>
                 <a:latin typeface="Trebuchet MS" pitchFamily="34" charset="0"/>
                 <a:ea typeface="Trebuchet MS" pitchFamily="34" charset="-122"/>
                 <a:cs typeface="Trebuchet MS" pitchFamily="34" charset="-120"/>
               </a:rPr>
-              <a:t>-ness</a:t>
+              <a:t>eco-</a:t>
             </a:r>
             <a:endParaRPr lang="en-US" sz="1300" dirty="0"/>
           </a:p>
@@ -41271,19 +43351,69 @@
       </p:sp>
       <p:sp>
         <p:nvSpPr>
-          <p:cNvPr id="28" name="Shape 26"/>
-          <p:cNvSpPr/>
-          <p:nvPr/>
-        </p:nvSpPr>
-        <p:spPr>
-          <a:xfrm>
-            <a:off x="640080" y="2670048"/>
+          <p:cNvPr id="29" name="Shape 27"/>
+          <p:cNvSpPr/>
+          <p:nvPr/>
+        </p:nvSpPr>
+        <p:spPr>
+          <a:xfrm>
+            <a:off x="3291840" y="2670048"/>
+            <a:ext cx="1645920" cy="420624"/>
+          </a:xfrm>
+          <a:prstGeom prst="rect">
+            <a:avLst/>
+          </a:prstGeom>
+          <a:solidFill>
+            <a:srgbClr val="F8FAFC"/>
+          </a:solidFill>
+          <a:ln w="12700">
+            <a:solidFill>
+              <a:srgbClr val="E5E7EB"/>
+            </a:solidFill>
+            <a:prstDash val="solid"/>
+          </a:ln>
+        </p:spPr>
+      </p:sp>
+      <p:sp>
+        <p:nvSpPr>
+          <p:cNvPr id="30" name="Shape 28"/>
+          <p:cNvSpPr/>
+          <p:nvPr/>
+        </p:nvSpPr>
+        <p:spPr>
+          <a:xfrm>
+            <a:off x="5943600" y="2670048"/>
             <a:ext cx="1463040" cy="420624"/>
           </a:xfrm>
           <a:prstGeom prst="rect">
             <a:avLst/>
           </a:prstGeom>
           <a:solidFill>
+            <a:srgbClr val="F8FAFC"/>
+          </a:solidFill>
+          <a:ln w="12700">
+            <a:solidFill>
+              <a:srgbClr val="E5E7EB"/>
+            </a:solidFill>
+            <a:prstDash val="solid"/>
+          </a:ln>
+        </p:spPr>
+      </p:sp>
+      <p:sp>
+        <p:nvSpPr>
+          <p:cNvPr id="31" name="Shape 29"/>
+          <p:cNvSpPr/>
+          <p:nvPr/>
+        </p:nvSpPr>
+        <p:spPr>
+          <a:xfrm>
+            <a:off x="640080" y="3127248"/>
+            <a:ext cx="1463040" cy="420624"/>
+          </a:xfrm>
+          <a:prstGeom prst="rect">
+            <a:avLst/>
+          </a:prstGeom>
+          <a:solidFill>
             <a:srgbClr val="DDD6FE"/>
           </a:solidFill>
           <a:ln w="12700">
@@ -41296,13 +43426,13 @@
       </p:sp>
       <p:sp>
         <p:nvSpPr>
-          <p:cNvPr id="29" name="Text 27"/>
-          <p:cNvSpPr/>
-          <p:nvPr/>
-        </p:nvSpPr>
-        <p:spPr>
-          <a:xfrm>
-            <a:off x="640080" y="2670048"/>
+          <p:cNvPr id="32" name="Text 30"/>
+          <p:cNvSpPr/>
+          <p:nvPr/>
+        </p:nvSpPr>
+        <p:spPr>
+          <a:xfrm>
+            <a:off x="640080" y="3127248"/>
             <a:ext cx="1463040" cy="420624"/>
           </a:xfrm>
           <a:prstGeom prst="rect">
@@ -41327,7 +43457,7 @@
                 <a:ea typeface="Trebuchet MS" pitchFamily="34" charset="-122"/>
                 <a:cs typeface="Trebuchet MS" pitchFamily="34" charset="-120"/>
               </a:rPr>
-              <a:t>chrono-</a:t>
+              <a:t>geo-</a:t>
             </a:r>
             <a:endParaRPr lang="en-US" sz="1300" dirty="0"/>
           </a:p>
@@ -41335,20 +43465,20 @@
       </p:sp>
       <p:sp>
         <p:nvSpPr>
-          <p:cNvPr id="30" name="Shape 28"/>
-          <p:cNvSpPr/>
-          <p:nvPr/>
-        </p:nvSpPr>
-        <p:spPr>
-          <a:xfrm>
-            <a:off x="3291840" y="2670048"/>
+          <p:cNvPr id="33" name="Shape 31"/>
+          <p:cNvSpPr/>
+          <p:nvPr/>
+        </p:nvSpPr>
+        <p:spPr>
+          <a:xfrm>
+            <a:off x="3291840" y="3127248"/>
             <a:ext cx="1645920" cy="420624"/>
           </a:xfrm>
           <a:prstGeom prst="rect">
             <a:avLst/>
           </a:prstGeom>
           <a:solidFill>
-            <a:srgbClr val="F8FAFC"/>
+            <a:srgbClr val="F1F5F9"/>
           </a:solidFill>
           <a:ln w="12700">
             <a:solidFill>
@@ -41360,20 +43490,20 @@
       </p:sp>
       <p:sp>
         <p:nvSpPr>
-          <p:cNvPr id="31" name="Shape 29"/>
-          <p:cNvSpPr/>
-          <p:nvPr/>
-        </p:nvSpPr>
-        <p:spPr>
-          <a:xfrm>
-            <a:off x="5943600" y="2670048"/>
+          <p:cNvPr id="34" name="Shape 32"/>
+          <p:cNvSpPr/>
+          <p:nvPr/>
+        </p:nvSpPr>
+        <p:spPr>
+          <a:xfrm>
+            <a:off x="5943600" y="3127248"/>
             <a:ext cx="1463040" cy="420624"/>
           </a:xfrm>
           <a:prstGeom prst="rect">
             <a:avLst/>
           </a:prstGeom>
           <a:solidFill>
-            <a:srgbClr val="FCE7F3"/>
+            <a:srgbClr val="F1F5F9"/>
           </a:solidFill>
           <a:ln w="12700">
             <a:solidFill>
@@ -41385,18 +43515,43 @@
       </p:sp>
       <p:sp>
         <p:nvSpPr>
-          <p:cNvPr id="32" name="Text 30"/>
-          <p:cNvSpPr/>
-          <p:nvPr/>
-        </p:nvSpPr>
-        <p:spPr>
-          <a:xfrm>
-            <a:off x="5943600" y="2670048"/>
+          <p:cNvPr id="35" name="Shape 33"/>
+          <p:cNvSpPr/>
+          <p:nvPr/>
+        </p:nvSpPr>
+        <p:spPr>
+          <a:xfrm>
+            <a:off x="640080" y="3584448"/>
             <a:ext cx="1463040" cy="420624"/>
           </a:xfrm>
           <a:prstGeom prst="rect">
             <a:avLst/>
           </a:prstGeom>
+          <a:solidFill>
+            <a:srgbClr val="DDD6FE"/>
+          </a:solidFill>
+          <a:ln w="12700">
+            <a:solidFill>
+              <a:srgbClr val="E5E7EB"/>
+            </a:solidFill>
+            <a:prstDash val="solid"/>
+          </a:ln>
+        </p:spPr>
+      </p:sp>
+      <p:sp>
+        <p:nvSpPr>
+          <p:cNvPr id="36" name="Text 34"/>
+          <p:cNvSpPr/>
+          <p:nvPr/>
+        </p:nvSpPr>
+        <p:spPr>
+          <a:xfrm>
+            <a:off x="640080" y="3584448"/>
+            <a:ext cx="1463040" cy="420624"/>
+          </a:xfrm>
+          <a:prstGeom prst="rect">
+            <a:avLst/>
+          </a:prstGeom>
           <a:noFill/>
           <a:ln/>
         </p:spPr>
@@ -41410,13 +43565,13 @@
             <a:r>
               <a:rPr lang="en-US" sz="1300" b="1" dirty="0">
                 <a:solidFill>
-                  <a:srgbClr val="9D174D"/>
+                  <a:srgbClr val="4C1D95"/>
                 </a:solidFill>
                 <a:latin typeface="Trebuchet MS" pitchFamily="34" charset="0"/>
                 <a:ea typeface="Trebuchet MS" pitchFamily="34" charset="-122"/>
                 <a:cs typeface="Trebuchet MS" pitchFamily="34" charset="-120"/>
               </a:rPr>
-              <a:t>-ity</a:t>
+              <a:t>in-</a:t>
             </a:r>
             <a:endParaRPr lang="en-US" sz="1300" dirty="0"/>
           </a:p>
@@ -41424,19 +43579,69 @@
       </p:sp>
       <p:sp>
         <p:nvSpPr>
-          <p:cNvPr id="33" name="Shape 31"/>
-          <p:cNvSpPr/>
-          <p:nvPr/>
-        </p:nvSpPr>
-        <p:spPr>
-          <a:xfrm>
-            <a:off x="640080" y="3127248"/>
+          <p:cNvPr id="37" name="Shape 35"/>
+          <p:cNvSpPr/>
+          <p:nvPr/>
+        </p:nvSpPr>
+        <p:spPr>
+          <a:xfrm>
+            <a:off x="3291840" y="3584448"/>
+            <a:ext cx="1645920" cy="420624"/>
+          </a:xfrm>
+          <a:prstGeom prst="rect">
+            <a:avLst/>
+          </a:prstGeom>
+          <a:solidFill>
+            <a:srgbClr val="F8FAFC"/>
+          </a:solidFill>
+          <a:ln w="12700">
+            <a:solidFill>
+              <a:srgbClr val="E5E7EB"/>
+            </a:solidFill>
+            <a:prstDash val="solid"/>
+          </a:ln>
+        </p:spPr>
+      </p:sp>
+      <p:sp>
+        <p:nvSpPr>
+          <p:cNvPr id="38" name="Shape 36"/>
+          <p:cNvSpPr/>
+          <p:nvPr/>
+        </p:nvSpPr>
+        <p:spPr>
+          <a:xfrm>
+            <a:off x="5943600" y="3584448"/>
             <a:ext cx="1463040" cy="420624"/>
           </a:xfrm>
           <a:prstGeom prst="rect">
             <a:avLst/>
           </a:prstGeom>
           <a:solidFill>
+            <a:srgbClr val="F8FAFC"/>
+          </a:solidFill>
+          <a:ln w="12700">
+            <a:solidFill>
+              <a:srgbClr val="E5E7EB"/>
+            </a:solidFill>
+            <a:prstDash val="solid"/>
+          </a:ln>
+        </p:spPr>
+      </p:sp>
+      <p:sp>
+        <p:nvSpPr>
+          <p:cNvPr id="39" name="Shape 37"/>
+          <p:cNvSpPr/>
+          <p:nvPr/>
+        </p:nvSpPr>
+        <p:spPr>
+          <a:xfrm>
+            <a:off x="640080" y="4041648"/>
+            <a:ext cx="1463040" cy="420624"/>
+          </a:xfrm>
+          <a:prstGeom prst="rect">
+            <a:avLst/>
+          </a:prstGeom>
+          <a:solidFill>
             <a:srgbClr val="DDD6FE"/>
           </a:solidFill>
           <a:ln w="12700">
@@ -41449,13 +43654,13 @@
       </p:sp>
       <p:sp>
         <p:nvSpPr>
-          <p:cNvPr id="34" name="Text 32"/>
-          <p:cNvSpPr/>
-          <p:nvPr/>
-        </p:nvSpPr>
-        <p:spPr>
-          <a:xfrm>
-            <a:off x="640080" y="3127248"/>
+          <p:cNvPr id="40" name="Text 38"/>
+          <p:cNvSpPr/>
+          <p:nvPr/>
+        </p:nvSpPr>
+        <p:spPr>
+          <a:xfrm>
+            <a:off x="640080" y="4041648"/>
             <a:ext cx="1463040" cy="420624"/>
           </a:xfrm>
           <a:prstGeom prst="rect">
@@ -41480,7 +43685,7 @@
                 <a:ea typeface="Trebuchet MS" pitchFamily="34" charset="-122"/>
                 <a:cs typeface="Trebuchet MS" pitchFamily="34" charset="-120"/>
               </a:rPr>
-              <a:t>psycho-</a:t>
+              <a:t>neuro-</a:t>
             </a:r>
             <a:endParaRPr lang="en-US" sz="1300" dirty="0"/>
           </a:p>
@@ -41488,13 +43693,13 @@
       </p:sp>
       <p:sp>
         <p:nvSpPr>
-          <p:cNvPr id="35" name="Shape 33"/>
-          <p:cNvSpPr/>
-          <p:nvPr/>
-        </p:nvSpPr>
-        <p:spPr>
-          <a:xfrm>
-            <a:off x="3291840" y="3127248"/>
+          <p:cNvPr id="41" name="Shape 39"/>
+          <p:cNvSpPr/>
+          <p:nvPr/>
+        </p:nvSpPr>
+        <p:spPr>
+          <a:xfrm>
+            <a:off x="3291840" y="4041648"/>
             <a:ext cx="1645920" cy="420624"/>
           </a:xfrm>
           <a:prstGeom prst="rect">
@@ -41513,20 +43718,20 @@
       </p:sp>
       <p:sp>
         <p:nvSpPr>
-          <p:cNvPr id="36" name="Shape 34"/>
-          <p:cNvSpPr/>
-          <p:nvPr/>
-        </p:nvSpPr>
-        <p:spPr>
-          <a:xfrm>
-            <a:off x="5943600" y="3127248"/>
+          <p:cNvPr id="42" name="Shape 40"/>
+          <p:cNvSpPr/>
+          <p:nvPr/>
+        </p:nvSpPr>
+        <p:spPr>
+          <a:xfrm>
+            <a:off x="5943600" y="4041648"/>
             <a:ext cx="1463040" cy="420624"/>
           </a:xfrm>
           <a:prstGeom prst="rect">
             <a:avLst/>
           </a:prstGeom>
           <a:solidFill>
-            <a:srgbClr val="FCE7F3"/>
+            <a:srgbClr val="F1F5F9"/>
           </a:solidFill>
           <a:ln w="12700">
             <a:solidFill>
@@ -41538,205 +43743,13 @@
       </p:sp>
       <p:sp>
         <p:nvSpPr>
-          <p:cNvPr id="37" name="Text 35"/>
-          <p:cNvSpPr/>
-          <p:nvPr/>
-        </p:nvSpPr>
-        <p:spPr>
-          <a:xfrm>
-            <a:off x="5943600" y="3127248"/>
-            <a:ext cx="1463040" cy="420624"/>
-          </a:xfrm>
-          <a:prstGeom prst="rect">
-            <a:avLst/>
-          </a:prstGeom>
-          <a:noFill/>
-          <a:ln/>
-        </p:spPr>
-        <p:txBody>
-          <a:bodyPr wrap="square" lIns="0" tIns="0" rIns="0" bIns="0" rtlCol="0" anchor="ctr"/>
-          <a:lstStyle/>
-          <a:p>
-            <a:pPr algn="ctr" indent="0" marL="0">
-              <a:buNone/>
-            </a:pPr>
-            <a:r>
-              <a:rPr lang="en-US" sz="1300" b="1" dirty="0">
-                <a:solidFill>
-                  <a:srgbClr val="9D174D"/>
-                </a:solidFill>
-                <a:latin typeface="Trebuchet MS" pitchFamily="34" charset="0"/>
-                <a:ea typeface="Trebuchet MS" pitchFamily="34" charset="-122"/>
-                <a:cs typeface="Trebuchet MS" pitchFamily="34" charset="-120"/>
-              </a:rPr>
-              <a:t>-al</a:t>
-            </a:r>
-            <a:endParaRPr lang="en-US" sz="1300" dirty="0"/>
-          </a:p>
-        </p:txBody>
-      </p:sp>
-      <p:sp>
-        <p:nvSpPr>
-          <p:cNvPr id="38" name="Shape 36"/>
-          <p:cNvSpPr/>
-          <p:nvPr/>
-        </p:nvSpPr>
-        <p:spPr>
-          <a:xfrm>
-            <a:off x="640080" y="3584448"/>
-            <a:ext cx="1463040" cy="420624"/>
-          </a:xfrm>
-          <a:prstGeom prst="rect">
-            <a:avLst/>
-          </a:prstGeom>
-          <a:solidFill>
-            <a:srgbClr val="DDD6FE"/>
-          </a:solidFill>
-          <a:ln w="12700">
-            <a:solidFill>
-              <a:srgbClr val="E5E7EB"/>
-            </a:solidFill>
-            <a:prstDash val="solid"/>
-          </a:ln>
-        </p:spPr>
-      </p:sp>
-      <p:sp>
-        <p:nvSpPr>
-          <p:cNvPr id="39" name="Text 37"/>
-          <p:cNvSpPr/>
-          <p:nvPr/>
-        </p:nvSpPr>
-        <p:spPr>
-          <a:xfrm>
-            <a:off x="640080" y="3584448"/>
-            <a:ext cx="1463040" cy="420624"/>
-          </a:xfrm>
-          <a:prstGeom prst="rect">
-            <a:avLst/>
-          </a:prstGeom>
-          <a:noFill/>
-          <a:ln/>
-        </p:spPr>
-        <p:txBody>
-          <a:bodyPr wrap="square" lIns="0" tIns="0" rIns="0" bIns="0" rtlCol="0" anchor="ctr"/>
-          <a:lstStyle/>
-          <a:p>
-            <a:pPr algn="ctr" indent="0" marL="0">
-              <a:buNone/>
-            </a:pPr>
-            <a:r>
-              <a:rPr lang="en-US" sz="1300" b="1" dirty="0">
-                <a:solidFill>
-                  <a:srgbClr val="4C1D95"/>
-                </a:solidFill>
-                <a:latin typeface="Trebuchet MS" pitchFamily="34" charset="0"/>
-                <a:ea typeface="Trebuchet MS" pitchFamily="34" charset="-122"/>
-                <a:cs typeface="Trebuchet MS" pitchFamily="34" charset="-120"/>
-              </a:rPr>
-              <a:t>techno-</a:t>
-            </a:r>
-            <a:endParaRPr lang="en-US" sz="1300" dirty="0"/>
-          </a:p>
-        </p:txBody>
-      </p:sp>
-      <p:sp>
-        <p:nvSpPr>
-          <p:cNvPr id="40" name="Shape 38"/>
-          <p:cNvSpPr/>
-          <p:nvPr/>
-        </p:nvSpPr>
-        <p:spPr>
-          <a:xfrm>
-            <a:off x="3291840" y="3584448"/>
-            <a:ext cx="1645920" cy="420624"/>
-          </a:xfrm>
-          <a:prstGeom prst="rect">
-            <a:avLst/>
-          </a:prstGeom>
-          <a:solidFill>
-            <a:srgbClr val="F8FAFC"/>
-          </a:solidFill>
-          <a:ln w="12700">
-            <a:solidFill>
-              <a:srgbClr val="E5E7EB"/>
-            </a:solidFill>
-            <a:prstDash val="solid"/>
-          </a:ln>
-        </p:spPr>
-      </p:sp>
-      <p:sp>
-        <p:nvSpPr>
-          <p:cNvPr id="41" name="Shape 39"/>
-          <p:cNvSpPr/>
-          <p:nvPr/>
-        </p:nvSpPr>
-        <p:spPr>
-          <a:xfrm>
-            <a:off x="5943600" y="3584448"/>
-            <a:ext cx="1463040" cy="420624"/>
-          </a:xfrm>
-          <a:prstGeom prst="rect">
-            <a:avLst/>
-          </a:prstGeom>
-          <a:solidFill>
-            <a:srgbClr val="FCE7F3"/>
-          </a:solidFill>
-          <a:ln w="12700">
-            <a:solidFill>
-              <a:srgbClr val="E5E7EB"/>
-            </a:solidFill>
-            <a:prstDash val="solid"/>
-          </a:ln>
-        </p:spPr>
-      </p:sp>
-      <p:sp>
-        <p:nvSpPr>
-          <p:cNvPr id="42" name="Text 40"/>
-          <p:cNvSpPr/>
-          <p:nvPr/>
-        </p:nvSpPr>
-        <p:spPr>
-          <a:xfrm>
-            <a:off x="5943600" y="3584448"/>
-            <a:ext cx="1463040" cy="420624"/>
-          </a:xfrm>
-          <a:prstGeom prst="rect">
-            <a:avLst/>
-          </a:prstGeom>
-          <a:noFill/>
-          <a:ln/>
-        </p:spPr>
-        <p:txBody>
-          <a:bodyPr wrap="square" lIns="0" tIns="0" rIns="0" bIns="0" rtlCol="0" anchor="ctr"/>
-          <a:lstStyle/>
-          <a:p>
-            <a:pPr algn="ctr" indent="0" marL="0">
-              <a:buNone/>
-            </a:pPr>
-            <a:r>
-              <a:rPr lang="en-US" sz="1300" b="1" dirty="0">
-                <a:solidFill>
-                  <a:srgbClr val="9D174D"/>
-                </a:solidFill>
-                <a:latin typeface="Trebuchet MS" pitchFamily="34" charset="0"/>
-                <a:ea typeface="Trebuchet MS" pitchFamily="34" charset="-122"/>
-                <a:cs typeface="Trebuchet MS" pitchFamily="34" charset="-120"/>
-              </a:rPr>
-              <a:t>-ian</a:t>
-            </a:r>
-            <a:endParaRPr lang="en-US" sz="1300" dirty="0"/>
-          </a:p>
-        </p:txBody>
-      </p:sp>
-      <p:sp>
-        <p:nvSpPr>
           <p:cNvPr id="43" name="Text 41"/>
           <p:cNvSpPr/>
           <p:nvPr/>
         </p:nvSpPr>
         <p:spPr>
           <a:xfrm>
-            <a:off x="365760" y="4178808"/>
+            <a:off x="365760" y="4636008"/>
             <a:ext cx="1097280" cy="420624"/>
           </a:xfrm>
           <a:prstGeom prst="rect">
@@ -41775,7 +43788,7 @@
         </p:nvSpPr>
         <p:spPr>
           <a:xfrm>
-            <a:off x="1508760" y="4178808"/>
+            <a:off x="1508760" y="4636008"/>
             <a:ext cx="950976" cy="420624"/>
           </a:xfrm>
           <a:prstGeom prst="rect">
@@ -41809,7 +43822,7 @@
         </p:nvSpPr>
         <p:spPr>
           <a:xfrm>
-            <a:off x="1508760" y="4178808"/>
+            <a:off x="1508760" y="4636008"/>
             <a:ext cx="950976" cy="420624"/>
           </a:xfrm>
           <a:prstGeom prst="rect">
@@ -41848,7 +43861,7 @@
         </p:nvSpPr>
         <p:spPr>
           <a:xfrm>
-            <a:off x="2487168" y="4178808"/>
+            <a:off x="2487168" y="4636008"/>
             <a:ext cx="320040" cy="420624"/>
           </a:xfrm>
           <a:prstGeom prst="rect">
@@ -41887,7 +43900,7 @@
         </p:nvSpPr>
         <p:spPr>
           <a:xfrm>
-            <a:off x="2834640" y="4178808"/>
+            <a:off x="2834640" y="4636008"/>
             <a:ext cx="1682496" cy="420624"/>
           </a:xfrm>
           <a:prstGeom prst="rect">
@@ -41921,7 +43934,7 @@
         </p:nvSpPr>
         <p:spPr>
           <a:xfrm>
-            <a:off x="2834640" y="4178808"/>
+            <a:off x="2834640" y="4636008"/>
             <a:ext cx="1682496" cy="420624"/>
           </a:xfrm>
           <a:prstGeom prst="rect">
@@ -41960,7 +43973,7 @@
         </p:nvSpPr>
         <p:spPr>
           <a:xfrm>
-            <a:off x="4544568" y="4178808"/>
+            <a:off x="4544568" y="4636008"/>
             <a:ext cx="320040" cy="420624"/>
           </a:xfrm>
           <a:prstGeom prst="rect">
@@ -41999,7 +44012,7 @@
         </p:nvSpPr>
         <p:spPr>
           <a:xfrm>
-            <a:off x="4892040" y="4178808"/>
+            <a:off x="4892040" y="4636008"/>
             <a:ext cx="822960" cy="420624"/>
           </a:xfrm>
           <a:prstGeom prst="rect">
@@ -42033,7 +44046,7 @@
         </p:nvSpPr>
         <p:spPr>
           <a:xfrm>
-            <a:off x="4892040" y="4178808"/>
+            <a:off x="4892040" y="4636008"/>
             <a:ext cx="822960" cy="420624"/>
           </a:xfrm>
           <a:prstGeom prst="rect">
@@ -42072,7 +44085,7 @@
         </p:nvSpPr>
         <p:spPr>
           <a:xfrm>
-            <a:off x="5788152" y="4178808"/>
+            <a:off x="5788152" y="4636008"/>
             <a:ext cx="365760" cy="420624"/>
           </a:xfrm>
           <a:prstGeom prst="rect">
@@ -42111,7 +44124,7 @@
         </p:nvSpPr>
         <p:spPr>
           <a:xfrm>
-            <a:off x="6199632" y="4178808"/>
+            <a:off x="6199632" y="4636008"/>
             <a:ext cx="2194560" cy="420624"/>
           </a:xfrm>
           <a:prstGeom prst="rect">
@@ -42138,7 +44151,7 @@
         </p:nvSpPr>
         <p:spPr>
           <a:xfrm>
-            <a:off x="6199632" y="4178808"/>
+            <a:off x="6199632" y="4636008"/>
             <a:ext cx="2194560" cy="420624"/>
           </a:xfrm>
           <a:prstGeom prst="rect">
@@ -42455,7 +44468,7 @@
                 <a:ea typeface="Calibri" pitchFamily="34" charset="-122"/>
                 <a:cs typeface="Calibri" pitchFamily="34" charset="-120"/>
               </a:rPr>
-              <a:t>Word Labs  •  wordlabs.app  •  Root: 'logical' = relating to reason or logic</a:t>
+              <a:t>Word Labs  •  wordlabs.app  •  Root: 'logical' = making sense</a:t>
             </a:r>
             <a:endParaRPr lang="en-US" sz="800" dirty="0"/>
           </a:p>
@@ -42633,7 +44646,7 @@
                 <a:ea typeface="Calibri" pitchFamily="34" charset="-122"/>
                 <a:cs typeface="Calibri" pitchFamily="34" charset="-120"/>
               </a:rPr>
-              <a:t>When something makes sense and follows clear reasoning, like solving a maths problem step by step.</a:t>
+              <a:t>following clear and sensible reasoning</a:t>
             </a:r>
             <a:endParaRPr lang="en-US" sz="1200" dirty="0"/>
           </a:p>
@@ -42772,7 +44785,7 @@
                 <a:ea typeface="Calibri" pitchFamily="34" charset="-122"/>
                 <a:cs typeface="Calibri" pitchFamily="34" charset="-120"/>
               </a:rPr>
-              <a:t>Relating to machines, computers, and tools that make our lives easier.</a:t>
+              <a:t>relating to the mind or how people think and feel</a:t>
             </a:r>
             <a:endParaRPr lang="en-US" sz="1200" dirty="0"/>
           </a:p>
@@ -42845,7 +44858,7 @@
                 <a:ea typeface="Trebuchet MS" pitchFamily="34" charset="-122"/>
                 <a:cs typeface="Trebuchet MS" pitchFamily="34" charset="-120"/>
               </a:rPr>
-              <a:t>biological</a:t>
+              <a:t>logically</a:t>
             </a:r>
             <a:endParaRPr lang="en-US" sz="1200" dirty="0"/>
           </a:p>
@@ -42911,7 +44924,7 @@
                 <a:ea typeface="Calibri" pitchFamily="34" charset="-122"/>
                 <a:cs typeface="Calibri" pitchFamily="34" charset="-120"/>
               </a:rPr>
-              <a:t>Relating to living things and how they grow, live, and function.</a:t>
+              <a:t>in a way that follows clear and sensible reasoning</a:t>
             </a:r>
             <a:endParaRPr lang="en-US" sz="1200" dirty="0"/>
           </a:p>
@@ -42984,7 +44997,7 @@
                 <a:ea typeface="Trebuchet MS" pitchFamily="34" charset="-122"/>
                 <a:cs typeface="Trebuchet MS" pitchFamily="34" charset="-120"/>
               </a:rPr>
-              <a:t>geological</a:t>
+              <a:t>illogically</a:t>
             </a:r>
             <a:endParaRPr lang="en-US" sz="1200" dirty="0"/>
           </a:p>
@@ -43050,7 +45063,7 @@
                 <a:ea typeface="Calibri" pitchFamily="34" charset="-122"/>
                 <a:cs typeface="Calibri" pitchFamily="34" charset="-120"/>
               </a:rPr>
-              <a:t>Arranged in the order that things happened, from first to last.</a:t>
+              <a:t>relating to the relationship between living things and their environment</a:t>
             </a:r>
             <a:endParaRPr lang="en-US" sz="1200" dirty="0"/>
           </a:p>
@@ -43123,7 +45136,7 @@
                 <a:ea typeface="Trebuchet MS" pitchFamily="34" charset="-122"/>
                 <a:cs typeface="Trebuchet MS" pitchFamily="34" charset="-120"/>
               </a:rPr>
-              <a:t>chronological</a:t>
+              <a:t>ecological</a:t>
             </a:r>
             <a:endParaRPr lang="en-US" sz="1200" dirty="0"/>
           </a:p>
@@ -43189,7 +45202,7 @@
                 <a:ea typeface="Calibri" pitchFamily="34" charset="-122"/>
                 <a:cs typeface="Calibri" pitchFamily="34" charset="-120"/>
               </a:rPr>
-              <a:t>Relating to rocks, land, and the physical history of the Earth.</a:t>
+              <a:t>in a way that does not make sense</a:t>
             </a:r>
             <a:endParaRPr lang="en-US" sz="1200" dirty="0"/>
           </a:p>
@@ -43262,7 +45275,7 @@
                 <a:ea typeface="Trebuchet MS" pitchFamily="34" charset="-122"/>
                 <a:cs typeface="Trebuchet MS" pitchFamily="34" charset="-120"/>
               </a:rPr>
-              <a:t>psychological</a:t>
+              <a:t>chronological</a:t>
             </a:r>
             <a:endParaRPr lang="en-US" sz="1200" dirty="0"/>
           </a:p>
@@ -43328,7 +45341,7 @@
                 <a:ea typeface="Calibri" pitchFamily="34" charset="-122"/>
                 <a:cs typeface="Calibri" pitchFamily="34" charset="-120"/>
               </a:rPr>
-              <a:t>Relating to the mind and how people think, feel, and behave.</a:t>
+              <a:t>arranged in the order in which things happened, following time order</a:t>
             </a:r>
             <a:endParaRPr lang="en-US" sz="1200" dirty="0"/>
           </a:p>
@@ -43401,7 +45414,7 @@
                 <a:ea typeface="Trebuchet MS" pitchFamily="34" charset="-122"/>
                 <a:cs typeface="Trebuchet MS" pitchFamily="34" charset="-120"/>
               </a:rPr>
-              <a:t>technological</a:t>
+              <a:t>psychological</a:t>
             </a:r>
             <a:endParaRPr lang="en-US" sz="1200" dirty="0"/>
           </a:p>
@@ -43467,7 +45480,7 @@
                 <a:ea typeface="Calibri" pitchFamily="34" charset="-122"/>
                 <a:cs typeface="Calibri" pitchFamily="34" charset="-120"/>
               </a:rPr>
-              <a:t>When something does not make sense or has no clear reason behind it.</a:t>
+              <a:t>not sensible or reasonable; against normal logic</a:t>
             </a:r>
             <a:endParaRPr lang="en-US" sz="1200" dirty="0"/>
           </a:p>
@@ -43759,7 +45772,7 @@
                 <a:ea typeface="Calibri" pitchFamily="34" charset="-122"/>
                 <a:cs typeface="Calibri" pitchFamily="34" charset="-120"/>
               </a:rPr>
-              <a:t>Word Labs  •  wordlabs.app  •  Root: 'logical' = relating to reason or logic</a:t>
+              <a:t>Word Labs  •  wordlabs.app  •  Root: 'logical' = making sense</a:t>
             </a:r>
             <a:endParaRPr lang="en-US" sz="800" dirty="0"/>
           </a:p>
@@ -43962,7 +45975,7 @@
                 <a:ea typeface="Calibri" pitchFamily="34" charset="-122"/>
                 <a:cs typeface="Calibri" pitchFamily="34" charset="-120"/>
               </a:rPr>
-              <a:t>The scientist gave a logical explanation for why the volcano erupted, using evidence from the rocks.</a:t>
+              <a:t>It was a logical decision to bring an umbrella since it was raining.</a:t>
             </a:r>
             <a:endParaRPr lang="en-US" sz="1500" dirty="0"/>
           </a:p>
@@ -44126,7 +46139,7 @@
                 <a:ea typeface="Calibri" pitchFamily="34" charset="-122"/>
                 <a:cs typeface="Calibri" pitchFamily="34" charset="-120"/>
               </a:rPr>
-              <a:t>It is illogical to leave your umbrella at home when the weather forecast says it will rain heavily.</a:t>
+              <a:t>It seemed illogical to wear a coat on such a hot day.</a:t>
             </a:r>
             <a:endParaRPr lang="en-US" sz="1500" dirty="0"/>
           </a:p>
@@ -44290,7 +46303,7 @@
                 <a:ea typeface="Calibri" pitchFamily="34" charset="-122"/>
                 <a:cs typeface="Calibri" pitchFamily="34" charset="-120"/>
               </a:rPr>
-              <a:t>The students arranged the events of the story in chronological order, starting from the very beginning.</a:t>
+              <a:t>She explained her answer logically, step by step.</a:t>
             </a:r>
             <a:endParaRPr lang="en-US" sz="1500" dirty="0"/>
           </a:p>
